--- a/PPT-Animation-Samples (Part 2).pptx
+++ b/PPT-Animation-Samples (Part 2).pptx
@@ -13,7 +13,11 @@
     <p:sldId id="284" r:id="rId7"/>
     <p:sldId id="285" r:id="rId8"/>
     <p:sldId id="278" r:id="rId9"/>
-    <p:sldId id="279" r:id="rId10"/>
+    <p:sldId id="287" r:id="rId10"/>
+    <p:sldId id="286" r:id="rId11"/>
+    <p:sldId id="279" r:id="rId12"/>
+    <p:sldId id="289" r:id="rId13"/>
+    <p:sldId id="290" r:id="rId14"/>
   </p:sldIdLst>
   <p:sldSz cx="12192000" cy="6858000"/>
   <p:notesSz cx="6858000" cy="9144000"/>
@@ -3464,6 +3468,1182 @@
 </p:sld>
 </file>
 
+<file path=ppt/slides/slide10.xml><?xml version="1.0" encoding="utf-8"?>
+<p:sld xmlns:a="http://schemas.openxmlformats.org/drawingml/2006/main" xmlns:r="http://schemas.openxmlformats.org/officeDocument/2006/relationships" xmlns:p="http://schemas.openxmlformats.org/presentationml/2006/main">
+  <p:cSld>
+    <p:spTree>
+      <p:nvGrpSpPr>
+        <p:cNvPr id="1" name=""/>
+        <p:cNvGrpSpPr/>
+        <p:nvPr/>
+      </p:nvGrpSpPr>
+      <p:grpSpPr>
+        <a:xfrm>
+          <a:off x="0" y="0"/>
+          <a:ext cx="0" cy="0"/>
+          <a:chOff x="0" y="0"/>
+          <a:chExt cx="0" cy="0"/>
+        </a:xfrm>
+      </p:grpSpPr>
+      <p:sp>
+        <p:nvSpPr>
+          <p:cNvPr id="2" name="标题 1">
+            <a:extLst>
+              <a:ext uri="{FF2B5EF4-FFF2-40B4-BE49-F238E27FC236}">
+                <a16:creationId xmlns:a16="http://schemas.microsoft.com/office/drawing/2014/main" id="{6C5F6DC9-CF0E-488D-9BF9-1AB1FD6469FF}"/>
+              </a:ext>
+            </a:extLst>
+          </p:cNvPr>
+          <p:cNvSpPr>
+            <a:spLocks noGrp="1"/>
+          </p:cNvSpPr>
+          <p:nvPr>
+            <p:ph type="title"/>
+          </p:nvPr>
+        </p:nvSpPr>
+        <p:spPr/>
+        <p:txBody>
+          <a:bodyPr/>
+          <a:lstStyle/>
+          <a:p>
+            <a:endParaRPr lang="zh-CN" altLang="en-US"/>
+          </a:p>
+        </p:txBody>
+      </p:sp>
+      <p:sp>
+        <p:nvSpPr>
+          <p:cNvPr id="3" name="内容占位符 2">
+            <a:extLst>
+              <a:ext uri="{FF2B5EF4-FFF2-40B4-BE49-F238E27FC236}">
+                <a16:creationId xmlns:a16="http://schemas.microsoft.com/office/drawing/2014/main" id="{C9BEDE2E-6144-4CFA-AE64-75219A7B7E4A}"/>
+              </a:ext>
+            </a:extLst>
+          </p:cNvPr>
+          <p:cNvSpPr>
+            <a:spLocks noGrp="1"/>
+          </p:cNvSpPr>
+          <p:nvPr>
+            <p:ph idx="1"/>
+          </p:nvPr>
+        </p:nvSpPr>
+        <p:spPr/>
+        <p:txBody>
+          <a:bodyPr/>
+          <a:lstStyle/>
+          <a:p>
+            <a:endParaRPr lang="zh-CN" altLang="en-US" dirty="0"/>
+          </a:p>
+        </p:txBody>
+      </p:sp>
+      <p:sp>
+        <p:nvSpPr>
+          <p:cNvPr id="4" name="矩形: 对角圆角 3">
+            <a:extLst>
+              <a:ext uri="{FF2B5EF4-FFF2-40B4-BE49-F238E27FC236}">
+                <a16:creationId xmlns:a16="http://schemas.microsoft.com/office/drawing/2014/main" id="{9829E989-7C84-43A0-A122-CC855E71A28B}"/>
+              </a:ext>
+            </a:extLst>
+          </p:cNvPr>
+          <p:cNvSpPr/>
+          <p:nvPr/>
+        </p:nvSpPr>
+        <p:spPr>
+          <a:xfrm>
+            <a:off x="4882575" y="2994530"/>
+            <a:ext cx="1884218" cy="1006764"/>
+          </a:xfrm>
+          <a:prstGeom prst="round2DiagRect">
+            <a:avLst/>
+          </a:prstGeom>
+        </p:spPr>
+        <p:style>
+          <a:lnRef idx="2">
+            <a:schemeClr val="accent1">
+              <a:shade val="50000"/>
+            </a:schemeClr>
+          </a:lnRef>
+          <a:fillRef idx="1">
+            <a:schemeClr val="accent1"/>
+          </a:fillRef>
+          <a:effectRef idx="0">
+            <a:schemeClr val="accent1"/>
+          </a:effectRef>
+          <a:fontRef idx="minor">
+            <a:schemeClr val="lt1"/>
+          </a:fontRef>
+        </p:style>
+        <p:txBody>
+          <a:bodyPr rtlCol="0" anchor="ctr"/>
+          <a:lstStyle/>
+          <a:p>
+            <a:pPr algn="ctr"/>
+            <a:r>
+              <a:rPr lang="zh-CN" altLang="en-US" dirty="0"/>
+              <a:t>放大缩小</a:t>
+            </a:r>
+            <a:endParaRPr lang="en-US" altLang="zh-CN" dirty="0"/>
+          </a:p>
+          <a:p>
+            <a:pPr algn="ctr"/>
+            <a:r>
+              <a:rPr lang="zh-CN" altLang="en-US" dirty="0"/>
+              <a:t>（大小改变）</a:t>
+            </a:r>
+            <a:endParaRPr lang="en-US" altLang="zh-CN" dirty="0"/>
+          </a:p>
+        </p:txBody>
+      </p:sp>
+    </p:spTree>
+    <p:extLst>
+      <p:ext uri="{BB962C8B-B14F-4D97-AF65-F5344CB8AC3E}">
+        <p14:creationId xmlns:p14="http://schemas.microsoft.com/office/powerpoint/2010/main" val="964607762"/>
+      </p:ext>
+    </p:extLst>
+  </p:cSld>
+  <p:clrMapOvr>
+    <a:masterClrMapping/>
+  </p:clrMapOvr>
+  <p:timing>
+    <p:tnLst>
+      <p:par>
+        <p:cTn id="1" dur="indefinite" restart="never" nodeType="tmRoot">
+          <p:childTnLst>
+            <p:seq concurrent="1" nextAc="seek">
+              <p:cTn id="2" dur="indefinite" nodeType="mainSeq">
+                <p:childTnLst>
+                  <p:par>
+                    <p:cTn id="3" fill="hold">
+                      <p:stCondLst>
+                        <p:cond delay="indefinite"/>
+                      </p:stCondLst>
+                      <p:childTnLst>
+                        <p:par>
+                          <p:cTn id="4" fill="hold">
+                            <p:stCondLst>
+                              <p:cond delay="0"/>
+                            </p:stCondLst>
+                            <p:childTnLst>
+                              <p:par>
+                                <p:cTn id="5" presetID="6" presetClass="emph" presetSubtype="0" autoRev="1" fill="hold" grpId="0" nodeType="clickEffect">
+                                  <p:stCondLst>
+                                    <p:cond delay="0"/>
+                                  </p:stCondLst>
+                                  <p:childTnLst>
+                                    <p:animScale>
+                                      <p:cBhvr>
+                                        <p:cTn id="6" dur="2000" fill="hold"/>
+                                        <p:tgtEl>
+                                          <p:spTgt spid="4"/>
+                                        </p:tgtEl>
+                                      </p:cBhvr>
+                                      <p:by x="200000" y="200000"/>
+                                    </p:animScale>
+                                  </p:childTnLst>
+                                </p:cTn>
+                              </p:par>
+                            </p:childTnLst>
+                          </p:cTn>
+                        </p:par>
+                      </p:childTnLst>
+                    </p:cTn>
+                  </p:par>
+                </p:childTnLst>
+              </p:cTn>
+              <p:prevCondLst>
+                <p:cond evt="onPrev" delay="0">
+                  <p:tgtEl>
+                    <p:sldTgt/>
+                  </p:tgtEl>
+                </p:cond>
+              </p:prevCondLst>
+              <p:nextCondLst>
+                <p:cond evt="onNext" delay="0">
+                  <p:tgtEl>
+                    <p:sldTgt/>
+                  </p:tgtEl>
+                </p:cond>
+              </p:nextCondLst>
+            </p:seq>
+          </p:childTnLst>
+        </p:cTn>
+      </p:par>
+    </p:tnLst>
+    <p:bldLst>
+      <p:bldP spid="4" grpId="0" animBg="1"/>
+    </p:bldLst>
+  </p:timing>
+</p:sld>
+</file>
+
+<file path=ppt/slides/slide11.xml><?xml version="1.0" encoding="utf-8"?>
+<p:sld xmlns:a="http://schemas.openxmlformats.org/drawingml/2006/main" xmlns:r="http://schemas.openxmlformats.org/officeDocument/2006/relationships" xmlns:p="http://schemas.openxmlformats.org/presentationml/2006/main">
+  <p:cSld>
+    <p:spTree>
+      <p:nvGrpSpPr>
+        <p:cNvPr id="1" name=""/>
+        <p:cNvGrpSpPr/>
+        <p:nvPr/>
+      </p:nvGrpSpPr>
+      <p:grpSpPr>
+        <a:xfrm>
+          <a:off x="0" y="0"/>
+          <a:ext cx="0" cy="0"/>
+          <a:chOff x="0" y="0"/>
+          <a:chExt cx="0" cy="0"/>
+        </a:xfrm>
+      </p:grpSpPr>
+      <p:sp>
+        <p:nvSpPr>
+          <p:cNvPr id="2" name="标题 1">
+            <a:extLst>
+              <a:ext uri="{FF2B5EF4-FFF2-40B4-BE49-F238E27FC236}">
+                <a16:creationId xmlns:a16="http://schemas.microsoft.com/office/drawing/2014/main" id="{365C2D13-5BB3-4EBC-9C2A-D3D602CA21B8}"/>
+              </a:ext>
+            </a:extLst>
+          </p:cNvPr>
+          <p:cNvSpPr>
+            <a:spLocks noGrp="1"/>
+          </p:cNvSpPr>
+          <p:nvPr>
+            <p:ph type="title"/>
+          </p:nvPr>
+        </p:nvSpPr>
+        <p:spPr/>
+        <p:txBody>
+          <a:bodyPr>
+            <a:normAutofit fontScale="90000"/>
+          </a:bodyPr>
+          <a:lstStyle/>
+          <a:p>
+            <a:br>
+              <a:rPr lang="en-US" altLang="zh-CN" dirty="0"/>
+            </a:br>
+            <a:r>
+              <a:rPr lang="en-US" altLang="zh-CN" dirty="0"/>
+              <a:t>2. </a:t>
+            </a:r>
+            <a:r>
+              <a:rPr lang="zh-CN" altLang="en-US" dirty="0"/>
+              <a:t>平滑效果的设置</a:t>
+            </a:r>
+            <a:br>
+              <a:rPr lang="en-US" altLang="zh-CN" dirty="0"/>
+            </a:br>
+            <a:endParaRPr lang="zh-CN" altLang="en-US" dirty="0"/>
+          </a:p>
+        </p:txBody>
+      </p:sp>
+      <p:sp>
+        <p:nvSpPr>
+          <p:cNvPr id="3" name="内容占位符 2">
+            <a:extLst>
+              <a:ext uri="{FF2B5EF4-FFF2-40B4-BE49-F238E27FC236}">
+                <a16:creationId xmlns:a16="http://schemas.microsoft.com/office/drawing/2014/main" id="{BF39A055-FBA5-4A37-BFCF-097E3409D23D}"/>
+              </a:ext>
+            </a:extLst>
+          </p:cNvPr>
+          <p:cNvSpPr>
+            <a:spLocks noGrp="1"/>
+          </p:cNvSpPr>
+          <p:nvPr>
+            <p:ph idx="1"/>
+          </p:nvPr>
+        </p:nvSpPr>
+        <p:spPr/>
+        <p:txBody>
+          <a:bodyPr/>
+          <a:lstStyle/>
+          <a:p>
+            <a:endParaRPr lang="zh-CN" altLang="en-US" dirty="0"/>
+          </a:p>
+        </p:txBody>
+      </p:sp>
+      <p:sp>
+        <p:nvSpPr>
+          <p:cNvPr id="4" name="矩形 3">
+            <a:extLst>
+              <a:ext uri="{FF2B5EF4-FFF2-40B4-BE49-F238E27FC236}">
+                <a16:creationId xmlns:a16="http://schemas.microsoft.com/office/drawing/2014/main" id="{CA0E7E4D-CBBC-4DDA-93F2-2AF5F1A6DEE1}"/>
+              </a:ext>
+            </a:extLst>
+          </p:cNvPr>
+          <p:cNvSpPr/>
+          <p:nvPr/>
+        </p:nvSpPr>
+        <p:spPr>
+          <a:xfrm>
+            <a:off x="942109" y="2488190"/>
+            <a:ext cx="1366982" cy="602673"/>
+          </a:xfrm>
+          <a:prstGeom prst="rect">
+            <a:avLst/>
+          </a:prstGeom>
+        </p:spPr>
+        <p:style>
+          <a:lnRef idx="2">
+            <a:schemeClr val="accent1">
+              <a:shade val="50000"/>
+            </a:schemeClr>
+          </a:lnRef>
+          <a:fillRef idx="1">
+            <a:schemeClr val="accent1"/>
+          </a:fillRef>
+          <a:effectRef idx="0">
+            <a:schemeClr val="accent1"/>
+          </a:effectRef>
+          <a:fontRef idx="minor">
+            <a:schemeClr val="lt1"/>
+          </a:fontRef>
+        </p:style>
+        <p:txBody>
+          <a:bodyPr rtlCol="0" anchor="ctr"/>
+          <a:lstStyle/>
+          <a:p>
+            <a:pPr algn="ctr"/>
+            <a:r>
+              <a:rPr lang="zh-CN" altLang="en-US" dirty="0"/>
+              <a:t>无平滑</a:t>
+            </a:r>
+            <a:endParaRPr lang="en-US" altLang="zh-CN" dirty="0"/>
+          </a:p>
+          <a:p>
+            <a:pPr algn="ctr"/>
+            <a:r>
+              <a:rPr lang="zh-CN" altLang="en-US" dirty="0"/>
+              <a:t>（匀速）</a:t>
+            </a:r>
+          </a:p>
+        </p:txBody>
+      </p:sp>
+      <p:sp>
+        <p:nvSpPr>
+          <p:cNvPr id="5" name="矩形 4">
+            <a:extLst>
+              <a:ext uri="{FF2B5EF4-FFF2-40B4-BE49-F238E27FC236}">
+                <a16:creationId xmlns:a16="http://schemas.microsoft.com/office/drawing/2014/main" id="{DC7E8EA1-E3FE-42C8-B35F-25F1EEF5105A}"/>
+              </a:ext>
+            </a:extLst>
+          </p:cNvPr>
+          <p:cNvSpPr/>
+          <p:nvPr/>
+        </p:nvSpPr>
+        <p:spPr>
+          <a:xfrm>
+            <a:off x="942108" y="3316576"/>
+            <a:ext cx="1366983" cy="602673"/>
+          </a:xfrm>
+          <a:prstGeom prst="rect">
+            <a:avLst/>
+          </a:prstGeom>
+        </p:spPr>
+        <p:style>
+          <a:lnRef idx="2">
+            <a:schemeClr val="accent1">
+              <a:shade val="50000"/>
+            </a:schemeClr>
+          </a:lnRef>
+          <a:fillRef idx="1">
+            <a:schemeClr val="accent1"/>
+          </a:fillRef>
+          <a:effectRef idx="0">
+            <a:schemeClr val="accent1"/>
+          </a:effectRef>
+          <a:fontRef idx="minor">
+            <a:schemeClr val="lt1"/>
+          </a:fontRef>
+        </p:style>
+        <p:txBody>
+          <a:bodyPr rtlCol="0" anchor="ctr"/>
+          <a:lstStyle/>
+          <a:p>
+            <a:pPr algn="ctr"/>
+            <a:r>
+              <a:rPr lang="zh-CN" altLang="en-US" dirty="0"/>
+              <a:t>平滑开始（加速开始）</a:t>
+            </a:r>
+          </a:p>
+        </p:txBody>
+      </p:sp>
+      <p:sp>
+        <p:nvSpPr>
+          <p:cNvPr id="6" name="矩形 5">
+            <a:extLst>
+              <a:ext uri="{FF2B5EF4-FFF2-40B4-BE49-F238E27FC236}">
+                <a16:creationId xmlns:a16="http://schemas.microsoft.com/office/drawing/2014/main" id="{BF2362AA-B4E7-42CC-AA57-A1F106B2D458}"/>
+              </a:ext>
+            </a:extLst>
+          </p:cNvPr>
+          <p:cNvSpPr/>
+          <p:nvPr/>
+        </p:nvSpPr>
+        <p:spPr>
+          <a:xfrm>
+            <a:off x="942107" y="4123603"/>
+            <a:ext cx="1366982" cy="602673"/>
+          </a:xfrm>
+          <a:prstGeom prst="rect">
+            <a:avLst/>
+          </a:prstGeom>
+        </p:spPr>
+        <p:style>
+          <a:lnRef idx="2">
+            <a:schemeClr val="accent1">
+              <a:shade val="50000"/>
+            </a:schemeClr>
+          </a:lnRef>
+          <a:fillRef idx="1">
+            <a:schemeClr val="accent1"/>
+          </a:fillRef>
+          <a:effectRef idx="0">
+            <a:schemeClr val="accent1"/>
+          </a:effectRef>
+          <a:fontRef idx="minor">
+            <a:schemeClr val="lt1"/>
+          </a:fontRef>
+        </p:style>
+        <p:txBody>
+          <a:bodyPr rtlCol="0" anchor="ctr"/>
+          <a:lstStyle/>
+          <a:p>
+            <a:pPr algn="ctr"/>
+            <a:r>
+              <a:rPr lang="zh-CN" altLang="en-US" dirty="0"/>
+              <a:t>平滑结束（加速结束）</a:t>
+            </a:r>
+          </a:p>
+        </p:txBody>
+      </p:sp>
+      <p:sp>
+        <p:nvSpPr>
+          <p:cNvPr id="7" name="矩形 6">
+            <a:extLst>
+              <a:ext uri="{FF2B5EF4-FFF2-40B4-BE49-F238E27FC236}">
+                <a16:creationId xmlns:a16="http://schemas.microsoft.com/office/drawing/2014/main" id="{3FB811DB-13EE-4498-9AE3-69F8FA8B7C69}"/>
+              </a:ext>
+            </a:extLst>
+          </p:cNvPr>
+          <p:cNvSpPr/>
+          <p:nvPr/>
+        </p:nvSpPr>
+        <p:spPr>
+          <a:xfrm>
+            <a:off x="942107" y="4951989"/>
+            <a:ext cx="1366982" cy="1224974"/>
+          </a:xfrm>
+          <a:prstGeom prst="rect">
+            <a:avLst/>
+          </a:prstGeom>
+        </p:spPr>
+        <p:style>
+          <a:lnRef idx="2">
+            <a:schemeClr val="accent1">
+              <a:shade val="50000"/>
+            </a:schemeClr>
+          </a:lnRef>
+          <a:fillRef idx="1">
+            <a:schemeClr val="accent1"/>
+          </a:fillRef>
+          <a:effectRef idx="0">
+            <a:schemeClr val="accent1"/>
+          </a:effectRef>
+          <a:fontRef idx="minor">
+            <a:schemeClr val="lt1"/>
+          </a:fontRef>
+        </p:style>
+        <p:txBody>
+          <a:bodyPr rtlCol="0" anchor="ctr"/>
+          <a:lstStyle/>
+          <a:p>
+            <a:pPr algn="ctr"/>
+            <a:r>
+              <a:rPr lang="zh-CN" altLang="en-US" dirty="0"/>
+              <a:t>弹跳结束</a:t>
+            </a:r>
+            <a:endParaRPr lang="en-US" altLang="zh-CN" dirty="0"/>
+          </a:p>
+          <a:p>
+            <a:pPr algn="ctr"/>
+            <a:r>
+              <a:rPr lang="zh-CN" altLang="en-US" dirty="0"/>
+              <a:t>（弹跳结束，有一秒钟作弹跳效果）</a:t>
+            </a:r>
+          </a:p>
+        </p:txBody>
+      </p:sp>
+    </p:spTree>
+    <p:extLst>
+      <p:ext uri="{BB962C8B-B14F-4D97-AF65-F5344CB8AC3E}">
+        <p14:creationId xmlns:p14="http://schemas.microsoft.com/office/powerpoint/2010/main" val="3327964293"/>
+      </p:ext>
+    </p:extLst>
+  </p:cSld>
+  <p:clrMapOvr>
+    <a:masterClrMapping/>
+  </p:clrMapOvr>
+  <mc:AlternateContent xmlns:mc="http://schemas.openxmlformats.org/markup-compatibility/2006">
+    <mc:Choice xmlns:p14="http://schemas.microsoft.com/office/powerpoint/2010/main" Requires="p14">
+      <p:timing>
+        <p:tnLst>
+          <p:par>
+            <p:cTn id="1" dur="indefinite" restart="never" nodeType="tmRoot">
+              <p:childTnLst>
+                <p:seq concurrent="1" nextAc="seek">
+                  <p:cTn id="2" dur="indefinite" nodeType="mainSeq">
+                    <p:childTnLst>
+                      <p:par>
+                        <p:cTn id="3" fill="hold">
+                          <p:stCondLst>
+                            <p:cond delay="indefinite"/>
+                          </p:stCondLst>
+                          <p:childTnLst>
+                            <p:par>
+                              <p:cTn id="4" fill="hold">
+                                <p:stCondLst>
+                                  <p:cond delay="0"/>
+                                </p:stCondLst>
+                                <p:childTnLst>
+                                  <p:par>
+                                    <p:cTn id="5" presetID="63" presetClass="path" presetSubtype="0" fill="hold" grpId="0" nodeType="clickEffect">
+                                      <p:stCondLst>
+                                        <p:cond delay="0"/>
+                                      </p:stCondLst>
+                                      <p:childTnLst>
+                                        <p:animMotion origin="layout" path="M -3.33333E-6 -2.96296E-6 L 0.74089 0.00417 " pathEditMode="relative" rAng="0" ptsTypes="AA">
+                                          <p:cBhvr>
+                                            <p:cTn id="6" dur="2000" fill="hold"/>
+                                            <p:tgtEl>
+                                              <p:spTgt spid="4"/>
+                                            </p:tgtEl>
+                                            <p:attrNameLst>
+                                              <p:attrName>ppt_x</p:attrName>
+                                              <p:attrName>ppt_y</p:attrName>
+                                            </p:attrNameLst>
+                                          </p:cBhvr>
+                                          <p:rCtr x="37044" y="208"/>
+                                        </p:animMotion>
+                                      </p:childTnLst>
+                                    </p:cTn>
+                                  </p:par>
+                                </p:childTnLst>
+                              </p:cTn>
+                            </p:par>
+                          </p:childTnLst>
+                        </p:cTn>
+                      </p:par>
+                      <p:par>
+                        <p:cTn id="7" fill="hold">
+                          <p:stCondLst>
+                            <p:cond delay="indefinite"/>
+                          </p:stCondLst>
+                          <p:childTnLst>
+                            <p:par>
+                              <p:cTn id="8" fill="hold">
+                                <p:stCondLst>
+                                  <p:cond delay="0"/>
+                                </p:stCondLst>
+                                <p:childTnLst>
+                                  <p:par>
+                                    <p:cTn id="9" presetID="63" presetClass="path" presetSubtype="0" accel="90000" fill="hold" grpId="0" nodeType="clickEffect">
+                                      <p:stCondLst>
+                                        <p:cond delay="0"/>
+                                      </p:stCondLst>
+                                      <p:childTnLst>
+                                        <p:animMotion origin="layout" path="M -3.33333E-6 3.7037E-6 L 0.74167 -0.00232 " pathEditMode="relative" rAng="0" ptsTypes="AA">
+                                          <p:cBhvr>
+                                            <p:cTn id="10" dur="2000" fill="hold"/>
+                                            <p:tgtEl>
+                                              <p:spTgt spid="5"/>
+                                            </p:tgtEl>
+                                            <p:attrNameLst>
+                                              <p:attrName>ppt_x</p:attrName>
+                                              <p:attrName>ppt_y</p:attrName>
+                                            </p:attrNameLst>
+                                          </p:cBhvr>
+                                          <p:rCtr x="37083" y="-116"/>
+                                        </p:animMotion>
+                                      </p:childTnLst>
+                                    </p:cTn>
+                                  </p:par>
+                                </p:childTnLst>
+                              </p:cTn>
+                            </p:par>
+                          </p:childTnLst>
+                        </p:cTn>
+                      </p:par>
+                      <p:par>
+                        <p:cTn id="11" fill="hold">
+                          <p:stCondLst>
+                            <p:cond delay="indefinite"/>
+                          </p:stCondLst>
+                          <p:childTnLst>
+                            <p:par>
+                              <p:cTn id="12" fill="hold">
+                                <p:stCondLst>
+                                  <p:cond delay="0"/>
+                                </p:stCondLst>
+                                <p:childTnLst>
+                                  <p:par>
+                                    <p:cTn id="13" presetID="63" presetClass="path" presetSubtype="0" decel="100000" fill="hold" grpId="0" nodeType="clickEffect">
+                                      <p:stCondLst>
+                                        <p:cond delay="0"/>
+                                      </p:stCondLst>
+                                      <p:childTnLst>
+                                        <p:animMotion origin="layout" path="M -3.33333E-6 1.11111E-6 L 0.74323 0.00532 " pathEditMode="relative" rAng="0" ptsTypes="AA">
+                                          <p:cBhvr>
+                                            <p:cTn id="14" dur="2000" fill="hold"/>
+                                            <p:tgtEl>
+                                              <p:spTgt spid="6"/>
+                                            </p:tgtEl>
+                                            <p:attrNameLst>
+                                              <p:attrName>ppt_x</p:attrName>
+                                              <p:attrName>ppt_y</p:attrName>
+                                            </p:attrNameLst>
+                                          </p:cBhvr>
+                                          <p:rCtr x="37161" y="255"/>
+                                        </p:animMotion>
+                                      </p:childTnLst>
+                                    </p:cTn>
+                                  </p:par>
+                                </p:childTnLst>
+                              </p:cTn>
+                            </p:par>
+                          </p:childTnLst>
+                        </p:cTn>
+                      </p:par>
+                      <p:par>
+                        <p:cTn id="15" fill="hold">
+                          <p:stCondLst>
+                            <p:cond delay="indefinite"/>
+                          </p:stCondLst>
+                          <p:childTnLst>
+                            <p:par>
+                              <p:cTn id="16" fill="hold">
+                                <p:stCondLst>
+                                  <p:cond delay="0"/>
+                                </p:stCondLst>
+                                <p:childTnLst>
+                                  <p:par>
+                                    <p:cTn id="17" presetID="63" presetClass="path" presetSubtype="0" fill="hold" grpId="0" nodeType="clickEffect" p14:presetBounceEnd="50000">
+                                      <p:stCondLst>
+                                        <p:cond delay="0"/>
+                                      </p:stCondLst>
+                                      <p:childTnLst>
+                                        <p:animMotion origin="layout" path="M -3.33333E-6 -2.59259E-6 L 0.74167 0.00047 " pathEditMode="relative" rAng="0" ptsTypes="AA" p14:bounceEnd="50000">
+                                          <p:cBhvr>
+                                            <p:cTn id="18" dur="2000" fill="hold"/>
+                                            <p:tgtEl>
+                                              <p:spTgt spid="7"/>
+                                            </p:tgtEl>
+                                            <p:attrNameLst>
+                                              <p:attrName>ppt_x</p:attrName>
+                                              <p:attrName>ppt_y</p:attrName>
+                                            </p:attrNameLst>
+                                          </p:cBhvr>
+                                          <p:rCtr x="37083" y="23"/>
+                                        </p:animMotion>
+                                      </p:childTnLst>
+                                    </p:cTn>
+                                  </p:par>
+                                </p:childTnLst>
+                              </p:cTn>
+                            </p:par>
+                          </p:childTnLst>
+                        </p:cTn>
+                      </p:par>
+                    </p:childTnLst>
+                  </p:cTn>
+                  <p:prevCondLst>
+                    <p:cond evt="onPrev" delay="0">
+                      <p:tgtEl>
+                        <p:sldTgt/>
+                      </p:tgtEl>
+                    </p:cond>
+                  </p:prevCondLst>
+                  <p:nextCondLst>
+                    <p:cond evt="onNext" delay="0">
+                      <p:tgtEl>
+                        <p:sldTgt/>
+                      </p:tgtEl>
+                    </p:cond>
+                  </p:nextCondLst>
+                </p:seq>
+              </p:childTnLst>
+            </p:cTn>
+          </p:par>
+        </p:tnLst>
+        <p:bldLst>
+          <p:bldP spid="4" grpId="0" animBg="1"/>
+          <p:bldP spid="5" grpId="0" animBg="1"/>
+          <p:bldP spid="6" grpId="0" animBg="1"/>
+          <p:bldP spid="7" grpId="0" animBg="1"/>
+        </p:bldLst>
+      </p:timing>
+    </mc:Choice>
+    <mc:Fallback>
+      <p:timing>
+        <p:tnLst>
+          <p:par>
+            <p:cTn id="1" dur="indefinite" restart="never" nodeType="tmRoot">
+              <p:childTnLst>
+                <p:seq concurrent="1" nextAc="seek">
+                  <p:cTn id="2" dur="indefinite" nodeType="mainSeq">
+                    <p:childTnLst>
+                      <p:par>
+                        <p:cTn id="3" fill="hold">
+                          <p:stCondLst>
+                            <p:cond delay="indefinite"/>
+                          </p:stCondLst>
+                          <p:childTnLst>
+                            <p:par>
+                              <p:cTn id="4" fill="hold">
+                                <p:stCondLst>
+                                  <p:cond delay="0"/>
+                                </p:stCondLst>
+                                <p:childTnLst>
+                                  <p:par>
+                                    <p:cTn id="5" presetID="63" presetClass="path" presetSubtype="0" fill="hold" grpId="0" nodeType="clickEffect">
+                                      <p:stCondLst>
+                                        <p:cond delay="0"/>
+                                      </p:stCondLst>
+                                      <p:childTnLst>
+                                        <p:animMotion origin="layout" path="M -3.33333E-6 -2.96296E-6 L 0.74089 0.00417 " pathEditMode="relative" rAng="0" ptsTypes="AA">
+                                          <p:cBhvr>
+                                            <p:cTn id="6" dur="2000" fill="hold"/>
+                                            <p:tgtEl>
+                                              <p:spTgt spid="4"/>
+                                            </p:tgtEl>
+                                            <p:attrNameLst>
+                                              <p:attrName>ppt_x</p:attrName>
+                                              <p:attrName>ppt_y</p:attrName>
+                                            </p:attrNameLst>
+                                          </p:cBhvr>
+                                          <p:rCtr x="37044" y="208"/>
+                                        </p:animMotion>
+                                      </p:childTnLst>
+                                    </p:cTn>
+                                  </p:par>
+                                </p:childTnLst>
+                              </p:cTn>
+                            </p:par>
+                          </p:childTnLst>
+                        </p:cTn>
+                      </p:par>
+                      <p:par>
+                        <p:cTn id="7" fill="hold">
+                          <p:stCondLst>
+                            <p:cond delay="indefinite"/>
+                          </p:stCondLst>
+                          <p:childTnLst>
+                            <p:par>
+                              <p:cTn id="8" fill="hold">
+                                <p:stCondLst>
+                                  <p:cond delay="0"/>
+                                </p:stCondLst>
+                                <p:childTnLst>
+                                  <p:par>
+                                    <p:cTn id="9" presetID="63" presetClass="path" presetSubtype="0" accel="90000" fill="hold" grpId="0" nodeType="clickEffect">
+                                      <p:stCondLst>
+                                        <p:cond delay="0"/>
+                                      </p:stCondLst>
+                                      <p:childTnLst>
+                                        <p:animMotion origin="layout" path="M -3.33333E-6 3.7037E-6 L 0.74167 -0.00232 " pathEditMode="relative" rAng="0" ptsTypes="AA">
+                                          <p:cBhvr>
+                                            <p:cTn id="10" dur="2000" fill="hold"/>
+                                            <p:tgtEl>
+                                              <p:spTgt spid="5"/>
+                                            </p:tgtEl>
+                                            <p:attrNameLst>
+                                              <p:attrName>ppt_x</p:attrName>
+                                              <p:attrName>ppt_y</p:attrName>
+                                            </p:attrNameLst>
+                                          </p:cBhvr>
+                                          <p:rCtr x="37083" y="-116"/>
+                                        </p:animMotion>
+                                      </p:childTnLst>
+                                    </p:cTn>
+                                  </p:par>
+                                </p:childTnLst>
+                              </p:cTn>
+                            </p:par>
+                          </p:childTnLst>
+                        </p:cTn>
+                      </p:par>
+                      <p:par>
+                        <p:cTn id="11" fill="hold">
+                          <p:stCondLst>
+                            <p:cond delay="indefinite"/>
+                          </p:stCondLst>
+                          <p:childTnLst>
+                            <p:par>
+                              <p:cTn id="12" fill="hold">
+                                <p:stCondLst>
+                                  <p:cond delay="0"/>
+                                </p:stCondLst>
+                                <p:childTnLst>
+                                  <p:par>
+                                    <p:cTn id="13" presetID="63" presetClass="path" presetSubtype="0" decel="100000" fill="hold" grpId="0" nodeType="clickEffect">
+                                      <p:stCondLst>
+                                        <p:cond delay="0"/>
+                                      </p:stCondLst>
+                                      <p:childTnLst>
+                                        <p:animMotion origin="layout" path="M -3.33333E-6 1.11111E-6 L 0.74323 0.00532 " pathEditMode="relative" rAng="0" ptsTypes="AA">
+                                          <p:cBhvr>
+                                            <p:cTn id="14" dur="2000" fill="hold"/>
+                                            <p:tgtEl>
+                                              <p:spTgt spid="6"/>
+                                            </p:tgtEl>
+                                            <p:attrNameLst>
+                                              <p:attrName>ppt_x</p:attrName>
+                                              <p:attrName>ppt_y</p:attrName>
+                                            </p:attrNameLst>
+                                          </p:cBhvr>
+                                          <p:rCtr x="37161" y="255"/>
+                                        </p:animMotion>
+                                      </p:childTnLst>
+                                    </p:cTn>
+                                  </p:par>
+                                </p:childTnLst>
+                              </p:cTn>
+                            </p:par>
+                          </p:childTnLst>
+                        </p:cTn>
+                      </p:par>
+                      <p:par>
+                        <p:cTn id="15" fill="hold">
+                          <p:stCondLst>
+                            <p:cond delay="indefinite"/>
+                          </p:stCondLst>
+                          <p:childTnLst>
+                            <p:par>
+                              <p:cTn id="16" fill="hold">
+                                <p:stCondLst>
+                                  <p:cond delay="0"/>
+                                </p:stCondLst>
+                                <p:childTnLst>
+                                  <p:par>
+                                    <p:cTn id="17" presetID="63" presetClass="path" presetSubtype="0" fill="hold" grpId="0" nodeType="clickEffect">
+                                      <p:stCondLst>
+                                        <p:cond delay="0"/>
+                                      </p:stCondLst>
+                                      <p:childTnLst>
+                                        <p:animMotion origin="layout" path="M -3.33333E-6 -2.59259E-6 L 0.74167 0.00047 " pathEditMode="relative" rAng="0" ptsTypes="AA">
+                                          <p:cBhvr>
+                                            <p:cTn id="18" dur="2000" fill="hold"/>
+                                            <p:tgtEl>
+                                              <p:spTgt spid="7"/>
+                                            </p:tgtEl>
+                                            <p:attrNameLst>
+                                              <p:attrName>ppt_x</p:attrName>
+                                              <p:attrName>ppt_y</p:attrName>
+                                            </p:attrNameLst>
+                                          </p:cBhvr>
+                                          <p:rCtr x="37083" y="23"/>
+                                        </p:animMotion>
+                                      </p:childTnLst>
+                                    </p:cTn>
+                                  </p:par>
+                                </p:childTnLst>
+                              </p:cTn>
+                            </p:par>
+                          </p:childTnLst>
+                        </p:cTn>
+                      </p:par>
+                    </p:childTnLst>
+                  </p:cTn>
+                  <p:prevCondLst>
+                    <p:cond evt="onPrev" delay="0">
+                      <p:tgtEl>
+                        <p:sldTgt/>
+                      </p:tgtEl>
+                    </p:cond>
+                  </p:prevCondLst>
+                  <p:nextCondLst>
+                    <p:cond evt="onNext" delay="0">
+                      <p:tgtEl>
+                        <p:sldTgt/>
+                      </p:tgtEl>
+                    </p:cond>
+                  </p:nextCondLst>
+                </p:seq>
+              </p:childTnLst>
+            </p:cTn>
+          </p:par>
+        </p:tnLst>
+        <p:bldLst>
+          <p:bldP spid="4" grpId="0" animBg="1"/>
+          <p:bldP spid="5" grpId="0" animBg="1"/>
+          <p:bldP spid="6" grpId="0" animBg="1"/>
+          <p:bldP spid="7" grpId="0" animBg="1"/>
+        </p:bldLst>
+      </p:timing>
+    </mc:Fallback>
+  </mc:AlternateContent>
+</p:sld>
+</file>
+
+<file path=ppt/slides/slide12.xml><?xml version="1.0" encoding="utf-8"?>
+<p:sld xmlns:a="http://schemas.openxmlformats.org/drawingml/2006/main" xmlns:r="http://schemas.openxmlformats.org/officeDocument/2006/relationships" xmlns:p="http://schemas.openxmlformats.org/presentationml/2006/main">
+  <p:cSld>
+    <p:spTree>
+      <p:nvGrpSpPr>
+        <p:cNvPr id="1" name=""/>
+        <p:cNvGrpSpPr/>
+        <p:nvPr/>
+      </p:nvGrpSpPr>
+      <p:grpSpPr>
+        <a:xfrm>
+          <a:off x="0" y="0"/>
+          <a:ext cx="0" cy="0"/>
+          <a:chOff x="0" y="0"/>
+          <a:chExt cx="0" cy="0"/>
+        </a:xfrm>
+      </p:grpSpPr>
+      <p:sp>
+        <p:nvSpPr>
+          <p:cNvPr id="10" name="标题 1">
+            <a:extLst>
+              <a:ext uri="{FF2B5EF4-FFF2-40B4-BE49-F238E27FC236}">
+                <a16:creationId xmlns:a16="http://schemas.microsoft.com/office/drawing/2014/main" id="{26E2AC48-A593-46C6-AF61-8997E0FA8C47}"/>
+              </a:ext>
+            </a:extLst>
+          </p:cNvPr>
+          <p:cNvSpPr>
+            <a:spLocks noGrp="1"/>
+          </p:cNvSpPr>
+          <p:nvPr>
+            <p:ph type="title"/>
+          </p:nvPr>
+        </p:nvSpPr>
+        <p:spPr>
+          <a:xfrm>
+            <a:off x="838200" y="365125"/>
+            <a:ext cx="10515600" cy="6091093"/>
+          </a:xfrm>
+        </p:spPr>
+        <p:txBody>
+          <a:bodyPr>
+            <a:normAutofit/>
+          </a:bodyPr>
+          <a:lstStyle/>
+          <a:p>
+            <a:r>
+              <a:rPr lang="en-US" altLang="zh-CN" sz="2200" b="1" u="sng" dirty="0"/>
+              <a:t>Sample 4</a:t>
+            </a:r>
+            <a:r>
+              <a:rPr lang="en-US" altLang="zh-CN" sz="2200" b="1" dirty="0"/>
+              <a:t>: </a:t>
+            </a:r>
+            <a:br>
+              <a:rPr lang="en-US" altLang="zh-CN" sz="2200" dirty="0"/>
+            </a:br>
+            <a:br>
+              <a:rPr lang="en-US" altLang="zh-CN" sz="2200" dirty="0"/>
+            </a:br>
+            <a:r>
+              <a:rPr lang="en-US" altLang="zh-CN" sz="2200" dirty="0"/>
+              <a:t>1. </a:t>
+            </a:r>
+            <a:r>
+              <a:rPr lang="zh-CN" altLang="en-US" sz="2200" b="1" dirty="0"/>
+              <a:t>目标：</a:t>
+            </a:r>
+            <a:r>
+              <a:rPr lang="zh-CN" altLang="en-US" sz="2200" dirty="0"/>
+              <a:t>球体坠落</a:t>
+            </a:r>
+            <a:br>
+              <a:rPr lang="en-US" altLang="zh-CN" sz="2200" dirty="0"/>
+            </a:br>
+            <a:r>
+              <a:rPr lang="en-US" altLang="zh-CN" sz="2200" dirty="0"/>
+              <a:t>2. </a:t>
+            </a:r>
+            <a:r>
+              <a:rPr lang="zh-CN" altLang="en-US" sz="2200" dirty="0"/>
+              <a:t>球体坠落无弹跳存在问题，</a:t>
+            </a:r>
+            <a:r>
+              <a:rPr lang="zh-CN" altLang="en-US" sz="2200" b="1" dirty="0"/>
+              <a:t>解决方案：</a:t>
+            </a:r>
+            <a:r>
+              <a:rPr lang="en-US" altLang="zh-CN" sz="2200" dirty="0"/>
+              <a:t>A)</a:t>
+            </a:r>
+            <a:r>
+              <a:rPr lang="zh-CN" altLang="en-US" sz="2200" dirty="0"/>
+              <a:t> 选中对象在强调中选用放大缩小，</a:t>
+            </a:r>
+            <a:r>
+              <a:rPr lang="en-US" altLang="zh-CN" sz="2200" dirty="0"/>
+              <a:t>B) </a:t>
+            </a:r>
+            <a:r>
+              <a:rPr lang="zh-CN" altLang="en-US" sz="2200" dirty="0"/>
+              <a:t>效果选项右下角箭头输入放大缩小尺寸</a:t>
+            </a:r>
+            <a:r>
+              <a:rPr lang="en-US" altLang="zh-CN" sz="2200" dirty="0"/>
+              <a:t>200</a:t>
+            </a:r>
+            <a:r>
+              <a:rPr lang="zh-CN" altLang="en-US" sz="2200" dirty="0"/>
+              <a:t>，且自动翻转，如下：</a:t>
+            </a:r>
+            <a:r>
+              <a:rPr lang="en-US" altLang="zh-CN" sz="2200" dirty="0"/>
+              <a:t> </a:t>
+            </a:r>
+            <a:br>
+              <a:rPr lang="en-US" altLang="zh-CN" sz="2200" dirty="0"/>
+            </a:br>
+            <a:endParaRPr lang="zh-CN" altLang="en-US" sz="2200" dirty="0"/>
+          </a:p>
+        </p:txBody>
+      </p:sp>
+    </p:spTree>
+    <p:extLst>
+      <p:ext uri="{BB962C8B-B14F-4D97-AF65-F5344CB8AC3E}">
+        <p14:creationId xmlns:p14="http://schemas.microsoft.com/office/powerpoint/2010/main" val="1092680992"/>
+      </p:ext>
+    </p:extLst>
+  </p:cSld>
+  <p:clrMapOvr>
+    <a:masterClrMapping/>
+  </p:clrMapOvr>
+</p:sld>
+</file>
+
+<file path=ppt/slides/slide13.xml><?xml version="1.0" encoding="utf-8"?>
+<p:sld xmlns:a="http://schemas.openxmlformats.org/drawingml/2006/main" xmlns:r="http://schemas.openxmlformats.org/officeDocument/2006/relationships" xmlns:p="http://schemas.openxmlformats.org/presentationml/2006/main">
+  <p:cSld>
+    <p:spTree>
+      <p:nvGrpSpPr>
+        <p:cNvPr id="1" name=""/>
+        <p:cNvGrpSpPr/>
+        <p:nvPr/>
+      </p:nvGrpSpPr>
+      <p:grpSpPr>
+        <a:xfrm>
+          <a:off x="0" y="0"/>
+          <a:ext cx="0" cy="0"/>
+          <a:chOff x="0" y="0"/>
+          <a:chExt cx="0" cy="0"/>
+        </a:xfrm>
+      </p:grpSpPr>
+      <p:sp>
+        <p:nvSpPr>
+          <p:cNvPr id="2" name="标题 1">
+            <a:extLst>
+              <a:ext uri="{FF2B5EF4-FFF2-40B4-BE49-F238E27FC236}">
+                <a16:creationId xmlns:a16="http://schemas.microsoft.com/office/drawing/2014/main" id="{AD064980-B5C1-4DDF-921E-01756B4DBE30}"/>
+              </a:ext>
+            </a:extLst>
+          </p:cNvPr>
+          <p:cNvSpPr>
+            <a:spLocks noGrp="1"/>
+          </p:cNvSpPr>
+          <p:nvPr>
+            <p:ph type="title"/>
+          </p:nvPr>
+        </p:nvSpPr>
+        <p:spPr/>
+        <p:txBody>
+          <a:bodyPr/>
+          <a:lstStyle/>
+          <a:p>
+            <a:endParaRPr lang="zh-CN" altLang="en-US"/>
+          </a:p>
+        </p:txBody>
+      </p:sp>
+      <p:sp>
+        <p:nvSpPr>
+          <p:cNvPr id="3" name="内容占位符 2">
+            <a:extLst>
+              <a:ext uri="{FF2B5EF4-FFF2-40B4-BE49-F238E27FC236}">
+                <a16:creationId xmlns:a16="http://schemas.microsoft.com/office/drawing/2014/main" id="{B7AD2026-1B29-48A3-99B0-48C73B5C406D}"/>
+              </a:ext>
+            </a:extLst>
+          </p:cNvPr>
+          <p:cNvSpPr>
+            <a:spLocks noGrp="1"/>
+          </p:cNvSpPr>
+          <p:nvPr>
+            <p:ph idx="1"/>
+          </p:nvPr>
+        </p:nvSpPr>
+        <p:spPr/>
+        <p:txBody>
+          <a:bodyPr/>
+          <a:lstStyle/>
+          <a:p>
+            <a:endParaRPr lang="zh-CN" altLang="en-US" dirty="0"/>
+          </a:p>
+        </p:txBody>
+      </p:sp>
+      <p:sp>
+        <p:nvSpPr>
+          <p:cNvPr id="4" name="流程图: 接点 3">
+            <a:extLst>
+              <a:ext uri="{FF2B5EF4-FFF2-40B4-BE49-F238E27FC236}">
+                <a16:creationId xmlns:a16="http://schemas.microsoft.com/office/drawing/2014/main" id="{BCC63270-4788-4895-8216-FF1CF710B541}"/>
+              </a:ext>
+            </a:extLst>
+          </p:cNvPr>
+          <p:cNvSpPr/>
+          <p:nvPr/>
+        </p:nvSpPr>
+        <p:spPr>
+          <a:xfrm>
+            <a:off x="5357091" y="1985818"/>
+            <a:ext cx="738909" cy="618837"/>
+          </a:xfrm>
+          <a:prstGeom prst="flowChartConnector">
+            <a:avLst/>
+          </a:prstGeom>
+        </p:spPr>
+        <p:style>
+          <a:lnRef idx="2">
+            <a:schemeClr val="accent1">
+              <a:shade val="50000"/>
+            </a:schemeClr>
+          </a:lnRef>
+          <a:fillRef idx="1">
+            <a:schemeClr val="accent1"/>
+          </a:fillRef>
+          <a:effectRef idx="0">
+            <a:schemeClr val="accent1"/>
+          </a:effectRef>
+          <a:fontRef idx="minor">
+            <a:schemeClr val="lt1"/>
+          </a:fontRef>
+        </p:style>
+        <p:txBody>
+          <a:bodyPr rtlCol="0" anchor="ctr"/>
+          <a:lstStyle/>
+          <a:p>
+            <a:pPr algn="ctr"/>
+            <a:r>
+              <a:rPr lang="zh-CN" altLang="en-US" sz="1200" dirty="0"/>
+              <a:t>球体</a:t>
+            </a:r>
+          </a:p>
+        </p:txBody>
+      </p:sp>
+    </p:spTree>
+    <p:extLst>
+      <p:ext uri="{BB962C8B-B14F-4D97-AF65-F5344CB8AC3E}">
+        <p14:creationId xmlns:p14="http://schemas.microsoft.com/office/powerpoint/2010/main" val="1337977765"/>
+      </p:ext>
+    </p:extLst>
+  </p:cSld>
+  <p:clrMapOvr>
+    <a:masterClrMapping/>
+  </p:clrMapOvr>
+</p:sld>
+</file>
+
 <file path=ppt/slides/slide2.xml><?xml version="1.0" encoding="utf-8"?>
 <p:sld xmlns:a="http://schemas.openxmlformats.org/drawingml/2006/main" xmlns:r="http://schemas.openxmlformats.org/officeDocument/2006/relationships" xmlns:p="http://schemas.openxmlformats.org/presentationml/2006/main">
   <p:cSld>
@@ -3502,7 +4682,14 @@
           <a:bodyPr/>
           <a:lstStyle/>
           <a:p>
-            <a:endParaRPr lang="zh-CN" altLang="en-US"/>
+            <a:r>
+              <a:rPr lang="en-US" altLang="zh-CN" dirty="0"/>
+              <a:t>1. </a:t>
+            </a:r>
+            <a:r>
+              <a:rPr lang="zh-CN" altLang="en-US" dirty="0"/>
+              <a:t>常用的基础动画</a:t>
+            </a:r>
           </a:p>
         </p:txBody>
       </p:sp>
@@ -3527,6 +4714,9 @@
           <a:bodyPr/>
           <a:lstStyle/>
           <a:p>
+            <a:pPr marL="0" indent="0">
+              <a:buNone/>
+            </a:pPr>
             <a:endParaRPr lang="zh-CN" altLang="en-US" dirty="0"/>
           </a:p>
         </p:txBody>
@@ -5012,10 +6202,10 @@
       </p:grpSpPr>
       <p:sp>
         <p:nvSpPr>
-          <p:cNvPr id="2" name="标题 1">
-            <a:extLst>
-              <a:ext uri="{FF2B5EF4-FFF2-40B4-BE49-F238E27FC236}">
-                <a16:creationId xmlns:a16="http://schemas.microsoft.com/office/drawing/2014/main" id="{365C2D13-5BB3-4EBC-9C2A-D3D602CA21B8}"/>
+          <p:cNvPr id="10" name="标题 1">
+            <a:extLst>
+              <a:ext uri="{FF2B5EF4-FFF2-40B4-BE49-F238E27FC236}">
+                <a16:creationId xmlns:a16="http://schemas.microsoft.com/office/drawing/2014/main" id="{26E2AC48-A593-46C6-AF61-8997E0FA8C47}"/>
               </a:ext>
             </a:extLst>
           </p:cNvPr>
@@ -5026,44 +6216,98 @@
             <p:ph type="title"/>
           </p:nvPr>
         </p:nvSpPr>
-        <p:spPr/>
-        <p:txBody>
-          <a:bodyPr/>
-          <a:lstStyle/>
-          <a:p>
-            <a:endParaRPr lang="zh-CN" altLang="en-US"/>
-          </a:p>
-        </p:txBody>
-      </p:sp>
-      <p:sp>
-        <p:nvSpPr>
-          <p:cNvPr id="3" name="内容占位符 2">
-            <a:extLst>
-              <a:ext uri="{FF2B5EF4-FFF2-40B4-BE49-F238E27FC236}">
-                <a16:creationId xmlns:a16="http://schemas.microsoft.com/office/drawing/2014/main" id="{BF39A055-FBA5-4A37-BFCF-097E3409D23D}"/>
-              </a:ext>
-            </a:extLst>
-          </p:cNvPr>
-          <p:cNvSpPr>
-            <a:spLocks noGrp="1"/>
-          </p:cNvSpPr>
-          <p:nvPr>
-            <p:ph idx="1"/>
-          </p:nvPr>
-        </p:nvSpPr>
-        <p:spPr/>
-        <p:txBody>
-          <a:bodyPr/>
-          <a:lstStyle/>
-          <a:p>
-            <a:endParaRPr lang="zh-CN" altLang="en-US"/>
+        <p:spPr>
+          <a:xfrm>
+            <a:off x="838200" y="365125"/>
+            <a:ext cx="10515600" cy="6091093"/>
+          </a:xfrm>
+        </p:spPr>
+        <p:txBody>
+          <a:bodyPr>
+            <a:normAutofit/>
+          </a:bodyPr>
+          <a:lstStyle/>
+          <a:p>
+            <a:r>
+              <a:rPr lang="en-US" altLang="zh-CN" sz="2200" b="1" u="sng" dirty="0"/>
+              <a:t>Sample 3</a:t>
+            </a:r>
+            <a:r>
+              <a:rPr lang="en-US" altLang="zh-CN" sz="2200" b="1" dirty="0"/>
+              <a:t>: </a:t>
+            </a:r>
+            <a:br>
+              <a:rPr lang="en-US" altLang="zh-CN" sz="2200" dirty="0"/>
+            </a:br>
+            <a:br>
+              <a:rPr lang="en-US" altLang="zh-CN" sz="2200" dirty="0"/>
+            </a:br>
+            <a:r>
+              <a:rPr lang="en-US" altLang="zh-CN" sz="2200" dirty="0"/>
+              <a:t>1. </a:t>
+            </a:r>
+            <a:r>
+              <a:rPr lang="zh-CN" altLang="en-US" sz="2200" b="1" dirty="0"/>
+              <a:t>目标：</a:t>
+            </a:r>
+            <a:r>
+              <a:rPr lang="zh-CN" altLang="en-US" sz="2200" dirty="0"/>
+              <a:t>放大缩小</a:t>
+            </a:r>
+            <a:br>
+              <a:rPr lang="en-US" altLang="zh-CN" sz="2200" dirty="0"/>
+            </a:br>
+            <a:r>
+              <a:rPr lang="en-US" altLang="zh-CN" sz="2200" dirty="0"/>
+              <a:t>2. </a:t>
+            </a:r>
+            <a:r>
+              <a:rPr lang="zh-CN" altLang="en-US" sz="2200" dirty="0"/>
+              <a:t>对象无法放大缩小存在问题，</a:t>
+            </a:r>
+            <a:r>
+              <a:rPr lang="zh-CN" altLang="en-US" sz="2200" b="1" dirty="0"/>
+              <a:t>解决方案：</a:t>
+            </a:r>
+            <a:r>
+              <a:rPr lang="en-US" altLang="zh-CN" sz="2200" dirty="0"/>
+              <a:t>A)</a:t>
+            </a:r>
+            <a:r>
+              <a:rPr lang="zh-CN" altLang="en-US" sz="2200" dirty="0"/>
+              <a:t> 选中对象在强调中选用放大缩小，</a:t>
+            </a:r>
+            <a:r>
+              <a:rPr lang="en-US" altLang="zh-CN" sz="2200" dirty="0"/>
+              <a:t>B) </a:t>
+            </a:r>
+            <a:r>
+              <a:rPr lang="zh-CN" altLang="en-US" sz="2200" dirty="0"/>
+              <a:t>效果选项右下角箭头输入放大缩小尺寸</a:t>
+            </a:r>
+            <a:r>
+              <a:rPr lang="en-US" altLang="zh-CN" sz="2200" dirty="0"/>
+              <a:t>200</a:t>
+            </a:r>
+            <a:r>
+              <a:rPr lang="zh-CN" altLang="en-US" sz="2200" dirty="0"/>
+              <a:t>，且自动翻转，如下：</a:t>
+            </a:r>
+            <a:r>
+              <a:rPr lang="en-US" altLang="zh-CN" sz="2200" dirty="0"/>
+              <a:t> </a:t>
+            </a:r>
+            <a:br>
+              <a:rPr lang="en-US" altLang="zh-CN" sz="2200" dirty="0"/>
+            </a:br>
+            <a:endParaRPr lang="zh-CN" altLang="en-US" sz="2200" dirty="0"/>
           </a:p>
         </p:txBody>
       </p:sp>
     </p:spTree>
     <p:extLst>
       <p:ext uri="{BB962C8B-B14F-4D97-AF65-F5344CB8AC3E}">
-        <p14:creationId xmlns:p14="http://schemas.microsoft.com/office/powerpoint/2010/main" val="3327964293"/>
+        <p14:creationId xmlns:p14="http://schemas.microsoft.com/office/powerpoint/2010/main" val="1188859001"/>
       </p:ext>
     </p:extLst>
   </p:cSld>

--- a/PPT-Animation-Samples (Part 2).pptx
+++ b/PPT-Animation-Samples (Part 2).pptx
@@ -4641,6 +4641,158 @@
   <p:clrMapOvr>
     <a:masterClrMapping/>
   </p:clrMapOvr>
+  <mc:AlternateContent xmlns:mc="http://schemas.openxmlformats.org/markup-compatibility/2006">
+    <mc:Choice xmlns:p14="http://schemas.microsoft.com/office/powerpoint/2010/main" Requires="p14">
+      <p:timing>
+        <p:tnLst>
+          <p:par>
+            <p:cTn id="1" dur="indefinite" restart="never" nodeType="tmRoot">
+              <p:childTnLst>
+                <p:seq concurrent="1" nextAc="seek">
+                  <p:cTn id="2" dur="indefinite" nodeType="mainSeq">
+                    <p:childTnLst>
+                      <p:par>
+                        <p:cTn id="3" fill="hold">
+                          <p:stCondLst>
+                            <p:cond delay="indefinite"/>
+                          </p:stCondLst>
+                          <p:childTnLst>
+                            <p:par>
+                              <p:cTn id="4" fill="hold">
+                                <p:stCondLst>
+                                  <p:cond delay="0"/>
+                                </p:stCondLst>
+                                <p:childTnLst>
+                                  <p:par>
+                                    <p:cTn id="5" presetID="42" presetClass="path" presetSubtype="0" fill="hold" grpId="0" nodeType="clickEffect" p14:presetBounceEnd="52000">
+                                      <p:stCondLst>
+                                        <p:cond delay="0"/>
+                                      </p:stCondLst>
+                                      <p:childTnLst>
+                                        <p:animMotion origin="layout" path="M -1.45833E-6 -2.22222E-6 L -0.00521 0.51922 " pathEditMode="relative" rAng="0" ptsTypes="AA" p14:bounceEnd="52000">
+                                          <p:cBhvr>
+                                            <p:cTn id="6" dur="2000" fill="hold"/>
+                                            <p:tgtEl>
+                                              <p:spTgt spid="4"/>
+                                            </p:tgtEl>
+                                            <p:attrNameLst>
+                                              <p:attrName>ppt_x</p:attrName>
+                                              <p:attrName>ppt_y</p:attrName>
+                                            </p:attrNameLst>
+                                          </p:cBhvr>
+                                          <p:rCtr x="-260" y="25949"/>
+                                        </p:animMotion>
+                                      </p:childTnLst>
+                                    </p:cTn>
+                                  </p:par>
+                                </p:childTnLst>
+                              </p:cTn>
+                            </p:par>
+                          </p:childTnLst>
+                        </p:cTn>
+                      </p:par>
+                    </p:childTnLst>
+                  </p:cTn>
+                  <p:prevCondLst>
+                    <p:cond evt="onPrev" delay="0">
+                      <p:tgtEl>
+                        <p:sldTgt/>
+                      </p:tgtEl>
+                    </p:cond>
+                  </p:prevCondLst>
+                  <p:nextCondLst>
+                    <p:cond evt="onNext" delay="0">
+                      <p:tgtEl>
+                        <p:sldTgt/>
+                      </p:tgtEl>
+                    </p:cond>
+                  </p:nextCondLst>
+                </p:seq>
+              </p:childTnLst>
+            </p:cTn>
+          </p:par>
+        </p:tnLst>
+        <p:bldLst>
+          <p:bldP spid="4" grpId="0" animBg="1"/>
+        </p:bldLst>
+      </p:timing>
+    </mc:Choice>
+    <mc:Fallback>
+      <p:timing>
+        <p:tnLst>
+          <p:par>
+            <p:cTn id="1" dur="indefinite" restart="never" nodeType="tmRoot">
+              <p:childTnLst>
+                <p:seq concurrent="1" nextAc="seek">
+                  <p:cTn id="2" dur="indefinite" nodeType="mainSeq">
+                    <p:childTnLst>
+                      <p:par>
+                        <p:cTn id="3" fill="hold">
+                          <p:stCondLst>
+                            <p:cond delay="indefinite"/>
+                          </p:stCondLst>
+                          <p:childTnLst>
+                            <p:par>
+                              <p:cTn id="4" fill="hold">
+                                <p:stCondLst>
+                                  <p:cond delay="0"/>
+                                </p:stCondLst>
+                                <p:childTnLst>
+                                  <p:par>
+                                    <p:cTn id="5" presetID="42" presetClass="path" presetSubtype="0" fill="hold" grpId="0" nodeType="clickEffect">
+                                      <p:stCondLst>
+                                        <p:cond delay="0"/>
+                                      </p:stCondLst>
+                                      <p:childTnLst>
+                                        <p:animMotion origin="layout" path="M -1.45833E-6 -2.22222E-6 L -0.00521 0.51922 " pathEditMode="relative" rAng="0" ptsTypes="AA">
+                                          <p:cBhvr>
+                                            <p:cTn id="6" dur="2000" fill="hold"/>
+                                            <p:tgtEl>
+                                              <p:spTgt spid="4"/>
+                                            </p:tgtEl>
+                                            <p:attrNameLst>
+                                              <p:attrName>ppt_x</p:attrName>
+                                              <p:attrName>ppt_y</p:attrName>
+                                            </p:attrNameLst>
+                                          </p:cBhvr>
+                                          <p:rCtr x="-260" y="25949"/>
+                                        </p:animMotion>
+                                      </p:childTnLst>
+                                    </p:cTn>
+                                  </p:par>
+                                </p:childTnLst>
+                              </p:cTn>
+                            </p:par>
+                          </p:childTnLst>
+                        </p:cTn>
+                      </p:par>
+                    </p:childTnLst>
+                  </p:cTn>
+                  <p:prevCondLst>
+                    <p:cond evt="onPrev" delay="0">
+                      <p:tgtEl>
+                        <p:sldTgt/>
+                      </p:tgtEl>
+                    </p:cond>
+                  </p:prevCondLst>
+                  <p:nextCondLst>
+                    <p:cond evt="onNext" delay="0">
+                      <p:tgtEl>
+                        <p:sldTgt/>
+                      </p:tgtEl>
+                    </p:cond>
+                  </p:nextCondLst>
+                </p:seq>
+              </p:childTnLst>
+            </p:cTn>
+          </p:par>
+        </p:tnLst>
+        <p:bldLst>
+          <p:bldP spid="4" grpId="0" animBg="1"/>
+        </p:bldLst>
+      </p:timing>
+    </mc:Fallback>
+  </mc:AlternateContent>
 </p:sld>
 </file>
 

--- a/PPT-Animation-Samples (Part 2).pptx
+++ b/PPT-Animation-Samples (Part 2).pptx
@@ -18,6 +18,10 @@
     <p:sldId id="279" r:id="rId12"/>
     <p:sldId id="289" r:id="rId13"/>
     <p:sldId id="290" r:id="rId14"/>
+    <p:sldId id="291" r:id="rId15"/>
+    <p:sldId id="292" r:id="rId16"/>
+    <p:sldId id="294" r:id="rId17"/>
+    <p:sldId id="293" r:id="rId18"/>
   </p:sldIdLst>
   <p:sldSz cx="12192000" cy="6858000"/>
   <p:notesSz cx="6858000" cy="9144000"/>
@@ -271,7 +275,7 @@
           <a:p>
             <a:fld id="{992B7589-6A85-43F1-96BB-1A2EC93AE491}" type="datetimeFigureOut">
               <a:rPr lang="zh-CN" altLang="en-US" smtClean="0"/>
-              <a:t>2026/5/30</a:t>
+              <a:t>2026/5/31</a:t>
             </a:fld>
             <a:endParaRPr lang="zh-CN" altLang="en-US"/>
           </a:p>
@@ -469,7 +473,7 @@
           <a:p>
             <a:fld id="{992B7589-6A85-43F1-96BB-1A2EC93AE491}" type="datetimeFigureOut">
               <a:rPr lang="zh-CN" altLang="en-US" smtClean="0"/>
-              <a:t>2026/5/30</a:t>
+              <a:t>2026/5/31</a:t>
             </a:fld>
             <a:endParaRPr lang="zh-CN" altLang="en-US"/>
           </a:p>
@@ -677,7 +681,7 @@
           <a:p>
             <a:fld id="{992B7589-6A85-43F1-96BB-1A2EC93AE491}" type="datetimeFigureOut">
               <a:rPr lang="zh-CN" altLang="en-US" smtClean="0"/>
-              <a:t>2026/5/30</a:t>
+              <a:t>2026/5/31</a:t>
             </a:fld>
             <a:endParaRPr lang="zh-CN" altLang="en-US"/>
           </a:p>
@@ -875,7 +879,7 @@
           <a:p>
             <a:fld id="{992B7589-6A85-43F1-96BB-1A2EC93AE491}" type="datetimeFigureOut">
               <a:rPr lang="zh-CN" altLang="en-US" smtClean="0"/>
-              <a:t>2026/5/30</a:t>
+              <a:t>2026/5/31</a:t>
             </a:fld>
             <a:endParaRPr lang="zh-CN" altLang="en-US"/>
           </a:p>
@@ -1150,7 +1154,7 @@
           <a:p>
             <a:fld id="{992B7589-6A85-43F1-96BB-1A2EC93AE491}" type="datetimeFigureOut">
               <a:rPr lang="zh-CN" altLang="en-US" smtClean="0"/>
-              <a:t>2026/5/30</a:t>
+              <a:t>2026/5/31</a:t>
             </a:fld>
             <a:endParaRPr lang="zh-CN" altLang="en-US"/>
           </a:p>
@@ -1415,7 +1419,7 @@
           <a:p>
             <a:fld id="{992B7589-6A85-43F1-96BB-1A2EC93AE491}" type="datetimeFigureOut">
               <a:rPr lang="zh-CN" altLang="en-US" smtClean="0"/>
-              <a:t>2026/5/30</a:t>
+              <a:t>2026/5/31</a:t>
             </a:fld>
             <a:endParaRPr lang="zh-CN" altLang="en-US"/>
           </a:p>
@@ -1827,7 +1831,7 @@
           <a:p>
             <a:fld id="{992B7589-6A85-43F1-96BB-1A2EC93AE491}" type="datetimeFigureOut">
               <a:rPr lang="zh-CN" altLang="en-US" smtClean="0"/>
-              <a:t>2026/5/30</a:t>
+              <a:t>2026/5/31</a:t>
             </a:fld>
             <a:endParaRPr lang="zh-CN" altLang="en-US"/>
           </a:p>
@@ -1968,7 +1972,7 @@
           <a:p>
             <a:fld id="{992B7589-6A85-43F1-96BB-1A2EC93AE491}" type="datetimeFigureOut">
               <a:rPr lang="zh-CN" altLang="en-US" smtClean="0"/>
-              <a:t>2026/5/30</a:t>
+              <a:t>2026/5/31</a:t>
             </a:fld>
             <a:endParaRPr lang="zh-CN" altLang="en-US"/>
           </a:p>
@@ -2081,7 +2085,7 @@
           <a:p>
             <a:fld id="{992B7589-6A85-43F1-96BB-1A2EC93AE491}" type="datetimeFigureOut">
               <a:rPr lang="zh-CN" altLang="en-US" smtClean="0"/>
-              <a:t>2026/5/30</a:t>
+              <a:t>2026/5/31</a:t>
             </a:fld>
             <a:endParaRPr lang="zh-CN" altLang="en-US"/>
           </a:p>
@@ -2392,7 +2396,7 @@
           <a:p>
             <a:fld id="{992B7589-6A85-43F1-96BB-1A2EC93AE491}" type="datetimeFigureOut">
               <a:rPr lang="zh-CN" altLang="en-US" smtClean="0"/>
-              <a:t>2026/5/30</a:t>
+              <a:t>2026/5/31</a:t>
             </a:fld>
             <a:endParaRPr lang="zh-CN" altLang="en-US"/>
           </a:p>
@@ -2680,7 +2684,7 @@
           <a:p>
             <a:fld id="{992B7589-6A85-43F1-96BB-1A2EC93AE491}" type="datetimeFigureOut">
               <a:rPr lang="zh-CN" altLang="en-US" smtClean="0"/>
-              <a:t>2026/5/30</a:t>
+              <a:t>2026/5/31</a:t>
             </a:fld>
             <a:endParaRPr lang="zh-CN" altLang="en-US"/>
           </a:p>
@@ -2921,7 +2925,7 @@
           <a:p>
             <a:fld id="{992B7589-6A85-43F1-96BB-1A2EC93AE491}" type="datetimeFigureOut">
               <a:rPr lang="zh-CN" altLang="en-US" smtClean="0"/>
-              <a:t>2026/5/30</a:t>
+              <a:t>2026/5/31</a:t>
             </a:fld>
             <a:endParaRPr lang="zh-CN" altLang="en-US"/>
           </a:p>
@@ -3980,8 +3984,8 @@
   <p:clrMapOvr>
     <a:masterClrMapping/>
   </p:clrMapOvr>
-  <mc:AlternateContent xmlns:mc="http://schemas.openxmlformats.org/markup-compatibility/2006">
-    <mc:Choice xmlns:p14="http://schemas.microsoft.com/office/powerpoint/2010/main" Requires="p14">
+  <mc:AlternateContent xmlns:mc="http://schemas.openxmlformats.org/markup-compatibility/2006" xmlns:p14="http://schemas.microsoft.com/office/powerpoint/2010/main">
+    <mc:Choice Requires="p14">
       <p:timing>
         <p:tnLst>
           <p:par>
@@ -4179,7 +4183,7 @@
         </p:bldLst>
       </p:timing>
     </mc:Choice>
-    <mc:Fallback>
+    <mc:Fallback xmlns="">
       <p:timing>
         <p:tnLst>
           <p:par>
@@ -4473,7 +4477,7 @@
             </a:r>
             <a:r>
               <a:rPr lang="zh-CN" altLang="en-US" sz="2200" dirty="0"/>
-              <a:t> 选中对象在强调中选用放大缩小，</a:t>
+              <a:t> 球体从视界外飞入，选择自顶部，平滑开始，</a:t>
             </a:r>
             <a:r>
               <a:rPr lang="en-US" altLang="zh-CN" sz="2200" dirty="0"/>
@@ -4481,15 +4485,39 @@
             </a:r>
             <a:r>
               <a:rPr lang="zh-CN" altLang="en-US" sz="2200" dirty="0"/>
-              <a:t>效果选项右下角箭头输入放大缩小尺寸</a:t>
+              <a:t>碰到地面后会反弹，添加动画，选择路径动画，所以添加直线路径，</a:t>
             </a:r>
             <a:r>
               <a:rPr lang="en-US" altLang="zh-CN" sz="2200" dirty="0"/>
-              <a:t>200</a:t>
+              <a:t>C)</a:t>
             </a:r>
             <a:r>
               <a:rPr lang="zh-CN" altLang="en-US" sz="2200" dirty="0"/>
-              <a:t>，且自动翻转，如下：</a:t>
+              <a:t> 第二个动画延迟</a:t>
+            </a:r>
+            <a:r>
+              <a:rPr lang="en-US" altLang="zh-CN" sz="2200" dirty="0"/>
+              <a:t>0.5</a:t>
+            </a:r>
+            <a:r>
+              <a:rPr lang="zh-CN" altLang="en-US" sz="2200" dirty="0"/>
+              <a:t>秒，持续时间</a:t>
+            </a:r>
+            <a:r>
+              <a:rPr lang="en-US" altLang="zh-CN" sz="2200" dirty="0"/>
+              <a:t>0.5</a:t>
+            </a:r>
+            <a:r>
+              <a:rPr lang="zh-CN" altLang="en-US" sz="2200" dirty="0"/>
+              <a:t>秒，</a:t>
+            </a:r>
+            <a:r>
+              <a:rPr lang="en-US" altLang="zh-CN" sz="2200" dirty="0"/>
+              <a:t>D)</a:t>
+            </a:r>
+            <a:r>
+              <a:rPr lang="zh-CN" altLang="en-US" sz="2200" dirty="0"/>
+              <a:t> 第二个动画平滑结束，如下：</a:t>
             </a:r>
             <a:r>
               <a:rPr lang="en-US" altLang="zh-CN" sz="2200" dirty="0"/>
@@ -4596,7 +4624,7 @@
         </p:nvSpPr>
         <p:spPr>
           <a:xfrm>
-            <a:off x="5357091" y="1985818"/>
+            <a:off x="5271030" y="4787016"/>
             <a:ext cx="738909" cy="618837"/>
           </a:xfrm>
           <a:prstGeom prst="flowChartConnector">
@@ -4641,158 +4669,3121 @@
   <p:clrMapOvr>
     <a:masterClrMapping/>
   </p:clrMapOvr>
-  <mc:AlternateContent xmlns:mc="http://schemas.openxmlformats.org/markup-compatibility/2006">
-    <mc:Choice xmlns:p14="http://schemas.microsoft.com/office/powerpoint/2010/main" Requires="p14">
-      <p:timing>
-        <p:tnLst>
-          <p:par>
-            <p:cTn id="1" dur="indefinite" restart="never" nodeType="tmRoot">
-              <p:childTnLst>
-                <p:seq concurrent="1" nextAc="seek">
-                  <p:cTn id="2" dur="indefinite" nodeType="mainSeq">
-                    <p:childTnLst>
-                      <p:par>
-                        <p:cTn id="3" fill="hold">
-                          <p:stCondLst>
-                            <p:cond delay="indefinite"/>
-                          </p:stCondLst>
-                          <p:childTnLst>
-                            <p:par>
-                              <p:cTn id="4" fill="hold">
-                                <p:stCondLst>
-                                  <p:cond delay="0"/>
-                                </p:stCondLst>
-                                <p:childTnLst>
-                                  <p:par>
-                                    <p:cTn id="5" presetID="42" presetClass="path" presetSubtype="0" fill="hold" grpId="0" nodeType="clickEffect" p14:presetBounceEnd="52000">
-                                      <p:stCondLst>
-                                        <p:cond delay="0"/>
-                                      </p:stCondLst>
-                                      <p:childTnLst>
-                                        <p:animMotion origin="layout" path="M -1.45833E-6 -2.22222E-6 L -0.00521 0.51922 " pathEditMode="relative" rAng="0" ptsTypes="AA" p14:bounceEnd="52000">
-                                          <p:cBhvr>
-                                            <p:cTn id="6" dur="2000" fill="hold"/>
-                                            <p:tgtEl>
-                                              <p:spTgt spid="4"/>
-                                            </p:tgtEl>
-                                            <p:attrNameLst>
-                                              <p:attrName>ppt_x</p:attrName>
-                                              <p:attrName>ppt_y</p:attrName>
-                                            </p:attrNameLst>
-                                          </p:cBhvr>
-                                          <p:rCtr x="-260" y="25949"/>
-                                        </p:animMotion>
-                                      </p:childTnLst>
-                                    </p:cTn>
-                                  </p:par>
-                                </p:childTnLst>
-                              </p:cTn>
-                            </p:par>
-                          </p:childTnLst>
-                        </p:cTn>
-                      </p:par>
-                    </p:childTnLst>
-                  </p:cTn>
-                  <p:prevCondLst>
-                    <p:cond evt="onPrev" delay="0">
-                      <p:tgtEl>
-                        <p:sldTgt/>
-                      </p:tgtEl>
-                    </p:cond>
-                  </p:prevCondLst>
-                  <p:nextCondLst>
-                    <p:cond evt="onNext" delay="0">
-                      <p:tgtEl>
-                        <p:sldTgt/>
-                      </p:tgtEl>
-                    </p:cond>
-                  </p:nextCondLst>
-                </p:seq>
-              </p:childTnLst>
-            </p:cTn>
-          </p:par>
-        </p:tnLst>
-        <p:bldLst>
-          <p:bldP spid="4" grpId="0" animBg="1"/>
-        </p:bldLst>
-      </p:timing>
-    </mc:Choice>
-    <mc:Fallback>
-      <p:timing>
-        <p:tnLst>
-          <p:par>
-            <p:cTn id="1" dur="indefinite" restart="never" nodeType="tmRoot">
-              <p:childTnLst>
-                <p:seq concurrent="1" nextAc="seek">
-                  <p:cTn id="2" dur="indefinite" nodeType="mainSeq">
-                    <p:childTnLst>
-                      <p:par>
-                        <p:cTn id="3" fill="hold">
-                          <p:stCondLst>
-                            <p:cond delay="indefinite"/>
-                          </p:stCondLst>
-                          <p:childTnLst>
-                            <p:par>
-                              <p:cTn id="4" fill="hold">
-                                <p:stCondLst>
-                                  <p:cond delay="0"/>
-                                </p:stCondLst>
-                                <p:childTnLst>
-                                  <p:par>
-                                    <p:cTn id="5" presetID="42" presetClass="path" presetSubtype="0" fill="hold" grpId="0" nodeType="clickEffect">
-                                      <p:stCondLst>
-                                        <p:cond delay="0"/>
-                                      </p:stCondLst>
-                                      <p:childTnLst>
-                                        <p:animMotion origin="layout" path="M -1.45833E-6 -2.22222E-6 L -0.00521 0.51922 " pathEditMode="relative" rAng="0" ptsTypes="AA">
-                                          <p:cBhvr>
-                                            <p:cTn id="6" dur="2000" fill="hold"/>
-                                            <p:tgtEl>
-                                              <p:spTgt spid="4"/>
-                                            </p:tgtEl>
-                                            <p:attrNameLst>
-                                              <p:attrName>ppt_x</p:attrName>
-                                              <p:attrName>ppt_y</p:attrName>
-                                            </p:attrNameLst>
-                                          </p:cBhvr>
-                                          <p:rCtr x="-260" y="25949"/>
-                                        </p:animMotion>
-                                      </p:childTnLst>
-                                    </p:cTn>
-                                  </p:par>
-                                </p:childTnLst>
-                              </p:cTn>
-                            </p:par>
-                          </p:childTnLst>
-                        </p:cTn>
-                      </p:par>
-                    </p:childTnLst>
-                  </p:cTn>
-                  <p:prevCondLst>
-                    <p:cond evt="onPrev" delay="0">
-                      <p:tgtEl>
-                        <p:sldTgt/>
-                      </p:tgtEl>
-                    </p:cond>
-                  </p:prevCondLst>
-                  <p:nextCondLst>
-                    <p:cond evt="onNext" delay="0">
-                      <p:tgtEl>
-                        <p:sldTgt/>
-                      </p:tgtEl>
-                    </p:cond>
-                  </p:nextCondLst>
-                </p:seq>
-              </p:childTnLst>
-            </p:cTn>
-          </p:par>
-        </p:tnLst>
-        <p:bldLst>
-          <p:bldP spid="4" grpId="0" animBg="1"/>
-        </p:bldLst>
-      </p:timing>
-    </mc:Fallback>
-  </mc:AlternateContent>
+  <p:timing>
+    <p:tnLst>
+      <p:par>
+        <p:cTn id="1" dur="indefinite" restart="never" nodeType="tmRoot">
+          <p:childTnLst>
+            <p:seq concurrent="1" nextAc="seek">
+              <p:cTn id="2" dur="indefinite" nodeType="mainSeq">
+                <p:childTnLst>
+                  <p:par>
+                    <p:cTn id="3" fill="hold">
+                      <p:stCondLst>
+                        <p:cond delay="indefinite"/>
+                        <p:cond evt="onBegin" delay="0">
+                          <p:tn val="2"/>
+                        </p:cond>
+                      </p:stCondLst>
+                      <p:childTnLst>
+                        <p:par>
+                          <p:cTn id="4" fill="hold">
+                            <p:stCondLst>
+                              <p:cond delay="0"/>
+                            </p:stCondLst>
+                            <p:childTnLst>
+                              <p:par>
+                                <p:cTn id="5" presetID="2" presetClass="entr" presetSubtype="1" accel="52000" fill="hold" grpId="0" nodeType="withEffect">
+                                  <p:stCondLst>
+                                    <p:cond delay="0"/>
+                                  </p:stCondLst>
+                                  <p:childTnLst>
+                                    <p:set>
+                                      <p:cBhvr>
+                                        <p:cTn id="6" dur="1" fill="hold">
+                                          <p:stCondLst>
+                                            <p:cond delay="0"/>
+                                          </p:stCondLst>
+                                        </p:cTn>
+                                        <p:tgtEl>
+                                          <p:spTgt spid="4"/>
+                                        </p:tgtEl>
+                                        <p:attrNameLst>
+                                          <p:attrName>style.visibility</p:attrName>
+                                        </p:attrNameLst>
+                                      </p:cBhvr>
+                                      <p:to>
+                                        <p:strVal val="visible"/>
+                                      </p:to>
+                                    </p:set>
+                                    <p:anim calcmode="lin" valueType="num">
+                                      <p:cBhvr additive="base">
+                                        <p:cTn id="7" dur="500" fill="hold"/>
+                                        <p:tgtEl>
+                                          <p:spTgt spid="4"/>
+                                        </p:tgtEl>
+                                        <p:attrNameLst>
+                                          <p:attrName>ppt_x</p:attrName>
+                                        </p:attrNameLst>
+                                      </p:cBhvr>
+                                      <p:tavLst>
+                                        <p:tav tm="0">
+                                          <p:val>
+                                            <p:strVal val="#ppt_x"/>
+                                          </p:val>
+                                        </p:tav>
+                                        <p:tav tm="100000">
+                                          <p:val>
+                                            <p:strVal val="#ppt_x"/>
+                                          </p:val>
+                                        </p:tav>
+                                      </p:tavLst>
+                                    </p:anim>
+                                    <p:anim calcmode="lin" valueType="num">
+                                      <p:cBhvr additive="base">
+                                        <p:cTn id="8" dur="500" fill="hold"/>
+                                        <p:tgtEl>
+                                          <p:spTgt spid="4"/>
+                                        </p:tgtEl>
+                                        <p:attrNameLst>
+                                          <p:attrName>ppt_y</p:attrName>
+                                        </p:attrNameLst>
+                                      </p:cBhvr>
+                                      <p:tavLst>
+                                        <p:tav tm="0">
+                                          <p:val>
+                                            <p:strVal val="0-#ppt_h/2"/>
+                                          </p:val>
+                                        </p:tav>
+                                        <p:tav tm="100000">
+                                          <p:val>
+                                            <p:strVal val="#ppt_y"/>
+                                          </p:val>
+                                        </p:tav>
+                                      </p:tavLst>
+                                    </p:anim>
+                                  </p:childTnLst>
+                                </p:cTn>
+                              </p:par>
+                              <p:par>
+                                <p:cTn id="9" presetID="42" presetClass="path" presetSubtype="0" decel="100000" fill="hold" grpId="1" nodeType="withEffect">
+                                  <p:stCondLst>
+                                    <p:cond delay="500"/>
+                                  </p:stCondLst>
+                                  <p:childTnLst>
+                                    <p:animMotion origin="layout" path="M -2.08333E-7 4.44444E-6 L 0.00143 -0.16899 " pathEditMode="relative" rAng="0" ptsTypes="AA">
+                                      <p:cBhvr>
+                                        <p:cTn id="10" dur="500" fill="hold"/>
+                                        <p:tgtEl>
+                                          <p:spTgt spid="4"/>
+                                        </p:tgtEl>
+                                        <p:attrNameLst>
+                                          <p:attrName>ppt_x</p:attrName>
+                                          <p:attrName>ppt_y</p:attrName>
+                                        </p:attrNameLst>
+                                      </p:cBhvr>
+                                      <p:rCtr x="65" y="-8449"/>
+                                    </p:animMotion>
+                                  </p:childTnLst>
+                                </p:cTn>
+                              </p:par>
+                            </p:childTnLst>
+                          </p:cTn>
+                        </p:par>
+                      </p:childTnLst>
+                    </p:cTn>
+                  </p:par>
+                </p:childTnLst>
+              </p:cTn>
+              <p:prevCondLst>
+                <p:cond evt="onPrev" delay="0">
+                  <p:tgtEl>
+                    <p:sldTgt/>
+                  </p:tgtEl>
+                </p:cond>
+              </p:prevCondLst>
+              <p:nextCondLst>
+                <p:cond evt="onNext" delay="0">
+                  <p:tgtEl>
+                    <p:sldTgt/>
+                  </p:tgtEl>
+                </p:cond>
+              </p:nextCondLst>
+            </p:seq>
+          </p:childTnLst>
+        </p:cTn>
+      </p:par>
+    </p:tnLst>
+    <p:bldLst>
+      <p:bldP spid="4" grpId="0" animBg="1"/>
+      <p:bldP spid="4" grpId="1" animBg="1"/>
+    </p:bldLst>
+  </p:timing>
+</p:sld>
+</file>
+
+<file path=ppt/slides/slide14.xml><?xml version="1.0" encoding="utf-8"?>
+<p:sld xmlns:a="http://schemas.openxmlformats.org/drawingml/2006/main" xmlns:r="http://schemas.openxmlformats.org/officeDocument/2006/relationships" xmlns:p="http://schemas.openxmlformats.org/presentationml/2006/main">
+  <p:cSld>
+    <p:spTree>
+      <p:nvGrpSpPr>
+        <p:cNvPr id="1" name=""/>
+        <p:cNvGrpSpPr/>
+        <p:nvPr/>
+      </p:nvGrpSpPr>
+      <p:grpSpPr>
+        <a:xfrm>
+          <a:off x="0" y="0"/>
+          <a:ext cx="0" cy="0"/>
+          <a:chOff x="0" y="0"/>
+          <a:chExt cx="0" cy="0"/>
+        </a:xfrm>
+      </p:grpSpPr>
+      <p:sp>
+        <p:nvSpPr>
+          <p:cNvPr id="2" name="标题 1">
+            <a:extLst>
+              <a:ext uri="{FF2B5EF4-FFF2-40B4-BE49-F238E27FC236}">
+                <a16:creationId xmlns:a16="http://schemas.microsoft.com/office/drawing/2014/main" id="{365C2D13-5BB3-4EBC-9C2A-D3D602CA21B8}"/>
+              </a:ext>
+            </a:extLst>
+          </p:cNvPr>
+          <p:cNvSpPr>
+            <a:spLocks noGrp="1"/>
+          </p:cNvSpPr>
+          <p:nvPr>
+            <p:ph type="title"/>
+          </p:nvPr>
+        </p:nvSpPr>
+        <p:spPr/>
+        <p:txBody>
+          <a:bodyPr>
+            <a:normAutofit fontScale="90000"/>
+          </a:bodyPr>
+          <a:lstStyle/>
+          <a:p>
+            <a:br>
+              <a:rPr lang="en-US" altLang="zh-CN" dirty="0"/>
+            </a:br>
+            <a:br>
+              <a:rPr lang="en-US" altLang="zh-CN" dirty="0"/>
+            </a:br>
+            <a:r>
+              <a:rPr lang="en-US" altLang="zh-CN" dirty="0"/>
+              <a:t>3. </a:t>
+            </a:r>
+            <a:r>
+              <a:rPr lang="zh-CN" altLang="en-US" dirty="0"/>
+              <a:t>制作</a:t>
+            </a:r>
+            <a:r>
+              <a:rPr lang="en-US" altLang="zh-CN" dirty="0"/>
+              <a:t>MG</a:t>
+            </a:r>
+            <a:r>
+              <a:rPr lang="zh-CN" altLang="en-US" dirty="0"/>
+              <a:t>修饰元素</a:t>
+            </a:r>
+            <a:br>
+              <a:rPr lang="zh-CN" altLang="en-US" dirty="0"/>
+            </a:br>
+            <a:br>
+              <a:rPr lang="en-US" altLang="zh-CN" dirty="0"/>
+            </a:br>
+            <a:endParaRPr lang="zh-CN" altLang="en-US" dirty="0"/>
+          </a:p>
+        </p:txBody>
+      </p:sp>
+      <p:sp>
+        <p:nvSpPr>
+          <p:cNvPr id="3" name="内容占位符 2">
+            <a:extLst>
+              <a:ext uri="{FF2B5EF4-FFF2-40B4-BE49-F238E27FC236}">
+                <a16:creationId xmlns:a16="http://schemas.microsoft.com/office/drawing/2014/main" id="{BF39A055-FBA5-4A37-BFCF-097E3409D23D}"/>
+              </a:ext>
+            </a:extLst>
+          </p:cNvPr>
+          <p:cNvSpPr>
+            <a:spLocks noGrp="1"/>
+          </p:cNvSpPr>
+          <p:nvPr>
+            <p:ph idx="1"/>
+          </p:nvPr>
+        </p:nvSpPr>
+        <p:spPr/>
+        <p:txBody>
+          <a:bodyPr/>
+          <a:lstStyle/>
+          <a:p>
+            <a:r>
+              <a:rPr lang="en-US" altLang="zh-CN" dirty="0"/>
+              <a:t>1. </a:t>
+            </a:r>
+            <a:r>
+              <a:rPr lang="zh-CN" altLang="en-US" dirty="0"/>
+              <a:t>安装</a:t>
+            </a:r>
+            <a:r>
+              <a:rPr lang="en-US" altLang="zh-CN" dirty="0" err="1"/>
+              <a:t>iSlide</a:t>
+            </a:r>
+            <a:r>
+              <a:rPr lang="zh-CN" altLang="en-US" dirty="0"/>
+              <a:t>插件（点击</a:t>
+            </a:r>
+            <a:r>
+              <a:rPr lang="en-US" altLang="zh-CN" dirty="0" err="1"/>
+              <a:t>iSlide</a:t>
+            </a:r>
+            <a:r>
+              <a:rPr lang="zh-CN" altLang="en-US" dirty="0"/>
+              <a:t>，数量设置为</a:t>
+            </a:r>
+            <a:r>
+              <a:rPr lang="en-US" altLang="zh-CN" dirty="0"/>
+              <a:t>8</a:t>
+            </a:r>
+            <a:r>
+              <a:rPr lang="zh-CN" altLang="en-US" dirty="0"/>
+              <a:t>，起始角度</a:t>
+            </a:r>
+            <a:r>
+              <a:rPr lang="en-US" altLang="zh-CN" dirty="0"/>
+              <a:t>1</a:t>
+            </a:r>
+            <a:r>
+              <a:rPr lang="zh-CN" altLang="en-US" dirty="0"/>
+              <a:t>，半径单位毫米，布局半径</a:t>
+            </a:r>
+            <a:r>
+              <a:rPr lang="en-US" altLang="zh-CN" dirty="0"/>
+              <a:t>30</a:t>
+            </a:r>
+            <a:r>
+              <a:rPr lang="zh-CN" altLang="en-US" dirty="0"/>
+              <a:t>，自动旋转，中间删除，</a:t>
+            </a:r>
+            <a:r>
+              <a:rPr lang="en-US" altLang="zh-CN" dirty="0"/>
+              <a:t>Control + G </a:t>
+            </a:r>
+            <a:r>
+              <a:rPr lang="zh-CN" altLang="en-US" dirty="0"/>
+              <a:t>组合在一起）</a:t>
+            </a:r>
+          </a:p>
+        </p:txBody>
+      </p:sp>
+      <p:sp>
+        <p:nvSpPr>
+          <p:cNvPr id="15" name="内容占位符 2">
+            <a:extLst>
+              <a:ext uri="{FF2B5EF4-FFF2-40B4-BE49-F238E27FC236}">
+                <a16:creationId xmlns:a16="http://schemas.microsoft.com/office/drawing/2014/main" id="{D224EADD-D73D-40FC-8B81-65654D430078}"/>
+              </a:ext>
+            </a:extLst>
+          </p:cNvPr>
+          <p:cNvSpPr txBox="1">
+            <a:spLocks/>
+          </p:cNvSpPr>
+          <p:nvPr/>
+        </p:nvSpPr>
+        <p:spPr>
+          <a:xfrm rot="5400000">
+            <a:off x="838200" y="-8689975"/>
+            <a:ext cx="10515600" cy="4351338"/>
+          </a:xfrm>
+          <a:prstGeom prst="rect">
+            <a:avLst/>
+          </a:prstGeom>
+        </p:spPr>
+        <p:txBody>
+          <a:bodyPr vert="horz" lIns="91440" tIns="45720" rIns="91440" bIns="45720" rtlCol="0">
+            <a:normAutofit/>
+          </a:bodyPr>
+          <a:lstStyle>
+            <a:lvl1pPr marL="228600" indent="-228600" algn="l" defTabSz="914400" rtl="0" eaLnBrk="1" latinLnBrk="0" hangingPunct="1">
+              <a:lnSpc>
+                <a:spcPct val="90000"/>
+              </a:lnSpc>
+              <a:spcBef>
+                <a:spcPts val="1000"/>
+              </a:spcBef>
+              <a:buFont typeface="Arial" panose="020B0604020202020204" pitchFamily="34" charset="0"/>
+              <a:buChar char="•"/>
+              <a:defRPr sz="2800" kern="1200">
+                <a:solidFill>
+                  <a:schemeClr val="tx1"/>
+                </a:solidFill>
+                <a:latin typeface="+mn-lt"/>
+                <a:ea typeface="+mn-ea"/>
+                <a:cs typeface="+mn-cs"/>
+              </a:defRPr>
+            </a:lvl1pPr>
+            <a:lvl2pPr marL="685800" indent="-228600" algn="l" defTabSz="914400" rtl="0" eaLnBrk="1" latinLnBrk="0" hangingPunct="1">
+              <a:lnSpc>
+                <a:spcPct val="90000"/>
+              </a:lnSpc>
+              <a:spcBef>
+                <a:spcPts val="500"/>
+              </a:spcBef>
+              <a:buFont typeface="Arial" panose="020B0604020202020204" pitchFamily="34" charset="0"/>
+              <a:buChar char="•"/>
+              <a:defRPr sz="2400" kern="1200">
+                <a:solidFill>
+                  <a:schemeClr val="tx1"/>
+                </a:solidFill>
+                <a:latin typeface="+mn-lt"/>
+                <a:ea typeface="+mn-ea"/>
+                <a:cs typeface="+mn-cs"/>
+              </a:defRPr>
+            </a:lvl2pPr>
+            <a:lvl3pPr marL="1143000" indent="-228600" algn="l" defTabSz="914400" rtl="0" eaLnBrk="1" latinLnBrk="0" hangingPunct="1">
+              <a:lnSpc>
+                <a:spcPct val="90000"/>
+              </a:lnSpc>
+              <a:spcBef>
+                <a:spcPts val="500"/>
+              </a:spcBef>
+              <a:buFont typeface="Arial" panose="020B0604020202020204" pitchFamily="34" charset="0"/>
+              <a:buChar char="•"/>
+              <a:defRPr sz="2000" kern="1200">
+                <a:solidFill>
+                  <a:schemeClr val="tx1"/>
+                </a:solidFill>
+                <a:latin typeface="+mn-lt"/>
+                <a:ea typeface="+mn-ea"/>
+                <a:cs typeface="+mn-cs"/>
+              </a:defRPr>
+            </a:lvl3pPr>
+            <a:lvl4pPr marL="1600200" indent="-228600" algn="l" defTabSz="914400" rtl="0" eaLnBrk="1" latinLnBrk="0" hangingPunct="1">
+              <a:lnSpc>
+                <a:spcPct val="90000"/>
+              </a:lnSpc>
+              <a:spcBef>
+                <a:spcPts val="500"/>
+              </a:spcBef>
+              <a:buFont typeface="Arial" panose="020B0604020202020204" pitchFamily="34" charset="0"/>
+              <a:buChar char="•"/>
+              <a:defRPr sz="1800" kern="1200">
+                <a:solidFill>
+                  <a:schemeClr val="tx1"/>
+                </a:solidFill>
+                <a:latin typeface="+mn-lt"/>
+                <a:ea typeface="+mn-ea"/>
+                <a:cs typeface="+mn-cs"/>
+              </a:defRPr>
+            </a:lvl4pPr>
+            <a:lvl5pPr marL="2057400" indent="-228600" algn="l" defTabSz="914400" rtl="0" eaLnBrk="1" latinLnBrk="0" hangingPunct="1">
+              <a:lnSpc>
+                <a:spcPct val="90000"/>
+              </a:lnSpc>
+              <a:spcBef>
+                <a:spcPts val="500"/>
+              </a:spcBef>
+              <a:buFont typeface="Arial" panose="020B0604020202020204" pitchFamily="34" charset="0"/>
+              <a:buChar char="•"/>
+              <a:defRPr sz="1800" kern="1200">
+                <a:solidFill>
+                  <a:schemeClr val="tx1"/>
+                </a:solidFill>
+                <a:latin typeface="+mn-lt"/>
+                <a:ea typeface="+mn-ea"/>
+                <a:cs typeface="+mn-cs"/>
+              </a:defRPr>
+            </a:lvl5pPr>
+            <a:lvl6pPr marL="2514600" indent="-228600" algn="l" defTabSz="914400" rtl="0" eaLnBrk="1" latinLnBrk="0" hangingPunct="1">
+              <a:lnSpc>
+                <a:spcPct val="90000"/>
+              </a:lnSpc>
+              <a:spcBef>
+                <a:spcPts val="500"/>
+              </a:spcBef>
+              <a:buFont typeface="Arial" panose="020B0604020202020204" pitchFamily="34" charset="0"/>
+              <a:buChar char="•"/>
+              <a:defRPr sz="1800" kern="1200">
+                <a:solidFill>
+                  <a:schemeClr val="tx1"/>
+                </a:solidFill>
+                <a:latin typeface="+mn-lt"/>
+                <a:ea typeface="+mn-ea"/>
+                <a:cs typeface="+mn-cs"/>
+              </a:defRPr>
+            </a:lvl6pPr>
+            <a:lvl7pPr marL="2971800" indent="-228600" algn="l" defTabSz="914400" rtl="0" eaLnBrk="1" latinLnBrk="0" hangingPunct="1">
+              <a:lnSpc>
+                <a:spcPct val="90000"/>
+              </a:lnSpc>
+              <a:spcBef>
+                <a:spcPts val="500"/>
+              </a:spcBef>
+              <a:buFont typeface="Arial" panose="020B0604020202020204" pitchFamily="34" charset="0"/>
+              <a:buChar char="•"/>
+              <a:defRPr sz="1800" kern="1200">
+                <a:solidFill>
+                  <a:schemeClr val="tx1"/>
+                </a:solidFill>
+                <a:latin typeface="+mn-lt"/>
+                <a:ea typeface="+mn-ea"/>
+                <a:cs typeface="+mn-cs"/>
+              </a:defRPr>
+            </a:lvl7pPr>
+            <a:lvl8pPr marL="3429000" indent="-228600" algn="l" defTabSz="914400" rtl="0" eaLnBrk="1" latinLnBrk="0" hangingPunct="1">
+              <a:lnSpc>
+                <a:spcPct val="90000"/>
+              </a:lnSpc>
+              <a:spcBef>
+                <a:spcPts val="500"/>
+              </a:spcBef>
+              <a:buFont typeface="Arial" panose="020B0604020202020204" pitchFamily="34" charset="0"/>
+              <a:buChar char="•"/>
+              <a:defRPr sz="1800" kern="1200">
+                <a:solidFill>
+                  <a:schemeClr val="tx1"/>
+                </a:solidFill>
+                <a:latin typeface="+mn-lt"/>
+                <a:ea typeface="+mn-ea"/>
+                <a:cs typeface="+mn-cs"/>
+              </a:defRPr>
+            </a:lvl8pPr>
+            <a:lvl9pPr marL="3886200" indent="-228600" algn="l" defTabSz="914400" rtl="0" eaLnBrk="1" latinLnBrk="0" hangingPunct="1">
+              <a:lnSpc>
+                <a:spcPct val="90000"/>
+              </a:lnSpc>
+              <a:spcBef>
+                <a:spcPts val="500"/>
+              </a:spcBef>
+              <a:buFont typeface="Arial" panose="020B0604020202020204" pitchFamily="34" charset="0"/>
+              <a:buChar char="•"/>
+              <a:defRPr sz="1800" kern="1200">
+                <a:solidFill>
+                  <a:schemeClr val="tx1"/>
+                </a:solidFill>
+                <a:latin typeface="+mn-lt"/>
+                <a:ea typeface="+mn-ea"/>
+                <a:cs typeface="+mn-cs"/>
+              </a:defRPr>
+            </a:lvl9pPr>
+          </a:lstStyle>
+          <a:p>
+            <a:r>
+              <a:rPr lang="en-US" altLang="zh-CN"/>
+              <a:t>1. </a:t>
+            </a:r>
+            <a:r>
+              <a:rPr lang="zh-CN" altLang="en-US"/>
+              <a:t>安装</a:t>
+            </a:r>
+            <a:r>
+              <a:rPr lang="en-US" altLang="zh-CN"/>
+              <a:t>iSlide</a:t>
+            </a:r>
+            <a:r>
+              <a:rPr lang="zh-CN" altLang="en-US"/>
+              <a:t>插件</a:t>
+            </a:r>
+            <a:endParaRPr lang="zh-CN" altLang="en-US" dirty="0"/>
+          </a:p>
+        </p:txBody>
+      </p:sp>
+      <p:sp>
+        <p:nvSpPr>
+          <p:cNvPr id="16" name="内容占位符 2">
+            <a:extLst>
+              <a:ext uri="{FF2B5EF4-FFF2-40B4-BE49-F238E27FC236}">
+                <a16:creationId xmlns:a16="http://schemas.microsoft.com/office/drawing/2014/main" id="{810AE8CE-1EAF-4EB0-AE29-F2A5960CFB16}"/>
+              </a:ext>
+            </a:extLst>
+          </p:cNvPr>
+          <p:cNvSpPr txBox="1">
+            <a:spLocks/>
+          </p:cNvSpPr>
+          <p:nvPr/>
+        </p:nvSpPr>
+        <p:spPr>
+          <a:xfrm rot="5400000">
+            <a:off x="9059627" y="-4730744"/>
+            <a:ext cx="10515600" cy="4351338"/>
+          </a:xfrm>
+          <a:prstGeom prst="rect">
+            <a:avLst/>
+          </a:prstGeom>
+        </p:spPr>
+        <p:txBody>
+          <a:bodyPr vert="horz" lIns="91440" tIns="45720" rIns="91440" bIns="45720" rtlCol="0">
+            <a:normAutofit/>
+          </a:bodyPr>
+          <a:lstStyle>
+            <a:lvl1pPr marL="228600" indent="-228600" algn="l" defTabSz="914400" rtl="0" eaLnBrk="1" latinLnBrk="0" hangingPunct="1">
+              <a:lnSpc>
+                <a:spcPct val="90000"/>
+              </a:lnSpc>
+              <a:spcBef>
+                <a:spcPts val="1000"/>
+              </a:spcBef>
+              <a:buFont typeface="Arial" panose="020B0604020202020204" pitchFamily="34" charset="0"/>
+              <a:buChar char="•"/>
+              <a:defRPr sz="2800" kern="1200">
+                <a:solidFill>
+                  <a:schemeClr val="tx1"/>
+                </a:solidFill>
+                <a:latin typeface="+mn-lt"/>
+                <a:ea typeface="+mn-ea"/>
+                <a:cs typeface="+mn-cs"/>
+              </a:defRPr>
+            </a:lvl1pPr>
+            <a:lvl2pPr marL="685800" indent="-228600" algn="l" defTabSz="914400" rtl="0" eaLnBrk="1" latinLnBrk="0" hangingPunct="1">
+              <a:lnSpc>
+                <a:spcPct val="90000"/>
+              </a:lnSpc>
+              <a:spcBef>
+                <a:spcPts val="500"/>
+              </a:spcBef>
+              <a:buFont typeface="Arial" panose="020B0604020202020204" pitchFamily="34" charset="0"/>
+              <a:buChar char="•"/>
+              <a:defRPr sz="2400" kern="1200">
+                <a:solidFill>
+                  <a:schemeClr val="tx1"/>
+                </a:solidFill>
+                <a:latin typeface="+mn-lt"/>
+                <a:ea typeface="+mn-ea"/>
+                <a:cs typeface="+mn-cs"/>
+              </a:defRPr>
+            </a:lvl2pPr>
+            <a:lvl3pPr marL="1143000" indent="-228600" algn="l" defTabSz="914400" rtl="0" eaLnBrk="1" latinLnBrk="0" hangingPunct="1">
+              <a:lnSpc>
+                <a:spcPct val="90000"/>
+              </a:lnSpc>
+              <a:spcBef>
+                <a:spcPts val="500"/>
+              </a:spcBef>
+              <a:buFont typeface="Arial" panose="020B0604020202020204" pitchFamily="34" charset="0"/>
+              <a:buChar char="•"/>
+              <a:defRPr sz="2000" kern="1200">
+                <a:solidFill>
+                  <a:schemeClr val="tx1"/>
+                </a:solidFill>
+                <a:latin typeface="+mn-lt"/>
+                <a:ea typeface="+mn-ea"/>
+                <a:cs typeface="+mn-cs"/>
+              </a:defRPr>
+            </a:lvl3pPr>
+            <a:lvl4pPr marL="1600200" indent="-228600" algn="l" defTabSz="914400" rtl="0" eaLnBrk="1" latinLnBrk="0" hangingPunct="1">
+              <a:lnSpc>
+                <a:spcPct val="90000"/>
+              </a:lnSpc>
+              <a:spcBef>
+                <a:spcPts val="500"/>
+              </a:spcBef>
+              <a:buFont typeface="Arial" panose="020B0604020202020204" pitchFamily="34" charset="0"/>
+              <a:buChar char="•"/>
+              <a:defRPr sz="1800" kern="1200">
+                <a:solidFill>
+                  <a:schemeClr val="tx1"/>
+                </a:solidFill>
+                <a:latin typeface="+mn-lt"/>
+                <a:ea typeface="+mn-ea"/>
+                <a:cs typeface="+mn-cs"/>
+              </a:defRPr>
+            </a:lvl4pPr>
+            <a:lvl5pPr marL="2057400" indent="-228600" algn="l" defTabSz="914400" rtl="0" eaLnBrk="1" latinLnBrk="0" hangingPunct="1">
+              <a:lnSpc>
+                <a:spcPct val="90000"/>
+              </a:lnSpc>
+              <a:spcBef>
+                <a:spcPts val="500"/>
+              </a:spcBef>
+              <a:buFont typeface="Arial" panose="020B0604020202020204" pitchFamily="34" charset="0"/>
+              <a:buChar char="•"/>
+              <a:defRPr sz="1800" kern="1200">
+                <a:solidFill>
+                  <a:schemeClr val="tx1"/>
+                </a:solidFill>
+                <a:latin typeface="+mn-lt"/>
+                <a:ea typeface="+mn-ea"/>
+                <a:cs typeface="+mn-cs"/>
+              </a:defRPr>
+            </a:lvl5pPr>
+            <a:lvl6pPr marL="2514600" indent="-228600" algn="l" defTabSz="914400" rtl="0" eaLnBrk="1" latinLnBrk="0" hangingPunct="1">
+              <a:lnSpc>
+                <a:spcPct val="90000"/>
+              </a:lnSpc>
+              <a:spcBef>
+                <a:spcPts val="500"/>
+              </a:spcBef>
+              <a:buFont typeface="Arial" panose="020B0604020202020204" pitchFamily="34" charset="0"/>
+              <a:buChar char="•"/>
+              <a:defRPr sz="1800" kern="1200">
+                <a:solidFill>
+                  <a:schemeClr val="tx1"/>
+                </a:solidFill>
+                <a:latin typeface="+mn-lt"/>
+                <a:ea typeface="+mn-ea"/>
+                <a:cs typeface="+mn-cs"/>
+              </a:defRPr>
+            </a:lvl6pPr>
+            <a:lvl7pPr marL="2971800" indent="-228600" algn="l" defTabSz="914400" rtl="0" eaLnBrk="1" latinLnBrk="0" hangingPunct="1">
+              <a:lnSpc>
+                <a:spcPct val="90000"/>
+              </a:lnSpc>
+              <a:spcBef>
+                <a:spcPts val="500"/>
+              </a:spcBef>
+              <a:buFont typeface="Arial" panose="020B0604020202020204" pitchFamily="34" charset="0"/>
+              <a:buChar char="•"/>
+              <a:defRPr sz="1800" kern="1200">
+                <a:solidFill>
+                  <a:schemeClr val="tx1"/>
+                </a:solidFill>
+                <a:latin typeface="+mn-lt"/>
+                <a:ea typeface="+mn-ea"/>
+                <a:cs typeface="+mn-cs"/>
+              </a:defRPr>
+            </a:lvl7pPr>
+            <a:lvl8pPr marL="3429000" indent="-228600" algn="l" defTabSz="914400" rtl="0" eaLnBrk="1" latinLnBrk="0" hangingPunct="1">
+              <a:lnSpc>
+                <a:spcPct val="90000"/>
+              </a:lnSpc>
+              <a:spcBef>
+                <a:spcPts val="500"/>
+              </a:spcBef>
+              <a:buFont typeface="Arial" panose="020B0604020202020204" pitchFamily="34" charset="0"/>
+              <a:buChar char="•"/>
+              <a:defRPr sz="1800" kern="1200">
+                <a:solidFill>
+                  <a:schemeClr val="tx1"/>
+                </a:solidFill>
+                <a:latin typeface="+mn-lt"/>
+                <a:ea typeface="+mn-ea"/>
+                <a:cs typeface="+mn-cs"/>
+              </a:defRPr>
+            </a:lvl8pPr>
+            <a:lvl9pPr marL="3886200" indent="-228600" algn="l" defTabSz="914400" rtl="0" eaLnBrk="1" latinLnBrk="0" hangingPunct="1">
+              <a:lnSpc>
+                <a:spcPct val="90000"/>
+              </a:lnSpc>
+              <a:spcBef>
+                <a:spcPts val="500"/>
+              </a:spcBef>
+              <a:buFont typeface="Arial" panose="020B0604020202020204" pitchFamily="34" charset="0"/>
+              <a:buChar char="•"/>
+              <a:defRPr sz="1800" kern="1200">
+                <a:solidFill>
+                  <a:schemeClr val="tx1"/>
+                </a:solidFill>
+                <a:latin typeface="+mn-lt"/>
+                <a:ea typeface="+mn-ea"/>
+                <a:cs typeface="+mn-cs"/>
+              </a:defRPr>
+            </a:lvl9pPr>
+          </a:lstStyle>
+          <a:p>
+            <a:r>
+              <a:rPr lang="en-US" altLang="zh-CN"/>
+              <a:t>1. </a:t>
+            </a:r>
+            <a:r>
+              <a:rPr lang="zh-CN" altLang="en-US"/>
+              <a:t>安装</a:t>
+            </a:r>
+            <a:r>
+              <a:rPr lang="en-US" altLang="zh-CN"/>
+              <a:t>iSlide</a:t>
+            </a:r>
+            <a:r>
+              <a:rPr lang="zh-CN" altLang="en-US"/>
+              <a:t>插件</a:t>
+            </a:r>
+            <a:endParaRPr lang="zh-CN" altLang="en-US" dirty="0"/>
+          </a:p>
+        </p:txBody>
+      </p:sp>
+      <p:sp>
+        <p:nvSpPr>
+          <p:cNvPr id="17" name="内容占位符 2">
+            <a:extLst>
+              <a:ext uri="{FF2B5EF4-FFF2-40B4-BE49-F238E27FC236}">
+                <a16:creationId xmlns:a16="http://schemas.microsoft.com/office/drawing/2014/main" id="{319B7B76-C40A-45F7-A721-7161417982BD}"/>
+              </a:ext>
+            </a:extLst>
+          </p:cNvPr>
+          <p:cNvSpPr txBox="1">
+            <a:spLocks/>
+          </p:cNvSpPr>
+          <p:nvPr/>
+        </p:nvSpPr>
+        <p:spPr>
+          <a:xfrm rot="5400000">
+            <a:off x="11090152" y="4165566"/>
+            <a:ext cx="10515600" cy="4351338"/>
+          </a:xfrm>
+          <a:prstGeom prst="rect">
+            <a:avLst/>
+          </a:prstGeom>
+        </p:spPr>
+        <p:txBody>
+          <a:bodyPr vert="horz" lIns="91440" tIns="45720" rIns="91440" bIns="45720" rtlCol="0">
+            <a:normAutofit/>
+          </a:bodyPr>
+          <a:lstStyle>
+            <a:lvl1pPr marL="228600" indent="-228600" algn="l" defTabSz="914400" rtl="0" eaLnBrk="1" latinLnBrk="0" hangingPunct="1">
+              <a:lnSpc>
+                <a:spcPct val="90000"/>
+              </a:lnSpc>
+              <a:spcBef>
+                <a:spcPts val="1000"/>
+              </a:spcBef>
+              <a:buFont typeface="Arial" panose="020B0604020202020204" pitchFamily="34" charset="0"/>
+              <a:buChar char="•"/>
+              <a:defRPr sz="2800" kern="1200">
+                <a:solidFill>
+                  <a:schemeClr val="tx1"/>
+                </a:solidFill>
+                <a:latin typeface="+mn-lt"/>
+                <a:ea typeface="+mn-ea"/>
+                <a:cs typeface="+mn-cs"/>
+              </a:defRPr>
+            </a:lvl1pPr>
+            <a:lvl2pPr marL="685800" indent="-228600" algn="l" defTabSz="914400" rtl="0" eaLnBrk="1" latinLnBrk="0" hangingPunct="1">
+              <a:lnSpc>
+                <a:spcPct val="90000"/>
+              </a:lnSpc>
+              <a:spcBef>
+                <a:spcPts val="500"/>
+              </a:spcBef>
+              <a:buFont typeface="Arial" panose="020B0604020202020204" pitchFamily="34" charset="0"/>
+              <a:buChar char="•"/>
+              <a:defRPr sz="2400" kern="1200">
+                <a:solidFill>
+                  <a:schemeClr val="tx1"/>
+                </a:solidFill>
+                <a:latin typeface="+mn-lt"/>
+                <a:ea typeface="+mn-ea"/>
+                <a:cs typeface="+mn-cs"/>
+              </a:defRPr>
+            </a:lvl2pPr>
+            <a:lvl3pPr marL="1143000" indent="-228600" algn="l" defTabSz="914400" rtl="0" eaLnBrk="1" latinLnBrk="0" hangingPunct="1">
+              <a:lnSpc>
+                <a:spcPct val="90000"/>
+              </a:lnSpc>
+              <a:spcBef>
+                <a:spcPts val="500"/>
+              </a:spcBef>
+              <a:buFont typeface="Arial" panose="020B0604020202020204" pitchFamily="34" charset="0"/>
+              <a:buChar char="•"/>
+              <a:defRPr sz="2000" kern="1200">
+                <a:solidFill>
+                  <a:schemeClr val="tx1"/>
+                </a:solidFill>
+                <a:latin typeface="+mn-lt"/>
+                <a:ea typeface="+mn-ea"/>
+                <a:cs typeface="+mn-cs"/>
+              </a:defRPr>
+            </a:lvl3pPr>
+            <a:lvl4pPr marL="1600200" indent="-228600" algn="l" defTabSz="914400" rtl="0" eaLnBrk="1" latinLnBrk="0" hangingPunct="1">
+              <a:lnSpc>
+                <a:spcPct val="90000"/>
+              </a:lnSpc>
+              <a:spcBef>
+                <a:spcPts val="500"/>
+              </a:spcBef>
+              <a:buFont typeface="Arial" panose="020B0604020202020204" pitchFamily="34" charset="0"/>
+              <a:buChar char="•"/>
+              <a:defRPr sz="1800" kern="1200">
+                <a:solidFill>
+                  <a:schemeClr val="tx1"/>
+                </a:solidFill>
+                <a:latin typeface="+mn-lt"/>
+                <a:ea typeface="+mn-ea"/>
+                <a:cs typeface="+mn-cs"/>
+              </a:defRPr>
+            </a:lvl4pPr>
+            <a:lvl5pPr marL="2057400" indent="-228600" algn="l" defTabSz="914400" rtl="0" eaLnBrk="1" latinLnBrk="0" hangingPunct="1">
+              <a:lnSpc>
+                <a:spcPct val="90000"/>
+              </a:lnSpc>
+              <a:spcBef>
+                <a:spcPts val="500"/>
+              </a:spcBef>
+              <a:buFont typeface="Arial" panose="020B0604020202020204" pitchFamily="34" charset="0"/>
+              <a:buChar char="•"/>
+              <a:defRPr sz="1800" kern="1200">
+                <a:solidFill>
+                  <a:schemeClr val="tx1"/>
+                </a:solidFill>
+                <a:latin typeface="+mn-lt"/>
+                <a:ea typeface="+mn-ea"/>
+                <a:cs typeface="+mn-cs"/>
+              </a:defRPr>
+            </a:lvl5pPr>
+            <a:lvl6pPr marL="2514600" indent="-228600" algn="l" defTabSz="914400" rtl="0" eaLnBrk="1" latinLnBrk="0" hangingPunct="1">
+              <a:lnSpc>
+                <a:spcPct val="90000"/>
+              </a:lnSpc>
+              <a:spcBef>
+                <a:spcPts val="500"/>
+              </a:spcBef>
+              <a:buFont typeface="Arial" panose="020B0604020202020204" pitchFamily="34" charset="0"/>
+              <a:buChar char="•"/>
+              <a:defRPr sz="1800" kern="1200">
+                <a:solidFill>
+                  <a:schemeClr val="tx1"/>
+                </a:solidFill>
+                <a:latin typeface="+mn-lt"/>
+                <a:ea typeface="+mn-ea"/>
+                <a:cs typeface="+mn-cs"/>
+              </a:defRPr>
+            </a:lvl6pPr>
+            <a:lvl7pPr marL="2971800" indent="-228600" algn="l" defTabSz="914400" rtl="0" eaLnBrk="1" latinLnBrk="0" hangingPunct="1">
+              <a:lnSpc>
+                <a:spcPct val="90000"/>
+              </a:lnSpc>
+              <a:spcBef>
+                <a:spcPts val="500"/>
+              </a:spcBef>
+              <a:buFont typeface="Arial" panose="020B0604020202020204" pitchFamily="34" charset="0"/>
+              <a:buChar char="•"/>
+              <a:defRPr sz="1800" kern="1200">
+                <a:solidFill>
+                  <a:schemeClr val="tx1"/>
+                </a:solidFill>
+                <a:latin typeface="+mn-lt"/>
+                <a:ea typeface="+mn-ea"/>
+                <a:cs typeface="+mn-cs"/>
+              </a:defRPr>
+            </a:lvl7pPr>
+            <a:lvl8pPr marL="3429000" indent="-228600" algn="l" defTabSz="914400" rtl="0" eaLnBrk="1" latinLnBrk="0" hangingPunct="1">
+              <a:lnSpc>
+                <a:spcPct val="90000"/>
+              </a:lnSpc>
+              <a:spcBef>
+                <a:spcPts val="500"/>
+              </a:spcBef>
+              <a:buFont typeface="Arial" panose="020B0604020202020204" pitchFamily="34" charset="0"/>
+              <a:buChar char="•"/>
+              <a:defRPr sz="1800" kern="1200">
+                <a:solidFill>
+                  <a:schemeClr val="tx1"/>
+                </a:solidFill>
+                <a:latin typeface="+mn-lt"/>
+                <a:ea typeface="+mn-ea"/>
+                <a:cs typeface="+mn-cs"/>
+              </a:defRPr>
+            </a:lvl8pPr>
+            <a:lvl9pPr marL="3886200" indent="-228600" algn="l" defTabSz="914400" rtl="0" eaLnBrk="1" latinLnBrk="0" hangingPunct="1">
+              <a:lnSpc>
+                <a:spcPct val="90000"/>
+              </a:lnSpc>
+              <a:spcBef>
+                <a:spcPts val="500"/>
+              </a:spcBef>
+              <a:buFont typeface="Arial" panose="020B0604020202020204" pitchFamily="34" charset="0"/>
+              <a:buChar char="•"/>
+              <a:defRPr sz="1800" kern="1200">
+                <a:solidFill>
+                  <a:schemeClr val="tx1"/>
+                </a:solidFill>
+                <a:latin typeface="+mn-lt"/>
+                <a:ea typeface="+mn-ea"/>
+                <a:cs typeface="+mn-cs"/>
+              </a:defRPr>
+            </a:lvl9pPr>
+          </a:lstStyle>
+          <a:p>
+            <a:r>
+              <a:rPr lang="en-US" altLang="zh-CN"/>
+              <a:t>1. </a:t>
+            </a:r>
+            <a:r>
+              <a:rPr lang="zh-CN" altLang="en-US"/>
+              <a:t>安装</a:t>
+            </a:r>
+            <a:r>
+              <a:rPr lang="en-US" altLang="zh-CN"/>
+              <a:t>iSlide</a:t>
+            </a:r>
+            <a:r>
+              <a:rPr lang="zh-CN" altLang="en-US"/>
+              <a:t>插件</a:t>
+            </a:r>
+            <a:endParaRPr lang="zh-CN" altLang="en-US" dirty="0"/>
+          </a:p>
+        </p:txBody>
+      </p:sp>
+      <p:sp>
+        <p:nvSpPr>
+          <p:cNvPr id="18" name="内容占位符 2">
+            <a:extLst>
+              <a:ext uri="{FF2B5EF4-FFF2-40B4-BE49-F238E27FC236}">
+                <a16:creationId xmlns:a16="http://schemas.microsoft.com/office/drawing/2014/main" id="{2E90728E-E52D-40C9-B13E-A66C4ED30349}"/>
+              </a:ext>
+            </a:extLst>
+          </p:cNvPr>
+          <p:cNvSpPr txBox="1">
+            <a:spLocks/>
+          </p:cNvSpPr>
+          <p:nvPr/>
+        </p:nvSpPr>
+        <p:spPr>
+          <a:xfrm rot="5400000">
+            <a:off x="5400748" y="11299853"/>
+            <a:ext cx="10515600" cy="4351338"/>
+          </a:xfrm>
+          <a:prstGeom prst="rect">
+            <a:avLst/>
+          </a:prstGeom>
+        </p:spPr>
+        <p:txBody>
+          <a:bodyPr vert="horz" lIns="91440" tIns="45720" rIns="91440" bIns="45720" rtlCol="0">
+            <a:normAutofit/>
+          </a:bodyPr>
+          <a:lstStyle>
+            <a:lvl1pPr marL="228600" indent="-228600" algn="l" defTabSz="914400" rtl="0" eaLnBrk="1" latinLnBrk="0" hangingPunct="1">
+              <a:lnSpc>
+                <a:spcPct val="90000"/>
+              </a:lnSpc>
+              <a:spcBef>
+                <a:spcPts val="1000"/>
+              </a:spcBef>
+              <a:buFont typeface="Arial" panose="020B0604020202020204" pitchFamily="34" charset="0"/>
+              <a:buChar char="•"/>
+              <a:defRPr sz="2800" kern="1200">
+                <a:solidFill>
+                  <a:schemeClr val="tx1"/>
+                </a:solidFill>
+                <a:latin typeface="+mn-lt"/>
+                <a:ea typeface="+mn-ea"/>
+                <a:cs typeface="+mn-cs"/>
+              </a:defRPr>
+            </a:lvl1pPr>
+            <a:lvl2pPr marL="685800" indent="-228600" algn="l" defTabSz="914400" rtl="0" eaLnBrk="1" latinLnBrk="0" hangingPunct="1">
+              <a:lnSpc>
+                <a:spcPct val="90000"/>
+              </a:lnSpc>
+              <a:spcBef>
+                <a:spcPts val="500"/>
+              </a:spcBef>
+              <a:buFont typeface="Arial" panose="020B0604020202020204" pitchFamily="34" charset="0"/>
+              <a:buChar char="•"/>
+              <a:defRPr sz="2400" kern="1200">
+                <a:solidFill>
+                  <a:schemeClr val="tx1"/>
+                </a:solidFill>
+                <a:latin typeface="+mn-lt"/>
+                <a:ea typeface="+mn-ea"/>
+                <a:cs typeface="+mn-cs"/>
+              </a:defRPr>
+            </a:lvl2pPr>
+            <a:lvl3pPr marL="1143000" indent="-228600" algn="l" defTabSz="914400" rtl="0" eaLnBrk="1" latinLnBrk="0" hangingPunct="1">
+              <a:lnSpc>
+                <a:spcPct val="90000"/>
+              </a:lnSpc>
+              <a:spcBef>
+                <a:spcPts val="500"/>
+              </a:spcBef>
+              <a:buFont typeface="Arial" panose="020B0604020202020204" pitchFamily="34" charset="0"/>
+              <a:buChar char="•"/>
+              <a:defRPr sz="2000" kern="1200">
+                <a:solidFill>
+                  <a:schemeClr val="tx1"/>
+                </a:solidFill>
+                <a:latin typeface="+mn-lt"/>
+                <a:ea typeface="+mn-ea"/>
+                <a:cs typeface="+mn-cs"/>
+              </a:defRPr>
+            </a:lvl3pPr>
+            <a:lvl4pPr marL="1600200" indent="-228600" algn="l" defTabSz="914400" rtl="0" eaLnBrk="1" latinLnBrk="0" hangingPunct="1">
+              <a:lnSpc>
+                <a:spcPct val="90000"/>
+              </a:lnSpc>
+              <a:spcBef>
+                <a:spcPts val="500"/>
+              </a:spcBef>
+              <a:buFont typeface="Arial" panose="020B0604020202020204" pitchFamily="34" charset="0"/>
+              <a:buChar char="•"/>
+              <a:defRPr sz="1800" kern="1200">
+                <a:solidFill>
+                  <a:schemeClr val="tx1"/>
+                </a:solidFill>
+                <a:latin typeface="+mn-lt"/>
+                <a:ea typeface="+mn-ea"/>
+                <a:cs typeface="+mn-cs"/>
+              </a:defRPr>
+            </a:lvl4pPr>
+            <a:lvl5pPr marL="2057400" indent="-228600" algn="l" defTabSz="914400" rtl="0" eaLnBrk="1" latinLnBrk="0" hangingPunct="1">
+              <a:lnSpc>
+                <a:spcPct val="90000"/>
+              </a:lnSpc>
+              <a:spcBef>
+                <a:spcPts val="500"/>
+              </a:spcBef>
+              <a:buFont typeface="Arial" panose="020B0604020202020204" pitchFamily="34" charset="0"/>
+              <a:buChar char="•"/>
+              <a:defRPr sz="1800" kern="1200">
+                <a:solidFill>
+                  <a:schemeClr val="tx1"/>
+                </a:solidFill>
+                <a:latin typeface="+mn-lt"/>
+                <a:ea typeface="+mn-ea"/>
+                <a:cs typeface="+mn-cs"/>
+              </a:defRPr>
+            </a:lvl5pPr>
+            <a:lvl6pPr marL="2514600" indent="-228600" algn="l" defTabSz="914400" rtl="0" eaLnBrk="1" latinLnBrk="0" hangingPunct="1">
+              <a:lnSpc>
+                <a:spcPct val="90000"/>
+              </a:lnSpc>
+              <a:spcBef>
+                <a:spcPts val="500"/>
+              </a:spcBef>
+              <a:buFont typeface="Arial" panose="020B0604020202020204" pitchFamily="34" charset="0"/>
+              <a:buChar char="•"/>
+              <a:defRPr sz="1800" kern="1200">
+                <a:solidFill>
+                  <a:schemeClr val="tx1"/>
+                </a:solidFill>
+                <a:latin typeface="+mn-lt"/>
+                <a:ea typeface="+mn-ea"/>
+                <a:cs typeface="+mn-cs"/>
+              </a:defRPr>
+            </a:lvl6pPr>
+            <a:lvl7pPr marL="2971800" indent="-228600" algn="l" defTabSz="914400" rtl="0" eaLnBrk="1" latinLnBrk="0" hangingPunct="1">
+              <a:lnSpc>
+                <a:spcPct val="90000"/>
+              </a:lnSpc>
+              <a:spcBef>
+                <a:spcPts val="500"/>
+              </a:spcBef>
+              <a:buFont typeface="Arial" panose="020B0604020202020204" pitchFamily="34" charset="0"/>
+              <a:buChar char="•"/>
+              <a:defRPr sz="1800" kern="1200">
+                <a:solidFill>
+                  <a:schemeClr val="tx1"/>
+                </a:solidFill>
+                <a:latin typeface="+mn-lt"/>
+                <a:ea typeface="+mn-ea"/>
+                <a:cs typeface="+mn-cs"/>
+              </a:defRPr>
+            </a:lvl7pPr>
+            <a:lvl8pPr marL="3429000" indent="-228600" algn="l" defTabSz="914400" rtl="0" eaLnBrk="1" latinLnBrk="0" hangingPunct="1">
+              <a:lnSpc>
+                <a:spcPct val="90000"/>
+              </a:lnSpc>
+              <a:spcBef>
+                <a:spcPts val="500"/>
+              </a:spcBef>
+              <a:buFont typeface="Arial" panose="020B0604020202020204" pitchFamily="34" charset="0"/>
+              <a:buChar char="•"/>
+              <a:defRPr sz="1800" kern="1200">
+                <a:solidFill>
+                  <a:schemeClr val="tx1"/>
+                </a:solidFill>
+                <a:latin typeface="+mn-lt"/>
+                <a:ea typeface="+mn-ea"/>
+                <a:cs typeface="+mn-cs"/>
+              </a:defRPr>
+            </a:lvl8pPr>
+            <a:lvl9pPr marL="3886200" indent="-228600" algn="l" defTabSz="914400" rtl="0" eaLnBrk="1" latinLnBrk="0" hangingPunct="1">
+              <a:lnSpc>
+                <a:spcPct val="90000"/>
+              </a:lnSpc>
+              <a:spcBef>
+                <a:spcPts val="500"/>
+              </a:spcBef>
+              <a:buFont typeface="Arial" panose="020B0604020202020204" pitchFamily="34" charset="0"/>
+              <a:buChar char="•"/>
+              <a:defRPr sz="1800" kern="1200">
+                <a:solidFill>
+                  <a:schemeClr val="tx1"/>
+                </a:solidFill>
+                <a:latin typeface="+mn-lt"/>
+                <a:ea typeface="+mn-ea"/>
+                <a:cs typeface="+mn-cs"/>
+              </a:defRPr>
+            </a:lvl9pPr>
+          </a:lstStyle>
+          <a:p>
+            <a:r>
+              <a:rPr lang="en-US" altLang="zh-CN"/>
+              <a:t>1. </a:t>
+            </a:r>
+            <a:r>
+              <a:rPr lang="zh-CN" altLang="en-US"/>
+              <a:t>安装</a:t>
+            </a:r>
+            <a:r>
+              <a:rPr lang="en-US" altLang="zh-CN"/>
+              <a:t>iSlide</a:t>
+            </a:r>
+            <a:r>
+              <a:rPr lang="zh-CN" altLang="en-US"/>
+              <a:t>插件</a:t>
+            </a:r>
+            <a:endParaRPr lang="zh-CN" altLang="en-US" dirty="0"/>
+          </a:p>
+        </p:txBody>
+      </p:sp>
+      <p:sp>
+        <p:nvSpPr>
+          <p:cNvPr id="19" name="内容占位符 2">
+            <a:extLst>
+              <a:ext uri="{FF2B5EF4-FFF2-40B4-BE49-F238E27FC236}">
+                <a16:creationId xmlns:a16="http://schemas.microsoft.com/office/drawing/2014/main" id="{C5B62515-7E9F-40D2-BD28-224B71CB6250}"/>
+              </a:ext>
+            </a:extLst>
+          </p:cNvPr>
+          <p:cNvSpPr txBox="1">
+            <a:spLocks/>
+          </p:cNvSpPr>
+          <p:nvPr/>
+        </p:nvSpPr>
+        <p:spPr>
+          <a:xfrm rot="5400000">
+            <a:off x="-3724348" y="11299853"/>
+            <a:ext cx="10515600" cy="4351338"/>
+          </a:xfrm>
+          <a:prstGeom prst="rect">
+            <a:avLst/>
+          </a:prstGeom>
+        </p:spPr>
+        <p:txBody>
+          <a:bodyPr vert="horz" lIns="91440" tIns="45720" rIns="91440" bIns="45720" rtlCol="0">
+            <a:normAutofit/>
+          </a:bodyPr>
+          <a:lstStyle>
+            <a:lvl1pPr marL="228600" indent="-228600" algn="l" defTabSz="914400" rtl="0" eaLnBrk="1" latinLnBrk="0" hangingPunct="1">
+              <a:lnSpc>
+                <a:spcPct val="90000"/>
+              </a:lnSpc>
+              <a:spcBef>
+                <a:spcPts val="1000"/>
+              </a:spcBef>
+              <a:buFont typeface="Arial" panose="020B0604020202020204" pitchFamily="34" charset="0"/>
+              <a:buChar char="•"/>
+              <a:defRPr sz="2800" kern="1200">
+                <a:solidFill>
+                  <a:schemeClr val="tx1"/>
+                </a:solidFill>
+                <a:latin typeface="+mn-lt"/>
+                <a:ea typeface="+mn-ea"/>
+                <a:cs typeface="+mn-cs"/>
+              </a:defRPr>
+            </a:lvl1pPr>
+            <a:lvl2pPr marL="685800" indent="-228600" algn="l" defTabSz="914400" rtl="0" eaLnBrk="1" latinLnBrk="0" hangingPunct="1">
+              <a:lnSpc>
+                <a:spcPct val="90000"/>
+              </a:lnSpc>
+              <a:spcBef>
+                <a:spcPts val="500"/>
+              </a:spcBef>
+              <a:buFont typeface="Arial" panose="020B0604020202020204" pitchFamily="34" charset="0"/>
+              <a:buChar char="•"/>
+              <a:defRPr sz="2400" kern="1200">
+                <a:solidFill>
+                  <a:schemeClr val="tx1"/>
+                </a:solidFill>
+                <a:latin typeface="+mn-lt"/>
+                <a:ea typeface="+mn-ea"/>
+                <a:cs typeface="+mn-cs"/>
+              </a:defRPr>
+            </a:lvl2pPr>
+            <a:lvl3pPr marL="1143000" indent="-228600" algn="l" defTabSz="914400" rtl="0" eaLnBrk="1" latinLnBrk="0" hangingPunct="1">
+              <a:lnSpc>
+                <a:spcPct val="90000"/>
+              </a:lnSpc>
+              <a:spcBef>
+                <a:spcPts val="500"/>
+              </a:spcBef>
+              <a:buFont typeface="Arial" panose="020B0604020202020204" pitchFamily="34" charset="0"/>
+              <a:buChar char="•"/>
+              <a:defRPr sz="2000" kern="1200">
+                <a:solidFill>
+                  <a:schemeClr val="tx1"/>
+                </a:solidFill>
+                <a:latin typeface="+mn-lt"/>
+                <a:ea typeface="+mn-ea"/>
+                <a:cs typeface="+mn-cs"/>
+              </a:defRPr>
+            </a:lvl3pPr>
+            <a:lvl4pPr marL="1600200" indent="-228600" algn="l" defTabSz="914400" rtl="0" eaLnBrk="1" latinLnBrk="0" hangingPunct="1">
+              <a:lnSpc>
+                <a:spcPct val="90000"/>
+              </a:lnSpc>
+              <a:spcBef>
+                <a:spcPts val="500"/>
+              </a:spcBef>
+              <a:buFont typeface="Arial" panose="020B0604020202020204" pitchFamily="34" charset="0"/>
+              <a:buChar char="•"/>
+              <a:defRPr sz="1800" kern="1200">
+                <a:solidFill>
+                  <a:schemeClr val="tx1"/>
+                </a:solidFill>
+                <a:latin typeface="+mn-lt"/>
+                <a:ea typeface="+mn-ea"/>
+                <a:cs typeface="+mn-cs"/>
+              </a:defRPr>
+            </a:lvl4pPr>
+            <a:lvl5pPr marL="2057400" indent="-228600" algn="l" defTabSz="914400" rtl="0" eaLnBrk="1" latinLnBrk="0" hangingPunct="1">
+              <a:lnSpc>
+                <a:spcPct val="90000"/>
+              </a:lnSpc>
+              <a:spcBef>
+                <a:spcPts val="500"/>
+              </a:spcBef>
+              <a:buFont typeface="Arial" panose="020B0604020202020204" pitchFamily="34" charset="0"/>
+              <a:buChar char="•"/>
+              <a:defRPr sz="1800" kern="1200">
+                <a:solidFill>
+                  <a:schemeClr val="tx1"/>
+                </a:solidFill>
+                <a:latin typeface="+mn-lt"/>
+                <a:ea typeface="+mn-ea"/>
+                <a:cs typeface="+mn-cs"/>
+              </a:defRPr>
+            </a:lvl5pPr>
+            <a:lvl6pPr marL="2514600" indent="-228600" algn="l" defTabSz="914400" rtl="0" eaLnBrk="1" latinLnBrk="0" hangingPunct="1">
+              <a:lnSpc>
+                <a:spcPct val="90000"/>
+              </a:lnSpc>
+              <a:spcBef>
+                <a:spcPts val="500"/>
+              </a:spcBef>
+              <a:buFont typeface="Arial" panose="020B0604020202020204" pitchFamily="34" charset="0"/>
+              <a:buChar char="•"/>
+              <a:defRPr sz="1800" kern="1200">
+                <a:solidFill>
+                  <a:schemeClr val="tx1"/>
+                </a:solidFill>
+                <a:latin typeface="+mn-lt"/>
+                <a:ea typeface="+mn-ea"/>
+                <a:cs typeface="+mn-cs"/>
+              </a:defRPr>
+            </a:lvl6pPr>
+            <a:lvl7pPr marL="2971800" indent="-228600" algn="l" defTabSz="914400" rtl="0" eaLnBrk="1" latinLnBrk="0" hangingPunct="1">
+              <a:lnSpc>
+                <a:spcPct val="90000"/>
+              </a:lnSpc>
+              <a:spcBef>
+                <a:spcPts val="500"/>
+              </a:spcBef>
+              <a:buFont typeface="Arial" panose="020B0604020202020204" pitchFamily="34" charset="0"/>
+              <a:buChar char="•"/>
+              <a:defRPr sz="1800" kern="1200">
+                <a:solidFill>
+                  <a:schemeClr val="tx1"/>
+                </a:solidFill>
+                <a:latin typeface="+mn-lt"/>
+                <a:ea typeface="+mn-ea"/>
+                <a:cs typeface="+mn-cs"/>
+              </a:defRPr>
+            </a:lvl7pPr>
+            <a:lvl8pPr marL="3429000" indent="-228600" algn="l" defTabSz="914400" rtl="0" eaLnBrk="1" latinLnBrk="0" hangingPunct="1">
+              <a:lnSpc>
+                <a:spcPct val="90000"/>
+              </a:lnSpc>
+              <a:spcBef>
+                <a:spcPts val="500"/>
+              </a:spcBef>
+              <a:buFont typeface="Arial" panose="020B0604020202020204" pitchFamily="34" charset="0"/>
+              <a:buChar char="•"/>
+              <a:defRPr sz="1800" kern="1200">
+                <a:solidFill>
+                  <a:schemeClr val="tx1"/>
+                </a:solidFill>
+                <a:latin typeface="+mn-lt"/>
+                <a:ea typeface="+mn-ea"/>
+                <a:cs typeface="+mn-cs"/>
+              </a:defRPr>
+            </a:lvl8pPr>
+            <a:lvl9pPr marL="3886200" indent="-228600" algn="l" defTabSz="914400" rtl="0" eaLnBrk="1" latinLnBrk="0" hangingPunct="1">
+              <a:lnSpc>
+                <a:spcPct val="90000"/>
+              </a:lnSpc>
+              <a:spcBef>
+                <a:spcPts val="500"/>
+              </a:spcBef>
+              <a:buFont typeface="Arial" panose="020B0604020202020204" pitchFamily="34" charset="0"/>
+              <a:buChar char="•"/>
+              <a:defRPr sz="1800" kern="1200">
+                <a:solidFill>
+                  <a:schemeClr val="tx1"/>
+                </a:solidFill>
+                <a:latin typeface="+mn-lt"/>
+                <a:ea typeface="+mn-ea"/>
+                <a:cs typeface="+mn-cs"/>
+              </a:defRPr>
+            </a:lvl9pPr>
+          </a:lstStyle>
+          <a:p>
+            <a:r>
+              <a:rPr lang="en-US" altLang="zh-CN" dirty="0"/>
+              <a:t>1. </a:t>
+            </a:r>
+            <a:r>
+              <a:rPr lang="zh-CN" altLang="en-US" dirty="0"/>
+              <a:t>安装</a:t>
+            </a:r>
+            <a:r>
+              <a:rPr lang="en-US" altLang="zh-CN" dirty="0" err="1"/>
+              <a:t>iSlide</a:t>
+            </a:r>
+            <a:r>
+              <a:rPr lang="zh-CN" altLang="en-US" dirty="0"/>
+              <a:t>插件</a:t>
+            </a:r>
+          </a:p>
+        </p:txBody>
+      </p:sp>
+      <p:sp>
+        <p:nvSpPr>
+          <p:cNvPr id="20" name="内容占位符 2">
+            <a:extLst>
+              <a:ext uri="{FF2B5EF4-FFF2-40B4-BE49-F238E27FC236}">
+                <a16:creationId xmlns:a16="http://schemas.microsoft.com/office/drawing/2014/main" id="{E03593A4-8686-4622-809B-FD2B9FD17E22}"/>
+              </a:ext>
+            </a:extLst>
+          </p:cNvPr>
+          <p:cNvSpPr txBox="1">
+            <a:spLocks/>
+          </p:cNvSpPr>
+          <p:nvPr/>
+        </p:nvSpPr>
+        <p:spPr>
+          <a:xfrm rot="5400000">
+            <a:off x="-9413752" y="4165566"/>
+            <a:ext cx="10515600" cy="4351338"/>
+          </a:xfrm>
+          <a:prstGeom prst="rect">
+            <a:avLst/>
+          </a:prstGeom>
+        </p:spPr>
+        <p:txBody>
+          <a:bodyPr vert="horz" lIns="91440" tIns="45720" rIns="91440" bIns="45720" rtlCol="0">
+            <a:normAutofit/>
+          </a:bodyPr>
+          <a:lstStyle>
+            <a:lvl1pPr marL="228600" indent="-228600" algn="l" defTabSz="914400" rtl="0" eaLnBrk="1" latinLnBrk="0" hangingPunct="1">
+              <a:lnSpc>
+                <a:spcPct val="90000"/>
+              </a:lnSpc>
+              <a:spcBef>
+                <a:spcPts val="1000"/>
+              </a:spcBef>
+              <a:buFont typeface="Arial" panose="020B0604020202020204" pitchFamily="34" charset="0"/>
+              <a:buChar char="•"/>
+              <a:defRPr sz="2800" kern="1200">
+                <a:solidFill>
+                  <a:schemeClr val="tx1"/>
+                </a:solidFill>
+                <a:latin typeface="+mn-lt"/>
+                <a:ea typeface="+mn-ea"/>
+                <a:cs typeface="+mn-cs"/>
+              </a:defRPr>
+            </a:lvl1pPr>
+            <a:lvl2pPr marL="685800" indent="-228600" algn="l" defTabSz="914400" rtl="0" eaLnBrk="1" latinLnBrk="0" hangingPunct="1">
+              <a:lnSpc>
+                <a:spcPct val="90000"/>
+              </a:lnSpc>
+              <a:spcBef>
+                <a:spcPts val="500"/>
+              </a:spcBef>
+              <a:buFont typeface="Arial" panose="020B0604020202020204" pitchFamily="34" charset="0"/>
+              <a:buChar char="•"/>
+              <a:defRPr sz="2400" kern="1200">
+                <a:solidFill>
+                  <a:schemeClr val="tx1"/>
+                </a:solidFill>
+                <a:latin typeface="+mn-lt"/>
+                <a:ea typeface="+mn-ea"/>
+                <a:cs typeface="+mn-cs"/>
+              </a:defRPr>
+            </a:lvl2pPr>
+            <a:lvl3pPr marL="1143000" indent="-228600" algn="l" defTabSz="914400" rtl="0" eaLnBrk="1" latinLnBrk="0" hangingPunct="1">
+              <a:lnSpc>
+                <a:spcPct val="90000"/>
+              </a:lnSpc>
+              <a:spcBef>
+                <a:spcPts val="500"/>
+              </a:spcBef>
+              <a:buFont typeface="Arial" panose="020B0604020202020204" pitchFamily="34" charset="0"/>
+              <a:buChar char="•"/>
+              <a:defRPr sz="2000" kern="1200">
+                <a:solidFill>
+                  <a:schemeClr val="tx1"/>
+                </a:solidFill>
+                <a:latin typeface="+mn-lt"/>
+                <a:ea typeface="+mn-ea"/>
+                <a:cs typeface="+mn-cs"/>
+              </a:defRPr>
+            </a:lvl3pPr>
+            <a:lvl4pPr marL="1600200" indent="-228600" algn="l" defTabSz="914400" rtl="0" eaLnBrk="1" latinLnBrk="0" hangingPunct="1">
+              <a:lnSpc>
+                <a:spcPct val="90000"/>
+              </a:lnSpc>
+              <a:spcBef>
+                <a:spcPts val="500"/>
+              </a:spcBef>
+              <a:buFont typeface="Arial" panose="020B0604020202020204" pitchFamily="34" charset="0"/>
+              <a:buChar char="•"/>
+              <a:defRPr sz="1800" kern="1200">
+                <a:solidFill>
+                  <a:schemeClr val="tx1"/>
+                </a:solidFill>
+                <a:latin typeface="+mn-lt"/>
+                <a:ea typeface="+mn-ea"/>
+                <a:cs typeface="+mn-cs"/>
+              </a:defRPr>
+            </a:lvl4pPr>
+            <a:lvl5pPr marL="2057400" indent="-228600" algn="l" defTabSz="914400" rtl="0" eaLnBrk="1" latinLnBrk="0" hangingPunct="1">
+              <a:lnSpc>
+                <a:spcPct val="90000"/>
+              </a:lnSpc>
+              <a:spcBef>
+                <a:spcPts val="500"/>
+              </a:spcBef>
+              <a:buFont typeface="Arial" panose="020B0604020202020204" pitchFamily="34" charset="0"/>
+              <a:buChar char="•"/>
+              <a:defRPr sz="1800" kern="1200">
+                <a:solidFill>
+                  <a:schemeClr val="tx1"/>
+                </a:solidFill>
+                <a:latin typeface="+mn-lt"/>
+                <a:ea typeface="+mn-ea"/>
+                <a:cs typeface="+mn-cs"/>
+              </a:defRPr>
+            </a:lvl5pPr>
+            <a:lvl6pPr marL="2514600" indent="-228600" algn="l" defTabSz="914400" rtl="0" eaLnBrk="1" latinLnBrk="0" hangingPunct="1">
+              <a:lnSpc>
+                <a:spcPct val="90000"/>
+              </a:lnSpc>
+              <a:spcBef>
+                <a:spcPts val="500"/>
+              </a:spcBef>
+              <a:buFont typeface="Arial" panose="020B0604020202020204" pitchFamily="34" charset="0"/>
+              <a:buChar char="•"/>
+              <a:defRPr sz="1800" kern="1200">
+                <a:solidFill>
+                  <a:schemeClr val="tx1"/>
+                </a:solidFill>
+                <a:latin typeface="+mn-lt"/>
+                <a:ea typeface="+mn-ea"/>
+                <a:cs typeface="+mn-cs"/>
+              </a:defRPr>
+            </a:lvl6pPr>
+            <a:lvl7pPr marL="2971800" indent="-228600" algn="l" defTabSz="914400" rtl="0" eaLnBrk="1" latinLnBrk="0" hangingPunct="1">
+              <a:lnSpc>
+                <a:spcPct val="90000"/>
+              </a:lnSpc>
+              <a:spcBef>
+                <a:spcPts val="500"/>
+              </a:spcBef>
+              <a:buFont typeface="Arial" panose="020B0604020202020204" pitchFamily="34" charset="0"/>
+              <a:buChar char="•"/>
+              <a:defRPr sz="1800" kern="1200">
+                <a:solidFill>
+                  <a:schemeClr val="tx1"/>
+                </a:solidFill>
+                <a:latin typeface="+mn-lt"/>
+                <a:ea typeface="+mn-ea"/>
+                <a:cs typeface="+mn-cs"/>
+              </a:defRPr>
+            </a:lvl7pPr>
+            <a:lvl8pPr marL="3429000" indent="-228600" algn="l" defTabSz="914400" rtl="0" eaLnBrk="1" latinLnBrk="0" hangingPunct="1">
+              <a:lnSpc>
+                <a:spcPct val="90000"/>
+              </a:lnSpc>
+              <a:spcBef>
+                <a:spcPts val="500"/>
+              </a:spcBef>
+              <a:buFont typeface="Arial" panose="020B0604020202020204" pitchFamily="34" charset="0"/>
+              <a:buChar char="•"/>
+              <a:defRPr sz="1800" kern="1200">
+                <a:solidFill>
+                  <a:schemeClr val="tx1"/>
+                </a:solidFill>
+                <a:latin typeface="+mn-lt"/>
+                <a:ea typeface="+mn-ea"/>
+                <a:cs typeface="+mn-cs"/>
+              </a:defRPr>
+            </a:lvl8pPr>
+            <a:lvl9pPr marL="3886200" indent="-228600" algn="l" defTabSz="914400" rtl="0" eaLnBrk="1" latinLnBrk="0" hangingPunct="1">
+              <a:lnSpc>
+                <a:spcPct val="90000"/>
+              </a:lnSpc>
+              <a:spcBef>
+                <a:spcPts val="500"/>
+              </a:spcBef>
+              <a:buFont typeface="Arial" panose="020B0604020202020204" pitchFamily="34" charset="0"/>
+              <a:buChar char="•"/>
+              <a:defRPr sz="1800" kern="1200">
+                <a:solidFill>
+                  <a:schemeClr val="tx1"/>
+                </a:solidFill>
+                <a:latin typeface="+mn-lt"/>
+                <a:ea typeface="+mn-ea"/>
+                <a:cs typeface="+mn-cs"/>
+              </a:defRPr>
+            </a:lvl9pPr>
+          </a:lstStyle>
+          <a:p>
+            <a:r>
+              <a:rPr lang="en-US" altLang="zh-CN"/>
+              <a:t>1. </a:t>
+            </a:r>
+            <a:r>
+              <a:rPr lang="zh-CN" altLang="en-US"/>
+              <a:t>安装</a:t>
+            </a:r>
+            <a:r>
+              <a:rPr lang="en-US" altLang="zh-CN"/>
+              <a:t>iSlide</a:t>
+            </a:r>
+            <a:r>
+              <a:rPr lang="zh-CN" altLang="en-US"/>
+              <a:t>插件</a:t>
+            </a:r>
+            <a:endParaRPr lang="zh-CN" altLang="en-US" dirty="0"/>
+          </a:p>
+        </p:txBody>
+      </p:sp>
+      <p:sp>
+        <p:nvSpPr>
+          <p:cNvPr id="21" name="内容占位符 2">
+            <a:extLst>
+              <a:ext uri="{FF2B5EF4-FFF2-40B4-BE49-F238E27FC236}">
+                <a16:creationId xmlns:a16="http://schemas.microsoft.com/office/drawing/2014/main" id="{94B5CA80-1172-429C-8034-FDD4BBA95217}"/>
+              </a:ext>
+            </a:extLst>
+          </p:cNvPr>
+          <p:cNvSpPr txBox="1">
+            <a:spLocks/>
+          </p:cNvSpPr>
+          <p:nvPr/>
+        </p:nvSpPr>
+        <p:spPr>
+          <a:xfrm rot="5400000">
+            <a:off x="-7383227" y="-4730744"/>
+            <a:ext cx="10515600" cy="4351338"/>
+          </a:xfrm>
+          <a:prstGeom prst="rect">
+            <a:avLst/>
+          </a:prstGeom>
+        </p:spPr>
+        <p:txBody>
+          <a:bodyPr vert="horz" lIns="91440" tIns="45720" rIns="91440" bIns="45720" rtlCol="0">
+            <a:normAutofit/>
+          </a:bodyPr>
+          <a:lstStyle>
+            <a:lvl1pPr marL="228600" indent="-228600" algn="l" defTabSz="914400" rtl="0" eaLnBrk="1" latinLnBrk="0" hangingPunct="1">
+              <a:lnSpc>
+                <a:spcPct val="90000"/>
+              </a:lnSpc>
+              <a:spcBef>
+                <a:spcPts val="1000"/>
+              </a:spcBef>
+              <a:buFont typeface="Arial" panose="020B0604020202020204" pitchFamily="34" charset="0"/>
+              <a:buChar char="•"/>
+              <a:defRPr sz="2800" kern="1200">
+                <a:solidFill>
+                  <a:schemeClr val="tx1"/>
+                </a:solidFill>
+                <a:latin typeface="+mn-lt"/>
+                <a:ea typeface="+mn-ea"/>
+                <a:cs typeface="+mn-cs"/>
+              </a:defRPr>
+            </a:lvl1pPr>
+            <a:lvl2pPr marL="685800" indent="-228600" algn="l" defTabSz="914400" rtl="0" eaLnBrk="1" latinLnBrk="0" hangingPunct="1">
+              <a:lnSpc>
+                <a:spcPct val="90000"/>
+              </a:lnSpc>
+              <a:spcBef>
+                <a:spcPts val="500"/>
+              </a:spcBef>
+              <a:buFont typeface="Arial" panose="020B0604020202020204" pitchFamily="34" charset="0"/>
+              <a:buChar char="•"/>
+              <a:defRPr sz="2400" kern="1200">
+                <a:solidFill>
+                  <a:schemeClr val="tx1"/>
+                </a:solidFill>
+                <a:latin typeface="+mn-lt"/>
+                <a:ea typeface="+mn-ea"/>
+                <a:cs typeface="+mn-cs"/>
+              </a:defRPr>
+            </a:lvl2pPr>
+            <a:lvl3pPr marL="1143000" indent="-228600" algn="l" defTabSz="914400" rtl="0" eaLnBrk="1" latinLnBrk="0" hangingPunct="1">
+              <a:lnSpc>
+                <a:spcPct val="90000"/>
+              </a:lnSpc>
+              <a:spcBef>
+                <a:spcPts val="500"/>
+              </a:spcBef>
+              <a:buFont typeface="Arial" panose="020B0604020202020204" pitchFamily="34" charset="0"/>
+              <a:buChar char="•"/>
+              <a:defRPr sz="2000" kern="1200">
+                <a:solidFill>
+                  <a:schemeClr val="tx1"/>
+                </a:solidFill>
+                <a:latin typeface="+mn-lt"/>
+                <a:ea typeface="+mn-ea"/>
+                <a:cs typeface="+mn-cs"/>
+              </a:defRPr>
+            </a:lvl3pPr>
+            <a:lvl4pPr marL="1600200" indent="-228600" algn="l" defTabSz="914400" rtl="0" eaLnBrk="1" latinLnBrk="0" hangingPunct="1">
+              <a:lnSpc>
+                <a:spcPct val="90000"/>
+              </a:lnSpc>
+              <a:spcBef>
+                <a:spcPts val="500"/>
+              </a:spcBef>
+              <a:buFont typeface="Arial" panose="020B0604020202020204" pitchFamily="34" charset="0"/>
+              <a:buChar char="•"/>
+              <a:defRPr sz="1800" kern="1200">
+                <a:solidFill>
+                  <a:schemeClr val="tx1"/>
+                </a:solidFill>
+                <a:latin typeface="+mn-lt"/>
+                <a:ea typeface="+mn-ea"/>
+                <a:cs typeface="+mn-cs"/>
+              </a:defRPr>
+            </a:lvl4pPr>
+            <a:lvl5pPr marL="2057400" indent="-228600" algn="l" defTabSz="914400" rtl="0" eaLnBrk="1" latinLnBrk="0" hangingPunct="1">
+              <a:lnSpc>
+                <a:spcPct val="90000"/>
+              </a:lnSpc>
+              <a:spcBef>
+                <a:spcPts val="500"/>
+              </a:spcBef>
+              <a:buFont typeface="Arial" panose="020B0604020202020204" pitchFamily="34" charset="0"/>
+              <a:buChar char="•"/>
+              <a:defRPr sz="1800" kern="1200">
+                <a:solidFill>
+                  <a:schemeClr val="tx1"/>
+                </a:solidFill>
+                <a:latin typeface="+mn-lt"/>
+                <a:ea typeface="+mn-ea"/>
+                <a:cs typeface="+mn-cs"/>
+              </a:defRPr>
+            </a:lvl5pPr>
+            <a:lvl6pPr marL="2514600" indent="-228600" algn="l" defTabSz="914400" rtl="0" eaLnBrk="1" latinLnBrk="0" hangingPunct="1">
+              <a:lnSpc>
+                <a:spcPct val="90000"/>
+              </a:lnSpc>
+              <a:spcBef>
+                <a:spcPts val="500"/>
+              </a:spcBef>
+              <a:buFont typeface="Arial" panose="020B0604020202020204" pitchFamily="34" charset="0"/>
+              <a:buChar char="•"/>
+              <a:defRPr sz="1800" kern="1200">
+                <a:solidFill>
+                  <a:schemeClr val="tx1"/>
+                </a:solidFill>
+                <a:latin typeface="+mn-lt"/>
+                <a:ea typeface="+mn-ea"/>
+                <a:cs typeface="+mn-cs"/>
+              </a:defRPr>
+            </a:lvl6pPr>
+            <a:lvl7pPr marL="2971800" indent="-228600" algn="l" defTabSz="914400" rtl="0" eaLnBrk="1" latinLnBrk="0" hangingPunct="1">
+              <a:lnSpc>
+                <a:spcPct val="90000"/>
+              </a:lnSpc>
+              <a:spcBef>
+                <a:spcPts val="500"/>
+              </a:spcBef>
+              <a:buFont typeface="Arial" panose="020B0604020202020204" pitchFamily="34" charset="0"/>
+              <a:buChar char="•"/>
+              <a:defRPr sz="1800" kern="1200">
+                <a:solidFill>
+                  <a:schemeClr val="tx1"/>
+                </a:solidFill>
+                <a:latin typeface="+mn-lt"/>
+                <a:ea typeface="+mn-ea"/>
+                <a:cs typeface="+mn-cs"/>
+              </a:defRPr>
+            </a:lvl7pPr>
+            <a:lvl8pPr marL="3429000" indent="-228600" algn="l" defTabSz="914400" rtl="0" eaLnBrk="1" latinLnBrk="0" hangingPunct="1">
+              <a:lnSpc>
+                <a:spcPct val="90000"/>
+              </a:lnSpc>
+              <a:spcBef>
+                <a:spcPts val="500"/>
+              </a:spcBef>
+              <a:buFont typeface="Arial" panose="020B0604020202020204" pitchFamily="34" charset="0"/>
+              <a:buChar char="•"/>
+              <a:defRPr sz="1800" kern="1200">
+                <a:solidFill>
+                  <a:schemeClr val="tx1"/>
+                </a:solidFill>
+                <a:latin typeface="+mn-lt"/>
+                <a:ea typeface="+mn-ea"/>
+                <a:cs typeface="+mn-cs"/>
+              </a:defRPr>
+            </a:lvl8pPr>
+            <a:lvl9pPr marL="3886200" indent="-228600" algn="l" defTabSz="914400" rtl="0" eaLnBrk="1" latinLnBrk="0" hangingPunct="1">
+              <a:lnSpc>
+                <a:spcPct val="90000"/>
+              </a:lnSpc>
+              <a:spcBef>
+                <a:spcPts val="500"/>
+              </a:spcBef>
+              <a:buFont typeface="Arial" panose="020B0604020202020204" pitchFamily="34" charset="0"/>
+              <a:buChar char="•"/>
+              <a:defRPr sz="1800" kern="1200">
+                <a:solidFill>
+                  <a:schemeClr val="tx1"/>
+                </a:solidFill>
+                <a:latin typeface="+mn-lt"/>
+                <a:ea typeface="+mn-ea"/>
+                <a:cs typeface="+mn-cs"/>
+              </a:defRPr>
+            </a:lvl9pPr>
+          </a:lstStyle>
+          <a:p>
+            <a:r>
+              <a:rPr lang="en-US" altLang="zh-CN"/>
+              <a:t>1. </a:t>
+            </a:r>
+            <a:r>
+              <a:rPr lang="zh-CN" altLang="en-US"/>
+              <a:t>安装</a:t>
+            </a:r>
+            <a:r>
+              <a:rPr lang="en-US" altLang="zh-CN"/>
+              <a:t>iSlide</a:t>
+            </a:r>
+            <a:r>
+              <a:rPr lang="zh-CN" altLang="en-US"/>
+              <a:t>插件</a:t>
+            </a:r>
+            <a:endParaRPr lang="zh-CN" altLang="en-US" dirty="0"/>
+          </a:p>
+        </p:txBody>
+      </p:sp>
+      <p:grpSp>
+        <p:nvGrpSpPr>
+          <p:cNvPr id="5" name="组合 4">
+            <a:extLst>
+              <a:ext uri="{FF2B5EF4-FFF2-40B4-BE49-F238E27FC236}">
+                <a16:creationId xmlns:a16="http://schemas.microsoft.com/office/drawing/2014/main" id="{30D5AE51-37E3-49FB-BF4E-820427FCDD7C}"/>
+              </a:ext>
+            </a:extLst>
+          </p:cNvPr>
+          <p:cNvGrpSpPr/>
+          <p:nvPr/>
+        </p:nvGrpSpPr>
+        <p:grpSpPr>
+          <a:xfrm>
+            <a:off x="4553917" y="3044490"/>
+            <a:ext cx="2886942" cy="2886942"/>
+            <a:chOff x="4553917" y="3044490"/>
+            <a:chExt cx="2886942" cy="2886942"/>
+          </a:xfrm>
+        </p:grpSpPr>
+        <p:cxnSp>
+          <p:nvCxnSpPr>
+            <p:cNvPr id="23" name="直接连接符 22">
+              <a:extLst>
+                <a:ext uri="{FF2B5EF4-FFF2-40B4-BE49-F238E27FC236}">
+                  <a16:creationId xmlns:a16="http://schemas.microsoft.com/office/drawing/2014/main" id="{CD1CCA02-91DE-45EF-BB1C-B799A301D3E7}"/>
+                </a:ext>
+              </a:extLst>
+            </p:cNvPr>
+            <p:cNvCxnSpPr>
+              <a:cxnSpLocks/>
+            </p:cNvCxnSpPr>
+            <p:nvPr/>
+          </p:nvCxnSpPr>
+          <p:spPr>
+            <a:xfrm rot="60000">
+              <a:off x="6016237" y="3044490"/>
+              <a:ext cx="0" cy="727271"/>
+            </a:xfrm>
+            <a:prstGeom prst="line">
+              <a:avLst/>
+            </a:prstGeom>
+            <a:ln/>
+          </p:spPr>
+          <p:style>
+            <a:lnRef idx="3">
+              <a:schemeClr val="dk1"/>
+            </a:lnRef>
+            <a:fillRef idx="0">
+              <a:schemeClr val="dk1"/>
+            </a:fillRef>
+            <a:effectRef idx="2">
+              <a:schemeClr val="dk1"/>
+            </a:effectRef>
+            <a:fontRef idx="minor">
+              <a:schemeClr val="tx1"/>
+            </a:fontRef>
+          </p:style>
+        </p:cxnSp>
+        <p:cxnSp>
+          <p:nvCxnSpPr>
+            <p:cNvPr id="24" name="直接连接符 23">
+              <a:extLst>
+                <a:ext uri="{FF2B5EF4-FFF2-40B4-BE49-F238E27FC236}">
+                  <a16:creationId xmlns:a16="http://schemas.microsoft.com/office/drawing/2014/main" id="{2214C67F-57B3-4DE8-A6B4-35653D1B1922}"/>
+                </a:ext>
+              </a:extLst>
+            </p:cNvPr>
+            <p:cNvCxnSpPr>
+              <a:cxnSpLocks/>
+            </p:cNvCxnSpPr>
+            <p:nvPr/>
+          </p:nvCxnSpPr>
+          <p:spPr>
+            <a:xfrm rot="2760000">
+              <a:off x="6774275" y="3374094"/>
+              <a:ext cx="0" cy="727271"/>
+            </a:xfrm>
+            <a:prstGeom prst="line">
+              <a:avLst/>
+            </a:prstGeom>
+            <a:ln/>
+          </p:spPr>
+          <p:style>
+            <a:lnRef idx="3">
+              <a:schemeClr val="dk1"/>
+            </a:lnRef>
+            <a:fillRef idx="0">
+              <a:schemeClr val="dk1"/>
+            </a:fillRef>
+            <a:effectRef idx="2">
+              <a:schemeClr val="dk1"/>
+            </a:effectRef>
+            <a:fontRef idx="minor">
+              <a:schemeClr val="tx1"/>
+            </a:fontRef>
+          </p:style>
+        </p:cxnSp>
+        <p:cxnSp>
+          <p:nvCxnSpPr>
+            <p:cNvPr id="25" name="直接连接符 24">
+              <a:extLst>
+                <a:ext uri="{FF2B5EF4-FFF2-40B4-BE49-F238E27FC236}">
+                  <a16:creationId xmlns:a16="http://schemas.microsoft.com/office/drawing/2014/main" id="{7B5C2A46-6AB6-456D-92A7-A812F0DA88B3}"/>
+                </a:ext>
+              </a:extLst>
+            </p:cNvPr>
+            <p:cNvCxnSpPr>
+              <a:cxnSpLocks/>
+            </p:cNvCxnSpPr>
+            <p:nvPr/>
+          </p:nvCxnSpPr>
+          <p:spPr>
+            <a:xfrm rot="5460000">
+              <a:off x="7077224" y="4143173"/>
+              <a:ext cx="0" cy="727271"/>
+            </a:xfrm>
+            <a:prstGeom prst="line">
+              <a:avLst/>
+            </a:prstGeom>
+            <a:ln/>
+          </p:spPr>
+          <p:style>
+            <a:lnRef idx="3">
+              <a:schemeClr val="dk1"/>
+            </a:lnRef>
+            <a:fillRef idx="0">
+              <a:schemeClr val="dk1"/>
+            </a:fillRef>
+            <a:effectRef idx="2">
+              <a:schemeClr val="dk1"/>
+            </a:effectRef>
+            <a:fontRef idx="minor">
+              <a:schemeClr val="tx1"/>
+            </a:fontRef>
+          </p:style>
+        </p:cxnSp>
+        <p:cxnSp>
+          <p:nvCxnSpPr>
+            <p:cNvPr id="26" name="直接连接符 25">
+              <a:extLst>
+                <a:ext uri="{FF2B5EF4-FFF2-40B4-BE49-F238E27FC236}">
+                  <a16:creationId xmlns:a16="http://schemas.microsoft.com/office/drawing/2014/main" id="{92F06542-D18F-468A-8E02-6BF3EC07EC3D}"/>
+                </a:ext>
+              </a:extLst>
+            </p:cNvPr>
+            <p:cNvCxnSpPr>
+              <a:cxnSpLocks/>
+            </p:cNvCxnSpPr>
+            <p:nvPr/>
+          </p:nvCxnSpPr>
+          <p:spPr>
+            <a:xfrm rot="8160000">
+              <a:off x="6747619" y="4901212"/>
+              <a:ext cx="0" cy="727271"/>
+            </a:xfrm>
+            <a:prstGeom prst="line">
+              <a:avLst/>
+            </a:prstGeom>
+            <a:ln/>
+          </p:spPr>
+          <p:style>
+            <a:lnRef idx="3">
+              <a:schemeClr val="dk1"/>
+            </a:lnRef>
+            <a:fillRef idx="0">
+              <a:schemeClr val="dk1"/>
+            </a:fillRef>
+            <a:effectRef idx="2">
+              <a:schemeClr val="dk1"/>
+            </a:effectRef>
+            <a:fontRef idx="minor">
+              <a:schemeClr val="tx1"/>
+            </a:fontRef>
+          </p:style>
+        </p:cxnSp>
+        <p:cxnSp>
+          <p:nvCxnSpPr>
+            <p:cNvPr id="27" name="直接连接符 26">
+              <a:extLst>
+                <a:ext uri="{FF2B5EF4-FFF2-40B4-BE49-F238E27FC236}">
+                  <a16:creationId xmlns:a16="http://schemas.microsoft.com/office/drawing/2014/main" id="{D5D6D026-D6BE-460C-ABE3-EFC8D75D4457}"/>
+                </a:ext>
+              </a:extLst>
+            </p:cNvPr>
+            <p:cNvCxnSpPr>
+              <a:cxnSpLocks/>
+            </p:cNvCxnSpPr>
+            <p:nvPr/>
+          </p:nvCxnSpPr>
+          <p:spPr>
+            <a:xfrm rot="10860000">
+              <a:off x="5978540" y="5204161"/>
+              <a:ext cx="0" cy="727271"/>
+            </a:xfrm>
+            <a:prstGeom prst="line">
+              <a:avLst/>
+            </a:prstGeom>
+            <a:ln/>
+          </p:spPr>
+          <p:style>
+            <a:lnRef idx="3">
+              <a:schemeClr val="dk1"/>
+            </a:lnRef>
+            <a:fillRef idx="0">
+              <a:schemeClr val="dk1"/>
+            </a:fillRef>
+            <a:effectRef idx="2">
+              <a:schemeClr val="dk1"/>
+            </a:effectRef>
+            <a:fontRef idx="minor">
+              <a:schemeClr val="tx1"/>
+            </a:fontRef>
+          </p:style>
+        </p:cxnSp>
+        <p:cxnSp>
+          <p:nvCxnSpPr>
+            <p:cNvPr id="28" name="直接连接符 27">
+              <a:extLst>
+                <a:ext uri="{FF2B5EF4-FFF2-40B4-BE49-F238E27FC236}">
+                  <a16:creationId xmlns:a16="http://schemas.microsoft.com/office/drawing/2014/main" id="{73FB6EA5-118E-4ECE-8E98-161577F680D2}"/>
+                </a:ext>
+              </a:extLst>
+            </p:cNvPr>
+            <p:cNvCxnSpPr>
+              <a:cxnSpLocks/>
+            </p:cNvCxnSpPr>
+            <p:nvPr/>
+          </p:nvCxnSpPr>
+          <p:spPr>
+            <a:xfrm rot="13560000">
+              <a:off x="5220501" y="4874556"/>
+              <a:ext cx="0" cy="727271"/>
+            </a:xfrm>
+            <a:prstGeom prst="line">
+              <a:avLst/>
+            </a:prstGeom>
+            <a:ln/>
+          </p:spPr>
+          <p:style>
+            <a:lnRef idx="3">
+              <a:schemeClr val="dk1"/>
+            </a:lnRef>
+            <a:fillRef idx="0">
+              <a:schemeClr val="dk1"/>
+            </a:fillRef>
+            <a:effectRef idx="2">
+              <a:schemeClr val="dk1"/>
+            </a:effectRef>
+            <a:fontRef idx="minor">
+              <a:schemeClr val="tx1"/>
+            </a:fontRef>
+          </p:style>
+        </p:cxnSp>
+        <p:cxnSp>
+          <p:nvCxnSpPr>
+            <p:cNvPr id="29" name="直接连接符 28">
+              <a:extLst>
+                <a:ext uri="{FF2B5EF4-FFF2-40B4-BE49-F238E27FC236}">
+                  <a16:creationId xmlns:a16="http://schemas.microsoft.com/office/drawing/2014/main" id="{73ED7142-1FAE-46B8-98D1-13BCB6955555}"/>
+                </a:ext>
+              </a:extLst>
+            </p:cNvPr>
+            <p:cNvCxnSpPr>
+              <a:cxnSpLocks/>
+            </p:cNvCxnSpPr>
+            <p:nvPr/>
+          </p:nvCxnSpPr>
+          <p:spPr>
+            <a:xfrm rot="16260000">
+              <a:off x="4917553" y="4105477"/>
+              <a:ext cx="0" cy="727271"/>
+            </a:xfrm>
+            <a:prstGeom prst="line">
+              <a:avLst/>
+            </a:prstGeom>
+            <a:ln/>
+          </p:spPr>
+          <p:style>
+            <a:lnRef idx="3">
+              <a:schemeClr val="dk1"/>
+            </a:lnRef>
+            <a:fillRef idx="0">
+              <a:schemeClr val="dk1"/>
+            </a:fillRef>
+            <a:effectRef idx="2">
+              <a:schemeClr val="dk1"/>
+            </a:effectRef>
+            <a:fontRef idx="minor">
+              <a:schemeClr val="tx1"/>
+            </a:fontRef>
+          </p:style>
+        </p:cxnSp>
+        <p:cxnSp>
+          <p:nvCxnSpPr>
+            <p:cNvPr id="30" name="直接连接符 29">
+              <a:extLst>
+                <a:ext uri="{FF2B5EF4-FFF2-40B4-BE49-F238E27FC236}">
+                  <a16:creationId xmlns:a16="http://schemas.microsoft.com/office/drawing/2014/main" id="{16372618-8240-495A-833A-67782523510D}"/>
+                </a:ext>
+              </a:extLst>
+            </p:cNvPr>
+            <p:cNvCxnSpPr>
+              <a:cxnSpLocks/>
+            </p:cNvCxnSpPr>
+            <p:nvPr/>
+          </p:nvCxnSpPr>
+          <p:spPr>
+            <a:xfrm rot="18960000">
+              <a:off x="5247157" y="3347438"/>
+              <a:ext cx="0" cy="727271"/>
+            </a:xfrm>
+            <a:prstGeom prst="line">
+              <a:avLst/>
+            </a:prstGeom>
+            <a:ln/>
+          </p:spPr>
+          <p:style>
+            <a:lnRef idx="3">
+              <a:schemeClr val="dk1"/>
+            </a:lnRef>
+            <a:fillRef idx="0">
+              <a:schemeClr val="dk1"/>
+            </a:fillRef>
+            <a:effectRef idx="2">
+              <a:schemeClr val="dk1"/>
+            </a:effectRef>
+            <a:fontRef idx="minor">
+              <a:schemeClr val="tx1"/>
+            </a:fontRef>
+          </p:style>
+        </p:cxnSp>
+      </p:grpSp>
+    </p:spTree>
+    <p:extLst>
+      <p:ext uri="{BB962C8B-B14F-4D97-AF65-F5344CB8AC3E}">
+        <p14:creationId xmlns:p14="http://schemas.microsoft.com/office/powerpoint/2010/main" val="2923728606"/>
+      </p:ext>
+    </p:extLst>
+  </p:cSld>
+  <p:clrMapOvr>
+    <a:masterClrMapping/>
+  </p:clrMapOvr>
+</p:sld>
+</file>
+
+<file path=ppt/slides/slide15.xml><?xml version="1.0" encoding="utf-8"?>
+<p:sld xmlns:a="http://schemas.openxmlformats.org/drawingml/2006/main" xmlns:r="http://schemas.openxmlformats.org/officeDocument/2006/relationships" xmlns:p="http://schemas.openxmlformats.org/presentationml/2006/main">
+  <p:cSld>
+    <p:spTree>
+      <p:nvGrpSpPr>
+        <p:cNvPr id="1" name=""/>
+        <p:cNvGrpSpPr/>
+        <p:nvPr/>
+      </p:nvGrpSpPr>
+      <p:grpSpPr>
+        <a:xfrm>
+          <a:off x="0" y="0"/>
+          <a:ext cx="0" cy="0"/>
+          <a:chOff x="0" y="0"/>
+          <a:chExt cx="0" cy="0"/>
+        </a:xfrm>
+      </p:grpSpPr>
+      <p:sp>
+        <p:nvSpPr>
+          <p:cNvPr id="2" name="标题 1">
+            <a:extLst>
+              <a:ext uri="{FF2B5EF4-FFF2-40B4-BE49-F238E27FC236}">
+                <a16:creationId xmlns:a16="http://schemas.microsoft.com/office/drawing/2014/main" id="{901ED800-317F-4F76-8DF7-47B0B0DC2D68}"/>
+              </a:ext>
+            </a:extLst>
+          </p:cNvPr>
+          <p:cNvSpPr>
+            <a:spLocks noGrp="1"/>
+          </p:cNvSpPr>
+          <p:nvPr>
+            <p:ph type="title"/>
+          </p:nvPr>
+        </p:nvSpPr>
+        <p:spPr/>
+        <p:txBody>
+          <a:bodyPr/>
+          <a:lstStyle/>
+          <a:p>
+            <a:endParaRPr lang="zh-CN" altLang="en-US"/>
+          </a:p>
+        </p:txBody>
+      </p:sp>
+      <p:sp>
+        <p:nvSpPr>
+          <p:cNvPr id="3" name="内容占位符 2">
+            <a:extLst>
+              <a:ext uri="{FF2B5EF4-FFF2-40B4-BE49-F238E27FC236}">
+                <a16:creationId xmlns:a16="http://schemas.microsoft.com/office/drawing/2014/main" id="{00B1559F-6E7C-4769-8957-0F5E6AC7F6A8}"/>
+              </a:ext>
+            </a:extLst>
+          </p:cNvPr>
+          <p:cNvSpPr>
+            <a:spLocks noGrp="1"/>
+          </p:cNvSpPr>
+          <p:nvPr>
+            <p:ph idx="1"/>
+          </p:nvPr>
+        </p:nvSpPr>
+        <p:spPr/>
+        <p:txBody>
+          <a:bodyPr/>
+          <a:lstStyle/>
+          <a:p>
+            <a:r>
+              <a:rPr lang="en-US" altLang="zh-CN" dirty="0"/>
+              <a:t>1. </a:t>
+            </a:r>
+            <a:r>
+              <a:rPr lang="en-US" altLang="zh-CN" dirty="0" err="1"/>
+              <a:t>Control+G</a:t>
+            </a:r>
+            <a:r>
+              <a:rPr lang="zh-CN" altLang="en-US" dirty="0"/>
+              <a:t>合并成一个图</a:t>
+            </a:r>
+            <a:endParaRPr lang="en-US" altLang="zh-CN" dirty="0"/>
+          </a:p>
+          <a:p>
+            <a:endParaRPr lang="zh-CN" altLang="en-US" dirty="0"/>
+          </a:p>
+        </p:txBody>
+      </p:sp>
+      <p:cxnSp>
+        <p:nvCxnSpPr>
+          <p:cNvPr id="5" name="直接连接符 4">
+            <a:extLst>
+              <a:ext uri="{FF2B5EF4-FFF2-40B4-BE49-F238E27FC236}">
+                <a16:creationId xmlns:a16="http://schemas.microsoft.com/office/drawing/2014/main" id="{1AF53A2C-BC23-48B5-AD7D-0E4081B5B29D}"/>
+              </a:ext>
+            </a:extLst>
+          </p:cNvPr>
+          <p:cNvCxnSpPr/>
+          <p:nvPr/>
+        </p:nvCxnSpPr>
+        <p:spPr>
+          <a:xfrm>
+            <a:off x="4882925" y="4027055"/>
+            <a:ext cx="1006763" cy="0"/>
+          </a:xfrm>
+          <a:prstGeom prst="line">
+            <a:avLst/>
+          </a:prstGeom>
+          <a:ln/>
+        </p:spPr>
+        <p:style>
+          <a:lnRef idx="3">
+            <a:schemeClr val="dk1"/>
+          </a:lnRef>
+          <a:fillRef idx="0">
+            <a:schemeClr val="dk1"/>
+          </a:fillRef>
+          <a:effectRef idx="2">
+            <a:schemeClr val="dk1"/>
+          </a:effectRef>
+          <a:fontRef idx="minor">
+            <a:schemeClr val="tx1"/>
+          </a:fontRef>
+        </p:style>
+      </p:cxnSp>
+      <p:cxnSp>
+        <p:nvCxnSpPr>
+          <p:cNvPr id="6" name="直接连接符 5">
+            <a:extLst>
+              <a:ext uri="{FF2B5EF4-FFF2-40B4-BE49-F238E27FC236}">
+                <a16:creationId xmlns:a16="http://schemas.microsoft.com/office/drawing/2014/main" id="{EA9762C7-77F7-4EEE-AE82-E5827284F4A2}"/>
+              </a:ext>
+            </a:extLst>
+          </p:cNvPr>
+          <p:cNvCxnSpPr>
+            <a:cxnSpLocks/>
+          </p:cNvCxnSpPr>
+          <p:nvPr/>
+        </p:nvCxnSpPr>
+        <p:spPr>
+          <a:xfrm rot="16200000">
+            <a:off x="4878308" y="4027054"/>
+            <a:ext cx="1006763" cy="0"/>
+          </a:xfrm>
+          <a:prstGeom prst="line">
+            <a:avLst/>
+          </a:prstGeom>
+          <a:ln/>
+        </p:spPr>
+        <p:style>
+          <a:lnRef idx="3">
+            <a:schemeClr val="dk1"/>
+          </a:lnRef>
+          <a:fillRef idx="0">
+            <a:schemeClr val="dk1"/>
+          </a:fillRef>
+          <a:effectRef idx="2">
+            <a:schemeClr val="dk1"/>
+          </a:effectRef>
+          <a:fontRef idx="minor">
+            <a:schemeClr val="tx1"/>
+          </a:fontRef>
+        </p:style>
+      </p:cxnSp>
+      <p:cxnSp>
+        <p:nvCxnSpPr>
+          <p:cNvPr id="7" name="直接连接符 6">
+            <a:extLst>
+              <a:ext uri="{FF2B5EF4-FFF2-40B4-BE49-F238E27FC236}">
+                <a16:creationId xmlns:a16="http://schemas.microsoft.com/office/drawing/2014/main" id="{13BBCE85-EC02-462F-B4A8-84C4AE458D68}"/>
+              </a:ext>
+            </a:extLst>
+          </p:cNvPr>
+          <p:cNvCxnSpPr>
+            <a:cxnSpLocks/>
+          </p:cNvCxnSpPr>
+          <p:nvPr/>
+        </p:nvCxnSpPr>
+        <p:spPr>
+          <a:xfrm rot="18540000">
+            <a:off x="4879786" y="4027053"/>
+            <a:ext cx="1006763" cy="0"/>
+          </a:xfrm>
+          <a:prstGeom prst="line">
+            <a:avLst/>
+          </a:prstGeom>
+          <a:ln/>
+        </p:spPr>
+        <p:style>
+          <a:lnRef idx="3">
+            <a:schemeClr val="dk1"/>
+          </a:lnRef>
+          <a:fillRef idx="0">
+            <a:schemeClr val="dk1"/>
+          </a:fillRef>
+          <a:effectRef idx="2">
+            <a:schemeClr val="dk1"/>
+          </a:effectRef>
+          <a:fontRef idx="minor">
+            <a:schemeClr val="tx1"/>
+          </a:fontRef>
+        </p:style>
+      </p:cxnSp>
+      <p:cxnSp>
+        <p:nvCxnSpPr>
+          <p:cNvPr id="8" name="直接连接符 7">
+            <a:extLst>
+              <a:ext uri="{FF2B5EF4-FFF2-40B4-BE49-F238E27FC236}">
+                <a16:creationId xmlns:a16="http://schemas.microsoft.com/office/drawing/2014/main" id="{93F44054-20B4-4E9B-83DF-471B712A985A}"/>
+              </a:ext>
+            </a:extLst>
+          </p:cNvPr>
+          <p:cNvCxnSpPr>
+            <a:cxnSpLocks/>
+          </p:cNvCxnSpPr>
+          <p:nvPr/>
+        </p:nvCxnSpPr>
+        <p:spPr>
+          <a:xfrm rot="24420000">
+            <a:off x="4878308" y="4027053"/>
+            <a:ext cx="1006763" cy="0"/>
+          </a:xfrm>
+          <a:prstGeom prst="line">
+            <a:avLst/>
+          </a:prstGeom>
+          <a:ln/>
+        </p:spPr>
+        <p:style>
+          <a:lnRef idx="3">
+            <a:schemeClr val="dk1"/>
+          </a:lnRef>
+          <a:fillRef idx="0">
+            <a:schemeClr val="dk1"/>
+          </a:fillRef>
+          <a:effectRef idx="2">
+            <a:schemeClr val="dk1"/>
+          </a:effectRef>
+          <a:fontRef idx="minor">
+            <a:schemeClr val="tx1"/>
+          </a:fontRef>
+        </p:style>
+      </p:cxnSp>
+    </p:spTree>
+    <p:extLst>
+      <p:ext uri="{BB962C8B-B14F-4D97-AF65-F5344CB8AC3E}">
+        <p14:creationId xmlns:p14="http://schemas.microsoft.com/office/powerpoint/2010/main" val="3957300730"/>
+      </p:ext>
+    </p:extLst>
+  </p:cSld>
+  <p:clrMapOvr>
+    <a:masterClrMapping/>
+  </p:clrMapOvr>
+</p:sld>
+</file>
+
+<file path=ppt/slides/slide16.xml><?xml version="1.0" encoding="utf-8"?>
+<p:sld xmlns:a="http://schemas.openxmlformats.org/drawingml/2006/main" xmlns:r="http://schemas.openxmlformats.org/officeDocument/2006/relationships" xmlns:p="http://schemas.openxmlformats.org/presentationml/2006/main">
+  <p:cSld>
+    <p:spTree>
+      <p:nvGrpSpPr>
+        <p:cNvPr id="1" name=""/>
+        <p:cNvGrpSpPr/>
+        <p:nvPr/>
+      </p:nvGrpSpPr>
+      <p:grpSpPr>
+        <a:xfrm>
+          <a:off x="0" y="0"/>
+          <a:ext cx="0" cy="0"/>
+          <a:chOff x="0" y="0"/>
+          <a:chExt cx="0" cy="0"/>
+        </a:xfrm>
+      </p:grpSpPr>
+      <p:sp>
+        <p:nvSpPr>
+          <p:cNvPr id="2" name="标题 1">
+            <a:extLst>
+              <a:ext uri="{FF2B5EF4-FFF2-40B4-BE49-F238E27FC236}">
+                <a16:creationId xmlns:a16="http://schemas.microsoft.com/office/drawing/2014/main" id="{901ED800-317F-4F76-8DF7-47B0B0DC2D68}"/>
+              </a:ext>
+            </a:extLst>
+          </p:cNvPr>
+          <p:cNvSpPr>
+            <a:spLocks noGrp="1"/>
+          </p:cNvSpPr>
+          <p:nvPr>
+            <p:ph type="title"/>
+          </p:nvPr>
+        </p:nvSpPr>
+        <p:spPr/>
+        <p:txBody>
+          <a:bodyPr/>
+          <a:lstStyle/>
+          <a:p>
+            <a:endParaRPr lang="zh-CN" altLang="en-US"/>
+          </a:p>
+        </p:txBody>
+      </p:sp>
+      <p:sp>
+        <p:nvSpPr>
+          <p:cNvPr id="3" name="内容占位符 2">
+            <a:extLst>
+              <a:ext uri="{FF2B5EF4-FFF2-40B4-BE49-F238E27FC236}">
+                <a16:creationId xmlns:a16="http://schemas.microsoft.com/office/drawing/2014/main" id="{00B1559F-6E7C-4769-8957-0F5E6AC7F6A8}"/>
+              </a:ext>
+            </a:extLst>
+          </p:cNvPr>
+          <p:cNvSpPr>
+            <a:spLocks noGrp="1"/>
+          </p:cNvSpPr>
+          <p:nvPr>
+            <p:ph idx="1"/>
+          </p:nvPr>
+        </p:nvSpPr>
+        <p:spPr/>
+        <p:txBody>
+          <a:bodyPr/>
+          <a:lstStyle/>
+          <a:p>
+            <a:r>
+              <a:rPr lang="en-US" altLang="zh-CN"/>
+              <a:t>2. Control</a:t>
+            </a:r>
+            <a:r>
+              <a:rPr lang="en-US" altLang="zh-CN" dirty="0" err="1"/>
+              <a:t>+G</a:t>
+            </a:r>
+            <a:r>
+              <a:rPr lang="zh-CN" altLang="en-US" dirty="0"/>
+              <a:t>合并成一个图</a:t>
+            </a:r>
+            <a:endParaRPr lang="en-US" altLang="zh-CN" dirty="0"/>
+          </a:p>
+          <a:p>
+            <a:endParaRPr lang="zh-CN" altLang="en-US" dirty="0"/>
+          </a:p>
+        </p:txBody>
+      </p:sp>
+      <p:grpSp>
+        <p:nvGrpSpPr>
+          <p:cNvPr id="4" name="组合 3">
+            <a:extLst>
+              <a:ext uri="{FF2B5EF4-FFF2-40B4-BE49-F238E27FC236}">
+                <a16:creationId xmlns:a16="http://schemas.microsoft.com/office/drawing/2014/main" id="{65469023-AA89-4F7C-AA47-4D3B793F5AB7}"/>
+              </a:ext>
+            </a:extLst>
+          </p:cNvPr>
+          <p:cNvGrpSpPr/>
+          <p:nvPr/>
+        </p:nvGrpSpPr>
+        <p:grpSpPr>
+          <a:xfrm>
+            <a:off x="4882925" y="3523671"/>
+            <a:ext cx="1006763" cy="1006764"/>
+            <a:chOff x="4882925" y="3523671"/>
+            <a:chExt cx="1006763" cy="1006764"/>
+          </a:xfrm>
+        </p:grpSpPr>
+        <p:cxnSp>
+          <p:nvCxnSpPr>
+            <p:cNvPr id="5" name="直接连接符 4">
+              <a:extLst>
+                <a:ext uri="{FF2B5EF4-FFF2-40B4-BE49-F238E27FC236}">
+                  <a16:creationId xmlns:a16="http://schemas.microsoft.com/office/drawing/2014/main" id="{1AF53A2C-BC23-48B5-AD7D-0E4081B5B29D}"/>
+                </a:ext>
+              </a:extLst>
+            </p:cNvPr>
+            <p:cNvCxnSpPr/>
+            <p:nvPr/>
+          </p:nvCxnSpPr>
+          <p:spPr>
+            <a:xfrm>
+              <a:off x="4882925" y="4027055"/>
+              <a:ext cx="1006763" cy="0"/>
+            </a:xfrm>
+            <a:prstGeom prst="line">
+              <a:avLst/>
+            </a:prstGeom>
+            <a:ln/>
+          </p:spPr>
+          <p:style>
+            <a:lnRef idx="3">
+              <a:schemeClr val="dk1"/>
+            </a:lnRef>
+            <a:fillRef idx="0">
+              <a:schemeClr val="dk1"/>
+            </a:fillRef>
+            <a:effectRef idx="2">
+              <a:schemeClr val="dk1"/>
+            </a:effectRef>
+            <a:fontRef idx="minor">
+              <a:schemeClr val="tx1"/>
+            </a:fontRef>
+          </p:style>
+        </p:cxnSp>
+        <p:cxnSp>
+          <p:nvCxnSpPr>
+            <p:cNvPr id="6" name="直接连接符 5">
+              <a:extLst>
+                <a:ext uri="{FF2B5EF4-FFF2-40B4-BE49-F238E27FC236}">
+                  <a16:creationId xmlns:a16="http://schemas.microsoft.com/office/drawing/2014/main" id="{EA9762C7-77F7-4EEE-AE82-E5827284F4A2}"/>
+                </a:ext>
+              </a:extLst>
+            </p:cNvPr>
+            <p:cNvCxnSpPr>
+              <a:cxnSpLocks/>
+            </p:cNvCxnSpPr>
+            <p:nvPr/>
+          </p:nvCxnSpPr>
+          <p:spPr>
+            <a:xfrm rot="16200000">
+              <a:off x="4878308" y="4027054"/>
+              <a:ext cx="1006763" cy="0"/>
+            </a:xfrm>
+            <a:prstGeom prst="line">
+              <a:avLst/>
+            </a:prstGeom>
+            <a:ln/>
+          </p:spPr>
+          <p:style>
+            <a:lnRef idx="3">
+              <a:schemeClr val="dk1"/>
+            </a:lnRef>
+            <a:fillRef idx="0">
+              <a:schemeClr val="dk1"/>
+            </a:fillRef>
+            <a:effectRef idx="2">
+              <a:schemeClr val="dk1"/>
+            </a:effectRef>
+            <a:fontRef idx="minor">
+              <a:schemeClr val="tx1"/>
+            </a:fontRef>
+          </p:style>
+        </p:cxnSp>
+        <p:cxnSp>
+          <p:nvCxnSpPr>
+            <p:cNvPr id="7" name="直接连接符 6">
+              <a:extLst>
+                <a:ext uri="{FF2B5EF4-FFF2-40B4-BE49-F238E27FC236}">
+                  <a16:creationId xmlns:a16="http://schemas.microsoft.com/office/drawing/2014/main" id="{13BBCE85-EC02-462F-B4A8-84C4AE458D68}"/>
+                </a:ext>
+              </a:extLst>
+            </p:cNvPr>
+            <p:cNvCxnSpPr>
+              <a:cxnSpLocks/>
+            </p:cNvCxnSpPr>
+            <p:nvPr/>
+          </p:nvCxnSpPr>
+          <p:spPr>
+            <a:xfrm rot="18540000">
+              <a:off x="4879786" y="4027053"/>
+              <a:ext cx="1006763" cy="0"/>
+            </a:xfrm>
+            <a:prstGeom prst="line">
+              <a:avLst/>
+            </a:prstGeom>
+            <a:ln/>
+          </p:spPr>
+          <p:style>
+            <a:lnRef idx="3">
+              <a:schemeClr val="dk1"/>
+            </a:lnRef>
+            <a:fillRef idx="0">
+              <a:schemeClr val="dk1"/>
+            </a:fillRef>
+            <a:effectRef idx="2">
+              <a:schemeClr val="dk1"/>
+            </a:effectRef>
+            <a:fontRef idx="minor">
+              <a:schemeClr val="tx1"/>
+            </a:fontRef>
+          </p:style>
+        </p:cxnSp>
+        <p:cxnSp>
+          <p:nvCxnSpPr>
+            <p:cNvPr id="8" name="直接连接符 7">
+              <a:extLst>
+                <a:ext uri="{FF2B5EF4-FFF2-40B4-BE49-F238E27FC236}">
+                  <a16:creationId xmlns:a16="http://schemas.microsoft.com/office/drawing/2014/main" id="{93F44054-20B4-4E9B-83DF-471B712A985A}"/>
+                </a:ext>
+              </a:extLst>
+            </p:cNvPr>
+            <p:cNvCxnSpPr>
+              <a:cxnSpLocks/>
+            </p:cNvCxnSpPr>
+            <p:nvPr/>
+          </p:nvCxnSpPr>
+          <p:spPr>
+            <a:xfrm rot="24420000">
+              <a:off x="4878308" y="4027053"/>
+              <a:ext cx="1006763" cy="0"/>
+            </a:xfrm>
+            <a:prstGeom prst="line">
+              <a:avLst/>
+            </a:prstGeom>
+            <a:ln/>
+          </p:spPr>
+          <p:style>
+            <a:lnRef idx="3">
+              <a:schemeClr val="dk1"/>
+            </a:lnRef>
+            <a:fillRef idx="0">
+              <a:schemeClr val="dk1"/>
+            </a:fillRef>
+            <a:effectRef idx="2">
+              <a:schemeClr val="dk1"/>
+            </a:effectRef>
+            <a:fontRef idx="minor">
+              <a:schemeClr val="tx1"/>
+            </a:fontRef>
+          </p:style>
+        </p:cxnSp>
+      </p:grpSp>
+    </p:spTree>
+    <p:extLst>
+      <p:ext uri="{BB962C8B-B14F-4D97-AF65-F5344CB8AC3E}">
+        <p14:creationId xmlns:p14="http://schemas.microsoft.com/office/powerpoint/2010/main" val="275883233"/>
+      </p:ext>
+    </p:extLst>
+  </p:cSld>
+  <p:clrMapOvr>
+    <a:masterClrMapping/>
+  </p:clrMapOvr>
+</p:sld>
+</file>
+
+<file path=ppt/slides/slide17.xml><?xml version="1.0" encoding="utf-8"?>
+<p:sld xmlns:a="http://schemas.openxmlformats.org/drawingml/2006/main" xmlns:r="http://schemas.openxmlformats.org/officeDocument/2006/relationships" xmlns:p="http://schemas.openxmlformats.org/presentationml/2006/main">
+  <p:cSld>
+    <p:spTree>
+      <p:nvGrpSpPr>
+        <p:cNvPr id="1" name=""/>
+        <p:cNvGrpSpPr/>
+        <p:nvPr/>
+      </p:nvGrpSpPr>
+      <p:grpSpPr>
+        <a:xfrm>
+          <a:off x="0" y="0"/>
+          <a:ext cx="0" cy="0"/>
+          <a:chOff x="0" y="0"/>
+          <a:chExt cx="0" cy="0"/>
+        </a:xfrm>
+      </p:grpSpPr>
+      <p:sp>
+        <p:nvSpPr>
+          <p:cNvPr id="2" name="标题 1">
+            <a:extLst>
+              <a:ext uri="{FF2B5EF4-FFF2-40B4-BE49-F238E27FC236}">
+                <a16:creationId xmlns:a16="http://schemas.microsoft.com/office/drawing/2014/main" id="{303601F6-22FE-437C-8B98-2E84C2ABC16F}"/>
+              </a:ext>
+            </a:extLst>
+          </p:cNvPr>
+          <p:cNvSpPr>
+            <a:spLocks noGrp="1"/>
+          </p:cNvSpPr>
+          <p:nvPr>
+            <p:ph type="title"/>
+          </p:nvPr>
+        </p:nvSpPr>
+        <p:spPr/>
+        <p:txBody>
+          <a:bodyPr/>
+          <a:lstStyle/>
+          <a:p>
+            <a:endParaRPr lang="zh-CN" altLang="en-US"/>
+          </a:p>
+        </p:txBody>
+      </p:sp>
+      <p:sp>
+        <p:nvSpPr>
+          <p:cNvPr id="3" name="内容占位符 2">
+            <a:extLst>
+              <a:ext uri="{FF2B5EF4-FFF2-40B4-BE49-F238E27FC236}">
+                <a16:creationId xmlns:a16="http://schemas.microsoft.com/office/drawing/2014/main" id="{A9CC2D86-BD04-4B12-AEDE-830050C19C34}"/>
+              </a:ext>
+            </a:extLst>
+          </p:cNvPr>
+          <p:cNvSpPr>
+            <a:spLocks noGrp="1"/>
+          </p:cNvSpPr>
+          <p:nvPr>
+            <p:ph idx="1"/>
+          </p:nvPr>
+        </p:nvSpPr>
+        <p:spPr/>
+        <p:txBody>
+          <a:bodyPr/>
+          <a:lstStyle/>
+          <a:p>
+            <a:endParaRPr lang="zh-CN" altLang="en-US" dirty="0"/>
+          </a:p>
+        </p:txBody>
+      </p:sp>
+      <p:grpSp>
+        <p:nvGrpSpPr>
+          <p:cNvPr id="14" name="组合 13">
+            <a:extLst>
+              <a:ext uri="{FF2B5EF4-FFF2-40B4-BE49-F238E27FC236}">
+                <a16:creationId xmlns:a16="http://schemas.microsoft.com/office/drawing/2014/main" id="{FF3CFB22-1E8A-4977-942A-AB92F13FF3B0}"/>
+              </a:ext>
+            </a:extLst>
+          </p:cNvPr>
+          <p:cNvGrpSpPr/>
+          <p:nvPr/>
+        </p:nvGrpSpPr>
+        <p:grpSpPr>
+          <a:xfrm>
+            <a:off x="4553917" y="3044490"/>
+            <a:ext cx="2886942" cy="2886942"/>
+            <a:chOff x="4553917" y="3044490"/>
+            <a:chExt cx="2886942" cy="2886942"/>
+          </a:xfrm>
+        </p:grpSpPr>
+        <p:cxnSp>
+          <p:nvCxnSpPr>
+            <p:cNvPr id="15" name="直接连接符 14">
+              <a:extLst>
+                <a:ext uri="{FF2B5EF4-FFF2-40B4-BE49-F238E27FC236}">
+                  <a16:creationId xmlns:a16="http://schemas.microsoft.com/office/drawing/2014/main" id="{F19AFEE8-4345-452A-A8F8-B636D1585EFC}"/>
+                </a:ext>
+              </a:extLst>
+            </p:cNvPr>
+            <p:cNvCxnSpPr>
+              <a:cxnSpLocks/>
+            </p:cNvCxnSpPr>
+            <p:nvPr/>
+          </p:nvCxnSpPr>
+          <p:spPr>
+            <a:xfrm rot="60000">
+              <a:off x="6016237" y="3044490"/>
+              <a:ext cx="0" cy="727271"/>
+            </a:xfrm>
+            <a:prstGeom prst="line">
+              <a:avLst/>
+            </a:prstGeom>
+            <a:ln/>
+          </p:spPr>
+          <p:style>
+            <a:lnRef idx="3">
+              <a:schemeClr val="dk1"/>
+            </a:lnRef>
+            <a:fillRef idx="0">
+              <a:schemeClr val="dk1"/>
+            </a:fillRef>
+            <a:effectRef idx="2">
+              <a:schemeClr val="dk1"/>
+            </a:effectRef>
+            <a:fontRef idx="minor">
+              <a:schemeClr val="tx1"/>
+            </a:fontRef>
+          </p:style>
+        </p:cxnSp>
+        <p:cxnSp>
+          <p:nvCxnSpPr>
+            <p:cNvPr id="16" name="直接连接符 15">
+              <a:extLst>
+                <a:ext uri="{FF2B5EF4-FFF2-40B4-BE49-F238E27FC236}">
+                  <a16:creationId xmlns:a16="http://schemas.microsoft.com/office/drawing/2014/main" id="{E55623E9-1CA1-4B38-9588-E638D00B74EF}"/>
+                </a:ext>
+              </a:extLst>
+            </p:cNvPr>
+            <p:cNvCxnSpPr>
+              <a:cxnSpLocks/>
+            </p:cNvCxnSpPr>
+            <p:nvPr/>
+          </p:nvCxnSpPr>
+          <p:spPr>
+            <a:xfrm rot="2760000">
+              <a:off x="6774275" y="3374094"/>
+              <a:ext cx="0" cy="727271"/>
+            </a:xfrm>
+            <a:prstGeom prst="line">
+              <a:avLst/>
+            </a:prstGeom>
+            <a:ln/>
+          </p:spPr>
+          <p:style>
+            <a:lnRef idx="3">
+              <a:schemeClr val="dk1"/>
+            </a:lnRef>
+            <a:fillRef idx="0">
+              <a:schemeClr val="dk1"/>
+            </a:fillRef>
+            <a:effectRef idx="2">
+              <a:schemeClr val="dk1"/>
+            </a:effectRef>
+            <a:fontRef idx="minor">
+              <a:schemeClr val="tx1"/>
+            </a:fontRef>
+          </p:style>
+        </p:cxnSp>
+        <p:cxnSp>
+          <p:nvCxnSpPr>
+            <p:cNvPr id="17" name="直接连接符 16">
+              <a:extLst>
+                <a:ext uri="{FF2B5EF4-FFF2-40B4-BE49-F238E27FC236}">
+                  <a16:creationId xmlns:a16="http://schemas.microsoft.com/office/drawing/2014/main" id="{2ADECE04-5743-426F-A5D3-E646CB500906}"/>
+                </a:ext>
+              </a:extLst>
+            </p:cNvPr>
+            <p:cNvCxnSpPr>
+              <a:cxnSpLocks/>
+            </p:cNvCxnSpPr>
+            <p:nvPr/>
+          </p:nvCxnSpPr>
+          <p:spPr>
+            <a:xfrm rot="5460000">
+              <a:off x="7077224" y="4143173"/>
+              <a:ext cx="0" cy="727271"/>
+            </a:xfrm>
+            <a:prstGeom prst="line">
+              <a:avLst/>
+            </a:prstGeom>
+            <a:ln/>
+          </p:spPr>
+          <p:style>
+            <a:lnRef idx="3">
+              <a:schemeClr val="dk1"/>
+            </a:lnRef>
+            <a:fillRef idx="0">
+              <a:schemeClr val="dk1"/>
+            </a:fillRef>
+            <a:effectRef idx="2">
+              <a:schemeClr val="dk1"/>
+            </a:effectRef>
+            <a:fontRef idx="minor">
+              <a:schemeClr val="tx1"/>
+            </a:fontRef>
+          </p:style>
+        </p:cxnSp>
+        <p:cxnSp>
+          <p:nvCxnSpPr>
+            <p:cNvPr id="18" name="直接连接符 17">
+              <a:extLst>
+                <a:ext uri="{FF2B5EF4-FFF2-40B4-BE49-F238E27FC236}">
+                  <a16:creationId xmlns:a16="http://schemas.microsoft.com/office/drawing/2014/main" id="{AFBB0A72-9A66-419D-856F-213B7610C350}"/>
+                </a:ext>
+              </a:extLst>
+            </p:cNvPr>
+            <p:cNvCxnSpPr>
+              <a:cxnSpLocks/>
+            </p:cNvCxnSpPr>
+            <p:nvPr/>
+          </p:nvCxnSpPr>
+          <p:spPr>
+            <a:xfrm rot="8160000">
+              <a:off x="6747619" y="4901212"/>
+              <a:ext cx="0" cy="727271"/>
+            </a:xfrm>
+            <a:prstGeom prst="line">
+              <a:avLst/>
+            </a:prstGeom>
+            <a:ln/>
+          </p:spPr>
+          <p:style>
+            <a:lnRef idx="3">
+              <a:schemeClr val="dk1"/>
+            </a:lnRef>
+            <a:fillRef idx="0">
+              <a:schemeClr val="dk1"/>
+            </a:fillRef>
+            <a:effectRef idx="2">
+              <a:schemeClr val="dk1"/>
+            </a:effectRef>
+            <a:fontRef idx="minor">
+              <a:schemeClr val="tx1"/>
+            </a:fontRef>
+          </p:style>
+        </p:cxnSp>
+        <p:cxnSp>
+          <p:nvCxnSpPr>
+            <p:cNvPr id="19" name="直接连接符 18">
+              <a:extLst>
+                <a:ext uri="{FF2B5EF4-FFF2-40B4-BE49-F238E27FC236}">
+                  <a16:creationId xmlns:a16="http://schemas.microsoft.com/office/drawing/2014/main" id="{2F919A3C-75BD-4D5B-A4F4-FC23A52CCAED}"/>
+                </a:ext>
+              </a:extLst>
+            </p:cNvPr>
+            <p:cNvCxnSpPr>
+              <a:cxnSpLocks/>
+            </p:cNvCxnSpPr>
+            <p:nvPr/>
+          </p:nvCxnSpPr>
+          <p:spPr>
+            <a:xfrm rot="10860000">
+              <a:off x="5978540" y="5204161"/>
+              <a:ext cx="0" cy="727271"/>
+            </a:xfrm>
+            <a:prstGeom prst="line">
+              <a:avLst/>
+            </a:prstGeom>
+            <a:ln/>
+          </p:spPr>
+          <p:style>
+            <a:lnRef idx="3">
+              <a:schemeClr val="dk1"/>
+            </a:lnRef>
+            <a:fillRef idx="0">
+              <a:schemeClr val="dk1"/>
+            </a:fillRef>
+            <a:effectRef idx="2">
+              <a:schemeClr val="dk1"/>
+            </a:effectRef>
+            <a:fontRef idx="minor">
+              <a:schemeClr val="tx1"/>
+            </a:fontRef>
+          </p:style>
+        </p:cxnSp>
+        <p:cxnSp>
+          <p:nvCxnSpPr>
+            <p:cNvPr id="20" name="直接连接符 19">
+              <a:extLst>
+                <a:ext uri="{FF2B5EF4-FFF2-40B4-BE49-F238E27FC236}">
+                  <a16:creationId xmlns:a16="http://schemas.microsoft.com/office/drawing/2014/main" id="{DD00835C-17C3-4AD1-B702-D70B5DA37F6F}"/>
+                </a:ext>
+              </a:extLst>
+            </p:cNvPr>
+            <p:cNvCxnSpPr>
+              <a:cxnSpLocks/>
+            </p:cNvCxnSpPr>
+            <p:nvPr/>
+          </p:nvCxnSpPr>
+          <p:spPr>
+            <a:xfrm rot="13560000">
+              <a:off x="5220501" y="4874556"/>
+              <a:ext cx="0" cy="727271"/>
+            </a:xfrm>
+            <a:prstGeom prst="line">
+              <a:avLst/>
+            </a:prstGeom>
+            <a:ln/>
+          </p:spPr>
+          <p:style>
+            <a:lnRef idx="3">
+              <a:schemeClr val="dk1"/>
+            </a:lnRef>
+            <a:fillRef idx="0">
+              <a:schemeClr val="dk1"/>
+            </a:fillRef>
+            <a:effectRef idx="2">
+              <a:schemeClr val="dk1"/>
+            </a:effectRef>
+            <a:fontRef idx="minor">
+              <a:schemeClr val="tx1"/>
+            </a:fontRef>
+          </p:style>
+        </p:cxnSp>
+        <p:cxnSp>
+          <p:nvCxnSpPr>
+            <p:cNvPr id="21" name="直接连接符 20">
+              <a:extLst>
+                <a:ext uri="{FF2B5EF4-FFF2-40B4-BE49-F238E27FC236}">
+                  <a16:creationId xmlns:a16="http://schemas.microsoft.com/office/drawing/2014/main" id="{A37A32BC-3D3F-44E8-A69C-DEB99B695E11}"/>
+                </a:ext>
+              </a:extLst>
+            </p:cNvPr>
+            <p:cNvCxnSpPr>
+              <a:cxnSpLocks/>
+            </p:cNvCxnSpPr>
+            <p:nvPr/>
+          </p:nvCxnSpPr>
+          <p:spPr>
+            <a:xfrm rot="16260000">
+              <a:off x="4917553" y="4105477"/>
+              <a:ext cx="0" cy="727271"/>
+            </a:xfrm>
+            <a:prstGeom prst="line">
+              <a:avLst/>
+            </a:prstGeom>
+            <a:ln/>
+          </p:spPr>
+          <p:style>
+            <a:lnRef idx="3">
+              <a:schemeClr val="dk1"/>
+            </a:lnRef>
+            <a:fillRef idx="0">
+              <a:schemeClr val="dk1"/>
+            </a:fillRef>
+            <a:effectRef idx="2">
+              <a:schemeClr val="dk1"/>
+            </a:effectRef>
+            <a:fontRef idx="minor">
+              <a:schemeClr val="tx1"/>
+            </a:fontRef>
+          </p:style>
+        </p:cxnSp>
+        <p:cxnSp>
+          <p:nvCxnSpPr>
+            <p:cNvPr id="22" name="直接连接符 21">
+              <a:extLst>
+                <a:ext uri="{FF2B5EF4-FFF2-40B4-BE49-F238E27FC236}">
+                  <a16:creationId xmlns:a16="http://schemas.microsoft.com/office/drawing/2014/main" id="{4B92896C-C07E-46AA-9EB6-3AF0D23F370D}"/>
+                </a:ext>
+              </a:extLst>
+            </p:cNvPr>
+            <p:cNvCxnSpPr>
+              <a:cxnSpLocks/>
+            </p:cNvCxnSpPr>
+            <p:nvPr/>
+          </p:nvCxnSpPr>
+          <p:spPr>
+            <a:xfrm rot="18960000">
+              <a:off x="5247157" y="3347438"/>
+              <a:ext cx="0" cy="727271"/>
+            </a:xfrm>
+            <a:prstGeom prst="line">
+              <a:avLst/>
+            </a:prstGeom>
+            <a:ln/>
+          </p:spPr>
+          <p:style>
+            <a:lnRef idx="3">
+              <a:schemeClr val="dk1"/>
+            </a:lnRef>
+            <a:fillRef idx="0">
+              <a:schemeClr val="dk1"/>
+            </a:fillRef>
+            <a:effectRef idx="2">
+              <a:schemeClr val="dk1"/>
+            </a:effectRef>
+            <a:fontRef idx="minor">
+              <a:schemeClr val="tx1"/>
+            </a:fontRef>
+          </p:style>
+        </p:cxnSp>
+      </p:grpSp>
+      <p:sp>
+        <p:nvSpPr>
+          <p:cNvPr id="23" name="流程图: 接点 22">
+            <a:extLst>
+              <a:ext uri="{FF2B5EF4-FFF2-40B4-BE49-F238E27FC236}">
+                <a16:creationId xmlns:a16="http://schemas.microsoft.com/office/drawing/2014/main" id="{2C0DE269-E692-4100-B7AA-07E13B5C1C79}"/>
+              </a:ext>
+            </a:extLst>
+          </p:cNvPr>
+          <p:cNvSpPr/>
+          <p:nvPr/>
+        </p:nvSpPr>
+        <p:spPr>
+          <a:xfrm>
+            <a:off x="5261236" y="3801014"/>
+            <a:ext cx="1420160" cy="1365119"/>
+          </a:xfrm>
+          <a:prstGeom prst="flowChartConnector">
+            <a:avLst/>
+          </a:prstGeom>
+          <a:noFill/>
+          <a:ln w="19050">
+            <a:solidFill>
+              <a:schemeClr val="tx1"/>
+            </a:solidFill>
+          </a:ln>
+        </p:spPr>
+        <p:style>
+          <a:lnRef idx="2">
+            <a:schemeClr val="accent1">
+              <a:shade val="50000"/>
+            </a:schemeClr>
+          </a:lnRef>
+          <a:fillRef idx="1">
+            <a:schemeClr val="accent1"/>
+          </a:fillRef>
+          <a:effectRef idx="0">
+            <a:schemeClr val="accent1"/>
+          </a:effectRef>
+          <a:fontRef idx="minor">
+            <a:schemeClr val="lt1"/>
+          </a:fontRef>
+        </p:style>
+        <p:txBody>
+          <a:bodyPr rtlCol="0" anchor="ctr"/>
+          <a:lstStyle/>
+          <a:p>
+            <a:pPr algn="ctr"/>
+            <a:endParaRPr lang="zh-CN" altLang="en-US" dirty="0"/>
+          </a:p>
+        </p:txBody>
+      </p:sp>
+    </p:spTree>
+    <p:extLst>
+      <p:ext uri="{BB962C8B-B14F-4D97-AF65-F5344CB8AC3E}">
+        <p14:creationId xmlns:p14="http://schemas.microsoft.com/office/powerpoint/2010/main" val="3112002063"/>
+      </p:ext>
+    </p:extLst>
+  </p:cSld>
+  <p:clrMapOvr>
+    <a:masterClrMapping/>
+  </p:clrMapOvr>
 </p:sld>
 </file>
 

--- a/PPT-Animation-Samples (Part 2).pptx
+++ b/PPT-Animation-Samples (Part 2).pptx
@@ -21,7 +21,11 @@
     <p:sldId id="291" r:id="rId15"/>
     <p:sldId id="292" r:id="rId16"/>
     <p:sldId id="294" r:id="rId17"/>
-    <p:sldId id="293" r:id="rId18"/>
+    <p:sldId id="295" r:id="rId18"/>
+    <p:sldId id="293" r:id="rId19"/>
+    <p:sldId id="296" r:id="rId20"/>
+    <p:sldId id="297" r:id="rId21"/>
+    <p:sldId id="298" r:id="rId22"/>
   </p:sldIdLst>
   <p:sldSz cx="12192000" cy="6858000"/>
   <p:notesSz cx="6858000" cy="9144000"/>
@@ -7116,16 +7120,28 @@
           <a:lstStyle/>
           <a:p>
             <a:r>
-              <a:rPr lang="en-US" altLang="zh-CN"/>
-              <a:t>2. Control</a:t>
-            </a:r>
-            <a:r>
-              <a:rPr lang="en-US" altLang="zh-CN" dirty="0" err="1"/>
-              <a:t>+G</a:t>
+              <a:rPr lang="en-US" altLang="zh-CN" dirty="0"/>
+              <a:t>2. </a:t>
             </a:r>
             <a:r>
               <a:rPr lang="zh-CN" altLang="en-US" dirty="0"/>
-              <a:t>合并成一个图</a:t>
+              <a:t>添加动画</a:t>
+            </a:r>
+            <a:r>
+              <a:rPr lang="en-US" altLang="zh-CN" dirty="0"/>
+              <a:t>-&gt;</a:t>
+            </a:r>
+            <a:r>
+              <a:rPr lang="zh-CN" altLang="en-US" dirty="0"/>
+              <a:t>更多进入效果</a:t>
+            </a:r>
+            <a:r>
+              <a:rPr lang="en-US" altLang="zh-CN" dirty="0"/>
+              <a:t>-&gt;</a:t>
+            </a:r>
+            <a:r>
+              <a:rPr lang="zh-CN" altLang="en-US" dirty="0"/>
+              <a:t>温和，基本缩放</a:t>
             </a:r>
             <a:endParaRPr lang="en-US" altLang="zh-CN" dirty="0"/>
           </a:p>
@@ -7319,6 +7335,127 @@
   <p:clrMapOvr>
     <a:masterClrMapping/>
   </p:clrMapOvr>
+  <p:timing>
+    <p:tnLst>
+      <p:par>
+        <p:cTn id="1" dur="indefinite" restart="never" nodeType="tmRoot">
+          <p:childTnLst>
+            <p:seq concurrent="1" nextAc="seek">
+              <p:cTn id="2" dur="indefinite" nodeType="mainSeq">
+                <p:childTnLst>
+                  <p:par>
+                    <p:cTn id="3" fill="hold">
+                      <p:stCondLst>
+                        <p:cond delay="indefinite"/>
+                      </p:stCondLst>
+                      <p:childTnLst>
+                        <p:par>
+                          <p:cTn id="4" fill="hold">
+                            <p:stCondLst>
+                              <p:cond delay="0"/>
+                            </p:stCondLst>
+                            <p:childTnLst>
+                              <p:par>
+                                <p:cTn id="5" presetID="23" presetClass="entr" presetSubtype="16" fill="hold" nodeType="clickEffect">
+                                  <p:stCondLst>
+                                    <p:cond delay="0"/>
+                                  </p:stCondLst>
+                                  <p:childTnLst>
+                                    <p:set>
+                                      <p:cBhvr>
+                                        <p:cTn id="6" dur="1" fill="hold">
+                                          <p:stCondLst>
+                                            <p:cond delay="0"/>
+                                          </p:stCondLst>
+                                        </p:cTn>
+                                        <p:tgtEl>
+                                          <p:spTgt spid="4"/>
+                                        </p:tgtEl>
+                                        <p:attrNameLst>
+                                          <p:attrName>style.visibility</p:attrName>
+                                        </p:attrNameLst>
+                                      </p:cBhvr>
+                                      <p:to>
+                                        <p:strVal val="visible"/>
+                                      </p:to>
+                                    </p:set>
+                                    <p:anim calcmode="lin" valueType="num">
+                                      <p:cBhvr>
+                                        <p:cTn id="7" dur="500" fill="hold"/>
+                                        <p:tgtEl>
+                                          <p:spTgt spid="4"/>
+                                        </p:tgtEl>
+                                        <p:attrNameLst>
+                                          <p:attrName>ppt_w</p:attrName>
+                                        </p:attrNameLst>
+                                      </p:cBhvr>
+                                      <p:tavLst>
+                                        <p:tav tm="0">
+                                          <p:val>
+                                            <p:fltVal val="0"/>
+                                          </p:val>
+                                        </p:tav>
+                                        <p:tav tm="100000">
+                                          <p:val>
+                                            <p:strVal val="#ppt_w"/>
+                                          </p:val>
+                                        </p:tav>
+                                      </p:tavLst>
+                                    </p:anim>
+                                    <p:anim calcmode="lin" valueType="num">
+                                      <p:cBhvr>
+                                        <p:cTn id="8" dur="500" fill="hold"/>
+                                        <p:tgtEl>
+                                          <p:spTgt spid="4"/>
+                                        </p:tgtEl>
+                                        <p:attrNameLst>
+                                          <p:attrName>ppt_h</p:attrName>
+                                        </p:attrNameLst>
+                                      </p:cBhvr>
+                                      <p:tavLst>
+                                        <p:tav tm="0">
+                                          <p:val>
+                                            <p:fltVal val="0"/>
+                                          </p:val>
+                                        </p:tav>
+                                        <p:tav tm="100000">
+                                          <p:val>
+                                            <p:strVal val="#ppt_h"/>
+                                          </p:val>
+                                        </p:tav>
+                                      </p:tavLst>
+                                    </p:anim>
+                                  </p:childTnLst>
+                                </p:cTn>
+                              </p:par>
+                            </p:childTnLst>
+                          </p:cTn>
+                        </p:par>
+                      </p:childTnLst>
+                    </p:cTn>
+                  </p:par>
+                </p:childTnLst>
+              </p:cTn>
+              <p:prevCondLst>
+                <p:cond evt="onPrev" delay="0">
+                  <p:tgtEl>
+                    <p:sldTgt/>
+                  </p:tgtEl>
+                </p:cond>
+              </p:prevCondLst>
+              <p:nextCondLst>
+                <p:cond evt="onNext" delay="0">
+                  <p:tgtEl>
+                    <p:sldTgt/>
+                  </p:tgtEl>
+                </p:cond>
+              </p:nextCondLst>
+            </p:seq>
+          </p:childTnLst>
+        </p:cTn>
+      </p:par>
+    </p:tnLst>
+  </p:timing>
 </p:sld>
 </file>
 
@@ -7344,7 +7481,7 @@
           <p:cNvPr id="2" name="标题 1">
             <a:extLst>
               <a:ext uri="{FF2B5EF4-FFF2-40B4-BE49-F238E27FC236}">
-                <a16:creationId xmlns:a16="http://schemas.microsoft.com/office/drawing/2014/main" id="{303601F6-22FE-437C-8B98-2E84C2ABC16F}"/>
+                <a16:creationId xmlns:a16="http://schemas.microsoft.com/office/drawing/2014/main" id="{901ED800-317F-4F76-8DF7-47B0B0DC2D68}"/>
               </a:ext>
             </a:extLst>
           </p:cNvPr>
@@ -7369,7 +7506,7 @@
           <p:cNvPr id="3" name="内容占位符 2">
             <a:extLst>
               <a:ext uri="{FF2B5EF4-FFF2-40B4-BE49-F238E27FC236}">
-                <a16:creationId xmlns:a16="http://schemas.microsoft.com/office/drawing/2014/main" id="{A9CC2D86-BD04-4B12-AEDE-830050C19C34}"/>
+                <a16:creationId xmlns:a16="http://schemas.microsoft.com/office/drawing/2014/main" id="{00B1559F-6E7C-4769-8957-0F5E6AC7F6A8}"/>
               </a:ext>
             </a:extLst>
           </p:cNvPr>
@@ -7385,7 +7522,564 @@
           <a:bodyPr/>
           <a:lstStyle/>
           <a:p>
+            <a:r>
+              <a:rPr lang="en-US" altLang="zh-CN" dirty="0"/>
+              <a:t>3. </a:t>
+            </a:r>
+            <a:r>
+              <a:rPr lang="zh-CN" altLang="en-US" dirty="0"/>
+              <a:t>添加动画</a:t>
+            </a:r>
+            <a:r>
+              <a:rPr lang="en-US" altLang="zh-CN" dirty="0"/>
+              <a:t>-&gt;</a:t>
+            </a:r>
+            <a:r>
+              <a:rPr lang="zh-CN" altLang="en-US" dirty="0"/>
+              <a:t>退出动画</a:t>
+            </a:r>
+            <a:r>
+              <a:rPr lang="en-US" altLang="zh-CN" dirty="0"/>
+              <a:t>-&gt;</a:t>
+            </a:r>
+            <a:r>
+              <a:rPr lang="zh-CN" altLang="en-US" dirty="0"/>
+              <a:t>形状</a:t>
+            </a:r>
+            <a:endParaRPr lang="en-US" altLang="zh-CN" dirty="0"/>
+          </a:p>
+          <a:p>
+            <a:r>
+              <a:rPr lang="en-US" altLang="zh-CN" dirty="0"/>
+              <a:t>4. </a:t>
+            </a:r>
+            <a:r>
+              <a:rPr lang="zh-CN" altLang="en-US" dirty="0"/>
+              <a:t>调节控制时间得到最佳效果</a:t>
+            </a:r>
+            <a:endParaRPr lang="en-US" altLang="zh-CN" dirty="0"/>
+          </a:p>
+          <a:p>
             <a:endParaRPr lang="zh-CN" altLang="en-US" dirty="0"/>
+          </a:p>
+        </p:txBody>
+      </p:sp>
+      <p:grpSp>
+        <p:nvGrpSpPr>
+          <p:cNvPr id="4" name="组合 3">
+            <a:extLst>
+              <a:ext uri="{FF2B5EF4-FFF2-40B4-BE49-F238E27FC236}">
+                <a16:creationId xmlns:a16="http://schemas.microsoft.com/office/drawing/2014/main" id="{65469023-AA89-4F7C-AA47-4D3B793F5AB7}"/>
+              </a:ext>
+            </a:extLst>
+          </p:cNvPr>
+          <p:cNvGrpSpPr/>
+          <p:nvPr/>
+        </p:nvGrpSpPr>
+        <p:grpSpPr>
+          <a:xfrm>
+            <a:off x="4882925" y="3523671"/>
+            <a:ext cx="1006763" cy="1006764"/>
+            <a:chOff x="4882925" y="3523671"/>
+            <a:chExt cx="1006763" cy="1006764"/>
+          </a:xfrm>
+        </p:grpSpPr>
+        <p:cxnSp>
+          <p:nvCxnSpPr>
+            <p:cNvPr id="5" name="直接连接符 4">
+              <a:extLst>
+                <a:ext uri="{FF2B5EF4-FFF2-40B4-BE49-F238E27FC236}">
+                  <a16:creationId xmlns:a16="http://schemas.microsoft.com/office/drawing/2014/main" id="{1AF53A2C-BC23-48B5-AD7D-0E4081B5B29D}"/>
+                </a:ext>
+              </a:extLst>
+            </p:cNvPr>
+            <p:cNvCxnSpPr/>
+            <p:nvPr/>
+          </p:nvCxnSpPr>
+          <p:spPr>
+            <a:xfrm>
+              <a:off x="4882925" y="4027055"/>
+              <a:ext cx="1006763" cy="0"/>
+            </a:xfrm>
+            <a:prstGeom prst="line">
+              <a:avLst/>
+            </a:prstGeom>
+            <a:ln/>
+          </p:spPr>
+          <p:style>
+            <a:lnRef idx="3">
+              <a:schemeClr val="dk1"/>
+            </a:lnRef>
+            <a:fillRef idx="0">
+              <a:schemeClr val="dk1"/>
+            </a:fillRef>
+            <a:effectRef idx="2">
+              <a:schemeClr val="dk1"/>
+            </a:effectRef>
+            <a:fontRef idx="minor">
+              <a:schemeClr val="tx1"/>
+            </a:fontRef>
+          </p:style>
+        </p:cxnSp>
+        <p:cxnSp>
+          <p:nvCxnSpPr>
+            <p:cNvPr id="6" name="直接连接符 5">
+              <a:extLst>
+                <a:ext uri="{FF2B5EF4-FFF2-40B4-BE49-F238E27FC236}">
+                  <a16:creationId xmlns:a16="http://schemas.microsoft.com/office/drawing/2014/main" id="{EA9762C7-77F7-4EEE-AE82-E5827284F4A2}"/>
+                </a:ext>
+              </a:extLst>
+            </p:cNvPr>
+            <p:cNvCxnSpPr>
+              <a:cxnSpLocks/>
+            </p:cNvCxnSpPr>
+            <p:nvPr/>
+          </p:nvCxnSpPr>
+          <p:spPr>
+            <a:xfrm rot="16200000">
+              <a:off x="4878308" y="4027054"/>
+              <a:ext cx="1006763" cy="0"/>
+            </a:xfrm>
+            <a:prstGeom prst="line">
+              <a:avLst/>
+            </a:prstGeom>
+            <a:ln/>
+          </p:spPr>
+          <p:style>
+            <a:lnRef idx="3">
+              <a:schemeClr val="dk1"/>
+            </a:lnRef>
+            <a:fillRef idx="0">
+              <a:schemeClr val="dk1"/>
+            </a:fillRef>
+            <a:effectRef idx="2">
+              <a:schemeClr val="dk1"/>
+            </a:effectRef>
+            <a:fontRef idx="minor">
+              <a:schemeClr val="tx1"/>
+            </a:fontRef>
+          </p:style>
+        </p:cxnSp>
+        <p:cxnSp>
+          <p:nvCxnSpPr>
+            <p:cNvPr id="7" name="直接连接符 6">
+              <a:extLst>
+                <a:ext uri="{FF2B5EF4-FFF2-40B4-BE49-F238E27FC236}">
+                  <a16:creationId xmlns:a16="http://schemas.microsoft.com/office/drawing/2014/main" id="{13BBCE85-EC02-462F-B4A8-84C4AE458D68}"/>
+                </a:ext>
+              </a:extLst>
+            </p:cNvPr>
+            <p:cNvCxnSpPr>
+              <a:cxnSpLocks/>
+            </p:cNvCxnSpPr>
+            <p:nvPr/>
+          </p:nvCxnSpPr>
+          <p:spPr>
+            <a:xfrm rot="18540000">
+              <a:off x="4879786" y="4027053"/>
+              <a:ext cx="1006763" cy="0"/>
+            </a:xfrm>
+            <a:prstGeom prst="line">
+              <a:avLst/>
+            </a:prstGeom>
+            <a:ln/>
+          </p:spPr>
+          <p:style>
+            <a:lnRef idx="3">
+              <a:schemeClr val="dk1"/>
+            </a:lnRef>
+            <a:fillRef idx="0">
+              <a:schemeClr val="dk1"/>
+            </a:fillRef>
+            <a:effectRef idx="2">
+              <a:schemeClr val="dk1"/>
+            </a:effectRef>
+            <a:fontRef idx="minor">
+              <a:schemeClr val="tx1"/>
+            </a:fontRef>
+          </p:style>
+        </p:cxnSp>
+        <p:cxnSp>
+          <p:nvCxnSpPr>
+            <p:cNvPr id="8" name="直接连接符 7">
+              <a:extLst>
+                <a:ext uri="{FF2B5EF4-FFF2-40B4-BE49-F238E27FC236}">
+                  <a16:creationId xmlns:a16="http://schemas.microsoft.com/office/drawing/2014/main" id="{93F44054-20B4-4E9B-83DF-471B712A985A}"/>
+                </a:ext>
+              </a:extLst>
+            </p:cNvPr>
+            <p:cNvCxnSpPr>
+              <a:cxnSpLocks/>
+            </p:cNvCxnSpPr>
+            <p:nvPr/>
+          </p:nvCxnSpPr>
+          <p:spPr>
+            <a:xfrm rot="24420000">
+              <a:off x="4878308" y="4027053"/>
+              <a:ext cx="1006763" cy="0"/>
+            </a:xfrm>
+            <a:prstGeom prst="line">
+              <a:avLst/>
+            </a:prstGeom>
+            <a:ln/>
+          </p:spPr>
+          <p:style>
+            <a:lnRef idx="3">
+              <a:schemeClr val="dk1"/>
+            </a:lnRef>
+            <a:fillRef idx="0">
+              <a:schemeClr val="dk1"/>
+            </a:fillRef>
+            <a:effectRef idx="2">
+              <a:schemeClr val="dk1"/>
+            </a:effectRef>
+            <a:fontRef idx="minor">
+              <a:schemeClr val="tx1"/>
+            </a:fontRef>
+          </p:style>
+        </p:cxnSp>
+      </p:grpSp>
+    </p:spTree>
+    <p:extLst>
+      <p:ext uri="{BB962C8B-B14F-4D97-AF65-F5344CB8AC3E}">
+        <p14:creationId xmlns:p14="http://schemas.microsoft.com/office/powerpoint/2010/main" val="4154679804"/>
+      </p:ext>
+    </p:extLst>
+  </p:cSld>
+  <p:clrMapOvr>
+    <a:masterClrMapping/>
+  </p:clrMapOvr>
+  <p:timing>
+    <p:tnLst>
+      <p:par>
+        <p:cTn id="1" dur="indefinite" restart="never" nodeType="tmRoot">
+          <p:childTnLst>
+            <p:seq concurrent="1" nextAc="seek">
+              <p:cTn id="2" dur="indefinite" nodeType="mainSeq">
+                <p:childTnLst>
+                  <p:par>
+                    <p:cTn id="3" fill="hold">
+                      <p:stCondLst>
+                        <p:cond delay="indefinite"/>
+                        <p:cond evt="onBegin" delay="0">
+                          <p:tn val="2"/>
+                        </p:cond>
+                      </p:stCondLst>
+                      <p:childTnLst>
+                        <p:par>
+                          <p:cTn id="4" fill="hold">
+                            <p:stCondLst>
+                              <p:cond delay="0"/>
+                            </p:stCondLst>
+                            <p:childTnLst>
+                              <p:par>
+                                <p:cTn id="5" presetID="23" presetClass="entr" presetSubtype="16" fill="hold" nodeType="withEffect">
+                                  <p:stCondLst>
+                                    <p:cond delay="0"/>
+                                  </p:stCondLst>
+                                  <p:childTnLst>
+                                    <p:set>
+                                      <p:cBhvr>
+                                        <p:cTn id="6" dur="1" fill="hold">
+                                          <p:stCondLst>
+                                            <p:cond delay="0"/>
+                                          </p:stCondLst>
+                                        </p:cTn>
+                                        <p:tgtEl>
+                                          <p:spTgt spid="4"/>
+                                        </p:tgtEl>
+                                        <p:attrNameLst>
+                                          <p:attrName>style.visibility</p:attrName>
+                                        </p:attrNameLst>
+                                      </p:cBhvr>
+                                      <p:to>
+                                        <p:strVal val="visible"/>
+                                      </p:to>
+                                    </p:set>
+                                    <p:anim calcmode="lin" valueType="num">
+                                      <p:cBhvr>
+                                        <p:cTn id="7" dur="300" fill="hold"/>
+                                        <p:tgtEl>
+                                          <p:spTgt spid="4"/>
+                                        </p:tgtEl>
+                                        <p:attrNameLst>
+                                          <p:attrName>ppt_w</p:attrName>
+                                        </p:attrNameLst>
+                                      </p:cBhvr>
+                                      <p:tavLst>
+                                        <p:tav tm="0">
+                                          <p:val>
+                                            <p:fltVal val="0"/>
+                                          </p:val>
+                                        </p:tav>
+                                        <p:tav tm="100000">
+                                          <p:val>
+                                            <p:strVal val="#ppt_w"/>
+                                          </p:val>
+                                        </p:tav>
+                                      </p:tavLst>
+                                    </p:anim>
+                                    <p:anim calcmode="lin" valueType="num">
+                                      <p:cBhvr>
+                                        <p:cTn id="8" dur="300" fill="hold"/>
+                                        <p:tgtEl>
+                                          <p:spTgt spid="4"/>
+                                        </p:tgtEl>
+                                        <p:attrNameLst>
+                                          <p:attrName>ppt_h</p:attrName>
+                                        </p:attrNameLst>
+                                      </p:cBhvr>
+                                      <p:tavLst>
+                                        <p:tav tm="0">
+                                          <p:val>
+                                            <p:fltVal val="0"/>
+                                          </p:val>
+                                        </p:tav>
+                                        <p:tav tm="100000">
+                                          <p:val>
+                                            <p:strVal val="#ppt_h"/>
+                                          </p:val>
+                                        </p:tav>
+                                      </p:tavLst>
+                                    </p:anim>
+                                  </p:childTnLst>
+                                </p:cTn>
+                              </p:par>
+                              <p:par>
+                                <p:cTn id="9" presetID="6" presetClass="exit" presetSubtype="32" fill="hold" nodeType="withEffect">
+                                  <p:stCondLst>
+                                    <p:cond delay="150"/>
+                                  </p:stCondLst>
+                                  <p:childTnLst>
+                                    <p:animEffect transition="out" filter="circle(out)">
+                                      <p:cBhvr>
+                                        <p:cTn id="10" dur="300"/>
+                                        <p:tgtEl>
+                                          <p:spTgt spid="4"/>
+                                        </p:tgtEl>
+                                      </p:cBhvr>
+                                    </p:animEffect>
+                                    <p:set>
+                                      <p:cBhvr>
+                                        <p:cTn id="11" dur="1" fill="hold">
+                                          <p:stCondLst>
+                                            <p:cond delay="299"/>
+                                          </p:stCondLst>
+                                        </p:cTn>
+                                        <p:tgtEl>
+                                          <p:spTgt spid="4"/>
+                                        </p:tgtEl>
+                                        <p:attrNameLst>
+                                          <p:attrName>style.visibility</p:attrName>
+                                        </p:attrNameLst>
+                                      </p:cBhvr>
+                                      <p:to>
+                                        <p:strVal val="hidden"/>
+                                      </p:to>
+                                    </p:set>
+                                  </p:childTnLst>
+                                </p:cTn>
+                              </p:par>
+                            </p:childTnLst>
+                          </p:cTn>
+                        </p:par>
+                      </p:childTnLst>
+                    </p:cTn>
+                  </p:par>
+                </p:childTnLst>
+              </p:cTn>
+              <p:prevCondLst>
+                <p:cond evt="onPrev" delay="0">
+                  <p:tgtEl>
+                    <p:sldTgt/>
+                  </p:tgtEl>
+                </p:cond>
+              </p:prevCondLst>
+              <p:nextCondLst>
+                <p:cond evt="onNext" delay="0">
+                  <p:tgtEl>
+                    <p:sldTgt/>
+                  </p:tgtEl>
+                </p:cond>
+              </p:nextCondLst>
+            </p:seq>
+          </p:childTnLst>
+        </p:cTn>
+      </p:par>
+    </p:tnLst>
+  </p:timing>
+</p:sld>
+</file>
+
+<file path=ppt/slides/slide18.xml><?xml version="1.0" encoding="utf-8"?>
+<p:sld xmlns:a="http://schemas.openxmlformats.org/drawingml/2006/main" xmlns:r="http://schemas.openxmlformats.org/officeDocument/2006/relationships" xmlns:p="http://schemas.openxmlformats.org/presentationml/2006/main">
+  <p:cSld>
+    <p:spTree>
+      <p:nvGrpSpPr>
+        <p:cNvPr id="1" name=""/>
+        <p:cNvGrpSpPr/>
+        <p:nvPr/>
+      </p:nvGrpSpPr>
+      <p:grpSpPr>
+        <a:xfrm>
+          <a:off x="0" y="0"/>
+          <a:ext cx="0" cy="0"/>
+          <a:chOff x="0" y="0"/>
+          <a:chExt cx="0" cy="0"/>
+        </a:xfrm>
+      </p:grpSpPr>
+      <p:sp>
+        <p:nvSpPr>
+          <p:cNvPr id="2" name="标题 1">
+            <a:extLst>
+              <a:ext uri="{FF2B5EF4-FFF2-40B4-BE49-F238E27FC236}">
+                <a16:creationId xmlns:a16="http://schemas.microsoft.com/office/drawing/2014/main" id="{303601F6-22FE-437C-8B98-2E84C2ABC16F}"/>
+              </a:ext>
+            </a:extLst>
+          </p:cNvPr>
+          <p:cNvSpPr>
+            <a:spLocks noGrp="1"/>
+          </p:cNvSpPr>
+          <p:nvPr>
+            <p:ph type="title"/>
+          </p:nvPr>
+        </p:nvSpPr>
+        <p:spPr/>
+        <p:txBody>
+          <a:bodyPr/>
+          <a:lstStyle/>
+          <a:p>
+            <a:endParaRPr lang="zh-CN" altLang="en-US"/>
+          </a:p>
+        </p:txBody>
+      </p:sp>
+      <p:sp>
+        <p:nvSpPr>
+          <p:cNvPr id="3" name="内容占位符 2">
+            <a:extLst>
+              <a:ext uri="{FF2B5EF4-FFF2-40B4-BE49-F238E27FC236}">
+                <a16:creationId xmlns:a16="http://schemas.microsoft.com/office/drawing/2014/main" id="{A9CC2D86-BD04-4B12-AEDE-830050C19C34}"/>
+              </a:ext>
+            </a:extLst>
+          </p:cNvPr>
+          <p:cNvSpPr>
+            <a:spLocks noGrp="1"/>
+          </p:cNvSpPr>
+          <p:nvPr>
+            <p:ph idx="1"/>
+          </p:nvPr>
+        </p:nvSpPr>
+        <p:spPr/>
+        <p:txBody>
+          <a:bodyPr/>
+          <a:lstStyle/>
+          <a:p>
+            <a:r>
+              <a:rPr lang="en-US" altLang="zh-CN" dirty="0"/>
+              <a:t>1. </a:t>
+            </a:r>
+            <a:r>
+              <a:rPr lang="zh-CN" altLang="en-US" dirty="0"/>
+              <a:t>内圈的圆，更多进入效果，基本缩放</a:t>
+            </a:r>
+            <a:endParaRPr lang="en-US" altLang="zh-CN" dirty="0"/>
+          </a:p>
+          <a:p>
+            <a:r>
+              <a:rPr lang="en-US" altLang="zh-CN" dirty="0"/>
+              <a:t>2. </a:t>
+            </a:r>
+            <a:r>
+              <a:rPr lang="zh-CN" altLang="en-US" dirty="0"/>
+              <a:t>添加动画里面，强调选择放大缩小，缩放大小调整为</a:t>
+            </a:r>
+            <a:r>
+              <a:rPr lang="en-US" altLang="zh-CN" dirty="0"/>
+              <a:t>120</a:t>
+            </a:r>
+          </a:p>
+          <a:p>
+            <a:r>
+              <a:rPr lang="en-US" altLang="zh-CN" dirty="0"/>
+              <a:t>3. </a:t>
+            </a:r>
+            <a:r>
+              <a:rPr lang="zh-CN" altLang="en-US" dirty="0"/>
+              <a:t>添加动画里面，退出动画淡化</a:t>
+            </a:r>
+            <a:endParaRPr lang="en-US" altLang="zh-CN" dirty="0"/>
+          </a:p>
+          <a:p>
+            <a:r>
+              <a:rPr lang="en-US" altLang="zh-CN" dirty="0"/>
+              <a:t>4. </a:t>
+            </a:r>
+            <a:r>
+              <a:rPr lang="zh-CN" altLang="en-US" dirty="0"/>
+              <a:t>第一个持续时间</a:t>
+            </a:r>
+            <a:r>
+              <a:rPr lang="en-US" altLang="zh-CN" dirty="0"/>
+              <a:t>0.25</a:t>
+            </a:r>
+            <a:r>
+              <a:rPr lang="zh-CN" altLang="en-US" dirty="0"/>
+              <a:t>秒</a:t>
+            </a:r>
+            <a:endParaRPr lang="en-US" altLang="zh-CN" dirty="0"/>
+          </a:p>
+          <a:p>
+            <a:r>
+              <a:rPr lang="en-US" altLang="zh-CN" dirty="0"/>
+              <a:t>5. </a:t>
+            </a:r>
+            <a:r>
+              <a:rPr lang="zh-CN" altLang="en-US" dirty="0"/>
+              <a:t>第二个持续时间</a:t>
+            </a:r>
+            <a:r>
+              <a:rPr lang="en-US" altLang="zh-CN" dirty="0"/>
+              <a:t>0.5</a:t>
+            </a:r>
+            <a:r>
+              <a:rPr lang="zh-CN" altLang="en-US" dirty="0"/>
+              <a:t>秒</a:t>
+            </a:r>
+            <a:r>
+              <a:rPr lang="en-US" altLang="zh-CN" dirty="0"/>
+              <a:t>+0.25</a:t>
+            </a:r>
+            <a:r>
+              <a:rPr lang="zh-CN" altLang="en-US" dirty="0"/>
+              <a:t>延迟</a:t>
+            </a:r>
+            <a:endParaRPr lang="en-US" altLang="zh-CN" dirty="0"/>
+          </a:p>
+          <a:p>
+            <a:r>
+              <a:rPr lang="en-US" altLang="zh-CN" dirty="0"/>
+              <a:t>6. </a:t>
+            </a:r>
+            <a:r>
+              <a:rPr lang="zh-CN" altLang="en-US" dirty="0"/>
+              <a:t>第三个持续时间</a:t>
+            </a:r>
+            <a:r>
+              <a:rPr lang="en-US" altLang="zh-CN" dirty="0"/>
+              <a:t>0.25</a:t>
+            </a:r>
+            <a:r>
+              <a:rPr lang="zh-CN" altLang="en-US" dirty="0"/>
+              <a:t>秒</a:t>
+            </a:r>
+            <a:r>
+              <a:rPr lang="en-US" altLang="zh-CN" dirty="0"/>
+              <a:t>+0.25</a:t>
+            </a:r>
+            <a:r>
+              <a:rPr lang="zh-CN" altLang="en-US" dirty="0"/>
+              <a:t>延迟</a:t>
+            </a:r>
           </a:p>
         </p:txBody>
       </p:sp>
@@ -7784,6 +8478,1007 @@
   <p:clrMapOvr>
     <a:masterClrMapping/>
   </p:clrMapOvr>
+  <p:timing>
+    <p:tnLst>
+      <p:par>
+        <p:cTn id="1" dur="indefinite" restart="never" nodeType="tmRoot">
+          <p:childTnLst>
+            <p:seq concurrent="1" nextAc="seek">
+              <p:cTn id="2" dur="indefinite" nodeType="mainSeq">
+                <p:childTnLst>
+                  <p:par>
+                    <p:cTn id="3" fill="hold">
+                      <p:stCondLst>
+                        <p:cond delay="indefinite"/>
+                        <p:cond evt="onBegin" delay="0">
+                          <p:tn val="2"/>
+                        </p:cond>
+                      </p:stCondLst>
+                      <p:childTnLst>
+                        <p:par>
+                          <p:cTn id="4" fill="hold">
+                            <p:stCondLst>
+                              <p:cond delay="0"/>
+                            </p:stCondLst>
+                            <p:childTnLst>
+                              <p:par>
+                                <p:cTn id="5" presetID="23" presetClass="entr" presetSubtype="16" fill="hold" grpId="0" nodeType="withEffect">
+                                  <p:stCondLst>
+                                    <p:cond delay="0"/>
+                                  </p:stCondLst>
+                                  <p:childTnLst>
+                                    <p:set>
+                                      <p:cBhvr>
+                                        <p:cTn id="6" dur="1" fill="hold">
+                                          <p:stCondLst>
+                                            <p:cond delay="0"/>
+                                          </p:stCondLst>
+                                        </p:cTn>
+                                        <p:tgtEl>
+                                          <p:spTgt spid="23"/>
+                                        </p:tgtEl>
+                                        <p:attrNameLst>
+                                          <p:attrName>style.visibility</p:attrName>
+                                        </p:attrNameLst>
+                                      </p:cBhvr>
+                                      <p:to>
+                                        <p:strVal val="visible"/>
+                                      </p:to>
+                                    </p:set>
+                                    <p:anim calcmode="lin" valueType="num">
+                                      <p:cBhvr>
+                                        <p:cTn id="7" dur="250" fill="hold"/>
+                                        <p:tgtEl>
+                                          <p:spTgt spid="23"/>
+                                        </p:tgtEl>
+                                        <p:attrNameLst>
+                                          <p:attrName>ppt_w</p:attrName>
+                                        </p:attrNameLst>
+                                      </p:cBhvr>
+                                      <p:tavLst>
+                                        <p:tav tm="0">
+                                          <p:val>
+                                            <p:fltVal val="0"/>
+                                          </p:val>
+                                        </p:tav>
+                                        <p:tav tm="100000">
+                                          <p:val>
+                                            <p:strVal val="#ppt_w"/>
+                                          </p:val>
+                                        </p:tav>
+                                      </p:tavLst>
+                                    </p:anim>
+                                    <p:anim calcmode="lin" valueType="num">
+                                      <p:cBhvr>
+                                        <p:cTn id="8" dur="250" fill="hold"/>
+                                        <p:tgtEl>
+                                          <p:spTgt spid="23"/>
+                                        </p:tgtEl>
+                                        <p:attrNameLst>
+                                          <p:attrName>ppt_h</p:attrName>
+                                        </p:attrNameLst>
+                                      </p:cBhvr>
+                                      <p:tavLst>
+                                        <p:tav tm="0">
+                                          <p:val>
+                                            <p:fltVal val="0"/>
+                                          </p:val>
+                                        </p:tav>
+                                        <p:tav tm="100000">
+                                          <p:val>
+                                            <p:strVal val="#ppt_h"/>
+                                          </p:val>
+                                        </p:tav>
+                                      </p:tavLst>
+                                    </p:anim>
+                                  </p:childTnLst>
+                                </p:cTn>
+                              </p:par>
+                              <p:par>
+                                <p:cTn id="9" presetID="6" presetClass="emph" presetSubtype="0" fill="hold" grpId="1" nodeType="withEffect">
+                                  <p:stCondLst>
+                                    <p:cond delay="250"/>
+                                  </p:stCondLst>
+                                  <p:childTnLst>
+                                    <p:animScale>
+                                      <p:cBhvr>
+                                        <p:cTn id="10" dur="500" fill="hold"/>
+                                        <p:tgtEl>
+                                          <p:spTgt spid="23"/>
+                                        </p:tgtEl>
+                                      </p:cBhvr>
+                                      <p:by x="120000" y="120000"/>
+                                    </p:animScale>
+                                  </p:childTnLst>
+                                </p:cTn>
+                              </p:par>
+                              <p:par>
+                                <p:cTn id="11" presetID="10" presetClass="exit" presetSubtype="0" fill="hold" grpId="2" nodeType="withEffect">
+                                  <p:stCondLst>
+                                    <p:cond delay="500"/>
+                                  </p:stCondLst>
+                                  <p:childTnLst>
+                                    <p:animEffect transition="out" filter="fade">
+                                      <p:cBhvr>
+                                        <p:cTn id="12" dur="250"/>
+                                        <p:tgtEl>
+                                          <p:spTgt spid="23"/>
+                                        </p:tgtEl>
+                                      </p:cBhvr>
+                                    </p:animEffect>
+                                    <p:set>
+                                      <p:cBhvr>
+                                        <p:cTn id="13" dur="1" fill="hold">
+                                          <p:stCondLst>
+                                            <p:cond delay="249"/>
+                                          </p:stCondLst>
+                                        </p:cTn>
+                                        <p:tgtEl>
+                                          <p:spTgt spid="23"/>
+                                        </p:tgtEl>
+                                        <p:attrNameLst>
+                                          <p:attrName>style.visibility</p:attrName>
+                                        </p:attrNameLst>
+                                      </p:cBhvr>
+                                      <p:to>
+                                        <p:strVal val="hidden"/>
+                                      </p:to>
+                                    </p:set>
+                                  </p:childTnLst>
+                                </p:cTn>
+                              </p:par>
+                            </p:childTnLst>
+                          </p:cTn>
+                        </p:par>
+                      </p:childTnLst>
+                    </p:cTn>
+                  </p:par>
+                </p:childTnLst>
+              </p:cTn>
+              <p:prevCondLst>
+                <p:cond evt="onPrev" delay="0">
+                  <p:tgtEl>
+                    <p:sldTgt/>
+                  </p:tgtEl>
+                </p:cond>
+              </p:prevCondLst>
+              <p:nextCondLst>
+                <p:cond evt="onNext" delay="0">
+                  <p:tgtEl>
+                    <p:sldTgt/>
+                  </p:tgtEl>
+                </p:cond>
+              </p:nextCondLst>
+            </p:seq>
+          </p:childTnLst>
+        </p:cTn>
+      </p:par>
+    </p:tnLst>
+    <p:bldLst>
+      <p:bldP spid="23" grpId="0" animBg="1"/>
+      <p:bldP spid="23" grpId="1" animBg="1"/>
+      <p:bldP spid="23" grpId="2" animBg="1"/>
+    </p:bldLst>
+  </p:timing>
+</p:sld>
+</file>
+
+<file path=ppt/slides/slide19.xml><?xml version="1.0" encoding="utf-8"?>
+<p:sld xmlns:a="http://schemas.openxmlformats.org/drawingml/2006/main" xmlns:r="http://schemas.openxmlformats.org/officeDocument/2006/relationships" xmlns:p="http://schemas.openxmlformats.org/presentationml/2006/main">
+  <p:cSld>
+    <p:spTree>
+      <p:nvGrpSpPr>
+        <p:cNvPr id="1" name=""/>
+        <p:cNvGrpSpPr/>
+        <p:nvPr/>
+      </p:nvGrpSpPr>
+      <p:grpSpPr>
+        <a:xfrm>
+          <a:off x="0" y="0"/>
+          <a:ext cx="0" cy="0"/>
+          <a:chOff x="0" y="0"/>
+          <a:chExt cx="0" cy="0"/>
+        </a:xfrm>
+      </p:grpSpPr>
+      <p:sp>
+        <p:nvSpPr>
+          <p:cNvPr id="2" name="标题 1">
+            <a:extLst>
+              <a:ext uri="{FF2B5EF4-FFF2-40B4-BE49-F238E27FC236}">
+                <a16:creationId xmlns:a16="http://schemas.microsoft.com/office/drawing/2014/main" id="{206B4946-0417-4619-A42E-737B55326E27}"/>
+              </a:ext>
+            </a:extLst>
+          </p:cNvPr>
+          <p:cNvSpPr>
+            <a:spLocks noGrp="1"/>
+          </p:cNvSpPr>
+          <p:nvPr>
+            <p:ph type="title"/>
+          </p:nvPr>
+        </p:nvSpPr>
+        <p:spPr/>
+        <p:txBody>
+          <a:bodyPr/>
+          <a:lstStyle/>
+          <a:p>
+            <a:endParaRPr lang="zh-CN" altLang="en-US"/>
+          </a:p>
+        </p:txBody>
+      </p:sp>
+      <p:sp>
+        <p:nvSpPr>
+          <p:cNvPr id="3" name="内容占位符 2">
+            <a:extLst>
+              <a:ext uri="{FF2B5EF4-FFF2-40B4-BE49-F238E27FC236}">
+                <a16:creationId xmlns:a16="http://schemas.microsoft.com/office/drawing/2014/main" id="{5F22D21D-AEEA-47F5-821C-8DA8F1E1B576}"/>
+              </a:ext>
+            </a:extLst>
+          </p:cNvPr>
+          <p:cNvSpPr>
+            <a:spLocks noGrp="1"/>
+          </p:cNvSpPr>
+          <p:nvPr>
+            <p:ph idx="1"/>
+          </p:nvPr>
+        </p:nvSpPr>
+        <p:spPr/>
+        <p:txBody>
+          <a:bodyPr/>
+          <a:lstStyle/>
+          <a:p>
+            <a:r>
+              <a:rPr lang="en-US" altLang="zh-CN" dirty="0"/>
+              <a:t>7. </a:t>
+            </a:r>
+            <a:r>
+              <a:rPr lang="zh-CN" altLang="en-US" dirty="0"/>
+              <a:t>内圈动画刷，刷给外圈</a:t>
+            </a:r>
+            <a:endParaRPr lang="en-US" altLang="zh-CN" dirty="0"/>
+          </a:p>
+          <a:p>
+            <a:r>
+              <a:rPr lang="en-US" altLang="zh-CN" dirty="0"/>
+              <a:t>8. </a:t>
+            </a:r>
+            <a:r>
+              <a:rPr lang="zh-CN" altLang="en-US" dirty="0"/>
+              <a:t>组合三淡化修改成形状，然后时间缩短为</a:t>
+            </a:r>
+            <a:r>
+              <a:rPr lang="en-US" altLang="zh-CN" dirty="0"/>
+              <a:t>0.5</a:t>
+            </a:r>
+            <a:r>
+              <a:rPr lang="zh-CN" altLang="en-US" dirty="0"/>
+              <a:t>秒</a:t>
+            </a:r>
+            <a:r>
+              <a:rPr lang="en-US" altLang="zh-CN" dirty="0"/>
+              <a:t>+</a:t>
+            </a:r>
+            <a:r>
+              <a:rPr lang="zh-CN" altLang="en-US" dirty="0"/>
+              <a:t>延迟</a:t>
+            </a:r>
+            <a:r>
+              <a:rPr lang="en-US" altLang="zh-CN" dirty="0"/>
+              <a:t>0.25</a:t>
+            </a:r>
+            <a:r>
+              <a:rPr lang="zh-CN" altLang="en-US" dirty="0"/>
+              <a:t>秒</a:t>
+            </a:r>
+            <a:endParaRPr lang="en-US" altLang="zh-CN" dirty="0"/>
+          </a:p>
+          <a:p>
+            <a:endParaRPr lang="zh-CN" altLang="en-US" dirty="0"/>
+          </a:p>
+        </p:txBody>
+      </p:sp>
+      <p:grpSp>
+        <p:nvGrpSpPr>
+          <p:cNvPr id="4" name="组合 3">
+            <a:extLst>
+              <a:ext uri="{FF2B5EF4-FFF2-40B4-BE49-F238E27FC236}">
+                <a16:creationId xmlns:a16="http://schemas.microsoft.com/office/drawing/2014/main" id="{7592F383-C0A4-499F-8456-D54897372F77}"/>
+              </a:ext>
+            </a:extLst>
+          </p:cNvPr>
+          <p:cNvGrpSpPr/>
+          <p:nvPr/>
+        </p:nvGrpSpPr>
+        <p:grpSpPr>
+          <a:xfrm>
+            <a:off x="4553917" y="3044490"/>
+            <a:ext cx="2886942" cy="2886942"/>
+            <a:chOff x="4553917" y="3044490"/>
+            <a:chExt cx="2886942" cy="2886942"/>
+          </a:xfrm>
+        </p:grpSpPr>
+        <p:cxnSp>
+          <p:nvCxnSpPr>
+            <p:cNvPr id="5" name="直接连接符 4">
+              <a:extLst>
+                <a:ext uri="{FF2B5EF4-FFF2-40B4-BE49-F238E27FC236}">
+                  <a16:creationId xmlns:a16="http://schemas.microsoft.com/office/drawing/2014/main" id="{D9F689F3-2527-47D8-A75E-56571D7F98DA}"/>
+                </a:ext>
+              </a:extLst>
+            </p:cNvPr>
+            <p:cNvCxnSpPr>
+              <a:cxnSpLocks/>
+            </p:cNvCxnSpPr>
+            <p:nvPr/>
+          </p:nvCxnSpPr>
+          <p:spPr>
+            <a:xfrm rot="60000">
+              <a:off x="6016237" y="3044490"/>
+              <a:ext cx="0" cy="727271"/>
+            </a:xfrm>
+            <a:prstGeom prst="line">
+              <a:avLst/>
+            </a:prstGeom>
+            <a:ln/>
+          </p:spPr>
+          <p:style>
+            <a:lnRef idx="3">
+              <a:schemeClr val="dk1"/>
+            </a:lnRef>
+            <a:fillRef idx="0">
+              <a:schemeClr val="dk1"/>
+            </a:fillRef>
+            <a:effectRef idx="2">
+              <a:schemeClr val="dk1"/>
+            </a:effectRef>
+            <a:fontRef idx="minor">
+              <a:schemeClr val="tx1"/>
+            </a:fontRef>
+          </p:style>
+        </p:cxnSp>
+        <p:cxnSp>
+          <p:nvCxnSpPr>
+            <p:cNvPr id="6" name="直接连接符 5">
+              <a:extLst>
+                <a:ext uri="{FF2B5EF4-FFF2-40B4-BE49-F238E27FC236}">
+                  <a16:creationId xmlns:a16="http://schemas.microsoft.com/office/drawing/2014/main" id="{3B82CD23-2DA1-48D8-8226-538972A2553E}"/>
+                </a:ext>
+              </a:extLst>
+            </p:cNvPr>
+            <p:cNvCxnSpPr>
+              <a:cxnSpLocks/>
+            </p:cNvCxnSpPr>
+            <p:nvPr/>
+          </p:nvCxnSpPr>
+          <p:spPr>
+            <a:xfrm rot="2760000">
+              <a:off x="6774275" y="3374094"/>
+              <a:ext cx="0" cy="727271"/>
+            </a:xfrm>
+            <a:prstGeom prst="line">
+              <a:avLst/>
+            </a:prstGeom>
+            <a:ln/>
+          </p:spPr>
+          <p:style>
+            <a:lnRef idx="3">
+              <a:schemeClr val="dk1"/>
+            </a:lnRef>
+            <a:fillRef idx="0">
+              <a:schemeClr val="dk1"/>
+            </a:fillRef>
+            <a:effectRef idx="2">
+              <a:schemeClr val="dk1"/>
+            </a:effectRef>
+            <a:fontRef idx="minor">
+              <a:schemeClr val="tx1"/>
+            </a:fontRef>
+          </p:style>
+        </p:cxnSp>
+        <p:cxnSp>
+          <p:nvCxnSpPr>
+            <p:cNvPr id="7" name="直接连接符 6">
+              <a:extLst>
+                <a:ext uri="{FF2B5EF4-FFF2-40B4-BE49-F238E27FC236}">
+                  <a16:creationId xmlns:a16="http://schemas.microsoft.com/office/drawing/2014/main" id="{95F18CD6-0E59-409E-8A9A-DD4B3D2DE694}"/>
+                </a:ext>
+              </a:extLst>
+            </p:cNvPr>
+            <p:cNvCxnSpPr>
+              <a:cxnSpLocks/>
+            </p:cNvCxnSpPr>
+            <p:nvPr/>
+          </p:nvCxnSpPr>
+          <p:spPr>
+            <a:xfrm rot="5460000">
+              <a:off x="7077224" y="4143173"/>
+              <a:ext cx="0" cy="727271"/>
+            </a:xfrm>
+            <a:prstGeom prst="line">
+              <a:avLst/>
+            </a:prstGeom>
+            <a:ln/>
+          </p:spPr>
+          <p:style>
+            <a:lnRef idx="3">
+              <a:schemeClr val="dk1"/>
+            </a:lnRef>
+            <a:fillRef idx="0">
+              <a:schemeClr val="dk1"/>
+            </a:fillRef>
+            <a:effectRef idx="2">
+              <a:schemeClr val="dk1"/>
+            </a:effectRef>
+            <a:fontRef idx="minor">
+              <a:schemeClr val="tx1"/>
+            </a:fontRef>
+          </p:style>
+        </p:cxnSp>
+        <p:cxnSp>
+          <p:nvCxnSpPr>
+            <p:cNvPr id="8" name="直接连接符 7">
+              <a:extLst>
+                <a:ext uri="{FF2B5EF4-FFF2-40B4-BE49-F238E27FC236}">
+                  <a16:creationId xmlns:a16="http://schemas.microsoft.com/office/drawing/2014/main" id="{D6C3C0A4-3EAE-442B-8057-38E633750F27}"/>
+                </a:ext>
+              </a:extLst>
+            </p:cNvPr>
+            <p:cNvCxnSpPr>
+              <a:cxnSpLocks/>
+            </p:cNvCxnSpPr>
+            <p:nvPr/>
+          </p:nvCxnSpPr>
+          <p:spPr>
+            <a:xfrm rot="8160000">
+              <a:off x="6747619" y="4901212"/>
+              <a:ext cx="0" cy="727271"/>
+            </a:xfrm>
+            <a:prstGeom prst="line">
+              <a:avLst/>
+            </a:prstGeom>
+            <a:ln/>
+          </p:spPr>
+          <p:style>
+            <a:lnRef idx="3">
+              <a:schemeClr val="dk1"/>
+            </a:lnRef>
+            <a:fillRef idx="0">
+              <a:schemeClr val="dk1"/>
+            </a:fillRef>
+            <a:effectRef idx="2">
+              <a:schemeClr val="dk1"/>
+            </a:effectRef>
+            <a:fontRef idx="minor">
+              <a:schemeClr val="tx1"/>
+            </a:fontRef>
+          </p:style>
+        </p:cxnSp>
+        <p:cxnSp>
+          <p:nvCxnSpPr>
+            <p:cNvPr id="9" name="直接连接符 8">
+              <a:extLst>
+                <a:ext uri="{FF2B5EF4-FFF2-40B4-BE49-F238E27FC236}">
+                  <a16:creationId xmlns:a16="http://schemas.microsoft.com/office/drawing/2014/main" id="{74C2827F-A084-4941-80A6-ECBC0027EFFA}"/>
+                </a:ext>
+              </a:extLst>
+            </p:cNvPr>
+            <p:cNvCxnSpPr>
+              <a:cxnSpLocks/>
+            </p:cNvCxnSpPr>
+            <p:nvPr/>
+          </p:nvCxnSpPr>
+          <p:spPr>
+            <a:xfrm rot="10860000">
+              <a:off x="5978540" y="5204161"/>
+              <a:ext cx="0" cy="727271"/>
+            </a:xfrm>
+            <a:prstGeom prst="line">
+              <a:avLst/>
+            </a:prstGeom>
+            <a:ln/>
+          </p:spPr>
+          <p:style>
+            <a:lnRef idx="3">
+              <a:schemeClr val="dk1"/>
+            </a:lnRef>
+            <a:fillRef idx="0">
+              <a:schemeClr val="dk1"/>
+            </a:fillRef>
+            <a:effectRef idx="2">
+              <a:schemeClr val="dk1"/>
+            </a:effectRef>
+            <a:fontRef idx="minor">
+              <a:schemeClr val="tx1"/>
+            </a:fontRef>
+          </p:style>
+        </p:cxnSp>
+        <p:cxnSp>
+          <p:nvCxnSpPr>
+            <p:cNvPr id="10" name="直接连接符 9">
+              <a:extLst>
+                <a:ext uri="{FF2B5EF4-FFF2-40B4-BE49-F238E27FC236}">
+                  <a16:creationId xmlns:a16="http://schemas.microsoft.com/office/drawing/2014/main" id="{BC1BC0A8-7F24-431D-BDEC-3536EC2C6AC2}"/>
+                </a:ext>
+              </a:extLst>
+            </p:cNvPr>
+            <p:cNvCxnSpPr>
+              <a:cxnSpLocks/>
+            </p:cNvCxnSpPr>
+            <p:nvPr/>
+          </p:nvCxnSpPr>
+          <p:spPr>
+            <a:xfrm rot="13560000">
+              <a:off x="5220501" y="4874556"/>
+              <a:ext cx="0" cy="727271"/>
+            </a:xfrm>
+            <a:prstGeom prst="line">
+              <a:avLst/>
+            </a:prstGeom>
+            <a:ln/>
+          </p:spPr>
+          <p:style>
+            <a:lnRef idx="3">
+              <a:schemeClr val="dk1"/>
+            </a:lnRef>
+            <a:fillRef idx="0">
+              <a:schemeClr val="dk1"/>
+            </a:fillRef>
+            <a:effectRef idx="2">
+              <a:schemeClr val="dk1"/>
+            </a:effectRef>
+            <a:fontRef idx="minor">
+              <a:schemeClr val="tx1"/>
+            </a:fontRef>
+          </p:style>
+        </p:cxnSp>
+        <p:cxnSp>
+          <p:nvCxnSpPr>
+            <p:cNvPr id="11" name="直接连接符 10">
+              <a:extLst>
+                <a:ext uri="{FF2B5EF4-FFF2-40B4-BE49-F238E27FC236}">
+                  <a16:creationId xmlns:a16="http://schemas.microsoft.com/office/drawing/2014/main" id="{0C1EB937-9D53-4D67-AA15-BFE9E232A0DC}"/>
+                </a:ext>
+              </a:extLst>
+            </p:cNvPr>
+            <p:cNvCxnSpPr>
+              <a:cxnSpLocks/>
+            </p:cNvCxnSpPr>
+            <p:nvPr/>
+          </p:nvCxnSpPr>
+          <p:spPr>
+            <a:xfrm rot="16260000">
+              <a:off x="4917553" y="4105477"/>
+              <a:ext cx="0" cy="727271"/>
+            </a:xfrm>
+            <a:prstGeom prst="line">
+              <a:avLst/>
+            </a:prstGeom>
+            <a:ln/>
+          </p:spPr>
+          <p:style>
+            <a:lnRef idx="3">
+              <a:schemeClr val="dk1"/>
+            </a:lnRef>
+            <a:fillRef idx="0">
+              <a:schemeClr val="dk1"/>
+            </a:fillRef>
+            <a:effectRef idx="2">
+              <a:schemeClr val="dk1"/>
+            </a:effectRef>
+            <a:fontRef idx="minor">
+              <a:schemeClr val="tx1"/>
+            </a:fontRef>
+          </p:style>
+        </p:cxnSp>
+        <p:cxnSp>
+          <p:nvCxnSpPr>
+            <p:cNvPr id="12" name="直接连接符 11">
+              <a:extLst>
+                <a:ext uri="{FF2B5EF4-FFF2-40B4-BE49-F238E27FC236}">
+                  <a16:creationId xmlns:a16="http://schemas.microsoft.com/office/drawing/2014/main" id="{76809D2A-E103-442B-AC58-29BD62E5C54C}"/>
+                </a:ext>
+              </a:extLst>
+            </p:cNvPr>
+            <p:cNvCxnSpPr>
+              <a:cxnSpLocks/>
+            </p:cNvCxnSpPr>
+            <p:nvPr/>
+          </p:nvCxnSpPr>
+          <p:spPr>
+            <a:xfrm rot="18960000">
+              <a:off x="5247157" y="3347438"/>
+              <a:ext cx="0" cy="727271"/>
+            </a:xfrm>
+            <a:prstGeom prst="line">
+              <a:avLst/>
+            </a:prstGeom>
+            <a:ln/>
+          </p:spPr>
+          <p:style>
+            <a:lnRef idx="3">
+              <a:schemeClr val="dk1"/>
+            </a:lnRef>
+            <a:fillRef idx="0">
+              <a:schemeClr val="dk1"/>
+            </a:fillRef>
+            <a:effectRef idx="2">
+              <a:schemeClr val="dk1"/>
+            </a:effectRef>
+            <a:fontRef idx="minor">
+              <a:schemeClr val="tx1"/>
+            </a:fontRef>
+          </p:style>
+        </p:cxnSp>
+      </p:grpSp>
+      <p:sp>
+        <p:nvSpPr>
+          <p:cNvPr id="13" name="流程图: 接点 12">
+            <a:extLst>
+              <a:ext uri="{FF2B5EF4-FFF2-40B4-BE49-F238E27FC236}">
+                <a16:creationId xmlns:a16="http://schemas.microsoft.com/office/drawing/2014/main" id="{A3EF9A8F-DDF5-4741-8EB2-CAFE9C4380A8}"/>
+              </a:ext>
+            </a:extLst>
+          </p:cNvPr>
+          <p:cNvSpPr/>
+          <p:nvPr/>
+        </p:nvSpPr>
+        <p:spPr>
+          <a:xfrm>
+            <a:off x="5261236" y="3801014"/>
+            <a:ext cx="1420160" cy="1365119"/>
+          </a:xfrm>
+          <a:prstGeom prst="flowChartConnector">
+            <a:avLst/>
+          </a:prstGeom>
+          <a:noFill/>
+          <a:ln w="19050">
+            <a:solidFill>
+              <a:schemeClr val="tx1"/>
+            </a:solidFill>
+          </a:ln>
+        </p:spPr>
+        <p:style>
+          <a:lnRef idx="2">
+            <a:schemeClr val="accent1">
+              <a:shade val="50000"/>
+            </a:schemeClr>
+          </a:lnRef>
+          <a:fillRef idx="1">
+            <a:schemeClr val="accent1"/>
+          </a:fillRef>
+          <a:effectRef idx="0">
+            <a:schemeClr val="accent1"/>
+          </a:effectRef>
+          <a:fontRef idx="minor">
+            <a:schemeClr val="lt1"/>
+          </a:fontRef>
+        </p:style>
+        <p:txBody>
+          <a:bodyPr rtlCol="0" anchor="ctr"/>
+          <a:lstStyle/>
+          <a:p>
+            <a:pPr algn="ctr"/>
+            <a:endParaRPr lang="zh-CN" altLang="en-US" dirty="0"/>
+          </a:p>
+        </p:txBody>
+      </p:sp>
+    </p:spTree>
+    <p:extLst>
+      <p:ext uri="{BB962C8B-B14F-4D97-AF65-F5344CB8AC3E}">
+        <p14:creationId xmlns:p14="http://schemas.microsoft.com/office/powerpoint/2010/main" val="706427469"/>
+      </p:ext>
+    </p:extLst>
+  </p:cSld>
+  <p:clrMapOvr>
+    <a:masterClrMapping/>
+  </p:clrMapOvr>
+  <p:timing>
+    <p:tnLst>
+      <p:par>
+        <p:cTn id="1" dur="indefinite" restart="never" nodeType="tmRoot">
+          <p:childTnLst>
+            <p:seq concurrent="1" nextAc="seek">
+              <p:cTn id="2" dur="indefinite" nodeType="mainSeq">
+                <p:childTnLst>
+                  <p:par>
+                    <p:cTn id="3" fill="hold">
+                      <p:stCondLst>
+                        <p:cond delay="indefinite"/>
+                        <p:cond evt="onBegin" delay="0">
+                          <p:tn val="2"/>
+                        </p:cond>
+                      </p:stCondLst>
+                      <p:childTnLst>
+                        <p:par>
+                          <p:cTn id="4" fill="hold">
+                            <p:stCondLst>
+                              <p:cond delay="0"/>
+                            </p:stCondLst>
+                            <p:childTnLst>
+                              <p:par>
+                                <p:cTn id="5" presetID="23" presetClass="entr" presetSubtype="16" fill="hold" grpId="0" nodeType="withEffect">
+                                  <p:stCondLst>
+                                    <p:cond delay="0"/>
+                                  </p:stCondLst>
+                                  <p:childTnLst>
+                                    <p:set>
+                                      <p:cBhvr>
+                                        <p:cTn id="6" dur="1" fill="hold">
+                                          <p:stCondLst>
+                                            <p:cond delay="0"/>
+                                          </p:stCondLst>
+                                        </p:cTn>
+                                        <p:tgtEl>
+                                          <p:spTgt spid="13"/>
+                                        </p:tgtEl>
+                                        <p:attrNameLst>
+                                          <p:attrName>style.visibility</p:attrName>
+                                        </p:attrNameLst>
+                                      </p:cBhvr>
+                                      <p:to>
+                                        <p:strVal val="visible"/>
+                                      </p:to>
+                                    </p:set>
+                                    <p:anim calcmode="lin" valueType="num">
+                                      <p:cBhvr>
+                                        <p:cTn id="7" dur="250" fill="hold"/>
+                                        <p:tgtEl>
+                                          <p:spTgt spid="13"/>
+                                        </p:tgtEl>
+                                        <p:attrNameLst>
+                                          <p:attrName>ppt_w</p:attrName>
+                                        </p:attrNameLst>
+                                      </p:cBhvr>
+                                      <p:tavLst>
+                                        <p:tav tm="0">
+                                          <p:val>
+                                            <p:fltVal val="0"/>
+                                          </p:val>
+                                        </p:tav>
+                                        <p:tav tm="100000">
+                                          <p:val>
+                                            <p:strVal val="#ppt_w"/>
+                                          </p:val>
+                                        </p:tav>
+                                      </p:tavLst>
+                                    </p:anim>
+                                    <p:anim calcmode="lin" valueType="num">
+                                      <p:cBhvr>
+                                        <p:cTn id="8" dur="250" fill="hold"/>
+                                        <p:tgtEl>
+                                          <p:spTgt spid="13"/>
+                                        </p:tgtEl>
+                                        <p:attrNameLst>
+                                          <p:attrName>ppt_h</p:attrName>
+                                        </p:attrNameLst>
+                                      </p:cBhvr>
+                                      <p:tavLst>
+                                        <p:tav tm="0">
+                                          <p:val>
+                                            <p:fltVal val="0"/>
+                                          </p:val>
+                                        </p:tav>
+                                        <p:tav tm="100000">
+                                          <p:val>
+                                            <p:strVal val="#ppt_h"/>
+                                          </p:val>
+                                        </p:tav>
+                                      </p:tavLst>
+                                    </p:anim>
+                                  </p:childTnLst>
+                                </p:cTn>
+                              </p:par>
+                              <p:par>
+                                <p:cTn id="9" presetID="6" presetClass="emph" presetSubtype="0" fill="hold" grpId="1" nodeType="withEffect">
+                                  <p:stCondLst>
+                                    <p:cond delay="250"/>
+                                  </p:stCondLst>
+                                  <p:childTnLst>
+                                    <p:animScale>
+                                      <p:cBhvr>
+                                        <p:cTn id="10" dur="500" fill="hold"/>
+                                        <p:tgtEl>
+                                          <p:spTgt spid="13"/>
+                                        </p:tgtEl>
+                                      </p:cBhvr>
+                                      <p:by x="120000" y="120000"/>
+                                    </p:animScale>
+                                  </p:childTnLst>
+                                </p:cTn>
+                              </p:par>
+                              <p:par>
+                                <p:cTn id="11" presetID="10" presetClass="exit" presetSubtype="0" fill="hold" grpId="2" nodeType="withEffect">
+                                  <p:stCondLst>
+                                    <p:cond delay="500"/>
+                                  </p:stCondLst>
+                                  <p:childTnLst>
+                                    <p:animEffect transition="out" filter="fade">
+                                      <p:cBhvr>
+                                        <p:cTn id="12" dur="250"/>
+                                        <p:tgtEl>
+                                          <p:spTgt spid="13"/>
+                                        </p:tgtEl>
+                                      </p:cBhvr>
+                                    </p:animEffect>
+                                    <p:set>
+                                      <p:cBhvr>
+                                        <p:cTn id="13" dur="1" fill="hold">
+                                          <p:stCondLst>
+                                            <p:cond delay="249"/>
+                                          </p:stCondLst>
+                                        </p:cTn>
+                                        <p:tgtEl>
+                                          <p:spTgt spid="13"/>
+                                        </p:tgtEl>
+                                        <p:attrNameLst>
+                                          <p:attrName>style.visibility</p:attrName>
+                                        </p:attrNameLst>
+                                      </p:cBhvr>
+                                      <p:to>
+                                        <p:strVal val="hidden"/>
+                                      </p:to>
+                                    </p:set>
+                                  </p:childTnLst>
+                                </p:cTn>
+                              </p:par>
+                              <p:par>
+                                <p:cTn id="14" presetID="23" presetClass="entr" presetSubtype="16" fill="hold" nodeType="withEffect">
+                                  <p:stCondLst>
+                                    <p:cond delay="0"/>
+                                  </p:stCondLst>
+                                  <p:childTnLst>
+                                    <p:set>
+                                      <p:cBhvr>
+                                        <p:cTn id="15" dur="1" fill="hold">
+                                          <p:stCondLst>
+                                            <p:cond delay="0"/>
+                                          </p:stCondLst>
+                                        </p:cTn>
+                                        <p:tgtEl>
+                                          <p:spTgt spid="4"/>
+                                        </p:tgtEl>
+                                        <p:attrNameLst>
+                                          <p:attrName>style.visibility</p:attrName>
+                                        </p:attrNameLst>
+                                      </p:cBhvr>
+                                      <p:to>
+                                        <p:strVal val="visible"/>
+                                      </p:to>
+                                    </p:set>
+                                    <p:anim calcmode="lin" valueType="num">
+                                      <p:cBhvr>
+                                        <p:cTn id="16" dur="250" fill="hold"/>
+                                        <p:tgtEl>
+                                          <p:spTgt spid="4"/>
+                                        </p:tgtEl>
+                                        <p:attrNameLst>
+                                          <p:attrName>ppt_w</p:attrName>
+                                        </p:attrNameLst>
+                                      </p:cBhvr>
+                                      <p:tavLst>
+                                        <p:tav tm="0">
+                                          <p:val>
+                                            <p:fltVal val="0"/>
+                                          </p:val>
+                                        </p:tav>
+                                        <p:tav tm="100000">
+                                          <p:val>
+                                            <p:strVal val="#ppt_w"/>
+                                          </p:val>
+                                        </p:tav>
+                                      </p:tavLst>
+                                    </p:anim>
+                                    <p:anim calcmode="lin" valueType="num">
+                                      <p:cBhvr>
+                                        <p:cTn id="17" dur="250" fill="hold"/>
+                                        <p:tgtEl>
+                                          <p:spTgt spid="4"/>
+                                        </p:tgtEl>
+                                        <p:attrNameLst>
+                                          <p:attrName>ppt_h</p:attrName>
+                                        </p:attrNameLst>
+                                      </p:cBhvr>
+                                      <p:tavLst>
+                                        <p:tav tm="0">
+                                          <p:val>
+                                            <p:fltVal val="0"/>
+                                          </p:val>
+                                        </p:tav>
+                                        <p:tav tm="100000">
+                                          <p:val>
+                                            <p:strVal val="#ppt_h"/>
+                                          </p:val>
+                                        </p:tav>
+                                      </p:tavLst>
+                                    </p:anim>
+                                  </p:childTnLst>
+                                </p:cTn>
+                              </p:par>
+                              <p:par>
+                                <p:cTn id="18" presetID="6" presetClass="emph" presetSubtype="0" fill="hold" nodeType="withEffect">
+                                  <p:stCondLst>
+                                    <p:cond delay="250"/>
+                                  </p:stCondLst>
+                                  <p:childTnLst>
+                                    <p:animScale>
+                                      <p:cBhvr>
+                                        <p:cTn id="19" dur="500" fill="hold"/>
+                                        <p:tgtEl>
+                                          <p:spTgt spid="4"/>
+                                        </p:tgtEl>
+                                      </p:cBhvr>
+                                      <p:by x="120000" y="120000"/>
+                                    </p:animScale>
+                                  </p:childTnLst>
+                                </p:cTn>
+                              </p:par>
+                              <p:par>
+                                <p:cTn id="20" presetID="6" presetClass="exit" presetSubtype="32" fill="hold" nodeType="withEffect">
+                                  <p:stCondLst>
+                                    <p:cond delay="250"/>
+                                  </p:stCondLst>
+                                  <p:childTnLst>
+                                    <p:animEffect transition="out" filter="circle(out)">
+                                      <p:cBhvr>
+                                        <p:cTn id="21" dur="500"/>
+                                        <p:tgtEl>
+                                          <p:spTgt spid="4"/>
+                                        </p:tgtEl>
+                                      </p:cBhvr>
+                                    </p:animEffect>
+                                    <p:set>
+                                      <p:cBhvr>
+                                        <p:cTn id="22" dur="1" fill="hold">
+                                          <p:stCondLst>
+                                            <p:cond delay="499"/>
+                                          </p:stCondLst>
+                                        </p:cTn>
+                                        <p:tgtEl>
+                                          <p:spTgt spid="4"/>
+                                        </p:tgtEl>
+                                        <p:attrNameLst>
+                                          <p:attrName>style.visibility</p:attrName>
+                                        </p:attrNameLst>
+                                      </p:cBhvr>
+                                      <p:to>
+                                        <p:strVal val="hidden"/>
+                                      </p:to>
+                                    </p:set>
+                                  </p:childTnLst>
+                                </p:cTn>
+                              </p:par>
+                            </p:childTnLst>
+                          </p:cTn>
+                        </p:par>
+                      </p:childTnLst>
+                    </p:cTn>
+                  </p:par>
+                </p:childTnLst>
+              </p:cTn>
+              <p:prevCondLst>
+                <p:cond evt="onPrev" delay="0">
+                  <p:tgtEl>
+                    <p:sldTgt/>
+                  </p:tgtEl>
+                </p:cond>
+              </p:prevCondLst>
+              <p:nextCondLst>
+                <p:cond evt="onNext" delay="0">
+                  <p:tgtEl>
+                    <p:sldTgt/>
+                  </p:tgtEl>
+                </p:cond>
+              </p:nextCondLst>
+            </p:seq>
+          </p:childTnLst>
+        </p:cTn>
+      </p:par>
+    </p:tnLst>
+    <p:bldLst>
+      <p:bldP spid="13" grpId="0" animBg="1"/>
+      <p:bldP spid="13" grpId="1" animBg="1"/>
+      <p:bldP spid="13" grpId="2" animBg="1"/>
+    </p:bldLst>
+  </p:timing>
 </p:sld>
 </file>
 
@@ -8303,6 +9998,184 @@
       <p:bldP spid="7" grpId="0" animBg="1"/>
     </p:bldLst>
   </p:timing>
+</p:sld>
+</file>
+
+<file path=ppt/slides/slide20.xml><?xml version="1.0" encoding="utf-8"?>
+<p:sld xmlns:a="http://schemas.openxmlformats.org/drawingml/2006/main" xmlns:r="http://schemas.openxmlformats.org/officeDocument/2006/relationships" xmlns:p="http://schemas.openxmlformats.org/presentationml/2006/main">
+  <p:cSld>
+    <p:spTree>
+      <p:nvGrpSpPr>
+        <p:cNvPr id="1" name=""/>
+        <p:cNvGrpSpPr/>
+        <p:nvPr/>
+      </p:nvGrpSpPr>
+      <p:grpSpPr>
+        <a:xfrm>
+          <a:off x="0" y="0"/>
+          <a:ext cx="0" cy="0"/>
+          <a:chOff x="0" y="0"/>
+          <a:chExt cx="0" cy="0"/>
+        </a:xfrm>
+      </p:grpSpPr>
+      <p:sp>
+        <p:nvSpPr>
+          <p:cNvPr id="2" name="标题 1">
+            <a:extLst>
+              <a:ext uri="{FF2B5EF4-FFF2-40B4-BE49-F238E27FC236}">
+                <a16:creationId xmlns:a16="http://schemas.microsoft.com/office/drawing/2014/main" id="{9BBD2E4C-11EB-4F8B-AB01-E201CF9451E9}"/>
+              </a:ext>
+            </a:extLst>
+          </p:cNvPr>
+          <p:cNvSpPr>
+            <a:spLocks noGrp="1"/>
+          </p:cNvSpPr>
+          <p:nvPr>
+            <p:ph type="title"/>
+          </p:nvPr>
+        </p:nvSpPr>
+        <p:spPr/>
+        <p:txBody>
+          <a:bodyPr/>
+          <a:lstStyle/>
+          <a:p>
+            <a:r>
+              <a:rPr lang="en-US" altLang="zh-CN" dirty="0"/>
+              <a:t>4. </a:t>
+            </a:r>
+            <a:r>
+              <a:rPr lang="zh-CN" altLang="en-US" dirty="0"/>
+              <a:t>做一个</a:t>
+            </a:r>
+            <a:r>
+              <a:rPr lang="en-US" altLang="zh-CN" dirty="0"/>
+              <a:t>MG</a:t>
+            </a:r>
+            <a:r>
+              <a:rPr lang="zh-CN" altLang="en-US" dirty="0"/>
+              <a:t>动画片头</a:t>
+            </a:r>
+          </a:p>
+        </p:txBody>
+      </p:sp>
+      <p:sp>
+        <p:nvSpPr>
+          <p:cNvPr id="3" name="内容占位符 2">
+            <a:extLst>
+              <a:ext uri="{FF2B5EF4-FFF2-40B4-BE49-F238E27FC236}">
+                <a16:creationId xmlns:a16="http://schemas.microsoft.com/office/drawing/2014/main" id="{2D3849D7-F7E9-4CA5-A75A-0BEEDDE61738}"/>
+              </a:ext>
+            </a:extLst>
+          </p:cNvPr>
+          <p:cNvSpPr>
+            <a:spLocks noGrp="1"/>
+          </p:cNvSpPr>
+          <p:nvPr>
+            <p:ph idx="1"/>
+          </p:nvPr>
+        </p:nvSpPr>
+        <p:spPr/>
+        <p:txBody>
+          <a:bodyPr/>
+          <a:lstStyle/>
+          <a:p>
+            <a:pPr marL="0" indent="0">
+              <a:buNone/>
+            </a:pPr>
+            <a:endParaRPr lang="zh-CN" altLang="en-US" dirty="0"/>
+          </a:p>
+        </p:txBody>
+      </p:sp>
+    </p:spTree>
+    <p:extLst>
+      <p:ext uri="{BB962C8B-B14F-4D97-AF65-F5344CB8AC3E}">
+        <p14:creationId xmlns:p14="http://schemas.microsoft.com/office/powerpoint/2010/main" val="3307297094"/>
+      </p:ext>
+    </p:extLst>
+  </p:cSld>
+  <p:clrMapOvr>
+    <a:masterClrMapping/>
+  </p:clrMapOvr>
+</p:sld>
+</file>
+
+<file path=ppt/slides/slide21.xml><?xml version="1.0" encoding="utf-8"?>
+<p:sld xmlns:a="http://schemas.openxmlformats.org/drawingml/2006/main" xmlns:r="http://schemas.openxmlformats.org/officeDocument/2006/relationships" xmlns:p="http://schemas.openxmlformats.org/presentationml/2006/main">
+  <p:cSld>
+    <p:spTree>
+      <p:nvGrpSpPr>
+        <p:cNvPr id="1" name=""/>
+        <p:cNvGrpSpPr/>
+        <p:nvPr/>
+      </p:nvGrpSpPr>
+      <p:grpSpPr>
+        <a:xfrm>
+          <a:off x="0" y="0"/>
+          <a:ext cx="0" cy="0"/>
+          <a:chOff x="0" y="0"/>
+          <a:chExt cx="0" cy="0"/>
+        </a:xfrm>
+      </p:grpSpPr>
+      <p:sp>
+        <p:nvSpPr>
+          <p:cNvPr id="2" name="标题 1">
+            <a:extLst>
+              <a:ext uri="{FF2B5EF4-FFF2-40B4-BE49-F238E27FC236}">
+                <a16:creationId xmlns:a16="http://schemas.microsoft.com/office/drawing/2014/main" id="{7E1A4AAC-A44C-430A-9065-01280C723849}"/>
+              </a:ext>
+            </a:extLst>
+          </p:cNvPr>
+          <p:cNvSpPr>
+            <a:spLocks noGrp="1"/>
+          </p:cNvSpPr>
+          <p:nvPr>
+            <p:ph type="title"/>
+          </p:nvPr>
+        </p:nvSpPr>
+        <p:spPr/>
+        <p:txBody>
+          <a:bodyPr/>
+          <a:lstStyle/>
+          <a:p>
+            <a:endParaRPr lang="zh-CN" altLang="en-US"/>
+          </a:p>
+        </p:txBody>
+      </p:sp>
+      <p:sp>
+        <p:nvSpPr>
+          <p:cNvPr id="3" name="内容占位符 2">
+            <a:extLst>
+              <a:ext uri="{FF2B5EF4-FFF2-40B4-BE49-F238E27FC236}">
+                <a16:creationId xmlns:a16="http://schemas.microsoft.com/office/drawing/2014/main" id="{19B7FD38-ABFA-4845-B48F-68C5AC871955}"/>
+              </a:ext>
+            </a:extLst>
+          </p:cNvPr>
+          <p:cNvSpPr>
+            <a:spLocks noGrp="1"/>
+          </p:cNvSpPr>
+          <p:nvPr>
+            <p:ph idx="1"/>
+          </p:nvPr>
+        </p:nvSpPr>
+        <p:spPr/>
+        <p:txBody>
+          <a:bodyPr/>
+          <a:lstStyle/>
+          <a:p>
+            <a:endParaRPr lang="zh-CN" altLang="en-US"/>
+          </a:p>
+        </p:txBody>
+      </p:sp>
+    </p:spTree>
+    <p:extLst>
+      <p:ext uri="{BB962C8B-B14F-4D97-AF65-F5344CB8AC3E}">
+        <p14:creationId xmlns:p14="http://schemas.microsoft.com/office/powerpoint/2010/main" val="2721816976"/>
+      </p:ext>
+    </p:extLst>
+  </p:cSld>
+  <p:clrMapOvr>
+    <a:masterClrMapping/>
+  </p:clrMapOvr>
 </p:sld>
 </file>
 

--- a/PPT-Animation-Samples (Part 2).pptx
+++ b/PPT-Animation-Samples (Part 2).pptx
@@ -26,6 +26,9 @@
     <p:sldId id="296" r:id="rId20"/>
     <p:sldId id="297" r:id="rId21"/>
     <p:sldId id="298" r:id="rId22"/>
+    <p:sldId id="301" r:id="rId23"/>
+    <p:sldId id="300" r:id="rId24"/>
+    <p:sldId id="299" r:id="rId25"/>
   </p:sldIdLst>
   <p:sldSz cx="12192000" cy="6858000"/>
   <p:notesSz cx="6858000" cy="9144000"/>
@@ -10162,7 +10165,135 @@
           <a:bodyPr/>
           <a:lstStyle/>
           <a:p>
-            <a:endParaRPr lang="zh-CN" altLang="en-US"/>
+            <a:r>
+              <a:rPr lang="en-US" altLang="zh-CN" dirty="0"/>
+              <a:t>1. </a:t>
+            </a:r>
+            <a:r>
+              <a:rPr lang="zh-CN" altLang="en-US" dirty="0"/>
+              <a:t>小球飞入，方向向下，效果选项，平滑开始</a:t>
+            </a:r>
+            <a:r>
+              <a:rPr lang="en-US" altLang="zh-CN" dirty="0"/>
+              <a:t>0.5</a:t>
+            </a:r>
+            <a:r>
+              <a:rPr lang="zh-CN" altLang="en-US" dirty="0"/>
+              <a:t>秒</a:t>
+            </a:r>
+            <a:endParaRPr lang="en-US" altLang="zh-CN" dirty="0"/>
+          </a:p>
+          <a:p>
+            <a:r>
+              <a:rPr lang="en-US" altLang="zh-CN" dirty="0"/>
+              <a:t>2. </a:t>
+            </a:r>
+            <a:r>
+              <a:rPr lang="zh-CN" altLang="en-US" dirty="0"/>
+              <a:t>添加动画，直线，路径向上，持续时间</a:t>
+            </a:r>
+            <a:r>
+              <a:rPr lang="en-US" altLang="zh-CN" dirty="0"/>
+              <a:t>0.5</a:t>
+            </a:r>
+            <a:r>
+              <a:rPr lang="zh-CN" altLang="en-US" dirty="0"/>
+              <a:t>秒，延迟</a:t>
+            </a:r>
+            <a:r>
+              <a:rPr lang="en-US" altLang="zh-CN" dirty="0"/>
+              <a:t>0.5</a:t>
+            </a:r>
+            <a:r>
+              <a:rPr lang="zh-CN" altLang="en-US" dirty="0"/>
+              <a:t>秒，</a:t>
+            </a:r>
+            <a:r>
+              <a:rPr lang="en-US" altLang="zh-CN" dirty="0"/>
+              <a:t>0.25</a:t>
+            </a:r>
+            <a:r>
+              <a:rPr lang="zh-CN" altLang="en-US" dirty="0"/>
+              <a:t>秒弹跳结束</a:t>
+            </a:r>
+            <a:endParaRPr lang="en-US" altLang="zh-CN" dirty="0"/>
+          </a:p>
+          <a:p>
+            <a:r>
+              <a:rPr lang="en-US" altLang="zh-CN" dirty="0"/>
+              <a:t>3. </a:t>
+            </a:r>
+            <a:r>
+              <a:rPr lang="zh-CN" altLang="en-US" dirty="0"/>
+              <a:t>添加放大缩小，小球盖住整个画面，延迟</a:t>
+            </a:r>
+            <a:r>
+              <a:rPr lang="en-US" altLang="zh-CN" dirty="0"/>
+              <a:t>1</a:t>
+            </a:r>
+            <a:r>
+              <a:rPr lang="zh-CN" altLang="en-US" dirty="0"/>
+              <a:t>秒，持续时间</a:t>
+            </a:r>
+            <a:r>
+              <a:rPr lang="en-US" altLang="zh-CN" dirty="0"/>
+              <a:t>0.25</a:t>
+            </a:r>
+            <a:r>
+              <a:rPr lang="zh-CN" altLang="en-US" dirty="0"/>
+              <a:t>秒，放大</a:t>
+            </a:r>
+            <a:r>
+              <a:rPr lang="en-US" altLang="zh-CN" dirty="0"/>
+              <a:t>4000</a:t>
+            </a:r>
+            <a:endParaRPr lang="zh-CN" altLang="en-US" dirty="0"/>
+          </a:p>
+        </p:txBody>
+      </p:sp>
+      <p:sp>
+        <p:nvSpPr>
+          <p:cNvPr id="4" name="流程图: 接点 3">
+            <a:extLst>
+              <a:ext uri="{FF2B5EF4-FFF2-40B4-BE49-F238E27FC236}">
+                <a16:creationId xmlns:a16="http://schemas.microsoft.com/office/drawing/2014/main" id="{DD44DB26-FB19-46EF-A042-DBB532CD0D1D}"/>
+              </a:ext>
+            </a:extLst>
+          </p:cNvPr>
+          <p:cNvSpPr/>
+          <p:nvPr/>
+        </p:nvSpPr>
+        <p:spPr>
+          <a:xfrm>
+            <a:off x="5271030" y="4787016"/>
+            <a:ext cx="738909" cy="618837"/>
+          </a:xfrm>
+          <a:prstGeom prst="flowChartConnector">
+            <a:avLst/>
+          </a:prstGeom>
+        </p:spPr>
+        <p:style>
+          <a:lnRef idx="2">
+            <a:schemeClr val="accent1">
+              <a:shade val="50000"/>
+            </a:schemeClr>
+          </a:lnRef>
+          <a:fillRef idx="1">
+            <a:schemeClr val="accent1"/>
+          </a:fillRef>
+          <a:effectRef idx="0">
+            <a:schemeClr val="accent1"/>
+          </a:effectRef>
+          <a:fontRef idx="minor">
+            <a:schemeClr val="lt1"/>
+          </a:fontRef>
+        </p:style>
+        <p:txBody>
+          <a:bodyPr rtlCol="0" anchor="ctr"/>
+          <a:lstStyle/>
+          <a:p>
+            <a:pPr algn="ctr"/>
+            <a:endParaRPr lang="zh-CN" altLang="en-US" sz="1200" dirty="0"/>
           </a:p>
         </p:txBody>
       </p:sp>
@@ -10170,6 +10301,3348 @@
     <p:extLst>
       <p:ext uri="{BB962C8B-B14F-4D97-AF65-F5344CB8AC3E}">
         <p14:creationId xmlns:p14="http://schemas.microsoft.com/office/powerpoint/2010/main" val="2721816976"/>
+      </p:ext>
+    </p:extLst>
+  </p:cSld>
+  <p:clrMapOvr>
+    <a:masterClrMapping/>
+  </p:clrMapOvr>
+  <mc:AlternateContent xmlns:mc="http://schemas.openxmlformats.org/markup-compatibility/2006">
+    <mc:Choice xmlns:p14="http://schemas.microsoft.com/office/powerpoint/2010/main" Requires="p14">
+      <p:timing>
+        <p:tnLst>
+          <p:par>
+            <p:cTn id="1" dur="indefinite" restart="never" nodeType="tmRoot">
+              <p:childTnLst>
+                <p:seq concurrent="1" nextAc="seek">
+                  <p:cTn id="2" dur="indefinite" nodeType="mainSeq">
+                    <p:childTnLst>
+                      <p:par>
+                        <p:cTn id="3" fill="hold">
+                          <p:stCondLst>
+                            <p:cond delay="indefinite"/>
+                            <p:cond evt="onBegin" delay="0">
+                              <p:tn val="2"/>
+                            </p:cond>
+                          </p:stCondLst>
+                          <p:childTnLst>
+                            <p:par>
+                              <p:cTn id="4" fill="hold">
+                                <p:stCondLst>
+                                  <p:cond delay="0"/>
+                                </p:stCondLst>
+                                <p:childTnLst>
+                                  <p:par>
+                                    <p:cTn id="5" presetID="2" presetClass="entr" presetSubtype="1" accel="100000" fill="hold" grpId="0" nodeType="withEffect">
+                                      <p:stCondLst>
+                                        <p:cond delay="0"/>
+                                      </p:stCondLst>
+                                      <p:childTnLst>
+                                        <p:set>
+                                          <p:cBhvr>
+                                            <p:cTn id="6" dur="1" fill="hold">
+                                              <p:stCondLst>
+                                                <p:cond delay="0"/>
+                                              </p:stCondLst>
+                                            </p:cTn>
+                                            <p:tgtEl>
+                                              <p:spTgt spid="4"/>
+                                            </p:tgtEl>
+                                            <p:attrNameLst>
+                                              <p:attrName>style.visibility</p:attrName>
+                                            </p:attrNameLst>
+                                          </p:cBhvr>
+                                          <p:to>
+                                            <p:strVal val="visible"/>
+                                          </p:to>
+                                        </p:set>
+                                        <p:anim calcmode="lin" valueType="num">
+                                          <p:cBhvr additive="base">
+                                            <p:cTn id="7" dur="500" fill="hold"/>
+                                            <p:tgtEl>
+                                              <p:spTgt spid="4"/>
+                                            </p:tgtEl>
+                                            <p:attrNameLst>
+                                              <p:attrName>ppt_x</p:attrName>
+                                            </p:attrNameLst>
+                                          </p:cBhvr>
+                                          <p:tavLst>
+                                            <p:tav tm="0">
+                                              <p:val>
+                                                <p:strVal val="#ppt_x"/>
+                                              </p:val>
+                                            </p:tav>
+                                            <p:tav tm="100000">
+                                              <p:val>
+                                                <p:strVal val="#ppt_x"/>
+                                              </p:val>
+                                            </p:tav>
+                                          </p:tavLst>
+                                        </p:anim>
+                                        <p:anim calcmode="lin" valueType="num">
+                                          <p:cBhvr additive="base">
+                                            <p:cTn id="8" dur="500" fill="hold"/>
+                                            <p:tgtEl>
+                                              <p:spTgt spid="4"/>
+                                            </p:tgtEl>
+                                            <p:attrNameLst>
+                                              <p:attrName>ppt_y</p:attrName>
+                                            </p:attrNameLst>
+                                          </p:cBhvr>
+                                          <p:tavLst>
+                                            <p:tav tm="0">
+                                              <p:val>
+                                                <p:strVal val="0-#ppt_h/2"/>
+                                              </p:val>
+                                            </p:tav>
+                                            <p:tav tm="100000">
+                                              <p:val>
+                                                <p:strVal val="#ppt_y"/>
+                                              </p:val>
+                                            </p:tav>
+                                          </p:tavLst>
+                                        </p:anim>
+                                      </p:childTnLst>
+                                    </p:cTn>
+                                  </p:par>
+                                  <p:par>
+                                    <p:cTn id="9" presetID="64" presetClass="path" presetSubtype="0" fill="hold" grpId="1" nodeType="withEffect" p14:presetBounceEnd="50000">
+                                      <p:stCondLst>
+                                        <p:cond delay="500"/>
+                                      </p:stCondLst>
+                                      <p:childTnLst>
+                                        <p:animMotion origin="layout" path="M -2.08333E-7 4.44444E-6 L 0.00039 -0.19514 " pathEditMode="relative" rAng="0" ptsTypes="AA" p14:bounceEnd="50000">
+                                          <p:cBhvr>
+                                            <p:cTn id="10" dur="500" fill="hold"/>
+                                            <p:tgtEl>
+                                              <p:spTgt spid="4"/>
+                                            </p:tgtEl>
+                                            <p:attrNameLst>
+                                              <p:attrName>ppt_x</p:attrName>
+                                              <p:attrName>ppt_y</p:attrName>
+                                            </p:attrNameLst>
+                                          </p:cBhvr>
+                                          <p:rCtr x="13" y="-9769"/>
+                                        </p:animMotion>
+                                      </p:childTnLst>
+                                    </p:cTn>
+                                  </p:par>
+                                  <p:par>
+                                    <p:cTn id="11" presetID="6" presetClass="emph" presetSubtype="0" fill="hold" grpId="2" nodeType="withEffect">
+                                      <p:stCondLst>
+                                        <p:cond delay="1000"/>
+                                      </p:stCondLst>
+                                      <p:childTnLst>
+                                        <p:animScale>
+                                          <p:cBhvr>
+                                            <p:cTn id="12" dur="300" fill="hold"/>
+                                            <p:tgtEl>
+                                              <p:spTgt spid="4"/>
+                                            </p:tgtEl>
+                                          </p:cBhvr>
+                                          <p:by x="4000000" y="4000000"/>
+                                        </p:animScale>
+                                      </p:childTnLst>
+                                    </p:cTn>
+                                  </p:par>
+                                </p:childTnLst>
+                              </p:cTn>
+                            </p:par>
+                          </p:childTnLst>
+                        </p:cTn>
+                      </p:par>
+                    </p:childTnLst>
+                  </p:cTn>
+                  <p:prevCondLst>
+                    <p:cond evt="onPrev" delay="0">
+                      <p:tgtEl>
+                        <p:sldTgt/>
+                      </p:tgtEl>
+                    </p:cond>
+                  </p:prevCondLst>
+                  <p:nextCondLst>
+                    <p:cond evt="onNext" delay="0">
+                      <p:tgtEl>
+                        <p:sldTgt/>
+                      </p:tgtEl>
+                    </p:cond>
+                  </p:nextCondLst>
+                </p:seq>
+              </p:childTnLst>
+            </p:cTn>
+          </p:par>
+        </p:tnLst>
+        <p:bldLst>
+          <p:bldP spid="4" grpId="0" animBg="1"/>
+          <p:bldP spid="4" grpId="1" animBg="1"/>
+          <p:bldP spid="4" grpId="2" animBg="1"/>
+        </p:bldLst>
+      </p:timing>
+    </mc:Choice>
+    <mc:Fallback>
+      <p:timing>
+        <p:tnLst>
+          <p:par>
+            <p:cTn id="1" dur="indefinite" restart="never" nodeType="tmRoot">
+              <p:childTnLst>
+                <p:seq concurrent="1" nextAc="seek">
+                  <p:cTn id="2" dur="indefinite" nodeType="mainSeq">
+                    <p:childTnLst>
+                      <p:par>
+                        <p:cTn id="3" fill="hold">
+                          <p:stCondLst>
+                            <p:cond delay="indefinite"/>
+                            <p:cond evt="onBegin" delay="0">
+                              <p:tn val="2"/>
+                            </p:cond>
+                          </p:stCondLst>
+                          <p:childTnLst>
+                            <p:par>
+                              <p:cTn id="4" fill="hold">
+                                <p:stCondLst>
+                                  <p:cond delay="0"/>
+                                </p:stCondLst>
+                                <p:childTnLst>
+                                  <p:par>
+                                    <p:cTn id="5" presetID="2" presetClass="entr" presetSubtype="1" accel="100000" fill="hold" grpId="0" nodeType="withEffect">
+                                      <p:stCondLst>
+                                        <p:cond delay="0"/>
+                                      </p:stCondLst>
+                                      <p:childTnLst>
+                                        <p:set>
+                                          <p:cBhvr>
+                                            <p:cTn id="6" dur="1" fill="hold">
+                                              <p:stCondLst>
+                                                <p:cond delay="0"/>
+                                              </p:stCondLst>
+                                            </p:cTn>
+                                            <p:tgtEl>
+                                              <p:spTgt spid="4"/>
+                                            </p:tgtEl>
+                                            <p:attrNameLst>
+                                              <p:attrName>style.visibility</p:attrName>
+                                            </p:attrNameLst>
+                                          </p:cBhvr>
+                                          <p:to>
+                                            <p:strVal val="visible"/>
+                                          </p:to>
+                                        </p:set>
+                                        <p:anim calcmode="lin" valueType="num">
+                                          <p:cBhvr additive="base">
+                                            <p:cTn id="7" dur="500" fill="hold"/>
+                                            <p:tgtEl>
+                                              <p:spTgt spid="4"/>
+                                            </p:tgtEl>
+                                            <p:attrNameLst>
+                                              <p:attrName>ppt_x</p:attrName>
+                                            </p:attrNameLst>
+                                          </p:cBhvr>
+                                          <p:tavLst>
+                                            <p:tav tm="0">
+                                              <p:val>
+                                                <p:strVal val="#ppt_x"/>
+                                              </p:val>
+                                            </p:tav>
+                                            <p:tav tm="100000">
+                                              <p:val>
+                                                <p:strVal val="#ppt_x"/>
+                                              </p:val>
+                                            </p:tav>
+                                          </p:tavLst>
+                                        </p:anim>
+                                        <p:anim calcmode="lin" valueType="num">
+                                          <p:cBhvr additive="base">
+                                            <p:cTn id="8" dur="500" fill="hold"/>
+                                            <p:tgtEl>
+                                              <p:spTgt spid="4"/>
+                                            </p:tgtEl>
+                                            <p:attrNameLst>
+                                              <p:attrName>ppt_y</p:attrName>
+                                            </p:attrNameLst>
+                                          </p:cBhvr>
+                                          <p:tavLst>
+                                            <p:tav tm="0">
+                                              <p:val>
+                                                <p:strVal val="0-#ppt_h/2"/>
+                                              </p:val>
+                                            </p:tav>
+                                            <p:tav tm="100000">
+                                              <p:val>
+                                                <p:strVal val="#ppt_y"/>
+                                              </p:val>
+                                            </p:tav>
+                                          </p:tavLst>
+                                        </p:anim>
+                                      </p:childTnLst>
+                                    </p:cTn>
+                                  </p:par>
+                                  <p:par>
+                                    <p:cTn id="9" presetID="64" presetClass="path" presetSubtype="0" fill="hold" grpId="1" nodeType="withEffect">
+                                      <p:stCondLst>
+                                        <p:cond delay="500"/>
+                                      </p:stCondLst>
+                                      <p:childTnLst>
+                                        <p:animMotion origin="layout" path="M -2.08333E-7 4.44444E-6 L 0.00039 -0.19514 " pathEditMode="relative" rAng="0" ptsTypes="AA">
+                                          <p:cBhvr>
+                                            <p:cTn id="10" dur="500" fill="hold"/>
+                                            <p:tgtEl>
+                                              <p:spTgt spid="4"/>
+                                            </p:tgtEl>
+                                            <p:attrNameLst>
+                                              <p:attrName>ppt_x</p:attrName>
+                                              <p:attrName>ppt_y</p:attrName>
+                                            </p:attrNameLst>
+                                          </p:cBhvr>
+                                          <p:rCtr x="13" y="-9769"/>
+                                        </p:animMotion>
+                                      </p:childTnLst>
+                                    </p:cTn>
+                                  </p:par>
+                                  <p:par>
+                                    <p:cTn id="11" presetID="6" presetClass="emph" presetSubtype="0" fill="hold" grpId="2" nodeType="withEffect">
+                                      <p:stCondLst>
+                                        <p:cond delay="1000"/>
+                                      </p:stCondLst>
+                                      <p:childTnLst>
+                                        <p:animScale>
+                                          <p:cBhvr>
+                                            <p:cTn id="12" dur="300" fill="hold"/>
+                                            <p:tgtEl>
+                                              <p:spTgt spid="4"/>
+                                            </p:tgtEl>
+                                          </p:cBhvr>
+                                          <p:by x="4000000" y="4000000"/>
+                                        </p:animScale>
+                                      </p:childTnLst>
+                                    </p:cTn>
+                                  </p:par>
+                                </p:childTnLst>
+                              </p:cTn>
+                            </p:par>
+                          </p:childTnLst>
+                        </p:cTn>
+                      </p:par>
+                    </p:childTnLst>
+                  </p:cTn>
+                  <p:prevCondLst>
+                    <p:cond evt="onPrev" delay="0">
+                      <p:tgtEl>
+                        <p:sldTgt/>
+                      </p:tgtEl>
+                    </p:cond>
+                  </p:prevCondLst>
+                  <p:nextCondLst>
+                    <p:cond evt="onNext" delay="0">
+                      <p:tgtEl>
+                        <p:sldTgt/>
+                      </p:tgtEl>
+                    </p:cond>
+                  </p:nextCondLst>
+                </p:seq>
+              </p:childTnLst>
+            </p:cTn>
+          </p:par>
+        </p:tnLst>
+        <p:bldLst>
+          <p:bldP spid="4" grpId="0" animBg="1"/>
+          <p:bldP spid="4" grpId="1" animBg="1"/>
+          <p:bldP spid="4" grpId="2" animBg="1"/>
+        </p:bldLst>
+      </p:timing>
+    </mc:Fallback>
+  </mc:AlternateContent>
+</p:sld>
+</file>
+
+<file path=ppt/slides/slide22.xml><?xml version="1.0" encoding="utf-8"?>
+<p:sld xmlns:a="http://schemas.openxmlformats.org/drawingml/2006/main" xmlns:r="http://schemas.openxmlformats.org/officeDocument/2006/relationships" xmlns:p="http://schemas.openxmlformats.org/presentationml/2006/main">
+  <p:cSld>
+    <p:spTree>
+      <p:nvGrpSpPr>
+        <p:cNvPr id="1" name=""/>
+        <p:cNvGrpSpPr/>
+        <p:nvPr/>
+      </p:nvGrpSpPr>
+      <p:grpSpPr>
+        <a:xfrm>
+          <a:off x="0" y="0"/>
+          <a:ext cx="0" cy="0"/>
+          <a:chOff x="0" y="0"/>
+          <a:chExt cx="0" cy="0"/>
+        </a:xfrm>
+      </p:grpSpPr>
+      <p:sp>
+        <p:nvSpPr>
+          <p:cNvPr id="2" name="标题 1">
+            <a:extLst>
+              <a:ext uri="{FF2B5EF4-FFF2-40B4-BE49-F238E27FC236}">
+                <a16:creationId xmlns:a16="http://schemas.microsoft.com/office/drawing/2014/main" id="{7E1A4AAC-A44C-430A-9065-01280C723849}"/>
+              </a:ext>
+            </a:extLst>
+          </p:cNvPr>
+          <p:cNvSpPr>
+            <a:spLocks noGrp="1"/>
+          </p:cNvSpPr>
+          <p:nvPr>
+            <p:ph type="title"/>
+          </p:nvPr>
+        </p:nvSpPr>
+        <p:spPr/>
+        <p:txBody>
+          <a:bodyPr/>
+          <a:lstStyle/>
+          <a:p>
+            <a:endParaRPr lang="zh-CN" altLang="en-US"/>
+          </a:p>
+        </p:txBody>
+      </p:sp>
+      <p:sp>
+        <p:nvSpPr>
+          <p:cNvPr id="3" name="内容占位符 2">
+            <a:extLst>
+              <a:ext uri="{FF2B5EF4-FFF2-40B4-BE49-F238E27FC236}">
+                <a16:creationId xmlns:a16="http://schemas.microsoft.com/office/drawing/2014/main" id="{19B7FD38-ABFA-4845-B48F-68C5AC871955}"/>
+              </a:ext>
+            </a:extLst>
+          </p:cNvPr>
+          <p:cNvSpPr>
+            <a:spLocks noGrp="1"/>
+          </p:cNvSpPr>
+          <p:nvPr>
+            <p:ph idx="1"/>
+          </p:nvPr>
+        </p:nvSpPr>
+        <p:spPr/>
+        <p:txBody>
+          <a:bodyPr/>
+          <a:lstStyle/>
+          <a:p>
+            <a:r>
+              <a:rPr lang="en-US" altLang="zh-CN" dirty="0"/>
+              <a:t>4. </a:t>
+            </a:r>
+            <a:r>
+              <a:rPr lang="zh-CN" altLang="en-US" dirty="0"/>
+              <a:t>底部进入动画，进入擦除，方向从上往下</a:t>
+            </a:r>
+            <a:endParaRPr lang="en-US" altLang="zh-CN" dirty="0"/>
+          </a:p>
+          <a:p>
+            <a:r>
+              <a:rPr lang="en-US" altLang="zh-CN" dirty="0"/>
+              <a:t>5. </a:t>
+            </a:r>
+            <a:r>
+              <a:rPr lang="zh-CN" altLang="en-US" dirty="0"/>
+              <a:t>底部添加动画，直线</a:t>
+            </a:r>
+            <a:r>
+              <a:rPr lang="en-US" altLang="zh-CN" dirty="0"/>
+              <a:t> </a:t>
+            </a:r>
+            <a:r>
+              <a:rPr lang="zh-CN" altLang="en-US" dirty="0"/>
+              <a:t>，方向向下，拿掉平滑开始和平滑结束</a:t>
+            </a:r>
+            <a:endParaRPr lang="en-US" altLang="zh-CN" dirty="0"/>
+          </a:p>
+          <a:p>
+            <a:r>
+              <a:rPr lang="en-US" altLang="zh-CN" dirty="0"/>
+              <a:t>6. </a:t>
+            </a:r>
+            <a:r>
+              <a:rPr lang="zh-CN" altLang="en-US" dirty="0"/>
+              <a:t>底部添加动画，退出擦除，方向向下</a:t>
+            </a:r>
+            <a:endParaRPr lang="en-US" altLang="zh-CN" dirty="0"/>
+          </a:p>
+          <a:p>
+            <a:r>
+              <a:rPr lang="zh-CN" altLang="en-US" dirty="0"/>
+              <a:t>都持续</a:t>
+            </a:r>
+            <a:r>
+              <a:rPr lang="en-US" altLang="zh-CN" dirty="0"/>
+              <a:t>0.25</a:t>
+            </a:r>
+            <a:r>
+              <a:rPr lang="zh-CN" altLang="en-US" dirty="0"/>
+              <a:t>秒，都延迟</a:t>
+            </a:r>
+            <a:r>
+              <a:rPr lang="en-US" altLang="zh-CN" dirty="0"/>
+              <a:t>0.6</a:t>
+            </a:r>
+            <a:r>
+              <a:rPr lang="zh-CN" altLang="en-US" dirty="0"/>
+              <a:t>秒</a:t>
+            </a:r>
+          </a:p>
+        </p:txBody>
+      </p:sp>
+      <p:cxnSp>
+        <p:nvCxnSpPr>
+          <p:cNvPr id="11" name="直接连接符 10">
+            <a:extLst>
+              <a:ext uri="{FF2B5EF4-FFF2-40B4-BE49-F238E27FC236}">
+                <a16:creationId xmlns:a16="http://schemas.microsoft.com/office/drawing/2014/main" id="{3BC08B03-F387-4242-BB16-DDACC3B7D901}"/>
+              </a:ext>
+            </a:extLst>
+          </p:cNvPr>
+          <p:cNvCxnSpPr>
+            <a:cxnSpLocks/>
+          </p:cNvCxnSpPr>
+          <p:nvPr/>
+        </p:nvCxnSpPr>
+        <p:spPr>
+          <a:xfrm rot="7260000">
+            <a:off x="5897797" y="5594585"/>
+            <a:ext cx="0" cy="372511"/>
+          </a:xfrm>
+          <a:prstGeom prst="line">
+            <a:avLst/>
+          </a:prstGeom>
+        </p:spPr>
+        <p:style>
+          <a:lnRef idx="1">
+            <a:schemeClr val="accent1"/>
+          </a:lnRef>
+          <a:fillRef idx="0">
+            <a:schemeClr val="accent1"/>
+          </a:fillRef>
+          <a:effectRef idx="0">
+            <a:schemeClr val="accent1"/>
+          </a:effectRef>
+          <a:fontRef idx="minor">
+            <a:schemeClr val="tx1"/>
+          </a:fontRef>
+        </p:style>
+      </p:cxnSp>
+      <p:cxnSp>
+        <p:nvCxnSpPr>
+          <p:cNvPr id="18" name="直接连接符 17">
+            <a:extLst>
+              <a:ext uri="{FF2B5EF4-FFF2-40B4-BE49-F238E27FC236}">
+                <a16:creationId xmlns:a16="http://schemas.microsoft.com/office/drawing/2014/main" id="{4F8BB144-7FC8-48B5-8D7B-1722F162CE81}"/>
+              </a:ext>
+            </a:extLst>
+          </p:cNvPr>
+          <p:cNvCxnSpPr>
+            <a:cxnSpLocks/>
+          </p:cNvCxnSpPr>
+          <p:nvPr/>
+        </p:nvCxnSpPr>
+        <p:spPr>
+          <a:xfrm rot="9060000">
+            <a:off x="5617635" y="5865134"/>
+            <a:ext cx="0" cy="372511"/>
+          </a:xfrm>
+          <a:prstGeom prst="line">
+            <a:avLst/>
+          </a:prstGeom>
+        </p:spPr>
+        <p:style>
+          <a:lnRef idx="1">
+            <a:schemeClr val="accent1"/>
+          </a:lnRef>
+          <a:fillRef idx="0">
+            <a:schemeClr val="accent1"/>
+          </a:fillRef>
+          <a:effectRef idx="0">
+            <a:schemeClr val="accent1"/>
+          </a:effectRef>
+          <a:fontRef idx="minor">
+            <a:schemeClr val="tx1"/>
+          </a:fontRef>
+        </p:style>
+      </p:cxnSp>
+      <p:cxnSp>
+        <p:nvCxnSpPr>
+          <p:cNvPr id="19" name="直接连接符 18">
+            <a:extLst>
+              <a:ext uri="{FF2B5EF4-FFF2-40B4-BE49-F238E27FC236}">
+                <a16:creationId xmlns:a16="http://schemas.microsoft.com/office/drawing/2014/main" id="{BC9AEBCA-9142-49DE-A523-B76F7BE8171D}"/>
+              </a:ext>
+            </a:extLst>
+          </p:cNvPr>
+          <p:cNvCxnSpPr>
+            <a:cxnSpLocks/>
+          </p:cNvCxnSpPr>
+          <p:nvPr/>
+        </p:nvCxnSpPr>
+        <p:spPr>
+          <a:xfrm rot="10860000">
+            <a:off x="5239734" y="5959356"/>
+            <a:ext cx="0" cy="372511"/>
+          </a:xfrm>
+          <a:prstGeom prst="line">
+            <a:avLst/>
+          </a:prstGeom>
+        </p:spPr>
+        <p:style>
+          <a:lnRef idx="1">
+            <a:schemeClr val="accent1"/>
+          </a:lnRef>
+          <a:fillRef idx="0">
+            <a:schemeClr val="accent1"/>
+          </a:fillRef>
+          <a:effectRef idx="0">
+            <a:schemeClr val="accent1"/>
+          </a:effectRef>
+          <a:fontRef idx="minor">
+            <a:schemeClr val="tx1"/>
+          </a:fontRef>
+        </p:style>
+      </p:cxnSp>
+      <p:cxnSp>
+        <p:nvCxnSpPr>
+          <p:cNvPr id="20" name="直接连接符 19">
+            <a:extLst>
+              <a:ext uri="{FF2B5EF4-FFF2-40B4-BE49-F238E27FC236}">
+                <a16:creationId xmlns:a16="http://schemas.microsoft.com/office/drawing/2014/main" id="{F7DD6B80-676E-40E6-B36C-48B639880326}"/>
+              </a:ext>
+            </a:extLst>
+          </p:cNvPr>
+          <p:cNvCxnSpPr>
+            <a:cxnSpLocks/>
+          </p:cNvCxnSpPr>
+          <p:nvPr/>
+        </p:nvCxnSpPr>
+        <p:spPr>
+          <a:xfrm rot="12660000">
+            <a:off x="4865350" y="5852003"/>
+            <a:ext cx="0" cy="372511"/>
+          </a:xfrm>
+          <a:prstGeom prst="line">
+            <a:avLst/>
+          </a:prstGeom>
+        </p:spPr>
+        <p:style>
+          <a:lnRef idx="1">
+            <a:schemeClr val="accent1"/>
+          </a:lnRef>
+          <a:fillRef idx="0">
+            <a:schemeClr val="accent1"/>
+          </a:fillRef>
+          <a:effectRef idx="0">
+            <a:schemeClr val="accent1"/>
+          </a:effectRef>
+          <a:fontRef idx="minor">
+            <a:schemeClr val="tx1"/>
+          </a:fontRef>
+        </p:style>
+      </p:cxnSp>
+      <p:cxnSp>
+        <p:nvCxnSpPr>
+          <p:cNvPr id="21" name="直接连接符 20">
+            <a:extLst>
+              <a:ext uri="{FF2B5EF4-FFF2-40B4-BE49-F238E27FC236}">
+                <a16:creationId xmlns:a16="http://schemas.microsoft.com/office/drawing/2014/main" id="{0E09662F-3101-4B05-8238-FE135F94C1E2}"/>
+              </a:ext>
+            </a:extLst>
+          </p:cNvPr>
+          <p:cNvCxnSpPr>
+            <a:cxnSpLocks/>
+          </p:cNvCxnSpPr>
+          <p:nvPr/>
+        </p:nvCxnSpPr>
+        <p:spPr>
+          <a:xfrm rot="14460000">
+            <a:off x="4594801" y="5571841"/>
+            <a:ext cx="0" cy="372511"/>
+          </a:xfrm>
+          <a:prstGeom prst="line">
+            <a:avLst/>
+          </a:prstGeom>
+        </p:spPr>
+        <p:style>
+          <a:lnRef idx="1">
+            <a:schemeClr val="accent1"/>
+          </a:lnRef>
+          <a:fillRef idx="0">
+            <a:schemeClr val="accent1"/>
+          </a:fillRef>
+          <a:effectRef idx="0">
+            <a:schemeClr val="accent1"/>
+          </a:effectRef>
+          <a:fontRef idx="minor">
+            <a:schemeClr val="tx1"/>
+          </a:fontRef>
+        </p:style>
+      </p:cxnSp>
+    </p:spTree>
+    <p:extLst>
+      <p:ext uri="{BB962C8B-B14F-4D97-AF65-F5344CB8AC3E}">
+        <p14:creationId xmlns:p14="http://schemas.microsoft.com/office/powerpoint/2010/main" val="1753814452"/>
+      </p:ext>
+    </p:extLst>
+  </p:cSld>
+  <p:clrMapOvr>
+    <a:masterClrMapping/>
+  </p:clrMapOvr>
+  <p:timing>
+    <p:tnLst>
+      <p:par>
+        <p:cTn id="1" dur="indefinite" restart="never" nodeType="tmRoot">
+          <p:childTnLst>
+            <p:seq concurrent="1" nextAc="seek">
+              <p:cTn id="2" dur="indefinite" nodeType="mainSeq">
+                <p:childTnLst>
+                  <p:par>
+                    <p:cTn id="3" fill="hold">
+                      <p:stCondLst>
+                        <p:cond delay="indefinite"/>
+                        <p:cond evt="onBegin" delay="0">
+                          <p:tn val="2"/>
+                        </p:cond>
+                      </p:stCondLst>
+                      <p:childTnLst>
+                        <p:par>
+                          <p:cTn id="4" fill="hold">
+                            <p:stCondLst>
+                              <p:cond delay="0"/>
+                            </p:stCondLst>
+                            <p:childTnLst>
+                              <p:par>
+                                <p:cTn id="5" presetID="22" presetClass="entr" presetSubtype="1" fill="hold" nodeType="withEffect">
+                                  <p:stCondLst>
+                                    <p:cond delay="600"/>
+                                  </p:stCondLst>
+                                  <p:childTnLst>
+                                    <p:set>
+                                      <p:cBhvr>
+                                        <p:cTn id="6" dur="1" fill="hold">
+                                          <p:stCondLst>
+                                            <p:cond delay="0"/>
+                                          </p:stCondLst>
+                                        </p:cTn>
+                                        <p:tgtEl>
+                                          <p:spTgt spid="11"/>
+                                        </p:tgtEl>
+                                        <p:attrNameLst>
+                                          <p:attrName>style.visibility</p:attrName>
+                                        </p:attrNameLst>
+                                      </p:cBhvr>
+                                      <p:to>
+                                        <p:strVal val="visible"/>
+                                      </p:to>
+                                    </p:set>
+                                    <p:animEffect transition="in" filter="wipe(up)">
+                                      <p:cBhvr>
+                                        <p:cTn id="7" dur="500"/>
+                                        <p:tgtEl>
+                                          <p:spTgt spid="11"/>
+                                        </p:tgtEl>
+                                      </p:cBhvr>
+                                    </p:animEffect>
+                                  </p:childTnLst>
+                                </p:cTn>
+                              </p:par>
+                              <p:par>
+                                <p:cTn id="8" presetID="42" presetClass="path" presetSubtype="0" fill="hold" nodeType="withEffect">
+                                  <p:stCondLst>
+                                    <p:cond delay="600"/>
+                                  </p:stCondLst>
+                                  <p:childTnLst>
+                                    <p:animMotion origin="layout" path="M -3.95833E-6 -4.07407E-6 L 0.06485 0.07755 " pathEditMode="relative" rAng="0" ptsTypes="AA">
+                                      <p:cBhvr>
+                                        <p:cTn id="9" dur="2000" fill="hold"/>
+                                        <p:tgtEl>
+                                          <p:spTgt spid="11"/>
+                                        </p:tgtEl>
+                                        <p:attrNameLst>
+                                          <p:attrName>ppt_x</p:attrName>
+                                          <p:attrName>ppt_y</p:attrName>
+                                        </p:attrNameLst>
+                                      </p:cBhvr>
+                                      <p:rCtr x="3242" y="3866"/>
+                                    </p:animMotion>
+                                  </p:childTnLst>
+                                </p:cTn>
+                              </p:par>
+                              <p:par>
+                                <p:cTn id="10" presetID="22" presetClass="exit" presetSubtype="1" fill="hold" nodeType="withEffect">
+                                  <p:stCondLst>
+                                    <p:cond delay="600"/>
+                                  </p:stCondLst>
+                                  <p:childTnLst>
+                                    <p:animEffect transition="out" filter="wipe(up)">
+                                      <p:cBhvr>
+                                        <p:cTn id="11" dur="500"/>
+                                        <p:tgtEl>
+                                          <p:spTgt spid="11"/>
+                                        </p:tgtEl>
+                                      </p:cBhvr>
+                                    </p:animEffect>
+                                    <p:set>
+                                      <p:cBhvr>
+                                        <p:cTn id="12" dur="1" fill="hold">
+                                          <p:stCondLst>
+                                            <p:cond delay="499"/>
+                                          </p:stCondLst>
+                                        </p:cTn>
+                                        <p:tgtEl>
+                                          <p:spTgt spid="11"/>
+                                        </p:tgtEl>
+                                        <p:attrNameLst>
+                                          <p:attrName>style.visibility</p:attrName>
+                                        </p:attrNameLst>
+                                      </p:cBhvr>
+                                      <p:to>
+                                        <p:strVal val="hidden"/>
+                                      </p:to>
+                                    </p:set>
+                                  </p:childTnLst>
+                                </p:cTn>
+                              </p:par>
+                              <p:par>
+                                <p:cTn id="13" presetID="22" presetClass="entr" presetSubtype="1" fill="hold" nodeType="withEffect">
+                                  <p:stCondLst>
+                                    <p:cond delay="600"/>
+                                  </p:stCondLst>
+                                  <p:childTnLst>
+                                    <p:set>
+                                      <p:cBhvr>
+                                        <p:cTn id="14" dur="1" fill="hold">
+                                          <p:stCondLst>
+                                            <p:cond delay="0"/>
+                                          </p:stCondLst>
+                                        </p:cTn>
+                                        <p:tgtEl>
+                                          <p:spTgt spid="21"/>
+                                        </p:tgtEl>
+                                        <p:attrNameLst>
+                                          <p:attrName>style.visibility</p:attrName>
+                                        </p:attrNameLst>
+                                      </p:cBhvr>
+                                      <p:to>
+                                        <p:strVal val="visible"/>
+                                      </p:to>
+                                    </p:set>
+                                    <p:animEffect transition="in" filter="wipe(up)">
+                                      <p:cBhvr>
+                                        <p:cTn id="15" dur="500"/>
+                                        <p:tgtEl>
+                                          <p:spTgt spid="21"/>
+                                        </p:tgtEl>
+                                      </p:cBhvr>
+                                    </p:animEffect>
+                                  </p:childTnLst>
+                                </p:cTn>
+                              </p:par>
+                              <p:par>
+                                <p:cTn id="16" presetID="42" presetClass="path" presetSubtype="0" fill="hold" nodeType="withEffect">
+                                  <p:stCondLst>
+                                    <p:cond delay="600"/>
+                                  </p:stCondLst>
+                                  <p:childTnLst>
+                                    <p:animMotion origin="layout" path="M -2.91667E-6 -3.33333E-6 L -0.07708 0.06667 " pathEditMode="relative" rAng="0" ptsTypes="AA">
+                                      <p:cBhvr>
+                                        <p:cTn id="17" dur="2000" fill="hold"/>
+                                        <p:tgtEl>
+                                          <p:spTgt spid="21"/>
+                                        </p:tgtEl>
+                                        <p:attrNameLst>
+                                          <p:attrName>ppt_x</p:attrName>
+                                          <p:attrName>ppt_y</p:attrName>
+                                        </p:attrNameLst>
+                                      </p:cBhvr>
+                                      <p:rCtr x="-3854" y="3333"/>
+                                    </p:animMotion>
+                                  </p:childTnLst>
+                                </p:cTn>
+                              </p:par>
+                              <p:par>
+                                <p:cTn id="18" presetID="22" presetClass="exit" presetSubtype="1" fill="hold" nodeType="withEffect">
+                                  <p:stCondLst>
+                                    <p:cond delay="600"/>
+                                  </p:stCondLst>
+                                  <p:childTnLst>
+                                    <p:animEffect transition="out" filter="wipe(up)">
+                                      <p:cBhvr>
+                                        <p:cTn id="19" dur="500"/>
+                                        <p:tgtEl>
+                                          <p:spTgt spid="21"/>
+                                        </p:tgtEl>
+                                      </p:cBhvr>
+                                    </p:animEffect>
+                                    <p:set>
+                                      <p:cBhvr>
+                                        <p:cTn id="20" dur="1" fill="hold">
+                                          <p:stCondLst>
+                                            <p:cond delay="499"/>
+                                          </p:stCondLst>
+                                        </p:cTn>
+                                        <p:tgtEl>
+                                          <p:spTgt spid="21"/>
+                                        </p:tgtEl>
+                                        <p:attrNameLst>
+                                          <p:attrName>style.visibility</p:attrName>
+                                        </p:attrNameLst>
+                                      </p:cBhvr>
+                                      <p:to>
+                                        <p:strVal val="hidden"/>
+                                      </p:to>
+                                    </p:set>
+                                  </p:childTnLst>
+                                </p:cTn>
+                              </p:par>
+                              <p:par>
+                                <p:cTn id="21" presetID="22" presetClass="entr" presetSubtype="1" fill="hold" nodeType="withEffect">
+                                  <p:stCondLst>
+                                    <p:cond delay="600"/>
+                                  </p:stCondLst>
+                                  <p:childTnLst>
+                                    <p:set>
+                                      <p:cBhvr>
+                                        <p:cTn id="22" dur="1" fill="hold">
+                                          <p:stCondLst>
+                                            <p:cond delay="0"/>
+                                          </p:stCondLst>
+                                        </p:cTn>
+                                        <p:tgtEl>
+                                          <p:spTgt spid="20"/>
+                                        </p:tgtEl>
+                                        <p:attrNameLst>
+                                          <p:attrName>style.visibility</p:attrName>
+                                        </p:attrNameLst>
+                                      </p:cBhvr>
+                                      <p:to>
+                                        <p:strVal val="visible"/>
+                                      </p:to>
+                                    </p:set>
+                                    <p:animEffect transition="in" filter="wipe(up)">
+                                      <p:cBhvr>
+                                        <p:cTn id="23" dur="500"/>
+                                        <p:tgtEl>
+                                          <p:spTgt spid="20"/>
+                                        </p:tgtEl>
+                                      </p:cBhvr>
+                                    </p:animEffect>
+                                  </p:childTnLst>
+                                </p:cTn>
+                              </p:par>
+                              <p:par>
+                                <p:cTn id="24" presetID="42" presetClass="path" presetSubtype="0" fill="hold" nodeType="withEffect">
+                                  <p:stCondLst>
+                                    <p:cond delay="600"/>
+                                  </p:stCondLst>
+                                  <p:childTnLst>
+                                    <p:animMotion origin="layout" path="M 1.45833E-6 -4.07407E-6 L -0.03555 0.09653 " pathEditMode="relative" rAng="0" ptsTypes="AA">
+                                      <p:cBhvr>
+                                        <p:cTn id="25" dur="2000" fill="hold"/>
+                                        <p:tgtEl>
+                                          <p:spTgt spid="20"/>
+                                        </p:tgtEl>
+                                        <p:attrNameLst>
+                                          <p:attrName>ppt_x</p:attrName>
+                                          <p:attrName>ppt_y</p:attrName>
+                                        </p:attrNameLst>
+                                      </p:cBhvr>
+                                      <p:rCtr x="-1784" y="4815"/>
+                                    </p:animMotion>
+                                  </p:childTnLst>
+                                </p:cTn>
+                              </p:par>
+                              <p:par>
+                                <p:cTn id="26" presetID="22" presetClass="exit" presetSubtype="1" fill="hold" nodeType="withEffect">
+                                  <p:stCondLst>
+                                    <p:cond delay="600"/>
+                                  </p:stCondLst>
+                                  <p:childTnLst>
+                                    <p:animEffect transition="out" filter="wipe(up)">
+                                      <p:cBhvr>
+                                        <p:cTn id="27" dur="500"/>
+                                        <p:tgtEl>
+                                          <p:spTgt spid="20"/>
+                                        </p:tgtEl>
+                                      </p:cBhvr>
+                                    </p:animEffect>
+                                    <p:set>
+                                      <p:cBhvr>
+                                        <p:cTn id="28" dur="1" fill="hold">
+                                          <p:stCondLst>
+                                            <p:cond delay="499"/>
+                                          </p:stCondLst>
+                                        </p:cTn>
+                                        <p:tgtEl>
+                                          <p:spTgt spid="20"/>
+                                        </p:tgtEl>
+                                        <p:attrNameLst>
+                                          <p:attrName>style.visibility</p:attrName>
+                                        </p:attrNameLst>
+                                      </p:cBhvr>
+                                      <p:to>
+                                        <p:strVal val="hidden"/>
+                                      </p:to>
+                                    </p:set>
+                                  </p:childTnLst>
+                                </p:cTn>
+                              </p:par>
+                              <p:par>
+                                <p:cTn id="29" presetID="22" presetClass="entr" presetSubtype="1" fill="hold" nodeType="withEffect">
+                                  <p:stCondLst>
+                                    <p:cond delay="600"/>
+                                  </p:stCondLst>
+                                  <p:childTnLst>
+                                    <p:set>
+                                      <p:cBhvr>
+                                        <p:cTn id="30" dur="1" fill="hold">
+                                          <p:stCondLst>
+                                            <p:cond delay="0"/>
+                                          </p:stCondLst>
+                                        </p:cTn>
+                                        <p:tgtEl>
+                                          <p:spTgt spid="19"/>
+                                        </p:tgtEl>
+                                        <p:attrNameLst>
+                                          <p:attrName>style.visibility</p:attrName>
+                                        </p:attrNameLst>
+                                      </p:cBhvr>
+                                      <p:to>
+                                        <p:strVal val="visible"/>
+                                      </p:to>
+                                    </p:set>
+                                    <p:animEffect transition="in" filter="wipe(up)">
+                                      <p:cBhvr>
+                                        <p:cTn id="31" dur="500"/>
+                                        <p:tgtEl>
+                                          <p:spTgt spid="19"/>
+                                        </p:tgtEl>
+                                      </p:cBhvr>
+                                    </p:animEffect>
+                                  </p:childTnLst>
+                                </p:cTn>
+                              </p:par>
+                              <p:par>
+                                <p:cTn id="32" presetID="42" presetClass="path" presetSubtype="0" fill="hold" nodeType="withEffect">
+                                  <p:stCondLst>
+                                    <p:cond delay="600"/>
+                                  </p:stCondLst>
+                                  <p:childTnLst>
+                                    <p:animMotion origin="layout" path="M 2.29167E-6 -4.81481E-6 L -0.00052 0.10394 " pathEditMode="relative" rAng="0" ptsTypes="AA">
+                                      <p:cBhvr>
+                                        <p:cTn id="33" dur="2000" fill="hold"/>
+                                        <p:tgtEl>
+                                          <p:spTgt spid="19"/>
+                                        </p:tgtEl>
+                                        <p:attrNameLst>
+                                          <p:attrName>ppt_x</p:attrName>
+                                          <p:attrName>ppt_y</p:attrName>
+                                        </p:attrNameLst>
+                                      </p:cBhvr>
+                                      <p:rCtr x="-26" y="5185"/>
+                                    </p:animMotion>
+                                  </p:childTnLst>
+                                </p:cTn>
+                              </p:par>
+                              <p:par>
+                                <p:cTn id="34" presetID="22" presetClass="exit" presetSubtype="1" fill="hold" nodeType="withEffect">
+                                  <p:stCondLst>
+                                    <p:cond delay="600"/>
+                                  </p:stCondLst>
+                                  <p:childTnLst>
+                                    <p:animEffect transition="out" filter="wipe(up)">
+                                      <p:cBhvr>
+                                        <p:cTn id="35" dur="500"/>
+                                        <p:tgtEl>
+                                          <p:spTgt spid="19"/>
+                                        </p:tgtEl>
+                                      </p:cBhvr>
+                                    </p:animEffect>
+                                    <p:set>
+                                      <p:cBhvr>
+                                        <p:cTn id="36" dur="1" fill="hold">
+                                          <p:stCondLst>
+                                            <p:cond delay="499"/>
+                                          </p:stCondLst>
+                                        </p:cTn>
+                                        <p:tgtEl>
+                                          <p:spTgt spid="19"/>
+                                        </p:tgtEl>
+                                        <p:attrNameLst>
+                                          <p:attrName>style.visibility</p:attrName>
+                                        </p:attrNameLst>
+                                      </p:cBhvr>
+                                      <p:to>
+                                        <p:strVal val="hidden"/>
+                                      </p:to>
+                                    </p:set>
+                                  </p:childTnLst>
+                                </p:cTn>
+                              </p:par>
+                              <p:par>
+                                <p:cTn id="37" presetID="22" presetClass="entr" presetSubtype="1" fill="hold" nodeType="withEffect">
+                                  <p:stCondLst>
+                                    <p:cond delay="600"/>
+                                  </p:stCondLst>
+                                  <p:childTnLst>
+                                    <p:set>
+                                      <p:cBhvr>
+                                        <p:cTn id="38" dur="1" fill="hold">
+                                          <p:stCondLst>
+                                            <p:cond delay="0"/>
+                                          </p:stCondLst>
+                                        </p:cTn>
+                                        <p:tgtEl>
+                                          <p:spTgt spid="18"/>
+                                        </p:tgtEl>
+                                        <p:attrNameLst>
+                                          <p:attrName>style.visibility</p:attrName>
+                                        </p:attrNameLst>
+                                      </p:cBhvr>
+                                      <p:to>
+                                        <p:strVal val="visible"/>
+                                      </p:to>
+                                    </p:set>
+                                    <p:animEffect transition="in" filter="wipe(up)">
+                                      <p:cBhvr>
+                                        <p:cTn id="39" dur="500"/>
+                                        <p:tgtEl>
+                                          <p:spTgt spid="18"/>
+                                        </p:tgtEl>
+                                      </p:cBhvr>
+                                    </p:animEffect>
+                                  </p:childTnLst>
+                                </p:cTn>
+                              </p:par>
+                              <p:par>
+                                <p:cTn id="40" presetID="42" presetClass="path" presetSubtype="0" fill="hold" nodeType="withEffect">
+                                  <p:stCondLst>
+                                    <p:cond delay="600"/>
+                                  </p:stCondLst>
+                                  <p:childTnLst>
+                                    <p:animMotion origin="layout" path="M 2.70833E-6 2.59259E-6 L 0.03502 0.10463 " pathEditMode="relative" rAng="0" ptsTypes="AA">
+                                      <p:cBhvr>
+                                        <p:cTn id="41" dur="2000" fill="hold"/>
+                                        <p:tgtEl>
+                                          <p:spTgt spid="18"/>
+                                        </p:tgtEl>
+                                        <p:attrNameLst>
+                                          <p:attrName>ppt_x</p:attrName>
+                                          <p:attrName>ppt_y</p:attrName>
+                                        </p:attrNameLst>
+                                      </p:cBhvr>
+                                      <p:rCtr x="1745" y="5231"/>
+                                    </p:animMotion>
+                                  </p:childTnLst>
+                                </p:cTn>
+                              </p:par>
+                              <p:par>
+                                <p:cTn id="42" presetID="22" presetClass="exit" presetSubtype="1" fill="hold" nodeType="withEffect">
+                                  <p:stCondLst>
+                                    <p:cond delay="600"/>
+                                  </p:stCondLst>
+                                  <p:childTnLst>
+                                    <p:animEffect transition="out" filter="wipe(up)">
+                                      <p:cBhvr>
+                                        <p:cTn id="43" dur="500"/>
+                                        <p:tgtEl>
+                                          <p:spTgt spid="18"/>
+                                        </p:tgtEl>
+                                      </p:cBhvr>
+                                    </p:animEffect>
+                                    <p:set>
+                                      <p:cBhvr>
+                                        <p:cTn id="44" dur="1" fill="hold">
+                                          <p:stCondLst>
+                                            <p:cond delay="499"/>
+                                          </p:stCondLst>
+                                        </p:cTn>
+                                        <p:tgtEl>
+                                          <p:spTgt spid="18"/>
+                                        </p:tgtEl>
+                                        <p:attrNameLst>
+                                          <p:attrName>style.visibility</p:attrName>
+                                        </p:attrNameLst>
+                                      </p:cBhvr>
+                                      <p:to>
+                                        <p:strVal val="hidden"/>
+                                      </p:to>
+                                    </p:set>
+                                  </p:childTnLst>
+                                </p:cTn>
+                              </p:par>
+                            </p:childTnLst>
+                          </p:cTn>
+                        </p:par>
+                      </p:childTnLst>
+                    </p:cTn>
+                  </p:par>
+                </p:childTnLst>
+              </p:cTn>
+              <p:prevCondLst>
+                <p:cond evt="onPrev" delay="0">
+                  <p:tgtEl>
+                    <p:sldTgt/>
+                  </p:tgtEl>
+                </p:cond>
+              </p:prevCondLst>
+              <p:nextCondLst>
+                <p:cond evt="onNext" delay="0">
+                  <p:tgtEl>
+                    <p:sldTgt/>
+                  </p:tgtEl>
+                </p:cond>
+              </p:nextCondLst>
+            </p:seq>
+          </p:childTnLst>
+        </p:cTn>
+      </p:par>
+    </p:tnLst>
+  </p:timing>
+</p:sld>
+</file>
+
+<file path=ppt/slides/slide23.xml><?xml version="1.0" encoding="utf-8"?>
+<p:sld xmlns:a="http://schemas.openxmlformats.org/drawingml/2006/main" xmlns:r="http://schemas.openxmlformats.org/officeDocument/2006/relationships" xmlns:p="http://schemas.openxmlformats.org/presentationml/2006/main">
+  <p:cSld>
+    <p:spTree>
+      <p:nvGrpSpPr>
+        <p:cNvPr id="1" name=""/>
+        <p:cNvGrpSpPr/>
+        <p:nvPr/>
+      </p:nvGrpSpPr>
+      <p:grpSpPr>
+        <a:xfrm>
+          <a:off x="0" y="0"/>
+          <a:ext cx="0" cy="0"/>
+          <a:chOff x="0" y="0"/>
+          <a:chExt cx="0" cy="0"/>
+        </a:xfrm>
+      </p:grpSpPr>
+      <p:sp>
+        <p:nvSpPr>
+          <p:cNvPr id="2" name="标题 1">
+            <a:extLst>
+              <a:ext uri="{FF2B5EF4-FFF2-40B4-BE49-F238E27FC236}">
+                <a16:creationId xmlns:a16="http://schemas.microsoft.com/office/drawing/2014/main" id="{0CE447EC-574F-4D76-BF21-ADFE126DE83E}"/>
+              </a:ext>
+            </a:extLst>
+          </p:cNvPr>
+          <p:cNvSpPr>
+            <a:spLocks noGrp="1"/>
+          </p:cNvSpPr>
+          <p:nvPr>
+            <p:ph type="title"/>
+          </p:nvPr>
+        </p:nvSpPr>
+        <p:spPr/>
+        <p:txBody>
+          <a:bodyPr/>
+          <a:lstStyle/>
+          <a:p>
+            <a:endParaRPr lang="zh-CN" altLang="en-US"/>
+          </a:p>
+        </p:txBody>
+      </p:sp>
+      <p:sp>
+        <p:nvSpPr>
+          <p:cNvPr id="3" name="内容占位符 2">
+            <a:extLst>
+              <a:ext uri="{FF2B5EF4-FFF2-40B4-BE49-F238E27FC236}">
+                <a16:creationId xmlns:a16="http://schemas.microsoft.com/office/drawing/2014/main" id="{97C785D6-AF83-4FBA-A901-3FAAF35A3660}"/>
+              </a:ext>
+            </a:extLst>
+          </p:cNvPr>
+          <p:cNvSpPr>
+            <a:spLocks noGrp="1"/>
+          </p:cNvSpPr>
+          <p:nvPr>
+            <p:ph idx="1"/>
+          </p:nvPr>
+        </p:nvSpPr>
+        <p:spPr/>
+        <p:txBody>
+          <a:bodyPr/>
+          <a:lstStyle/>
+          <a:p>
+            <a:r>
+              <a:rPr lang="zh-CN" altLang="en-US" dirty="0"/>
+              <a:t>整合效果</a:t>
+            </a:r>
+          </a:p>
+        </p:txBody>
+      </p:sp>
+      <p:cxnSp>
+        <p:nvCxnSpPr>
+          <p:cNvPr id="4" name="直接连接符 3">
+            <a:extLst>
+              <a:ext uri="{FF2B5EF4-FFF2-40B4-BE49-F238E27FC236}">
+                <a16:creationId xmlns:a16="http://schemas.microsoft.com/office/drawing/2014/main" id="{6F3BA4EA-139B-4FE9-9F24-21AE97D9CC76}"/>
+              </a:ext>
+            </a:extLst>
+          </p:cNvPr>
+          <p:cNvCxnSpPr>
+            <a:cxnSpLocks/>
+          </p:cNvCxnSpPr>
+          <p:nvPr/>
+        </p:nvCxnSpPr>
+        <p:spPr>
+          <a:xfrm rot="7260000">
+            <a:off x="5897797" y="5594585"/>
+            <a:ext cx="0" cy="372511"/>
+          </a:xfrm>
+          <a:prstGeom prst="line">
+            <a:avLst/>
+          </a:prstGeom>
+        </p:spPr>
+        <p:style>
+          <a:lnRef idx="1">
+            <a:schemeClr val="accent1"/>
+          </a:lnRef>
+          <a:fillRef idx="0">
+            <a:schemeClr val="accent1"/>
+          </a:fillRef>
+          <a:effectRef idx="0">
+            <a:schemeClr val="accent1"/>
+          </a:effectRef>
+          <a:fontRef idx="minor">
+            <a:schemeClr val="tx1"/>
+          </a:fontRef>
+        </p:style>
+      </p:cxnSp>
+      <p:cxnSp>
+        <p:nvCxnSpPr>
+          <p:cNvPr id="5" name="直接连接符 4">
+            <a:extLst>
+              <a:ext uri="{FF2B5EF4-FFF2-40B4-BE49-F238E27FC236}">
+                <a16:creationId xmlns:a16="http://schemas.microsoft.com/office/drawing/2014/main" id="{1D0FF6B8-8E2A-47EA-8B4B-6D228CB5D2A5}"/>
+              </a:ext>
+            </a:extLst>
+          </p:cNvPr>
+          <p:cNvCxnSpPr>
+            <a:cxnSpLocks/>
+          </p:cNvCxnSpPr>
+          <p:nvPr/>
+        </p:nvCxnSpPr>
+        <p:spPr>
+          <a:xfrm rot="9060000">
+            <a:off x="5617635" y="5865134"/>
+            <a:ext cx="0" cy="372511"/>
+          </a:xfrm>
+          <a:prstGeom prst="line">
+            <a:avLst/>
+          </a:prstGeom>
+        </p:spPr>
+        <p:style>
+          <a:lnRef idx="1">
+            <a:schemeClr val="accent1"/>
+          </a:lnRef>
+          <a:fillRef idx="0">
+            <a:schemeClr val="accent1"/>
+          </a:fillRef>
+          <a:effectRef idx="0">
+            <a:schemeClr val="accent1"/>
+          </a:effectRef>
+          <a:fontRef idx="minor">
+            <a:schemeClr val="tx1"/>
+          </a:fontRef>
+        </p:style>
+      </p:cxnSp>
+      <p:cxnSp>
+        <p:nvCxnSpPr>
+          <p:cNvPr id="6" name="直接连接符 5">
+            <a:extLst>
+              <a:ext uri="{FF2B5EF4-FFF2-40B4-BE49-F238E27FC236}">
+                <a16:creationId xmlns:a16="http://schemas.microsoft.com/office/drawing/2014/main" id="{C13A8FE9-E36D-4FFA-B502-0DD84F0B1C01}"/>
+              </a:ext>
+            </a:extLst>
+          </p:cNvPr>
+          <p:cNvCxnSpPr>
+            <a:cxnSpLocks/>
+          </p:cNvCxnSpPr>
+          <p:nvPr/>
+        </p:nvCxnSpPr>
+        <p:spPr>
+          <a:xfrm rot="10860000">
+            <a:off x="5239734" y="5959356"/>
+            <a:ext cx="0" cy="372511"/>
+          </a:xfrm>
+          <a:prstGeom prst="line">
+            <a:avLst/>
+          </a:prstGeom>
+        </p:spPr>
+        <p:style>
+          <a:lnRef idx="1">
+            <a:schemeClr val="accent1"/>
+          </a:lnRef>
+          <a:fillRef idx="0">
+            <a:schemeClr val="accent1"/>
+          </a:fillRef>
+          <a:effectRef idx="0">
+            <a:schemeClr val="accent1"/>
+          </a:effectRef>
+          <a:fontRef idx="minor">
+            <a:schemeClr val="tx1"/>
+          </a:fontRef>
+        </p:style>
+      </p:cxnSp>
+      <p:cxnSp>
+        <p:nvCxnSpPr>
+          <p:cNvPr id="7" name="直接连接符 6">
+            <a:extLst>
+              <a:ext uri="{FF2B5EF4-FFF2-40B4-BE49-F238E27FC236}">
+                <a16:creationId xmlns:a16="http://schemas.microsoft.com/office/drawing/2014/main" id="{EFD891FF-645F-4F07-AC9B-AC9576383D83}"/>
+              </a:ext>
+            </a:extLst>
+          </p:cNvPr>
+          <p:cNvCxnSpPr>
+            <a:cxnSpLocks/>
+          </p:cNvCxnSpPr>
+          <p:nvPr/>
+        </p:nvCxnSpPr>
+        <p:spPr>
+          <a:xfrm rot="12660000">
+            <a:off x="4865350" y="5852003"/>
+            <a:ext cx="0" cy="372511"/>
+          </a:xfrm>
+          <a:prstGeom prst="line">
+            <a:avLst/>
+          </a:prstGeom>
+        </p:spPr>
+        <p:style>
+          <a:lnRef idx="1">
+            <a:schemeClr val="accent1"/>
+          </a:lnRef>
+          <a:fillRef idx="0">
+            <a:schemeClr val="accent1"/>
+          </a:fillRef>
+          <a:effectRef idx="0">
+            <a:schemeClr val="accent1"/>
+          </a:effectRef>
+          <a:fontRef idx="minor">
+            <a:schemeClr val="tx1"/>
+          </a:fontRef>
+        </p:style>
+      </p:cxnSp>
+      <p:cxnSp>
+        <p:nvCxnSpPr>
+          <p:cNvPr id="8" name="直接连接符 7">
+            <a:extLst>
+              <a:ext uri="{FF2B5EF4-FFF2-40B4-BE49-F238E27FC236}">
+                <a16:creationId xmlns:a16="http://schemas.microsoft.com/office/drawing/2014/main" id="{359C5DD6-58F8-4A2D-8F91-E490AF3C2864}"/>
+              </a:ext>
+            </a:extLst>
+          </p:cNvPr>
+          <p:cNvCxnSpPr>
+            <a:cxnSpLocks/>
+          </p:cNvCxnSpPr>
+          <p:nvPr/>
+        </p:nvCxnSpPr>
+        <p:spPr>
+          <a:xfrm rot="14460000">
+            <a:off x="4594801" y="5571841"/>
+            <a:ext cx="0" cy="372511"/>
+          </a:xfrm>
+          <a:prstGeom prst="line">
+            <a:avLst/>
+          </a:prstGeom>
+        </p:spPr>
+        <p:style>
+          <a:lnRef idx="1">
+            <a:schemeClr val="accent1"/>
+          </a:lnRef>
+          <a:fillRef idx="0">
+            <a:schemeClr val="accent1"/>
+          </a:fillRef>
+          <a:effectRef idx="0">
+            <a:schemeClr val="accent1"/>
+          </a:effectRef>
+          <a:fontRef idx="minor">
+            <a:schemeClr val="tx1"/>
+          </a:fontRef>
+        </p:style>
+      </p:cxnSp>
+      <p:sp>
+        <p:nvSpPr>
+          <p:cNvPr id="9" name="流程图: 接点 8">
+            <a:extLst>
+              <a:ext uri="{FF2B5EF4-FFF2-40B4-BE49-F238E27FC236}">
+                <a16:creationId xmlns:a16="http://schemas.microsoft.com/office/drawing/2014/main" id="{E63B39C7-5E9E-43AC-B136-4A24A82E320A}"/>
+              </a:ext>
+            </a:extLst>
+          </p:cNvPr>
+          <p:cNvSpPr/>
+          <p:nvPr/>
+        </p:nvSpPr>
+        <p:spPr>
+          <a:xfrm>
+            <a:off x="4878726" y="4882882"/>
+            <a:ext cx="738909" cy="618837"/>
+          </a:xfrm>
+          <a:prstGeom prst="flowChartConnector">
+            <a:avLst/>
+          </a:prstGeom>
+        </p:spPr>
+        <p:style>
+          <a:lnRef idx="2">
+            <a:schemeClr val="accent1">
+              <a:shade val="50000"/>
+            </a:schemeClr>
+          </a:lnRef>
+          <a:fillRef idx="1">
+            <a:schemeClr val="accent1"/>
+          </a:fillRef>
+          <a:effectRef idx="0">
+            <a:schemeClr val="accent1"/>
+          </a:effectRef>
+          <a:fontRef idx="minor">
+            <a:schemeClr val="lt1"/>
+          </a:fontRef>
+        </p:style>
+        <p:txBody>
+          <a:bodyPr rtlCol="0" anchor="ctr"/>
+          <a:lstStyle/>
+          <a:p>
+            <a:pPr algn="ctr"/>
+            <a:endParaRPr lang="zh-CN" altLang="en-US" sz="1200" dirty="0"/>
+          </a:p>
+        </p:txBody>
+      </p:sp>
+    </p:spTree>
+    <p:extLst>
+      <p:ext uri="{BB962C8B-B14F-4D97-AF65-F5344CB8AC3E}">
+        <p14:creationId xmlns:p14="http://schemas.microsoft.com/office/powerpoint/2010/main" val="552654774"/>
+      </p:ext>
+    </p:extLst>
+  </p:cSld>
+  <p:clrMapOvr>
+    <a:masterClrMapping/>
+  </p:clrMapOvr>
+  <mc:AlternateContent xmlns:mc="http://schemas.openxmlformats.org/markup-compatibility/2006">
+    <mc:Choice xmlns:p14="http://schemas.microsoft.com/office/powerpoint/2010/main" Requires="p14">
+      <p:timing>
+        <p:tnLst>
+          <p:par>
+            <p:cTn id="1" dur="indefinite" restart="never" nodeType="tmRoot">
+              <p:childTnLst>
+                <p:seq concurrent="1" nextAc="seek">
+                  <p:cTn id="2" dur="indefinite" nodeType="mainSeq">
+                    <p:childTnLst>
+                      <p:par>
+                        <p:cTn id="3" fill="hold">
+                          <p:stCondLst>
+                            <p:cond delay="indefinite"/>
+                            <p:cond evt="onBegin" delay="0">
+                              <p:tn val="2"/>
+                            </p:cond>
+                          </p:stCondLst>
+                          <p:childTnLst>
+                            <p:par>
+                              <p:cTn id="4" fill="hold">
+                                <p:stCondLst>
+                                  <p:cond delay="0"/>
+                                </p:stCondLst>
+                                <p:childTnLst>
+                                  <p:par>
+                                    <p:cTn id="5" presetID="22" presetClass="entr" presetSubtype="1" fill="hold" nodeType="withEffect">
+                                      <p:stCondLst>
+                                        <p:cond delay="600"/>
+                                      </p:stCondLst>
+                                      <p:childTnLst>
+                                        <p:set>
+                                          <p:cBhvr>
+                                            <p:cTn id="6" dur="1" fill="hold">
+                                              <p:stCondLst>
+                                                <p:cond delay="0"/>
+                                              </p:stCondLst>
+                                            </p:cTn>
+                                            <p:tgtEl>
+                                              <p:spTgt spid="4"/>
+                                            </p:tgtEl>
+                                            <p:attrNameLst>
+                                              <p:attrName>style.visibility</p:attrName>
+                                            </p:attrNameLst>
+                                          </p:cBhvr>
+                                          <p:to>
+                                            <p:strVal val="visible"/>
+                                          </p:to>
+                                        </p:set>
+                                        <p:animEffect transition="in" filter="wipe(up)">
+                                          <p:cBhvr>
+                                            <p:cTn id="7" dur="500"/>
+                                            <p:tgtEl>
+                                              <p:spTgt spid="4"/>
+                                            </p:tgtEl>
+                                          </p:cBhvr>
+                                        </p:animEffect>
+                                      </p:childTnLst>
+                                    </p:cTn>
+                                  </p:par>
+                                  <p:par>
+                                    <p:cTn id="8" presetID="42" presetClass="path" presetSubtype="0" fill="hold" nodeType="withEffect">
+                                      <p:stCondLst>
+                                        <p:cond delay="600"/>
+                                      </p:stCondLst>
+                                      <p:childTnLst>
+                                        <p:animMotion origin="layout" path="M -3.95833E-6 -4.07407E-6 L 0.06485 0.07755 " pathEditMode="relative" rAng="0" ptsTypes="AA">
+                                          <p:cBhvr>
+                                            <p:cTn id="9" dur="2000" fill="hold"/>
+                                            <p:tgtEl>
+                                              <p:spTgt spid="4"/>
+                                            </p:tgtEl>
+                                            <p:attrNameLst>
+                                              <p:attrName>ppt_x</p:attrName>
+                                              <p:attrName>ppt_y</p:attrName>
+                                            </p:attrNameLst>
+                                          </p:cBhvr>
+                                          <p:rCtr x="3242" y="3866"/>
+                                        </p:animMotion>
+                                      </p:childTnLst>
+                                    </p:cTn>
+                                  </p:par>
+                                  <p:par>
+                                    <p:cTn id="10" presetID="22" presetClass="exit" presetSubtype="1" fill="hold" nodeType="withEffect">
+                                      <p:stCondLst>
+                                        <p:cond delay="600"/>
+                                      </p:stCondLst>
+                                      <p:childTnLst>
+                                        <p:animEffect transition="out" filter="wipe(up)">
+                                          <p:cBhvr>
+                                            <p:cTn id="11" dur="500"/>
+                                            <p:tgtEl>
+                                              <p:spTgt spid="4"/>
+                                            </p:tgtEl>
+                                          </p:cBhvr>
+                                        </p:animEffect>
+                                        <p:set>
+                                          <p:cBhvr>
+                                            <p:cTn id="12" dur="1" fill="hold">
+                                              <p:stCondLst>
+                                                <p:cond delay="499"/>
+                                              </p:stCondLst>
+                                            </p:cTn>
+                                            <p:tgtEl>
+                                              <p:spTgt spid="4"/>
+                                            </p:tgtEl>
+                                            <p:attrNameLst>
+                                              <p:attrName>style.visibility</p:attrName>
+                                            </p:attrNameLst>
+                                          </p:cBhvr>
+                                          <p:to>
+                                            <p:strVal val="hidden"/>
+                                          </p:to>
+                                        </p:set>
+                                      </p:childTnLst>
+                                    </p:cTn>
+                                  </p:par>
+                                  <p:par>
+                                    <p:cTn id="13" presetID="22" presetClass="entr" presetSubtype="1" fill="hold" nodeType="withEffect">
+                                      <p:stCondLst>
+                                        <p:cond delay="600"/>
+                                      </p:stCondLst>
+                                      <p:childTnLst>
+                                        <p:set>
+                                          <p:cBhvr>
+                                            <p:cTn id="14" dur="1" fill="hold">
+                                              <p:stCondLst>
+                                                <p:cond delay="0"/>
+                                              </p:stCondLst>
+                                            </p:cTn>
+                                            <p:tgtEl>
+                                              <p:spTgt spid="8"/>
+                                            </p:tgtEl>
+                                            <p:attrNameLst>
+                                              <p:attrName>style.visibility</p:attrName>
+                                            </p:attrNameLst>
+                                          </p:cBhvr>
+                                          <p:to>
+                                            <p:strVal val="visible"/>
+                                          </p:to>
+                                        </p:set>
+                                        <p:animEffect transition="in" filter="wipe(up)">
+                                          <p:cBhvr>
+                                            <p:cTn id="15" dur="500"/>
+                                            <p:tgtEl>
+                                              <p:spTgt spid="8"/>
+                                            </p:tgtEl>
+                                          </p:cBhvr>
+                                        </p:animEffect>
+                                      </p:childTnLst>
+                                    </p:cTn>
+                                  </p:par>
+                                  <p:par>
+                                    <p:cTn id="16" presetID="42" presetClass="path" presetSubtype="0" fill="hold" nodeType="withEffect">
+                                      <p:stCondLst>
+                                        <p:cond delay="600"/>
+                                      </p:stCondLst>
+                                      <p:childTnLst>
+                                        <p:animMotion origin="layout" path="M -2.91667E-6 -3.33333E-6 L -0.07708 0.06667 " pathEditMode="relative" rAng="0" ptsTypes="AA">
+                                          <p:cBhvr>
+                                            <p:cTn id="17" dur="2000" fill="hold"/>
+                                            <p:tgtEl>
+                                              <p:spTgt spid="8"/>
+                                            </p:tgtEl>
+                                            <p:attrNameLst>
+                                              <p:attrName>ppt_x</p:attrName>
+                                              <p:attrName>ppt_y</p:attrName>
+                                            </p:attrNameLst>
+                                          </p:cBhvr>
+                                          <p:rCtr x="-3854" y="3333"/>
+                                        </p:animMotion>
+                                      </p:childTnLst>
+                                    </p:cTn>
+                                  </p:par>
+                                  <p:par>
+                                    <p:cTn id="18" presetID="22" presetClass="exit" presetSubtype="1" fill="hold" nodeType="withEffect">
+                                      <p:stCondLst>
+                                        <p:cond delay="600"/>
+                                      </p:stCondLst>
+                                      <p:childTnLst>
+                                        <p:animEffect transition="out" filter="wipe(up)">
+                                          <p:cBhvr>
+                                            <p:cTn id="19" dur="500"/>
+                                            <p:tgtEl>
+                                              <p:spTgt spid="8"/>
+                                            </p:tgtEl>
+                                          </p:cBhvr>
+                                        </p:animEffect>
+                                        <p:set>
+                                          <p:cBhvr>
+                                            <p:cTn id="20" dur="1" fill="hold">
+                                              <p:stCondLst>
+                                                <p:cond delay="499"/>
+                                              </p:stCondLst>
+                                            </p:cTn>
+                                            <p:tgtEl>
+                                              <p:spTgt spid="8"/>
+                                            </p:tgtEl>
+                                            <p:attrNameLst>
+                                              <p:attrName>style.visibility</p:attrName>
+                                            </p:attrNameLst>
+                                          </p:cBhvr>
+                                          <p:to>
+                                            <p:strVal val="hidden"/>
+                                          </p:to>
+                                        </p:set>
+                                      </p:childTnLst>
+                                    </p:cTn>
+                                  </p:par>
+                                  <p:par>
+                                    <p:cTn id="21" presetID="22" presetClass="entr" presetSubtype="1" fill="hold" nodeType="withEffect">
+                                      <p:stCondLst>
+                                        <p:cond delay="600"/>
+                                      </p:stCondLst>
+                                      <p:childTnLst>
+                                        <p:set>
+                                          <p:cBhvr>
+                                            <p:cTn id="22" dur="1" fill="hold">
+                                              <p:stCondLst>
+                                                <p:cond delay="0"/>
+                                              </p:stCondLst>
+                                            </p:cTn>
+                                            <p:tgtEl>
+                                              <p:spTgt spid="7"/>
+                                            </p:tgtEl>
+                                            <p:attrNameLst>
+                                              <p:attrName>style.visibility</p:attrName>
+                                            </p:attrNameLst>
+                                          </p:cBhvr>
+                                          <p:to>
+                                            <p:strVal val="visible"/>
+                                          </p:to>
+                                        </p:set>
+                                        <p:animEffect transition="in" filter="wipe(up)">
+                                          <p:cBhvr>
+                                            <p:cTn id="23" dur="500"/>
+                                            <p:tgtEl>
+                                              <p:spTgt spid="7"/>
+                                            </p:tgtEl>
+                                          </p:cBhvr>
+                                        </p:animEffect>
+                                      </p:childTnLst>
+                                    </p:cTn>
+                                  </p:par>
+                                  <p:par>
+                                    <p:cTn id="24" presetID="42" presetClass="path" presetSubtype="0" fill="hold" nodeType="withEffect">
+                                      <p:stCondLst>
+                                        <p:cond delay="600"/>
+                                      </p:stCondLst>
+                                      <p:childTnLst>
+                                        <p:animMotion origin="layout" path="M 1.45833E-6 -4.07407E-6 L -0.03555 0.09653 " pathEditMode="relative" rAng="0" ptsTypes="AA">
+                                          <p:cBhvr>
+                                            <p:cTn id="25" dur="2000" fill="hold"/>
+                                            <p:tgtEl>
+                                              <p:spTgt spid="7"/>
+                                            </p:tgtEl>
+                                            <p:attrNameLst>
+                                              <p:attrName>ppt_x</p:attrName>
+                                              <p:attrName>ppt_y</p:attrName>
+                                            </p:attrNameLst>
+                                          </p:cBhvr>
+                                          <p:rCtr x="-1784" y="4815"/>
+                                        </p:animMotion>
+                                      </p:childTnLst>
+                                    </p:cTn>
+                                  </p:par>
+                                  <p:par>
+                                    <p:cTn id="26" presetID="22" presetClass="exit" presetSubtype="1" fill="hold" nodeType="withEffect">
+                                      <p:stCondLst>
+                                        <p:cond delay="600"/>
+                                      </p:stCondLst>
+                                      <p:childTnLst>
+                                        <p:animEffect transition="out" filter="wipe(up)">
+                                          <p:cBhvr>
+                                            <p:cTn id="27" dur="500"/>
+                                            <p:tgtEl>
+                                              <p:spTgt spid="7"/>
+                                            </p:tgtEl>
+                                          </p:cBhvr>
+                                        </p:animEffect>
+                                        <p:set>
+                                          <p:cBhvr>
+                                            <p:cTn id="28" dur="1" fill="hold">
+                                              <p:stCondLst>
+                                                <p:cond delay="499"/>
+                                              </p:stCondLst>
+                                            </p:cTn>
+                                            <p:tgtEl>
+                                              <p:spTgt spid="7"/>
+                                            </p:tgtEl>
+                                            <p:attrNameLst>
+                                              <p:attrName>style.visibility</p:attrName>
+                                            </p:attrNameLst>
+                                          </p:cBhvr>
+                                          <p:to>
+                                            <p:strVal val="hidden"/>
+                                          </p:to>
+                                        </p:set>
+                                      </p:childTnLst>
+                                    </p:cTn>
+                                  </p:par>
+                                  <p:par>
+                                    <p:cTn id="29" presetID="22" presetClass="entr" presetSubtype="1" fill="hold" nodeType="withEffect">
+                                      <p:stCondLst>
+                                        <p:cond delay="600"/>
+                                      </p:stCondLst>
+                                      <p:childTnLst>
+                                        <p:set>
+                                          <p:cBhvr>
+                                            <p:cTn id="30" dur="1" fill="hold">
+                                              <p:stCondLst>
+                                                <p:cond delay="0"/>
+                                              </p:stCondLst>
+                                            </p:cTn>
+                                            <p:tgtEl>
+                                              <p:spTgt spid="6"/>
+                                            </p:tgtEl>
+                                            <p:attrNameLst>
+                                              <p:attrName>style.visibility</p:attrName>
+                                            </p:attrNameLst>
+                                          </p:cBhvr>
+                                          <p:to>
+                                            <p:strVal val="visible"/>
+                                          </p:to>
+                                        </p:set>
+                                        <p:animEffect transition="in" filter="wipe(up)">
+                                          <p:cBhvr>
+                                            <p:cTn id="31" dur="500"/>
+                                            <p:tgtEl>
+                                              <p:spTgt spid="6"/>
+                                            </p:tgtEl>
+                                          </p:cBhvr>
+                                        </p:animEffect>
+                                      </p:childTnLst>
+                                    </p:cTn>
+                                  </p:par>
+                                  <p:par>
+                                    <p:cTn id="32" presetID="42" presetClass="path" presetSubtype="0" fill="hold" nodeType="withEffect">
+                                      <p:stCondLst>
+                                        <p:cond delay="600"/>
+                                      </p:stCondLst>
+                                      <p:childTnLst>
+                                        <p:animMotion origin="layout" path="M 2.29167E-6 -4.81481E-6 L -0.00052 0.10394 " pathEditMode="relative" rAng="0" ptsTypes="AA">
+                                          <p:cBhvr>
+                                            <p:cTn id="33" dur="2000" fill="hold"/>
+                                            <p:tgtEl>
+                                              <p:spTgt spid="6"/>
+                                            </p:tgtEl>
+                                            <p:attrNameLst>
+                                              <p:attrName>ppt_x</p:attrName>
+                                              <p:attrName>ppt_y</p:attrName>
+                                            </p:attrNameLst>
+                                          </p:cBhvr>
+                                          <p:rCtr x="-26" y="5185"/>
+                                        </p:animMotion>
+                                      </p:childTnLst>
+                                    </p:cTn>
+                                  </p:par>
+                                  <p:par>
+                                    <p:cTn id="34" presetID="22" presetClass="exit" presetSubtype="1" fill="hold" nodeType="withEffect">
+                                      <p:stCondLst>
+                                        <p:cond delay="600"/>
+                                      </p:stCondLst>
+                                      <p:childTnLst>
+                                        <p:animEffect transition="out" filter="wipe(up)">
+                                          <p:cBhvr>
+                                            <p:cTn id="35" dur="500"/>
+                                            <p:tgtEl>
+                                              <p:spTgt spid="6"/>
+                                            </p:tgtEl>
+                                          </p:cBhvr>
+                                        </p:animEffect>
+                                        <p:set>
+                                          <p:cBhvr>
+                                            <p:cTn id="36" dur="1" fill="hold">
+                                              <p:stCondLst>
+                                                <p:cond delay="499"/>
+                                              </p:stCondLst>
+                                            </p:cTn>
+                                            <p:tgtEl>
+                                              <p:spTgt spid="6"/>
+                                            </p:tgtEl>
+                                            <p:attrNameLst>
+                                              <p:attrName>style.visibility</p:attrName>
+                                            </p:attrNameLst>
+                                          </p:cBhvr>
+                                          <p:to>
+                                            <p:strVal val="hidden"/>
+                                          </p:to>
+                                        </p:set>
+                                      </p:childTnLst>
+                                    </p:cTn>
+                                  </p:par>
+                                  <p:par>
+                                    <p:cTn id="37" presetID="22" presetClass="entr" presetSubtype="1" fill="hold" nodeType="withEffect">
+                                      <p:stCondLst>
+                                        <p:cond delay="600"/>
+                                      </p:stCondLst>
+                                      <p:childTnLst>
+                                        <p:set>
+                                          <p:cBhvr>
+                                            <p:cTn id="38" dur="1" fill="hold">
+                                              <p:stCondLst>
+                                                <p:cond delay="0"/>
+                                              </p:stCondLst>
+                                            </p:cTn>
+                                            <p:tgtEl>
+                                              <p:spTgt spid="5"/>
+                                            </p:tgtEl>
+                                            <p:attrNameLst>
+                                              <p:attrName>style.visibility</p:attrName>
+                                            </p:attrNameLst>
+                                          </p:cBhvr>
+                                          <p:to>
+                                            <p:strVal val="visible"/>
+                                          </p:to>
+                                        </p:set>
+                                        <p:animEffect transition="in" filter="wipe(up)">
+                                          <p:cBhvr>
+                                            <p:cTn id="39" dur="500"/>
+                                            <p:tgtEl>
+                                              <p:spTgt spid="5"/>
+                                            </p:tgtEl>
+                                          </p:cBhvr>
+                                        </p:animEffect>
+                                      </p:childTnLst>
+                                    </p:cTn>
+                                  </p:par>
+                                  <p:par>
+                                    <p:cTn id="40" presetID="42" presetClass="path" presetSubtype="0" fill="hold" nodeType="withEffect">
+                                      <p:stCondLst>
+                                        <p:cond delay="600"/>
+                                      </p:stCondLst>
+                                      <p:childTnLst>
+                                        <p:animMotion origin="layout" path="M 2.70833E-6 2.59259E-6 L 0.03502 0.10463 " pathEditMode="relative" rAng="0" ptsTypes="AA">
+                                          <p:cBhvr>
+                                            <p:cTn id="41" dur="2000" fill="hold"/>
+                                            <p:tgtEl>
+                                              <p:spTgt spid="5"/>
+                                            </p:tgtEl>
+                                            <p:attrNameLst>
+                                              <p:attrName>ppt_x</p:attrName>
+                                              <p:attrName>ppt_y</p:attrName>
+                                            </p:attrNameLst>
+                                          </p:cBhvr>
+                                          <p:rCtr x="1745" y="5231"/>
+                                        </p:animMotion>
+                                      </p:childTnLst>
+                                    </p:cTn>
+                                  </p:par>
+                                  <p:par>
+                                    <p:cTn id="42" presetID="22" presetClass="exit" presetSubtype="1" fill="hold" nodeType="withEffect">
+                                      <p:stCondLst>
+                                        <p:cond delay="600"/>
+                                      </p:stCondLst>
+                                      <p:childTnLst>
+                                        <p:animEffect transition="out" filter="wipe(up)">
+                                          <p:cBhvr>
+                                            <p:cTn id="43" dur="500"/>
+                                            <p:tgtEl>
+                                              <p:spTgt spid="5"/>
+                                            </p:tgtEl>
+                                          </p:cBhvr>
+                                        </p:animEffect>
+                                        <p:set>
+                                          <p:cBhvr>
+                                            <p:cTn id="44" dur="1" fill="hold">
+                                              <p:stCondLst>
+                                                <p:cond delay="499"/>
+                                              </p:stCondLst>
+                                            </p:cTn>
+                                            <p:tgtEl>
+                                              <p:spTgt spid="5"/>
+                                            </p:tgtEl>
+                                            <p:attrNameLst>
+                                              <p:attrName>style.visibility</p:attrName>
+                                            </p:attrNameLst>
+                                          </p:cBhvr>
+                                          <p:to>
+                                            <p:strVal val="hidden"/>
+                                          </p:to>
+                                        </p:set>
+                                      </p:childTnLst>
+                                    </p:cTn>
+                                  </p:par>
+                                  <p:par>
+                                    <p:cTn id="45" presetID="2" presetClass="entr" presetSubtype="1" accel="100000" fill="hold" grpId="0" nodeType="withEffect">
+                                      <p:stCondLst>
+                                        <p:cond delay="0"/>
+                                      </p:stCondLst>
+                                      <p:childTnLst>
+                                        <p:set>
+                                          <p:cBhvr>
+                                            <p:cTn id="46" dur="1" fill="hold">
+                                              <p:stCondLst>
+                                                <p:cond delay="0"/>
+                                              </p:stCondLst>
+                                            </p:cTn>
+                                            <p:tgtEl>
+                                              <p:spTgt spid="9"/>
+                                            </p:tgtEl>
+                                            <p:attrNameLst>
+                                              <p:attrName>style.visibility</p:attrName>
+                                            </p:attrNameLst>
+                                          </p:cBhvr>
+                                          <p:to>
+                                            <p:strVal val="visible"/>
+                                          </p:to>
+                                        </p:set>
+                                        <p:anim calcmode="lin" valueType="num">
+                                          <p:cBhvr additive="base">
+                                            <p:cTn id="47" dur="500" fill="hold"/>
+                                            <p:tgtEl>
+                                              <p:spTgt spid="9"/>
+                                            </p:tgtEl>
+                                            <p:attrNameLst>
+                                              <p:attrName>ppt_x</p:attrName>
+                                            </p:attrNameLst>
+                                          </p:cBhvr>
+                                          <p:tavLst>
+                                            <p:tav tm="0">
+                                              <p:val>
+                                                <p:strVal val="#ppt_x"/>
+                                              </p:val>
+                                            </p:tav>
+                                            <p:tav tm="100000">
+                                              <p:val>
+                                                <p:strVal val="#ppt_x"/>
+                                              </p:val>
+                                            </p:tav>
+                                          </p:tavLst>
+                                        </p:anim>
+                                        <p:anim calcmode="lin" valueType="num">
+                                          <p:cBhvr additive="base">
+                                            <p:cTn id="48" dur="500" fill="hold"/>
+                                            <p:tgtEl>
+                                              <p:spTgt spid="9"/>
+                                            </p:tgtEl>
+                                            <p:attrNameLst>
+                                              <p:attrName>ppt_y</p:attrName>
+                                            </p:attrNameLst>
+                                          </p:cBhvr>
+                                          <p:tavLst>
+                                            <p:tav tm="0">
+                                              <p:val>
+                                                <p:strVal val="0-#ppt_h/2"/>
+                                              </p:val>
+                                            </p:tav>
+                                            <p:tav tm="100000">
+                                              <p:val>
+                                                <p:strVal val="#ppt_y"/>
+                                              </p:val>
+                                            </p:tav>
+                                          </p:tavLst>
+                                        </p:anim>
+                                      </p:childTnLst>
+                                    </p:cTn>
+                                  </p:par>
+                                  <p:par>
+                                    <p:cTn id="49" presetID="64" presetClass="path" presetSubtype="0" fill="hold" grpId="1" nodeType="withEffect" p14:presetBounceEnd="50000">
+                                      <p:stCondLst>
+                                        <p:cond delay="500"/>
+                                      </p:stCondLst>
+                                      <p:childTnLst>
+                                        <p:animMotion origin="layout" path="M 1.25E-6 4.07407E-6 L 0.00039 -0.19514 " pathEditMode="relative" rAng="0" ptsTypes="AA" p14:bounceEnd="50000">
+                                          <p:cBhvr>
+                                            <p:cTn id="50" dur="500" fill="hold"/>
+                                            <p:tgtEl>
+                                              <p:spTgt spid="9"/>
+                                            </p:tgtEl>
+                                            <p:attrNameLst>
+                                              <p:attrName>ppt_x</p:attrName>
+                                              <p:attrName>ppt_y</p:attrName>
+                                            </p:attrNameLst>
+                                          </p:cBhvr>
+                                          <p:rCtr x="13" y="-9769"/>
+                                        </p:animMotion>
+                                      </p:childTnLst>
+                                    </p:cTn>
+                                  </p:par>
+                                  <p:par>
+                                    <p:cTn id="51" presetID="6" presetClass="emph" presetSubtype="0" fill="hold" grpId="2" nodeType="withEffect">
+                                      <p:stCondLst>
+                                        <p:cond delay="1000"/>
+                                      </p:stCondLst>
+                                      <p:childTnLst>
+                                        <p:animScale>
+                                          <p:cBhvr>
+                                            <p:cTn id="52" dur="300" fill="hold"/>
+                                            <p:tgtEl>
+                                              <p:spTgt spid="9"/>
+                                            </p:tgtEl>
+                                          </p:cBhvr>
+                                          <p:by x="4000000" y="4000000"/>
+                                        </p:animScale>
+                                      </p:childTnLst>
+                                    </p:cTn>
+                                  </p:par>
+                                </p:childTnLst>
+                              </p:cTn>
+                            </p:par>
+                          </p:childTnLst>
+                        </p:cTn>
+                      </p:par>
+                    </p:childTnLst>
+                  </p:cTn>
+                  <p:prevCondLst>
+                    <p:cond evt="onPrev" delay="0">
+                      <p:tgtEl>
+                        <p:sldTgt/>
+                      </p:tgtEl>
+                    </p:cond>
+                  </p:prevCondLst>
+                  <p:nextCondLst>
+                    <p:cond evt="onNext" delay="0">
+                      <p:tgtEl>
+                        <p:sldTgt/>
+                      </p:tgtEl>
+                    </p:cond>
+                  </p:nextCondLst>
+                </p:seq>
+              </p:childTnLst>
+            </p:cTn>
+          </p:par>
+        </p:tnLst>
+        <p:bldLst>
+          <p:bldP spid="9" grpId="0" animBg="1"/>
+          <p:bldP spid="9" grpId="1" animBg="1"/>
+          <p:bldP spid="9" grpId="2" animBg="1"/>
+        </p:bldLst>
+      </p:timing>
+    </mc:Choice>
+    <mc:Fallback>
+      <p:timing>
+        <p:tnLst>
+          <p:par>
+            <p:cTn id="1" dur="indefinite" restart="never" nodeType="tmRoot">
+              <p:childTnLst>
+                <p:seq concurrent="1" nextAc="seek">
+                  <p:cTn id="2" dur="indefinite" nodeType="mainSeq">
+                    <p:childTnLst>
+                      <p:par>
+                        <p:cTn id="3" fill="hold">
+                          <p:stCondLst>
+                            <p:cond delay="indefinite"/>
+                            <p:cond evt="onBegin" delay="0">
+                              <p:tn val="2"/>
+                            </p:cond>
+                          </p:stCondLst>
+                          <p:childTnLst>
+                            <p:par>
+                              <p:cTn id="4" fill="hold">
+                                <p:stCondLst>
+                                  <p:cond delay="0"/>
+                                </p:stCondLst>
+                                <p:childTnLst>
+                                  <p:par>
+                                    <p:cTn id="5" presetID="22" presetClass="entr" presetSubtype="1" fill="hold" nodeType="withEffect">
+                                      <p:stCondLst>
+                                        <p:cond delay="600"/>
+                                      </p:stCondLst>
+                                      <p:childTnLst>
+                                        <p:set>
+                                          <p:cBhvr>
+                                            <p:cTn id="6" dur="1" fill="hold">
+                                              <p:stCondLst>
+                                                <p:cond delay="0"/>
+                                              </p:stCondLst>
+                                            </p:cTn>
+                                            <p:tgtEl>
+                                              <p:spTgt spid="4"/>
+                                            </p:tgtEl>
+                                            <p:attrNameLst>
+                                              <p:attrName>style.visibility</p:attrName>
+                                            </p:attrNameLst>
+                                          </p:cBhvr>
+                                          <p:to>
+                                            <p:strVal val="visible"/>
+                                          </p:to>
+                                        </p:set>
+                                        <p:animEffect transition="in" filter="wipe(up)">
+                                          <p:cBhvr>
+                                            <p:cTn id="7" dur="500"/>
+                                            <p:tgtEl>
+                                              <p:spTgt spid="4"/>
+                                            </p:tgtEl>
+                                          </p:cBhvr>
+                                        </p:animEffect>
+                                      </p:childTnLst>
+                                    </p:cTn>
+                                  </p:par>
+                                  <p:par>
+                                    <p:cTn id="8" presetID="42" presetClass="path" presetSubtype="0" fill="hold" nodeType="withEffect">
+                                      <p:stCondLst>
+                                        <p:cond delay="600"/>
+                                      </p:stCondLst>
+                                      <p:childTnLst>
+                                        <p:animMotion origin="layout" path="M -3.95833E-6 -4.07407E-6 L 0.06485 0.07755 " pathEditMode="relative" rAng="0" ptsTypes="AA">
+                                          <p:cBhvr>
+                                            <p:cTn id="9" dur="2000" fill="hold"/>
+                                            <p:tgtEl>
+                                              <p:spTgt spid="4"/>
+                                            </p:tgtEl>
+                                            <p:attrNameLst>
+                                              <p:attrName>ppt_x</p:attrName>
+                                              <p:attrName>ppt_y</p:attrName>
+                                            </p:attrNameLst>
+                                          </p:cBhvr>
+                                          <p:rCtr x="3242" y="3866"/>
+                                        </p:animMotion>
+                                      </p:childTnLst>
+                                    </p:cTn>
+                                  </p:par>
+                                  <p:par>
+                                    <p:cTn id="10" presetID="22" presetClass="exit" presetSubtype="1" fill="hold" nodeType="withEffect">
+                                      <p:stCondLst>
+                                        <p:cond delay="600"/>
+                                      </p:stCondLst>
+                                      <p:childTnLst>
+                                        <p:animEffect transition="out" filter="wipe(up)">
+                                          <p:cBhvr>
+                                            <p:cTn id="11" dur="500"/>
+                                            <p:tgtEl>
+                                              <p:spTgt spid="4"/>
+                                            </p:tgtEl>
+                                          </p:cBhvr>
+                                        </p:animEffect>
+                                        <p:set>
+                                          <p:cBhvr>
+                                            <p:cTn id="12" dur="1" fill="hold">
+                                              <p:stCondLst>
+                                                <p:cond delay="499"/>
+                                              </p:stCondLst>
+                                            </p:cTn>
+                                            <p:tgtEl>
+                                              <p:spTgt spid="4"/>
+                                            </p:tgtEl>
+                                            <p:attrNameLst>
+                                              <p:attrName>style.visibility</p:attrName>
+                                            </p:attrNameLst>
+                                          </p:cBhvr>
+                                          <p:to>
+                                            <p:strVal val="hidden"/>
+                                          </p:to>
+                                        </p:set>
+                                      </p:childTnLst>
+                                    </p:cTn>
+                                  </p:par>
+                                  <p:par>
+                                    <p:cTn id="13" presetID="22" presetClass="entr" presetSubtype="1" fill="hold" nodeType="withEffect">
+                                      <p:stCondLst>
+                                        <p:cond delay="600"/>
+                                      </p:stCondLst>
+                                      <p:childTnLst>
+                                        <p:set>
+                                          <p:cBhvr>
+                                            <p:cTn id="14" dur="1" fill="hold">
+                                              <p:stCondLst>
+                                                <p:cond delay="0"/>
+                                              </p:stCondLst>
+                                            </p:cTn>
+                                            <p:tgtEl>
+                                              <p:spTgt spid="8"/>
+                                            </p:tgtEl>
+                                            <p:attrNameLst>
+                                              <p:attrName>style.visibility</p:attrName>
+                                            </p:attrNameLst>
+                                          </p:cBhvr>
+                                          <p:to>
+                                            <p:strVal val="visible"/>
+                                          </p:to>
+                                        </p:set>
+                                        <p:animEffect transition="in" filter="wipe(up)">
+                                          <p:cBhvr>
+                                            <p:cTn id="15" dur="500"/>
+                                            <p:tgtEl>
+                                              <p:spTgt spid="8"/>
+                                            </p:tgtEl>
+                                          </p:cBhvr>
+                                        </p:animEffect>
+                                      </p:childTnLst>
+                                    </p:cTn>
+                                  </p:par>
+                                  <p:par>
+                                    <p:cTn id="16" presetID="42" presetClass="path" presetSubtype="0" fill="hold" nodeType="withEffect">
+                                      <p:stCondLst>
+                                        <p:cond delay="600"/>
+                                      </p:stCondLst>
+                                      <p:childTnLst>
+                                        <p:animMotion origin="layout" path="M -2.91667E-6 -3.33333E-6 L -0.07708 0.06667 " pathEditMode="relative" rAng="0" ptsTypes="AA">
+                                          <p:cBhvr>
+                                            <p:cTn id="17" dur="2000" fill="hold"/>
+                                            <p:tgtEl>
+                                              <p:spTgt spid="8"/>
+                                            </p:tgtEl>
+                                            <p:attrNameLst>
+                                              <p:attrName>ppt_x</p:attrName>
+                                              <p:attrName>ppt_y</p:attrName>
+                                            </p:attrNameLst>
+                                          </p:cBhvr>
+                                          <p:rCtr x="-3854" y="3333"/>
+                                        </p:animMotion>
+                                      </p:childTnLst>
+                                    </p:cTn>
+                                  </p:par>
+                                  <p:par>
+                                    <p:cTn id="18" presetID="22" presetClass="exit" presetSubtype="1" fill="hold" nodeType="withEffect">
+                                      <p:stCondLst>
+                                        <p:cond delay="600"/>
+                                      </p:stCondLst>
+                                      <p:childTnLst>
+                                        <p:animEffect transition="out" filter="wipe(up)">
+                                          <p:cBhvr>
+                                            <p:cTn id="19" dur="500"/>
+                                            <p:tgtEl>
+                                              <p:spTgt spid="8"/>
+                                            </p:tgtEl>
+                                          </p:cBhvr>
+                                        </p:animEffect>
+                                        <p:set>
+                                          <p:cBhvr>
+                                            <p:cTn id="20" dur="1" fill="hold">
+                                              <p:stCondLst>
+                                                <p:cond delay="499"/>
+                                              </p:stCondLst>
+                                            </p:cTn>
+                                            <p:tgtEl>
+                                              <p:spTgt spid="8"/>
+                                            </p:tgtEl>
+                                            <p:attrNameLst>
+                                              <p:attrName>style.visibility</p:attrName>
+                                            </p:attrNameLst>
+                                          </p:cBhvr>
+                                          <p:to>
+                                            <p:strVal val="hidden"/>
+                                          </p:to>
+                                        </p:set>
+                                      </p:childTnLst>
+                                    </p:cTn>
+                                  </p:par>
+                                  <p:par>
+                                    <p:cTn id="21" presetID="22" presetClass="entr" presetSubtype="1" fill="hold" nodeType="withEffect">
+                                      <p:stCondLst>
+                                        <p:cond delay="600"/>
+                                      </p:stCondLst>
+                                      <p:childTnLst>
+                                        <p:set>
+                                          <p:cBhvr>
+                                            <p:cTn id="22" dur="1" fill="hold">
+                                              <p:stCondLst>
+                                                <p:cond delay="0"/>
+                                              </p:stCondLst>
+                                            </p:cTn>
+                                            <p:tgtEl>
+                                              <p:spTgt spid="7"/>
+                                            </p:tgtEl>
+                                            <p:attrNameLst>
+                                              <p:attrName>style.visibility</p:attrName>
+                                            </p:attrNameLst>
+                                          </p:cBhvr>
+                                          <p:to>
+                                            <p:strVal val="visible"/>
+                                          </p:to>
+                                        </p:set>
+                                        <p:animEffect transition="in" filter="wipe(up)">
+                                          <p:cBhvr>
+                                            <p:cTn id="23" dur="500"/>
+                                            <p:tgtEl>
+                                              <p:spTgt spid="7"/>
+                                            </p:tgtEl>
+                                          </p:cBhvr>
+                                        </p:animEffect>
+                                      </p:childTnLst>
+                                    </p:cTn>
+                                  </p:par>
+                                  <p:par>
+                                    <p:cTn id="24" presetID="42" presetClass="path" presetSubtype="0" fill="hold" nodeType="withEffect">
+                                      <p:stCondLst>
+                                        <p:cond delay="600"/>
+                                      </p:stCondLst>
+                                      <p:childTnLst>
+                                        <p:animMotion origin="layout" path="M 1.45833E-6 -4.07407E-6 L -0.03555 0.09653 " pathEditMode="relative" rAng="0" ptsTypes="AA">
+                                          <p:cBhvr>
+                                            <p:cTn id="25" dur="2000" fill="hold"/>
+                                            <p:tgtEl>
+                                              <p:spTgt spid="7"/>
+                                            </p:tgtEl>
+                                            <p:attrNameLst>
+                                              <p:attrName>ppt_x</p:attrName>
+                                              <p:attrName>ppt_y</p:attrName>
+                                            </p:attrNameLst>
+                                          </p:cBhvr>
+                                          <p:rCtr x="-1784" y="4815"/>
+                                        </p:animMotion>
+                                      </p:childTnLst>
+                                    </p:cTn>
+                                  </p:par>
+                                  <p:par>
+                                    <p:cTn id="26" presetID="22" presetClass="exit" presetSubtype="1" fill="hold" nodeType="withEffect">
+                                      <p:stCondLst>
+                                        <p:cond delay="600"/>
+                                      </p:stCondLst>
+                                      <p:childTnLst>
+                                        <p:animEffect transition="out" filter="wipe(up)">
+                                          <p:cBhvr>
+                                            <p:cTn id="27" dur="500"/>
+                                            <p:tgtEl>
+                                              <p:spTgt spid="7"/>
+                                            </p:tgtEl>
+                                          </p:cBhvr>
+                                        </p:animEffect>
+                                        <p:set>
+                                          <p:cBhvr>
+                                            <p:cTn id="28" dur="1" fill="hold">
+                                              <p:stCondLst>
+                                                <p:cond delay="499"/>
+                                              </p:stCondLst>
+                                            </p:cTn>
+                                            <p:tgtEl>
+                                              <p:spTgt spid="7"/>
+                                            </p:tgtEl>
+                                            <p:attrNameLst>
+                                              <p:attrName>style.visibility</p:attrName>
+                                            </p:attrNameLst>
+                                          </p:cBhvr>
+                                          <p:to>
+                                            <p:strVal val="hidden"/>
+                                          </p:to>
+                                        </p:set>
+                                      </p:childTnLst>
+                                    </p:cTn>
+                                  </p:par>
+                                  <p:par>
+                                    <p:cTn id="29" presetID="22" presetClass="entr" presetSubtype="1" fill="hold" nodeType="withEffect">
+                                      <p:stCondLst>
+                                        <p:cond delay="600"/>
+                                      </p:stCondLst>
+                                      <p:childTnLst>
+                                        <p:set>
+                                          <p:cBhvr>
+                                            <p:cTn id="30" dur="1" fill="hold">
+                                              <p:stCondLst>
+                                                <p:cond delay="0"/>
+                                              </p:stCondLst>
+                                            </p:cTn>
+                                            <p:tgtEl>
+                                              <p:spTgt spid="6"/>
+                                            </p:tgtEl>
+                                            <p:attrNameLst>
+                                              <p:attrName>style.visibility</p:attrName>
+                                            </p:attrNameLst>
+                                          </p:cBhvr>
+                                          <p:to>
+                                            <p:strVal val="visible"/>
+                                          </p:to>
+                                        </p:set>
+                                        <p:animEffect transition="in" filter="wipe(up)">
+                                          <p:cBhvr>
+                                            <p:cTn id="31" dur="500"/>
+                                            <p:tgtEl>
+                                              <p:spTgt spid="6"/>
+                                            </p:tgtEl>
+                                          </p:cBhvr>
+                                        </p:animEffect>
+                                      </p:childTnLst>
+                                    </p:cTn>
+                                  </p:par>
+                                  <p:par>
+                                    <p:cTn id="32" presetID="42" presetClass="path" presetSubtype="0" fill="hold" nodeType="withEffect">
+                                      <p:stCondLst>
+                                        <p:cond delay="600"/>
+                                      </p:stCondLst>
+                                      <p:childTnLst>
+                                        <p:animMotion origin="layout" path="M 2.29167E-6 -4.81481E-6 L -0.00052 0.10394 " pathEditMode="relative" rAng="0" ptsTypes="AA">
+                                          <p:cBhvr>
+                                            <p:cTn id="33" dur="2000" fill="hold"/>
+                                            <p:tgtEl>
+                                              <p:spTgt spid="6"/>
+                                            </p:tgtEl>
+                                            <p:attrNameLst>
+                                              <p:attrName>ppt_x</p:attrName>
+                                              <p:attrName>ppt_y</p:attrName>
+                                            </p:attrNameLst>
+                                          </p:cBhvr>
+                                          <p:rCtr x="-26" y="5185"/>
+                                        </p:animMotion>
+                                      </p:childTnLst>
+                                    </p:cTn>
+                                  </p:par>
+                                  <p:par>
+                                    <p:cTn id="34" presetID="22" presetClass="exit" presetSubtype="1" fill="hold" nodeType="withEffect">
+                                      <p:stCondLst>
+                                        <p:cond delay="600"/>
+                                      </p:stCondLst>
+                                      <p:childTnLst>
+                                        <p:animEffect transition="out" filter="wipe(up)">
+                                          <p:cBhvr>
+                                            <p:cTn id="35" dur="500"/>
+                                            <p:tgtEl>
+                                              <p:spTgt spid="6"/>
+                                            </p:tgtEl>
+                                          </p:cBhvr>
+                                        </p:animEffect>
+                                        <p:set>
+                                          <p:cBhvr>
+                                            <p:cTn id="36" dur="1" fill="hold">
+                                              <p:stCondLst>
+                                                <p:cond delay="499"/>
+                                              </p:stCondLst>
+                                            </p:cTn>
+                                            <p:tgtEl>
+                                              <p:spTgt spid="6"/>
+                                            </p:tgtEl>
+                                            <p:attrNameLst>
+                                              <p:attrName>style.visibility</p:attrName>
+                                            </p:attrNameLst>
+                                          </p:cBhvr>
+                                          <p:to>
+                                            <p:strVal val="hidden"/>
+                                          </p:to>
+                                        </p:set>
+                                      </p:childTnLst>
+                                    </p:cTn>
+                                  </p:par>
+                                  <p:par>
+                                    <p:cTn id="37" presetID="22" presetClass="entr" presetSubtype="1" fill="hold" nodeType="withEffect">
+                                      <p:stCondLst>
+                                        <p:cond delay="600"/>
+                                      </p:stCondLst>
+                                      <p:childTnLst>
+                                        <p:set>
+                                          <p:cBhvr>
+                                            <p:cTn id="38" dur="1" fill="hold">
+                                              <p:stCondLst>
+                                                <p:cond delay="0"/>
+                                              </p:stCondLst>
+                                            </p:cTn>
+                                            <p:tgtEl>
+                                              <p:spTgt spid="5"/>
+                                            </p:tgtEl>
+                                            <p:attrNameLst>
+                                              <p:attrName>style.visibility</p:attrName>
+                                            </p:attrNameLst>
+                                          </p:cBhvr>
+                                          <p:to>
+                                            <p:strVal val="visible"/>
+                                          </p:to>
+                                        </p:set>
+                                        <p:animEffect transition="in" filter="wipe(up)">
+                                          <p:cBhvr>
+                                            <p:cTn id="39" dur="500"/>
+                                            <p:tgtEl>
+                                              <p:spTgt spid="5"/>
+                                            </p:tgtEl>
+                                          </p:cBhvr>
+                                        </p:animEffect>
+                                      </p:childTnLst>
+                                    </p:cTn>
+                                  </p:par>
+                                  <p:par>
+                                    <p:cTn id="40" presetID="42" presetClass="path" presetSubtype="0" fill="hold" nodeType="withEffect">
+                                      <p:stCondLst>
+                                        <p:cond delay="600"/>
+                                      </p:stCondLst>
+                                      <p:childTnLst>
+                                        <p:animMotion origin="layout" path="M 2.70833E-6 2.59259E-6 L 0.03502 0.10463 " pathEditMode="relative" rAng="0" ptsTypes="AA">
+                                          <p:cBhvr>
+                                            <p:cTn id="41" dur="2000" fill="hold"/>
+                                            <p:tgtEl>
+                                              <p:spTgt spid="5"/>
+                                            </p:tgtEl>
+                                            <p:attrNameLst>
+                                              <p:attrName>ppt_x</p:attrName>
+                                              <p:attrName>ppt_y</p:attrName>
+                                            </p:attrNameLst>
+                                          </p:cBhvr>
+                                          <p:rCtr x="1745" y="5231"/>
+                                        </p:animMotion>
+                                      </p:childTnLst>
+                                    </p:cTn>
+                                  </p:par>
+                                  <p:par>
+                                    <p:cTn id="42" presetID="22" presetClass="exit" presetSubtype="1" fill="hold" nodeType="withEffect">
+                                      <p:stCondLst>
+                                        <p:cond delay="600"/>
+                                      </p:stCondLst>
+                                      <p:childTnLst>
+                                        <p:animEffect transition="out" filter="wipe(up)">
+                                          <p:cBhvr>
+                                            <p:cTn id="43" dur="500"/>
+                                            <p:tgtEl>
+                                              <p:spTgt spid="5"/>
+                                            </p:tgtEl>
+                                          </p:cBhvr>
+                                        </p:animEffect>
+                                        <p:set>
+                                          <p:cBhvr>
+                                            <p:cTn id="44" dur="1" fill="hold">
+                                              <p:stCondLst>
+                                                <p:cond delay="499"/>
+                                              </p:stCondLst>
+                                            </p:cTn>
+                                            <p:tgtEl>
+                                              <p:spTgt spid="5"/>
+                                            </p:tgtEl>
+                                            <p:attrNameLst>
+                                              <p:attrName>style.visibility</p:attrName>
+                                            </p:attrNameLst>
+                                          </p:cBhvr>
+                                          <p:to>
+                                            <p:strVal val="hidden"/>
+                                          </p:to>
+                                        </p:set>
+                                      </p:childTnLst>
+                                    </p:cTn>
+                                  </p:par>
+                                  <p:par>
+                                    <p:cTn id="45" presetID="2" presetClass="entr" presetSubtype="1" accel="100000" fill="hold" grpId="0" nodeType="withEffect">
+                                      <p:stCondLst>
+                                        <p:cond delay="0"/>
+                                      </p:stCondLst>
+                                      <p:childTnLst>
+                                        <p:set>
+                                          <p:cBhvr>
+                                            <p:cTn id="46" dur="1" fill="hold">
+                                              <p:stCondLst>
+                                                <p:cond delay="0"/>
+                                              </p:stCondLst>
+                                            </p:cTn>
+                                            <p:tgtEl>
+                                              <p:spTgt spid="9"/>
+                                            </p:tgtEl>
+                                            <p:attrNameLst>
+                                              <p:attrName>style.visibility</p:attrName>
+                                            </p:attrNameLst>
+                                          </p:cBhvr>
+                                          <p:to>
+                                            <p:strVal val="visible"/>
+                                          </p:to>
+                                        </p:set>
+                                        <p:anim calcmode="lin" valueType="num">
+                                          <p:cBhvr additive="base">
+                                            <p:cTn id="47" dur="500" fill="hold"/>
+                                            <p:tgtEl>
+                                              <p:spTgt spid="9"/>
+                                            </p:tgtEl>
+                                            <p:attrNameLst>
+                                              <p:attrName>ppt_x</p:attrName>
+                                            </p:attrNameLst>
+                                          </p:cBhvr>
+                                          <p:tavLst>
+                                            <p:tav tm="0">
+                                              <p:val>
+                                                <p:strVal val="#ppt_x"/>
+                                              </p:val>
+                                            </p:tav>
+                                            <p:tav tm="100000">
+                                              <p:val>
+                                                <p:strVal val="#ppt_x"/>
+                                              </p:val>
+                                            </p:tav>
+                                          </p:tavLst>
+                                        </p:anim>
+                                        <p:anim calcmode="lin" valueType="num">
+                                          <p:cBhvr additive="base">
+                                            <p:cTn id="48" dur="500" fill="hold"/>
+                                            <p:tgtEl>
+                                              <p:spTgt spid="9"/>
+                                            </p:tgtEl>
+                                            <p:attrNameLst>
+                                              <p:attrName>ppt_y</p:attrName>
+                                            </p:attrNameLst>
+                                          </p:cBhvr>
+                                          <p:tavLst>
+                                            <p:tav tm="0">
+                                              <p:val>
+                                                <p:strVal val="0-#ppt_h/2"/>
+                                              </p:val>
+                                            </p:tav>
+                                            <p:tav tm="100000">
+                                              <p:val>
+                                                <p:strVal val="#ppt_y"/>
+                                              </p:val>
+                                            </p:tav>
+                                          </p:tavLst>
+                                        </p:anim>
+                                      </p:childTnLst>
+                                    </p:cTn>
+                                  </p:par>
+                                  <p:par>
+                                    <p:cTn id="49" presetID="64" presetClass="path" presetSubtype="0" fill="hold" grpId="1" nodeType="withEffect">
+                                      <p:stCondLst>
+                                        <p:cond delay="500"/>
+                                      </p:stCondLst>
+                                      <p:childTnLst>
+                                        <p:animMotion origin="layout" path="M 1.25E-6 4.07407E-6 L 0.00039 -0.19514 " pathEditMode="relative" rAng="0" ptsTypes="AA">
+                                          <p:cBhvr>
+                                            <p:cTn id="50" dur="500" fill="hold"/>
+                                            <p:tgtEl>
+                                              <p:spTgt spid="9"/>
+                                            </p:tgtEl>
+                                            <p:attrNameLst>
+                                              <p:attrName>ppt_x</p:attrName>
+                                              <p:attrName>ppt_y</p:attrName>
+                                            </p:attrNameLst>
+                                          </p:cBhvr>
+                                          <p:rCtr x="13" y="-9769"/>
+                                        </p:animMotion>
+                                      </p:childTnLst>
+                                    </p:cTn>
+                                  </p:par>
+                                  <p:par>
+                                    <p:cTn id="51" presetID="6" presetClass="emph" presetSubtype="0" fill="hold" grpId="2" nodeType="withEffect">
+                                      <p:stCondLst>
+                                        <p:cond delay="1000"/>
+                                      </p:stCondLst>
+                                      <p:childTnLst>
+                                        <p:animScale>
+                                          <p:cBhvr>
+                                            <p:cTn id="52" dur="300" fill="hold"/>
+                                            <p:tgtEl>
+                                              <p:spTgt spid="9"/>
+                                            </p:tgtEl>
+                                          </p:cBhvr>
+                                          <p:by x="4000000" y="4000000"/>
+                                        </p:animScale>
+                                      </p:childTnLst>
+                                    </p:cTn>
+                                  </p:par>
+                                </p:childTnLst>
+                              </p:cTn>
+                            </p:par>
+                          </p:childTnLst>
+                        </p:cTn>
+                      </p:par>
+                    </p:childTnLst>
+                  </p:cTn>
+                  <p:prevCondLst>
+                    <p:cond evt="onPrev" delay="0">
+                      <p:tgtEl>
+                        <p:sldTgt/>
+                      </p:tgtEl>
+                    </p:cond>
+                  </p:prevCondLst>
+                  <p:nextCondLst>
+                    <p:cond evt="onNext" delay="0">
+                      <p:tgtEl>
+                        <p:sldTgt/>
+                      </p:tgtEl>
+                    </p:cond>
+                  </p:nextCondLst>
+                </p:seq>
+              </p:childTnLst>
+            </p:cTn>
+          </p:par>
+        </p:tnLst>
+        <p:bldLst>
+          <p:bldP spid="9" grpId="0" animBg="1"/>
+          <p:bldP spid="9" grpId="1" animBg="1"/>
+          <p:bldP spid="9" grpId="2" animBg="1"/>
+        </p:bldLst>
+      </p:timing>
+    </mc:Fallback>
+  </mc:AlternateContent>
+</p:sld>
+</file>
+
+<file path=ppt/slides/slide24.xml><?xml version="1.0" encoding="utf-8"?>
+<p:sld xmlns:a="http://schemas.openxmlformats.org/drawingml/2006/main" xmlns:r="http://schemas.openxmlformats.org/officeDocument/2006/relationships" xmlns:p="http://schemas.openxmlformats.org/presentationml/2006/main">
+  <p:cSld>
+    <p:spTree>
+      <p:nvGrpSpPr>
+        <p:cNvPr id="1" name=""/>
+        <p:cNvGrpSpPr/>
+        <p:nvPr/>
+      </p:nvGrpSpPr>
+      <p:grpSpPr>
+        <a:xfrm>
+          <a:off x="0" y="0"/>
+          <a:ext cx="0" cy="0"/>
+          <a:chOff x="0" y="0"/>
+          <a:chExt cx="0" cy="0"/>
+        </a:xfrm>
+      </p:grpSpPr>
+      <p:sp>
+        <p:nvSpPr>
+          <p:cNvPr id="2" name="标题 1">
+            <a:extLst>
+              <a:ext uri="{FF2B5EF4-FFF2-40B4-BE49-F238E27FC236}">
+                <a16:creationId xmlns:a16="http://schemas.microsoft.com/office/drawing/2014/main" id="{17373D41-82CA-46A0-BBB0-5F9E24E8D84D}"/>
+              </a:ext>
+            </a:extLst>
+          </p:cNvPr>
+          <p:cNvSpPr>
+            <a:spLocks noGrp="1"/>
+          </p:cNvSpPr>
+          <p:nvPr>
+            <p:ph type="title"/>
+          </p:nvPr>
+        </p:nvSpPr>
+        <p:spPr/>
+        <p:txBody>
+          <a:bodyPr/>
+          <a:lstStyle/>
+          <a:p>
+            <a:endParaRPr lang="zh-CN" altLang="en-US"/>
+          </a:p>
+        </p:txBody>
+      </p:sp>
+      <p:sp>
+        <p:nvSpPr>
+          <p:cNvPr id="3" name="内容占位符 2">
+            <a:extLst>
+              <a:ext uri="{FF2B5EF4-FFF2-40B4-BE49-F238E27FC236}">
+                <a16:creationId xmlns:a16="http://schemas.microsoft.com/office/drawing/2014/main" id="{49379126-BE17-4148-B7D2-E6A424A16423}"/>
+              </a:ext>
+            </a:extLst>
+          </p:cNvPr>
+          <p:cNvSpPr>
+            <a:spLocks noGrp="1"/>
+          </p:cNvSpPr>
+          <p:nvPr>
+            <p:ph idx="1"/>
+          </p:nvPr>
+        </p:nvSpPr>
+        <p:spPr/>
+        <p:txBody>
+          <a:bodyPr/>
+          <a:lstStyle/>
+          <a:p>
+            <a:endParaRPr lang="zh-CN" altLang="en-US" dirty="0"/>
+          </a:p>
+        </p:txBody>
+      </p:sp>
+      <p:cxnSp>
+        <p:nvCxnSpPr>
+          <p:cNvPr id="4" name="直接连接符 3">
+            <a:extLst>
+              <a:ext uri="{FF2B5EF4-FFF2-40B4-BE49-F238E27FC236}">
+                <a16:creationId xmlns:a16="http://schemas.microsoft.com/office/drawing/2014/main" id="{1929E86C-43A4-415D-A945-2064A199245E}"/>
+              </a:ext>
+            </a:extLst>
+          </p:cNvPr>
+          <p:cNvCxnSpPr>
+            <a:cxnSpLocks/>
+          </p:cNvCxnSpPr>
+          <p:nvPr/>
+        </p:nvCxnSpPr>
+        <p:spPr>
+          <a:xfrm>
+            <a:off x="8989971" y="5207070"/>
+            <a:ext cx="0" cy="372511"/>
+          </a:xfrm>
+          <a:prstGeom prst="line">
+            <a:avLst/>
+          </a:prstGeom>
+        </p:spPr>
+        <p:style>
+          <a:lnRef idx="1">
+            <a:schemeClr val="accent1"/>
+          </a:lnRef>
+          <a:fillRef idx="0">
+            <a:schemeClr val="accent1"/>
+          </a:fillRef>
+          <a:effectRef idx="0">
+            <a:schemeClr val="accent1"/>
+          </a:effectRef>
+          <a:fontRef idx="minor">
+            <a:schemeClr val="tx1"/>
+          </a:fontRef>
+        </p:style>
+      </p:cxnSp>
+      <p:cxnSp>
+        <p:nvCxnSpPr>
+          <p:cNvPr id="5" name="直接连接符 4">
+            <a:extLst>
+              <a:ext uri="{FF2B5EF4-FFF2-40B4-BE49-F238E27FC236}">
+                <a16:creationId xmlns:a16="http://schemas.microsoft.com/office/drawing/2014/main" id="{D161594E-672E-4F2B-9741-B42A35C51C90}"/>
+              </a:ext>
+            </a:extLst>
+          </p:cNvPr>
+          <p:cNvCxnSpPr>
+            <a:cxnSpLocks/>
+          </p:cNvCxnSpPr>
+          <p:nvPr/>
+        </p:nvCxnSpPr>
+        <p:spPr>
+          <a:xfrm rot="60000">
+            <a:off x="9003102" y="4454785"/>
+            <a:ext cx="0" cy="372511"/>
+          </a:xfrm>
+          <a:prstGeom prst="line">
+            <a:avLst/>
+          </a:prstGeom>
+        </p:spPr>
+        <p:style>
+          <a:lnRef idx="1">
+            <a:schemeClr val="accent1"/>
+          </a:lnRef>
+          <a:fillRef idx="0">
+            <a:schemeClr val="accent1"/>
+          </a:fillRef>
+          <a:effectRef idx="0">
+            <a:schemeClr val="accent1"/>
+          </a:effectRef>
+          <a:fontRef idx="minor">
+            <a:schemeClr val="tx1"/>
+          </a:fontRef>
+        </p:style>
+      </p:cxnSp>
+      <p:cxnSp>
+        <p:nvCxnSpPr>
+          <p:cNvPr id="6" name="直接连接符 5">
+            <a:extLst>
+              <a:ext uri="{FF2B5EF4-FFF2-40B4-BE49-F238E27FC236}">
+                <a16:creationId xmlns:a16="http://schemas.microsoft.com/office/drawing/2014/main" id="{A7B92EE0-2FEC-4525-8F34-FEAF9733142A}"/>
+              </a:ext>
+            </a:extLst>
+          </p:cNvPr>
+          <p:cNvCxnSpPr>
+            <a:cxnSpLocks/>
+          </p:cNvCxnSpPr>
+          <p:nvPr/>
+        </p:nvCxnSpPr>
+        <p:spPr>
+          <a:xfrm rot="1860000">
+            <a:off x="9377485" y="4562137"/>
+            <a:ext cx="0" cy="372511"/>
+          </a:xfrm>
+          <a:prstGeom prst="line">
+            <a:avLst/>
+          </a:prstGeom>
+        </p:spPr>
+        <p:style>
+          <a:lnRef idx="1">
+            <a:schemeClr val="accent1"/>
+          </a:lnRef>
+          <a:fillRef idx="0">
+            <a:schemeClr val="accent1"/>
+          </a:fillRef>
+          <a:effectRef idx="0">
+            <a:schemeClr val="accent1"/>
+          </a:effectRef>
+          <a:fontRef idx="minor">
+            <a:schemeClr val="tx1"/>
+          </a:fontRef>
+        </p:style>
+      </p:cxnSp>
+      <p:cxnSp>
+        <p:nvCxnSpPr>
+          <p:cNvPr id="7" name="直接连接符 6">
+            <a:extLst>
+              <a:ext uri="{FF2B5EF4-FFF2-40B4-BE49-F238E27FC236}">
+                <a16:creationId xmlns:a16="http://schemas.microsoft.com/office/drawing/2014/main" id="{AE8AB7A3-99DC-485B-88C1-2510E0A02BD0}"/>
+              </a:ext>
+            </a:extLst>
+          </p:cNvPr>
+          <p:cNvCxnSpPr>
+            <a:cxnSpLocks/>
+          </p:cNvCxnSpPr>
+          <p:nvPr/>
+        </p:nvCxnSpPr>
+        <p:spPr>
+          <a:xfrm rot="3660000">
+            <a:off x="9648034" y="4842299"/>
+            <a:ext cx="0" cy="372511"/>
+          </a:xfrm>
+          <a:prstGeom prst="line">
+            <a:avLst/>
+          </a:prstGeom>
+        </p:spPr>
+        <p:style>
+          <a:lnRef idx="1">
+            <a:schemeClr val="accent1"/>
+          </a:lnRef>
+          <a:fillRef idx="0">
+            <a:schemeClr val="accent1"/>
+          </a:fillRef>
+          <a:effectRef idx="0">
+            <a:schemeClr val="accent1"/>
+          </a:effectRef>
+          <a:fontRef idx="minor">
+            <a:schemeClr val="tx1"/>
+          </a:fontRef>
+        </p:style>
+      </p:cxnSp>
+      <p:cxnSp>
+        <p:nvCxnSpPr>
+          <p:cNvPr id="8" name="直接连接符 7">
+            <a:extLst>
+              <a:ext uri="{FF2B5EF4-FFF2-40B4-BE49-F238E27FC236}">
+                <a16:creationId xmlns:a16="http://schemas.microsoft.com/office/drawing/2014/main" id="{96690C6D-FABE-4090-A808-ADA2472386BB}"/>
+              </a:ext>
+            </a:extLst>
+          </p:cNvPr>
+          <p:cNvCxnSpPr>
+            <a:cxnSpLocks/>
+          </p:cNvCxnSpPr>
+          <p:nvPr/>
+        </p:nvCxnSpPr>
+        <p:spPr>
+          <a:xfrm rot="5460000">
+            <a:off x="9742256" y="5220202"/>
+            <a:ext cx="0" cy="372511"/>
+          </a:xfrm>
+          <a:prstGeom prst="line">
+            <a:avLst/>
+          </a:prstGeom>
+        </p:spPr>
+        <p:style>
+          <a:lnRef idx="1">
+            <a:schemeClr val="accent1"/>
+          </a:lnRef>
+          <a:fillRef idx="0">
+            <a:schemeClr val="accent1"/>
+          </a:fillRef>
+          <a:effectRef idx="0">
+            <a:schemeClr val="accent1"/>
+          </a:effectRef>
+          <a:fontRef idx="minor">
+            <a:schemeClr val="tx1"/>
+          </a:fontRef>
+        </p:style>
+      </p:cxnSp>
+      <p:cxnSp>
+        <p:nvCxnSpPr>
+          <p:cNvPr id="9" name="直接连接符 8">
+            <a:extLst>
+              <a:ext uri="{FF2B5EF4-FFF2-40B4-BE49-F238E27FC236}">
+                <a16:creationId xmlns:a16="http://schemas.microsoft.com/office/drawing/2014/main" id="{6505F868-E7C7-4CEF-9E19-65295AB706AB}"/>
+              </a:ext>
+            </a:extLst>
+          </p:cNvPr>
+          <p:cNvCxnSpPr>
+            <a:cxnSpLocks/>
+          </p:cNvCxnSpPr>
+          <p:nvPr/>
+        </p:nvCxnSpPr>
+        <p:spPr>
+          <a:xfrm rot="7260000">
+            <a:off x="9634903" y="5594585"/>
+            <a:ext cx="0" cy="372511"/>
+          </a:xfrm>
+          <a:prstGeom prst="line">
+            <a:avLst/>
+          </a:prstGeom>
+        </p:spPr>
+        <p:style>
+          <a:lnRef idx="1">
+            <a:schemeClr val="accent1"/>
+          </a:lnRef>
+          <a:fillRef idx="0">
+            <a:schemeClr val="accent1"/>
+          </a:fillRef>
+          <a:effectRef idx="0">
+            <a:schemeClr val="accent1"/>
+          </a:effectRef>
+          <a:fontRef idx="minor">
+            <a:schemeClr val="tx1"/>
+          </a:fontRef>
+        </p:style>
+      </p:cxnSp>
+      <p:cxnSp>
+        <p:nvCxnSpPr>
+          <p:cNvPr id="10" name="直接连接符 9">
+            <a:extLst>
+              <a:ext uri="{FF2B5EF4-FFF2-40B4-BE49-F238E27FC236}">
+                <a16:creationId xmlns:a16="http://schemas.microsoft.com/office/drawing/2014/main" id="{3BC1FF59-855D-4E3F-A283-99BD712820CA}"/>
+              </a:ext>
+            </a:extLst>
+          </p:cNvPr>
+          <p:cNvCxnSpPr>
+            <a:cxnSpLocks/>
+          </p:cNvCxnSpPr>
+          <p:nvPr/>
+        </p:nvCxnSpPr>
+        <p:spPr>
+          <a:xfrm rot="9060000">
+            <a:off x="9354741" y="5865134"/>
+            <a:ext cx="0" cy="372511"/>
+          </a:xfrm>
+          <a:prstGeom prst="line">
+            <a:avLst/>
+          </a:prstGeom>
+        </p:spPr>
+        <p:style>
+          <a:lnRef idx="1">
+            <a:schemeClr val="accent1"/>
+          </a:lnRef>
+          <a:fillRef idx="0">
+            <a:schemeClr val="accent1"/>
+          </a:fillRef>
+          <a:effectRef idx="0">
+            <a:schemeClr val="accent1"/>
+          </a:effectRef>
+          <a:fontRef idx="minor">
+            <a:schemeClr val="tx1"/>
+          </a:fontRef>
+        </p:style>
+      </p:cxnSp>
+      <p:cxnSp>
+        <p:nvCxnSpPr>
+          <p:cNvPr id="11" name="直接连接符 10">
+            <a:extLst>
+              <a:ext uri="{FF2B5EF4-FFF2-40B4-BE49-F238E27FC236}">
+                <a16:creationId xmlns:a16="http://schemas.microsoft.com/office/drawing/2014/main" id="{0C73AAE4-84EF-4463-9D54-165BDC070FAA}"/>
+              </a:ext>
+            </a:extLst>
+          </p:cNvPr>
+          <p:cNvCxnSpPr>
+            <a:cxnSpLocks/>
+          </p:cNvCxnSpPr>
+          <p:nvPr/>
+        </p:nvCxnSpPr>
+        <p:spPr>
+          <a:xfrm rot="10860000">
+            <a:off x="8976840" y="5959356"/>
+            <a:ext cx="0" cy="372511"/>
+          </a:xfrm>
+          <a:prstGeom prst="line">
+            <a:avLst/>
+          </a:prstGeom>
+        </p:spPr>
+        <p:style>
+          <a:lnRef idx="1">
+            <a:schemeClr val="accent1"/>
+          </a:lnRef>
+          <a:fillRef idx="0">
+            <a:schemeClr val="accent1"/>
+          </a:fillRef>
+          <a:effectRef idx="0">
+            <a:schemeClr val="accent1"/>
+          </a:effectRef>
+          <a:fontRef idx="minor">
+            <a:schemeClr val="tx1"/>
+          </a:fontRef>
+        </p:style>
+      </p:cxnSp>
+      <p:cxnSp>
+        <p:nvCxnSpPr>
+          <p:cNvPr id="12" name="直接连接符 11">
+            <a:extLst>
+              <a:ext uri="{FF2B5EF4-FFF2-40B4-BE49-F238E27FC236}">
+                <a16:creationId xmlns:a16="http://schemas.microsoft.com/office/drawing/2014/main" id="{63536154-962B-48C3-8C57-A819BB7A627C}"/>
+              </a:ext>
+            </a:extLst>
+          </p:cNvPr>
+          <p:cNvCxnSpPr>
+            <a:cxnSpLocks/>
+          </p:cNvCxnSpPr>
+          <p:nvPr/>
+        </p:nvCxnSpPr>
+        <p:spPr>
+          <a:xfrm rot="12660000">
+            <a:off x="8602456" y="5852003"/>
+            <a:ext cx="0" cy="372511"/>
+          </a:xfrm>
+          <a:prstGeom prst="line">
+            <a:avLst/>
+          </a:prstGeom>
+        </p:spPr>
+        <p:style>
+          <a:lnRef idx="1">
+            <a:schemeClr val="accent1"/>
+          </a:lnRef>
+          <a:fillRef idx="0">
+            <a:schemeClr val="accent1"/>
+          </a:fillRef>
+          <a:effectRef idx="0">
+            <a:schemeClr val="accent1"/>
+          </a:effectRef>
+          <a:fontRef idx="minor">
+            <a:schemeClr val="tx1"/>
+          </a:fontRef>
+        </p:style>
+      </p:cxnSp>
+      <p:cxnSp>
+        <p:nvCxnSpPr>
+          <p:cNvPr id="13" name="直接连接符 12">
+            <a:extLst>
+              <a:ext uri="{FF2B5EF4-FFF2-40B4-BE49-F238E27FC236}">
+                <a16:creationId xmlns:a16="http://schemas.microsoft.com/office/drawing/2014/main" id="{F648FE31-3682-4E0A-BA67-63197B0B735B}"/>
+              </a:ext>
+            </a:extLst>
+          </p:cNvPr>
+          <p:cNvCxnSpPr>
+            <a:cxnSpLocks/>
+          </p:cNvCxnSpPr>
+          <p:nvPr/>
+        </p:nvCxnSpPr>
+        <p:spPr>
+          <a:xfrm rot="14460000">
+            <a:off x="8331907" y="5571841"/>
+            <a:ext cx="0" cy="372511"/>
+          </a:xfrm>
+          <a:prstGeom prst="line">
+            <a:avLst/>
+          </a:prstGeom>
+        </p:spPr>
+        <p:style>
+          <a:lnRef idx="1">
+            <a:schemeClr val="accent1"/>
+          </a:lnRef>
+          <a:fillRef idx="0">
+            <a:schemeClr val="accent1"/>
+          </a:fillRef>
+          <a:effectRef idx="0">
+            <a:schemeClr val="accent1"/>
+          </a:effectRef>
+          <a:fontRef idx="minor">
+            <a:schemeClr val="tx1"/>
+          </a:fontRef>
+        </p:style>
+      </p:cxnSp>
+      <p:cxnSp>
+        <p:nvCxnSpPr>
+          <p:cNvPr id="14" name="直接连接符 13">
+            <a:extLst>
+              <a:ext uri="{FF2B5EF4-FFF2-40B4-BE49-F238E27FC236}">
+                <a16:creationId xmlns:a16="http://schemas.microsoft.com/office/drawing/2014/main" id="{278AC3B0-4651-46CB-B731-59A030C5E829}"/>
+              </a:ext>
+            </a:extLst>
+          </p:cNvPr>
+          <p:cNvCxnSpPr>
+            <a:cxnSpLocks/>
+          </p:cNvCxnSpPr>
+          <p:nvPr/>
+        </p:nvCxnSpPr>
+        <p:spPr>
+          <a:xfrm rot="16260000">
+            <a:off x="8237686" y="5193939"/>
+            <a:ext cx="0" cy="372511"/>
+          </a:xfrm>
+          <a:prstGeom prst="line">
+            <a:avLst/>
+          </a:prstGeom>
+        </p:spPr>
+        <p:style>
+          <a:lnRef idx="1">
+            <a:schemeClr val="accent1"/>
+          </a:lnRef>
+          <a:fillRef idx="0">
+            <a:schemeClr val="accent1"/>
+          </a:fillRef>
+          <a:effectRef idx="0">
+            <a:schemeClr val="accent1"/>
+          </a:effectRef>
+          <a:fontRef idx="minor">
+            <a:schemeClr val="tx1"/>
+          </a:fontRef>
+        </p:style>
+      </p:cxnSp>
+      <p:cxnSp>
+        <p:nvCxnSpPr>
+          <p:cNvPr id="15" name="直接连接符 14">
+            <a:extLst>
+              <a:ext uri="{FF2B5EF4-FFF2-40B4-BE49-F238E27FC236}">
+                <a16:creationId xmlns:a16="http://schemas.microsoft.com/office/drawing/2014/main" id="{ADD0C087-215D-420D-9068-34109FBBF426}"/>
+              </a:ext>
+            </a:extLst>
+          </p:cNvPr>
+          <p:cNvCxnSpPr>
+            <a:cxnSpLocks/>
+          </p:cNvCxnSpPr>
+          <p:nvPr/>
+        </p:nvCxnSpPr>
+        <p:spPr>
+          <a:xfrm rot="18060000">
+            <a:off x="8345038" y="4819555"/>
+            <a:ext cx="0" cy="372511"/>
+          </a:xfrm>
+          <a:prstGeom prst="line">
+            <a:avLst/>
+          </a:prstGeom>
+        </p:spPr>
+        <p:style>
+          <a:lnRef idx="1">
+            <a:schemeClr val="accent1"/>
+          </a:lnRef>
+          <a:fillRef idx="0">
+            <a:schemeClr val="accent1"/>
+          </a:fillRef>
+          <a:effectRef idx="0">
+            <a:schemeClr val="accent1"/>
+          </a:effectRef>
+          <a:fontRef idx="minor">
+            <a:schemeClr val="tx1"/>
+          </a:fontRef>
+        </p:style>
+      </p:cxnSp>
+      <p:cxnSp>
+        <p:nvCxnSpPr>
+          <p:cNvPr id="16" name="直接连接符 15">
+            <a:extLst>
+              <a:ext uri="{FF2B5EF4-FFF2-40B4-BE49-F238E27FC236}">
+                <a16:creationId xmlns:a16="http://schemas.microsoft.com/office/drawing/2014/main" id="{BC3D97B3-3EF4-4A26-A8A6-4F97BCDB5A4B}"/>
+              </a:ext>
+            </a:extLst>
+          </p:cNvPr>
+          <p:cNvCxnSpPr>
+            <a:cxnSpLocks/>
+          </p:cNvCxnSpPr>
+          <p:nvPr/>
+        </p:nvCxnSpPr>
+        <p:spPr>
+          <a:xfrm rot="19860000">
+            <a:off x="8625200" y="4549006"/>
+            <a:ext cx="0" cy="372511"/>
+          </a:xfrm>
+          <a:prstGeom prst="line">
+            <a:avLst/>
+          </a:prstGeom>
+        </p:spPr>
+        <p:style>
+          <a:lnRef idx="1">
+            <a:schemeClr val="accent1"/>
+          </a:lnRef>
+          <a:fillRef idx="0">
+            <a:schemeClr val="accent1"/>
+          </a:fillRef>
+          <a:effectRef idx="0">
+            <a:schemeClr val="accent1"/>
+          </a:effectRef>
+          <a:fontRef idx="minor">
+            <a:schemeClr val="tx1"/>
+          </a:fontRef>
+        </p:style>
+      </p:cxnSp>
+    </p:spTree>
+    <p:extLst>
+      <p:ext uri="{BB962C8B-B14F-4D97-AF65-F5344CB8AC3E}">
+        <p14:creationId xmlns:p14="http://schemas.microsoft.com/office/powerpoint/2010/main" val="1829861382"/>
       </p:ext>
     </p:extLst>
   </p:cSld>

--- a/PPT-Animation-Samples (Part 2).pptx
+++ b/PPT-Animation-Samples (Part 2).pptx
@@ -29,6 +29,7 @@
     <p:sldId id="301" r:id="rId23"/>
     <p:sldId id="300" r:id="rId24"/>
     <p:sldId id="299" r:id="rId25"/>
+    <p:sldId id="302" r:id="rId26"/>
   </p:sldIdLst>
   <p:sldSz cx="12192000" cy="6858000"/>
   <p:notesSz cx="6858000" cy="9144000"/>
@@ -13145,504 +13146,286 @@
           </a:p>
         </p:txBody>
       </p:sp>
-      <p:cxnSp>
-        <p:nvCxnSpPr>
-          <p:cNvPr id="4" name="直接连接符 3">
-            <a:extLst>
-              <a:ext uri="{FF2B5EF4-FFF2-40B4-BE49-F238E27FC236}">
-                <a16:creationId xmlns:a16="http://schemas.microsoft.com/office/drawing/2014/main" id="{1929E86C-43A4-415D-A945-2064A199245E}"/>
-              </a:ext>
-            </a:extLst>
-          </p:cNvPr>
-          <p:cNvCxnSpPr>
-            <a:cxnSpLocks/>
-          </p:cNvCxnSpPr>
+      <p:sp>
+        <p:nvSpPr>
+          <p:cNvPr id="24" name="流程图: 接点 23">
+            <a:extLst>
+              <a:ext uri="{FF2B5EF4-FFF2-40B4-BE49-F238E27FC236}">
+                <a16:creationId xmlns:a16="http://schemas.microsoft.com/office/drawing/2014/main" id="{64E724B3-432A-4AF8-B4F1-2A86A5CB9BD1}"/>
+              </a:ext>
+            </a:extLst>
+          </p:cNvPr>
+          <p:cNvSpPr/>
           <p:nvPr/>
-        </p:nvCxnSpPr>
+        </p:nvSpPr>
         <p:spPr>
           <a:xfrm>
-            <a:off x="8989971" y="5207070"/>
-            <a:ext cx="0" cy="372511"/>
+            <a:off x="4722828" y="2903456"/>
+            <a:ext cx="1847653" cy="1611983"/>
           </a:xfrm>
-          <a:prstGeom prst="line">
+          <a:prstGeom prst="flowChartConnector">
             <a:avLst/>
           </a:prstGeom>
         </p:spPr>
         <p:style>
-          <a:lnRef idx="1">
-            <a:schemeClr val="accent1"/>
+          <a:lnRef idx="2">
+            <a:schemeClr val="accent1">
+              <a:shade val="50000"/>
+            </a:schemeClr>
           </a:lnRef>
-          <a:fillRef idx="0">
+          <a:fillRef idx="1">
             <a:schemeClr val="accent1"/>
           </a:fillRef>
           <a:effectRef idx="0">
             <a:schemeClr val="accent1"/>
           </a:effectRef>
           <a:fontRef idx="minor">
-            <a:schemeClr val="tx1"/>
+            <a:schemeClr val="lt1"/>
           </a:fontRef>
         </p:style>
-      </p:cxnSp>
-      <p:cxnSp>
-        <p:nvCxnSpPr>
-          <p:cNvPr id="5" name="直接连接符 4">
-            <a:extLst>
-              <a:ext uri="{FF2B5EF4-FFF2-40B4-BE49-F238E27FC236}">
-                <a16:creationId xmlns:a16="http://schemas.microsoft.com/office/drawing/2014/main" id="{D161594E-672E-4F2B-9741-B42A35C51C90}"/>
-              </a:ext>
-            </a:extLst>
-          </p:cNvPr>
-          <p:cNvCxnSpPr>
-            <a:cxnSpLocks/>
-          </p:cNvCxnSpPr>
+        <p:txBody>
+          <a:bodyPr rtlCol="0" anchor="ctr"/>
+          <a:lstStyle/>
+          <a:p>
+            <a:pPr algn="ctr"/>
+            <a:r>
+              <a:rPr lang="zh-CN" altLang="en-US" sz="4400" dirty="0"/>
+              <a:t>文字</a:t>
+            </a:r>
+          </a:p>
+        </p:txBody>
+      </p:sp>
+      <p:sp>
+        <p:nvSpPr>
+          <p:cNvPr id="25" name="矩形 24">
+            <a:extLst>
+              <a:ext uri="{FF2B5EF4-FFF2-40B4-BE49-F238E27FC236}">
+                <a16:creationId xmlns:a16="http://schemas.microsoft.com/office/drawing/2014/main" id="{326FDA48-B227-4ECE-89B6-73E176D5933C}"/>
+              </a:ext>
+            </a:extLst>
+          </p:cNvPr>
+          <p:cNvSpPr/>
           <p:nvPr/>
-        </p:nvCxnSpPr>
+        </p:nvSpPr>
         <p:spPr>
-          <a:xfrm rot="60000">
-            <a:off x="9003102" y="4454785"/>
-            <a:ext cx="0" cy="372511"/>
+          <a:xfrm>
+            <a:off x="6627043" y="3544479"/>
+            <a:ext cx="2714920" cy="1593129"/>
           </a:xfrm>
-          <a:prstGeom prst="line">
+          <a:prstGeom prst="rect">
             <a:avLst/>
           </a:prstGeom>
         </p:spPr>
         <p:style>
-          <a:lnRef idx="1">
-            <a:schemeClr val="accent1"/>
+          <a:lnRef idx="2">
+            <a:schemeClr val="accent1">
+              <a:shade val="50000"/>
+            </a:schemeClr>
           </a:lnRef>
-          <a:fillRef idx="0">
+          <a:fillRef idx="1">
             <a:schemeClr val="accent1"/>
           </a:fillRef>
           <a:effectRef idx="0">
             <a:schemeClr val="accent1"/>
           </a:effectRef>
           <a:fontRef idx="minor">
-            <a:schemeClr val="tx1"/>
+            <a:schemeClr val="lt1"/>
           </a:fontRef>
         </p:style>
-      </p:cxnSp>
-      <p:cxnSp>
-        <p:nvCxnSpPr>
-          <p:cNvPr id="6" name="直接连接符 5">
-            <a:extLst>
-              <a:ext uri="{FF2B5EF4-FFF2-40B4-BE49-F238E27FC236}">
-                <a16:creationId xmlns:a16="http://schemas.microsoft.com/office/drawing/2014/main" id="{A7B92EE0-2FEC-4525-8F34-FEAF9733142A}"/>
-              </a:ext>
-            </a:extLst>
-          </p:cNvPr>
-          <p:cNvCxnSpPr>
-            <a:cxnSpLocks/>
-          </p:cNvCxnSpPr>
+        <p:txBody>
+          <a:bodyPr rtlCol="0" anchor="ctr"/>
+          <a:lstStyle/>
+          <a:p>
+            <a:pPr algn="ctr"/>
+            <a:r>
+              <a:rPr lang="zh-CN" altLang="en-US" dirty="0"/>
+              <a:t>这里是详细的文字</a:t>
+            </a:r>
+          </a:p>
+        </p:txBody>
+      </p:sp>
+    </p:spTree>
+    <p:extLst>
+      <p:ext uri="{BB962C8B-B14F-4D97-AF65-F5344CB8AC3E}">
+        <p14:creationId xmlns:p14="http://schemas.microsoft.com/office/powerpoint/2010/main" val="1829861382"/>
+      </p:ext>
+    </p:extLst>
+  </p:cSld>
+  <p:clrMapOvr>
+    <a:masterClrMapping/>
+  </p:clrMapOvr>
+</p:sld>
+</file>
+
+<file path=ppt/slides/slide25.xml><?xml version="1.0" encoding="utf-8"?>
+<p:sld xmlns:a="http://schemas.openxmlformats.org/drawingml/2006/main" xmlns:r="http://schemas.openxmlformats.org/officeDocument/2006/relationships" xmlns:p="http://schemas.openxmlformats.org/presentationml/2006/main">
+  <p:cSld>
+    <p:spTree>
+      <p:nvGrpSpPr>
+        <p:cNvPr id="1" name=""/>
+        <p:cNvGrpSpPr/>
+        <p:nvPr/>
+      </p:nvGrpSpPr>
+      <p:grpSpPr>
+        <a:xfrm>
+          <a:off x="0" y="0"/>
+          <a:ext cx="0" cy="0"/>
+          <a:chOff x="0" y="0"/>
+          <a:chExt cx="0" cy="0"/>
+        </a:xfrm>
+      </p:grpSpPr>
+      <p:sp>
+        <p:nvSpPr>
+          <p:cNvPr id="2" name="标题 1">
+            <a:extLst>
+              <a:ext uri="{FF2B5EF4-FFF2-40B4-BE49-F238E27FC236}">
+                <a16:creationId xmlns:a16="http://schemas.microsoft.com/office/drawing/2014/main" id="{17373D41-82CA-46A0-BBB0-5F9E24E8D84D}"/>
+              </a:ext>
+            </a:extLst>
+          </p:cNvPr>
+          <p:cNvSpPr>
+            <a:spLocks noGrp="1"/>
+          </p:cNvSpPr>
+          <p:nvPr>
+            <p:ph type="title"/>
+          </p:nvPr>
+        </p:nvSpPr>
+        <p:spPr/>
+        <p:txBody>
+          <a:bodyPr/>
+          <a:lstStyle/>
+          <a:p>
+            <a:endParaRPr lang="zh-CN" altLang="en-US"/>
+          </a:p>
+        </p:txBody>
+      </p:sp>
+      <p:sp>
+        <p:nvSpPr>
+          <p:cNvPr id="3" name="内容占位符 2">
+            <a:extLst>
+              <a:ext uri="{FF2B5EF4-FFF2-40B4-BE49-F238E27FC236}">
+                <a16:creationId xmlns:a16="http://schemas.microsoft.com/office/drawing/2014/main" id="{49379126-BE17-4148-B7D2-E6A424A16423}"/>
+              </a:ext>
+            </a:extLst>
+          </p:cNvPr>
+          <p:cNvSpPr>
+            <a:spLocks noGrp="1"/>
+          </p:cNvSpPr>
+          <p:nvPr>
+            <p:ph idx="1"/>
+          </p:nvPr>
+        </p:nvSpPr>
+        <p:spPr/>
+        <p:txBody>
+          <a:bodyPr/>
+          <a:lstStyle/>
+          <a:p>
+            <a:endParaRPr lang="zh-CN" altLang="en-US" dirty="0"/>
+          </a:p>
+        </p:txBody>
+      </p:sp>
+      <p:sp>
+        <p:nvSpPr>
+          <p:cNvPr id="24" name="流程图: 接点 23">
+            <a:extLst>
+              <a:ext uri="{FF2B5EF4-FFF2-40B4-BE49-F238E27FC236}">
+                <a16:creationId xmlns:a16="http://schemas.microsoft.com/office/drawing/2014/main" id="{64E724B3-432A-4AF8-B4F1-2A86A5CB9BD1}"/>
+              </a:ext>
+            </a:extLst>
+          </p:cNvPr>
+          <p:cNvSpPr/>
           <p:nvPr/>
-        </p:nvCxnSpPr>
+        </p:nvSpPr>
         <p:spPr>
-          <a:xfrm rot="1860000">
-            <a:off x="9377485" y="4562137"/>
-            <a:ext cx="0" cy="372511"/>
+          <a:xfrm>
+            <a:off x="4722828" y="2903456"/>
+            <a:ext cx="1847653" cy="1611983"/>
           </a:xfrm>
-          <a:prstGeom prst="line">
+          <a:prstGeom prst="flowChartConnector">
             <a:avLst/>
           </a:prstGeom>
         </p:spPr>
         <p:style>
-          <a:lnRef idx="1">
-            <a:schemeClr val="accent1"/>
+          <a:lnRef idx="2">
+            <a:schemeClr val="accent1">
+              <a:shade val="50000"/>
+            </a:schemeClr>
           </a:lnRef>
-          <a:fillRef idx="0">
+          <a:fillRef idx="1">
             <a:schemeClr val="accent1"/>
           </a:fillRef>
           <a:effectRef idx="0">
             <a:schemeClr val="accent1"/>
           </a:effectRef>
           <a:fontRef idx="minor">
-            <a:schemeClr val="tx1"/>
+            <a:schemeClr val="lt1"/>
           </a:fontRef>
         </p:style>
-      </p:cxnSp>
-      <p:cxnSp>
-        <p:nvCxnSpPr>
-          <p:cNvPr id="7" name="直接连接符 6">
-            <a:extLst>
-              <a:ext uri="{FF2B5EF4-FFF2-40B4-BE49-F238E27FC236}">
-                <a16:creationId xmlns:a16="http://schemas.microsoft.com/office/drawing/2014/main" id="{AE8AB7A3-99DC-485B-88C1-2510E0A02BD0}"/>
-              </a:ext>
-            </a:extLst>
-          </p:cNvPr>
-          <p:cNvCxnSpPr>
-            <a:cxnSpLocks/>
-          </p:cNvCxnSpPr>
+        <p:txBody>
+          <a:bodyPr rtlCol="0" anchor="ctr"/>
+          <a:lstStyle/>
+          <a:p>
+            <a:pPr algn="ctr"/>
+            <a:r>
+              <a:rPr lang="zh-CN" altLang="en-US" sz="4400" dirty="0"/>
+              <a:t>文字</a:t>
+            </a:r>
+          </a:p>
+        </p:txBody>
+      </p:sp>
+      <p:sp>
+        <p:nvSpPr>
+          <p:cNvPr id="25" name="矩形 24">
+            <a:extLst>
+              <a:ext uri="{FF2B5EF4-FFF2-40B4-BE49-F238E27FC236}">
+                <a16:creationId xmlns:a16="http://schemas.microsoft.com/office/drawing/2014/main" id="{326FDA48-B227-4ECE-89B6-73E176D5933C}"/>
+              </a:ext>
+            </a:extLst>
+          </p:cNvPr>
+          <p:cNvSpPr/>
           <p:nvPr/>
-        </p:nvCxnSpPr>
+        </p:nvSpPr>
         <p:spPr>
-          <a:xfrm rot="3660000">
-            <a:off x="9648034" y="4842299"/>
-            <a:ext cx="0" cy="372511"/>
+          <a:xfrm>
+            <a:off x="6627043" y="3544479"/>
+            <a:ext cx="2714920" cy="1593129"/>
           </a:xfrm>
-          <a:prstGeom prst="line">
+          <a:prstGeom prst="rect">
             <a:avLst/>
           </a:prstGeom>
         </p:spPr>
         <p:style>
-          <a:lnRef idx="1">
-            <a:schemeClr val="accent1"/>
+          <a:lnRef idx="2">
+            <a:schemeClr val="accent1">
+              <a:shade val="50000"/>
+            </a:schemeClr>
           </a:lnRef>
-          <a:fillRef idx="0">
+          <a:fillRef idx="1">
             <a:schemeClr val="accent1"/>
           </a:fillRef>
           <a:effectRef idx="0">
             <a:schemeClr val="accent1"/>
           </a:effectRef>
           <a:fontRef idx="minor">
-            <a:schemeClr val="tx1"/>
+            <a:schemeClr val="lt1"/>
           </a:fontRef>
         </p:style>
-      </p:cxnSp>
-      <p:cxnSp>
-        <p:nvCxnSpPr>
-          <p:cNvPr id="8" name="直接连接符 7">
-            <a:extLst>
-              <a:ext uri="{FF2B5EF4-FFF2-40B4-BE49-F238E27FC236}">
-                <a16:creationId xmlns:a16="http://schemas.microsoft.com/office/drawing/2014/main" id="{96690C6D-FABE-4090-A808-ADA2472386BB}"/>
-              </a:ext>
-            </a:extLst>
-          </p:cNvPr>
-          <p:cNvCxnSpPr>
-            <a:cxnSpLocks/>
-          </p:cNvCxnSpPr>
-          <p:nvPr/>
-        </p:nvCxnSpPr>
-        <p:spPr>
-          <a:xfrm rot="5460000">
-            <a:off x="9742256" y="5220202"/>
-            <a:ext cx="0" cy="372511"/>
-          </a:xfrm>
-          <a:prstGeom prst="line">
-            <a:avLst/>
-          </a:prstGeom>
-        </p:spPr>
-        <p:style>
-          <a:lnRef idx="1">
-            <a:schemeClr val="accent1"/>
-          </a:lnRef>
-          <a:fillRef idx="0">
-            <a:schemeClr val="accent1"/>
-          </a:fillRef>
-          <a:effectRef idx="0">
-            <a:schemeClr val="accent1"/>
-          </a:effectRef>
-          <a:fontRef idx="minor">
-            <a:schemeClr val="tx1"/>
-          </a:fontRef>
-        </p:style>
-      </p:cxnSp>
-      <p:cxnSp>
-        <p:nvCxnSpPr>
-          <p:cNvPr id="9" name="直接连接符 8">
-            <a:extLst>
-              <a:ext uri="{FF2B5EF4-FFF2-40B4-BE49-F238E27FC236}">
-                <a16:creationId xmlns:a16="http://schemas.microsoft.com/office/drawing/2014/main" id="{6505F868-E7C7-4CEF-9E19-65295AB706AB}"/>
-              </a:ext>
-            </a:extLst>
-          </p:cNvPr>
-          <p:cNvCxnSpPr>
-            <a:cxnSpLocks/>
-          </p:cNvCxnSpPr>
-          <p:nvPr/>
-        </p:nvCxnSpPr>
-        <p:spPr>
-          <a:xfrm rot="7260000">
-            <a:off x="9634903" y="5594585"/>
-            <a:ext cx="0" cy="372511"/>
-          </a:xfrm>
-          <a:prstGeom prst="line">
-            <a:avLst/>
-          </a:prstGeom>
-        </p:spPr>
-        <p:style>
-          <a:lnRef idx="1">
-            <a:schemeClr val="accent1"/>
-          </a:lnRef>
-          <a:fillRef idx="0">
-            <a:schemeClr val="accent1"/>
-          </a:fillRef>
-          <a:effectRef idx="0">
-            <a:schemeClr val="accent1"/>
-          </a:effectRef>
-          <a:fontRef idx="minor">
-            <a:schemeClr val="tx1"/>
-          </a:fontRef>
-        </p:style>
-      </p:cxnSp>
-      <p:cxnSp>
-        <p:nvCxnSpPr>
-          <p:cNvPr id="10" name="直接连接符 9">
-            <a:extLst>
-              <a:ext uri="{FF2B5EF4-FFF2-40B4-BE49-F238E27FC236}">
-                <a16:creationId xmlns:a16="http://schemas.microsoft.com/office/drawing/2014/main" id="{3BC1FF59-855D-4E3F-A283-99BD712820CA}"/>
-              </a:ext>
-            </a:extLst>
-          </p:cNvPr>
-          <p:cNvCxnSpPr>
-            <a:cxnSpLocks/>
-          </p:cNvCxnSpPr>
-          <p:nvPr/>
-        </p:nvCxnSpPr>
-        <p:spPr>
-          <a:xfrm rot="9060000">
-            <a:off x="9354741" y="5865134"/>
-            <a:ext cx="0" cy="372511"/>
-          </a:xfrm>
-          <a:prstGeom prst="line">
-            <a:avLst/>
-          </a:prstGeom>
-        </p:spPr>
-        <p:style>
-          <a:lnRef idx="1">
-            <a:schemeClr val="accent1"/>
-          </a:lnRef>
-          <a:fillRef idx="0">
-            <a:schemeClr val="accent1"/>
-          </a:fillRef>
-          <a:effectRef idx="0">
-            <a:schemeClr val="accent1"/>
-          </a:effectRef>
-          <a:fontRef idx="minor">
-            <a:schemeClr val="tx1"/>
-          </a:fontRef>
-        </p:style>
-      </p:cxnSp>
-      <p:cxnSp>
-        <p:nvCxnSpPr>
-          <p:cNvPr id="11" name="直接连接符 10">
-            <a:extLst>
-              <a:ext uri="{FF2B5EF4-FFF2-40B4-BE49-F238E27FC236}">
-                <a16:creationId xmlns:a16="http://schemas.microsoft.com/office/drawing/2014/main" id="{0C73AAE4-84EF-4463-9D54-165BDC070FAA}"/>
-              </a:ext>
-            </a:extLst>
-          </p:cNvPr>
-          <p:cNvCxnSpPr>
-            <a:cxnSpLocks/>
-          </p:cNvCxnSpPr>
-          <p:nvPr/>
-        </p:nvCxnSpPr>
-        <p:spPr>
-          <a:xfrm rot="10860000">
-            <a:off x="8976840" y="5959356"/>
-            <a:ext cx="0" cy="372511"/>
-          </a:xfrm>
-          <a:prstGeom prst="line">
-            <a:avLst/>
-          </a:prstGeom>
-        </p:spPr>
-        <p:style>
-          <a:lnRef idx="1">
-            <a:schemeClr val="accent1"/>
-          </a:lnRef>
-          <a:fillRef idx="0">
-            <a:schemeClr val="accent1"/>
-          </a:fillRef>
-          <a:effectRef idx="0">
-            <a:schemeClr val="accent1"/>
-          </a:effectRef>
-          <a:fontRef idx="minor">
-            <a:schemeClr val="tx1"/>
-          </a:fontRef>
-        </p:style>
-      </p:cxnSp>
-      <p:cxnSp>
-        <p:nvCxnSpPr>
-          <p:cNvPr id="12" name="直接连接符 11">
-            <a:extLst>
-              <a:ext uri="{FF2B5EF4-FFF2-40B4-BE49-F238E27FC236}">
-                <a16:creationId xmlns:a16="http://schemas.microsoft.com/office/drawing/2014/main" id="{63536154-962B-48C3-8C57-A819BB7A627C}"/>
-              </a:ext>
-            </a:extLst>
-          </p:cNvPr>
-          <p:cNvCxnSpPr>
-            <a:cxnSpLocks/>
-          </p:cNvCxnSpPr>
-          <p:nvPr/>
-        </p:nvCxnSpPr>
-        <p:spPr>
-          <a:xfrm rot="12660000">
-            <a:off x="8602456" y="5852003"/>
-            <a:ext cx="0" cy="372511"/>
-          </a:xfrm>
-          <a:prstGeom prst="line">
-            <a:avLst/>
-          </a:prstGeom>
-        </p:spPr>
-        <p:style>
-          <a:lnRef idx="1">
-            <a:schemeClr val="accent1"/>
-          </a:lnRef>
-          <a:fillRef idx="0">
-            <a:schemeClr val="accent1"/>
-          </a:fillRef>
-          <a:effectRef idx="0">
-            <a:schemeClr val="accent1"/>
-          </a:effectRef>
-          <a:fontRef idx="minor">
-            <a:schemeClr val="tx1"/>
-          </a:fontRef>
-        </p:style>
-      </p:cxnSp>
-      <p:cxnSp>
-        <p:nvCxnSpPr>
-          <p:cNvPr id="13" name="直接连接符 12">
-            <a:extLst>
-              <a:ext uri="{FF2B5EF4-FFF2-40B4-BE49-F238E27FC236}">
-                <a16:creationId xmlns:a16="http://schemas.microsoft.com/office/drawing/2014/main" id="{F648FE31-3682-4E0A-BA67-63197B0B735B}"/>
-              </a:ext>
-            </a:extLst>
-          </p:cNvPr>
-          <p:cNvCxnSpPr>
-            <a:cxnSpLocks/>
-          </p:cNvCxnSpPr>
-          <p:nvPr/>
-        </p:nvCxnSpPr>
-        <p:spPr>
-          <a:xfrm rot="14460000">
-            <a:off x="8331907" y="5571841"/>
-            <a:ext cx="0" cy="372511"/>
-          </a:xfrm>
-          <a:prstGeom prst="line">
-            <a:avLst/>
-          </a:prstGeom>
-        </p:spPr>
-        <p:style>
-          <a:lnRef idx="1">
-            <a:schemeClr val="accent1"/>
-          </a:lnRef>
-          <a:fillRef idx="0">
-            <a:schemeClr val="accent1"/>
-          </a:fillRef>
-          <a:effectRef idx="0">
-            <a:schemeClr val="accent1"/>
-          </a:effectRef>
-          <a:fontRef idx="minor">
-            <a:schemeClr val="tx1"/>
-          </a:fontRef>
-        </p:style>
-      </p:cxnSp>
-      <p:cxnSp>
-        <p:nvCxnSpPr>
-          <p:cNvPr id="14" name="直接连接符 13">
-            <a:extLst>
-              <a:ext uri="{FF2B5EF4-FFF2-40B4-BE49-F238E27FC236}">
-                <a16:creationId xmlns:a16="http://schemas.microsoft.com/office/drawing/2014/main" id="{278AC3B0-4651-46CB-B731-59A030C5E829}"/>
-              </a:ext>
-            </a:extLst>
-          </p:cNvPr>
-          <p:cNvCxnSpPr>
-            <a:cxnSpLocks/>
-          </p:cNvCxnSpPr>
-          <p:nvPr/>
-        </p:nvCxnSpPr>
-        <p:spPr>
-          <a:xfrm rot="16260000">
-            <a:off x="8237686" y="5193939"/>
-            <a:ext cx="0" cy="372511"/>
-          </a:xfrm>
-          <a:prstGeom prst="line">
-            <a:avLst/>
-          </a:prstGeom>
-        </p:spPr>
-        <p:style>
-          <a:lnRef idx="1">
-            <a:schemeClr val="accent1"/>
-          </a:lnRef>
-          <a:fillRef idx="0">
-            <a:schemeClr val="accent1"/>
-          </a:fillRef>
-          <a:effectRef idx="0">
-            <a:schemeClr val="accent1"/>
-          </a:effectRef>
-          <a:fontRef idx="minor">
-            <a:schemeClr val="tx1"/>
-          </a:fontRef>
-        </p:style>
-      </p:cxnSp>
-      <p:cxnSp>
-        <p:nvCxnSpPr>
-          <p:cNvPr id="15" name="直接连接符 14">
-            <a:extLst>
-              <a:ext uri="{FF2B5EF4-FFF2-40B4-BE49-F238E27FC236}">
-                <a16:creationId xmlns:a16="http://schemas.microsoft.com/office/drawing/2014/main" id="{ADD0C087-215D-420D-9068-34109FBBF426}"/>
-              </a:ext>
-            </a:extLst>
-          </p:cNvPr>
-          <p:cNvCxnSpPr>
-            <a:cxnSpLocks/>
-          </p:cNvCxnSpPr>
-          <p:nvPr/>
-        </p:nvCxnSpPr>
-        <p:spPr>
-          <a:xfrm rot="18060000">
-            <a:off x="8345038" y="4819555"/>
-            <a:ext cx="0" cy="372511"/>
-          </a:xfrm>
-          <a:prstGeom prst="line">
-            <a:avLst/>
-          </a:prstGeom>
-        </p:spPr>
-        <p:style>
-          <a:lnRef idx="1">
-            <a:schemeClr val="accent1"/>
-          </a:lnRef>
-          <a:fillRef idx="0">
-            <a:schemeClr val="accent1"/>
-          </a:fillRef>
-          <a:effectRef idx="0">
-            <a:schemeClr val="accent1"/>
-          </a:effectRef>
-          <a:fontRef idx="minor">
-            <a:schemeClr val="tx1"/>
-          </a:fontRef>
-        </p:style>
-      </p:cxnSp>
-      <p:cxnSp>
-        <p:nvCxnSpPr>
-          <p:cNvPr id="16" name="直接连接符 15">
-            <a:extLst>
-              <a:ext uri="{FF2B5EF4-FFF2-40B4-BE49-F238E27FC236}">
-                <a16:creationId xmlns:a16="http://schemas.microsoft.com/office/drawing/2014/main" id="{BC3D97B3-3EF4-4A26-A8A6-4F97BCDB5A4B}"/>
-              </a:ext>
-            </a:extLst>
-          </p:cNvPr>
-          <p:cNvCxnSpPr>
-            <a:cxnSpLocks/>
-          </p:cNvCxnSpPr>
-          <p:nvPr/>
-        </p:nvCxnSpPr>
-        <p:spPr>
-          <a:xfrm rot="19860000">
-            <a:off x="8625200" y="4549006"/>
-            <a:ext cx="0" cy="372511"/>
-          </a:xfrm>
-          <a:prstGeom prst="line">
-            <a:avLst/>
-          </a:prstGeom>
-        </p:spPr>
-        <p:style>
-          <a:lnRef idx="1">
-            <a:schemeClr val="accent1"/>
-          </a:lnRef>
-          <a:fillRef idx="0">
-            <a:schemeClr val="accent1"/>
-          </a:fillRef>
-          <a:effectRef idx="0">
-            <a:schemeClr val="accent1"/>
-          </a:effectRef>
-          <a:fontRef idx="minor">
-            <a:schemeClr val="tx1"/>
-          </a:fontRef>
-        </p:style>
-      </p:cxnSp>
+        <p:txBody>
+          <a:bodyPr rtlCol="0" anchor="ctr"/>
+          <a:lstStyle/>
+          <a:p>
+            <a:pPr algn="ctr"/>
+            <a:r>
+              <a:rPr lang="zh-CN" altLang="en-US" dirty="0"/>
+              <a:t>这里是详细的文字</a:t>
+            </a:r>
+          </a:p>
+        </p:txBody>
+      </p:sp>
     </p:spTree>
     <p:extLst>
       <p:ext uri="{BB962C8B-B14F-4D97-AF65-F5344CB8AC3E}">
-        <p14:creationId xmlns:p14="http://schemas.microsoft.com/office/powerpoint/2010/main" val="1829861382"/>
+        <p14:creationId xmlns:p14="http://schemas.microsoft.com/office/powerpoint/2010/main" val="2861545056"/>
       </p:ext>
     </p:extLst>
   </p:cSld>

--- a/PPT-Animation-Samples (Part 2).pptx
+++ b/PPT-Animation-Samples (Part 2).pptx
@@ -36,6 +36,7 @@
     <p:sldId id="306" r:id="rId30"/>
     <p:sldId id="307" r:id="rId31"/>
     <p:sldId id="308" r:id="rId32"/>
+    <p:sldId id="309" r:id="rId33"/>
   </p:sldIdLst>
   <p:sldSz cx="12192000" cy="6858000"/>
   <p:notesSz cx="6858000" cy="9144000"/>
@@ -289,7 +290,7 @@
           <a:p>
             <a:fld id="{992B7589-6A85-43F1-96BB-1A2EC93AE491}" type="datetimeFigureOut">
               <a:rPr lang="zh-CN" altLang="en-US" smtClean="0"/>
-              <a:t>2026/5/31</a:t>
+              <a:t>2026/6/1</a:t>
             </a:fld>
             <a:endParaRPr lang="zh-CN" altLang="en-US"/>
           </a:p>
@@ -487,7 +488,7 @@
           <a:p>
             <a:fld id="{992B7589-6A85-43F1-96BB-1A2EC93AE491}" type="datetimeFigureOut">
               <a:rPr lang="zh-CN" altLang="en-US" smtClean="0"/>
-              <a:t>2026/5/31</a:t>
+              <a:t>2026/6/1</a:t>
             </a:fld>
             <a:endParaRPr lang="zh-CN" altLang="en-US"/>
           </a:p>
@@ -695,7 +696,7 @@
           <a:p>
             <a:fld id="{992B7589-6A85-43F1-96BB-1A2EC93AE491}" type="datetimeFigureOut">
               <a:rPr lang="zh-CN" altLang="en-US" smtClean="0"/>
-              <a:t>2026/5/31</a:t>
+              <a:t>2026/6/1</a:t>
             </a:fld>
             <a:endParaRPr lang="zh-CN" altLang="en-US"/>
           </a:p>
@@ -893,7 +894,7 @@
           <a:p>
             <a:fld id="{992B7589-6A85-43F1-96BB-1A2EC93AE491}" type="datetimeFigureOut">
               <a:rPr lang="zh-CN" altLang="en-US" smtClean="0"/>
-              <a:t>2026/5/31</a:t>
+              <a:t>2026/6/1</a:t>
             </a:fld>
             <a:endParaRPr lang="zh-CN" altLang="en-US"/>
           </a:p>
@@ -1168,7 +1169,7 @@
           <a:p>
             <a:fld id="{992B7589-6A85-43F1-96BB-1A2EC93AE491}" type="datetimeFigureOut">
               <a:rPr lang="zh-CN" altLang="en-US" smtClean="0"/>
-              <a:t>2026/5/31</a:t>
+              <a:t>2026/6/1</a:t>
             </a:fld>
             <a:endParaRPr lang="zh-CN" altLang="en-US"/>
           </a:p>
@@ -1433,7 +1434,7 @@
           <a:p>
             <a:fld id="{992B7589-6A85-43F1-96BB-1A2EC93AE491}" type="datetimeFigureOut">
               <a:rPr lang="zh-CN" altLang="en-US" smtClean="0"/>
-              <a:t>2026/5/31</a:t>
+              <a:t>2026/6/1</a:t>
             </a:fld>
             <a:endParaRPr lang="zh-CN" altLang="en-US"/>
           </a:p>
@@ -1845,7 +1846,7 @@
           <a:p>
             <a:fld id="{992B7589-6A85-43F1-96BB-1A2EC93AE491}" type="datetimeFigureOut">
               <a:rPr lang="zh-CN" altLang="en-US" smtClean="0"/>
-              <a:t>2026/5/31</a:t>
+              <a:t>2026/6/1</a:t>
             </a:fld>
             <a:endParaRPr lang="zh-CN" altLang="en-US"/>
           </a:p>
@@ -1986,7 +1987,7 @@
           <a:p>
             <a:fld id="{992B7589-6A85-43F1-96BB-1A2EC93AE491}" type="datetimeFigureOut">
               <a:rPr lang="zh-CN" altLang="en-US" smtClean="0"/>
-              <a:t>2026/5/31</a:t>
+              <a:t>2026/6/1</a:t>
             </a:fld>
             <a:endParaRPr lang="zh-CN" altLang="en-US"/>
           </a:p>
@@ -2099,7 +2100,7 @@
           <a:p>
             <a:fld id="{992B7589-6A85-43F1-96BB-1A2EC93AE491}" type="datetimeFigureOut">
               <a:rPr lang="zh-CN" altLang="en-US" smtClean="0"/>
-              <a:t>2026/5/31</a:t>
+              <a:t>2026/6/1</a:t>
             </a:fld>
             <a:endParaRPr lang="zh-CN" altLang="en-US"/>
           </a:p>
@@ -2410,7 +2411,7 @@
           <a:p>
             <a:fld id="{992B7589-6A85-43F1-96BB-1A2EC93AE491}" type="datetimeFigureOut">
               <a:rPr lang="zh-CN" altLang="en-US" smtClean="0"/>
-              <a:t>2026/5/31</a:t>
+              <a:t>2026/6/1</a:t>
             </a:fld>
             <a:endParaRPr lang="zh-CN" altLang="en-US"/>
           </a:p>
@@ -2698,7 +2699,7 @@
           <a:p>
             <a:fld id="{992B7589-6A85-43F1-96BB-1A2EC93AE491}" type="datetimeFigureOut">
               <a:rPr lang="zh-CN" altLang="en-US" smtClean="0"/>
-              <a:t>2026/5/31</a:t>
+              <a:t>2026/6/1</a:t>
             </a:fld>
             <a:endParaRPr lang="zh-CN" altLang="en-US"/>
           </a:p>
@@ -2939,7 +2940,7 @@
           <a:p>
             <a:fld id="{992B7589-6A85-43F1-96BB-1A2EC93AE491}" type="datetimeFigureOut">
               <a:rPr lang="zh-CN" altLang="en-US" smtClean="0"/>
-              <a:t>2026/5/31</a:t>
+              <a:t>2026/6/1</a:t>
             </a:fld>
             <a:endParaRPr lang="zh-CN" altLang="en-US"/>
           </a:p>
@@ -10314,8 +10315,8 @@
   <p:clrMapOvr>
     <a:masterClrMapping/>
   </p:clrMapOvr>
-  <mc:AlternateContent xmlns:mc="http://schemas.openxmlformats.org/markup-compatibility/2006">
-    <mc:Choice xmlns:p14="http://schemas.microsoft.com/office/powerpoint/2010/main" Requires="p14">
+  <mc:AlternateContent xmlns:mc="http://schemas.openxmlformats.org/markup-compatibility/2006" xmlns:p14="http://schemas.microsoft.com/office/powerpoint/2010/main">
+    <mc:Choice Requires="p14">
       <p:timing>
         <p:tnLst>
           <p:par>
@@ -10486,7 +10487,7 @@
         </p:bldLst>
       </p:timing>
     </mc:Choice>
-    <mc:Fallback>
+    <mc:Fallback xmlns="">
       <p:timing>
         <p:tnLst>
           <p:par>
@@ -11818,8 +11819,8 @@
   <p:clrMapOvr>
     <a:masterClrMapping/>
   </p:clrMapOvr>
-  <mc:AlternateContent xmlns:mc="http://schemas.openxmlformats.org/markup-compatibility/2006">
-    <mc:Choice xmlns:p14="http://schemas.microsoft.com/office/powerpoint/2010/main" Requires="p14">
+  <mc:AlternateContent xmlns:mc="http://schemas.openxmlformats.org/markup-compatibility/2006" xmlns:p14="http://schemas.microsoft.com/office/powerpoint/2010/main">
+    <mc:Choice Requires="p14">
       <p:timing>
         <p:tnLst>
           <p:par>
@@ -12450,7 +12451,7 @@
         </p:bldLst>
       </p:timing>
     </mc:Choice>
-    <mc:Fallback>
+    <mc:Fallback xmlns="">
       <p:timing>
         <p:tnLst>
           <p:par>
@@ -13299,8 +13300,8 @@
   <p:clrMapOvr>
     <a:masterClrMapping/>
   </p:clrMapOvr>
-  <mc:AlternateContent xmlns:mc="http://schemas.openxmlformats.org/markup-compatibility/2006">
-    <mc:Choice xmlns:p14="http://schemas.microsoft.com/office/powerpoint/2010/main" Requires="p14">
+  <mc:AlternateContent xmlns:mc="http://schemas.openxmlformats.org/markup-compatibility/2006" xmlns:p14="http://schemas.microsoft.com/office/powerpoint/2010/main">
+    <mc:Choice Requires="p14">
       <p:timing>
         <p:tnLst>
           <p:par>
@@ -13502,7 +13503,7 @@
         </p:bldLst>
       </p:timing>
     </mc:Choice>
-    <mc:Fallback>
+    <mc:Fallback xmlns="">
       <p:timing>
         <p:tnLst>
           <p:par>
@@ -14142,8 +14143,8 @@
   <p:clrMapOvr>
     <a:masterClrMapping/>
   </p:clrMapOvr>
-  <mc:AlternateContent xmlns:mc="http://schemas.openxmlformats.org/markup-compatibility/2006">
-    <mc:Choice xmlns:p14="http://schemas.microsoft.com/office/powerpoint/2010/main" Requires="p14">
+  <mc:AlternateContent xmlns:mc="http://schemas.openxmlformats.org/markup-compatibility/2006" xmlns:p14="http://schemas.microsoft.com/office/powerpoint/2010/main">
+    <mc:Choice Requires="p14">
       <p:timing>
         <p:tnLst>
           <p:par>
@@ -14404,7 +14405,7 @@
         </p:bldLst>
       </p:timing>
     </mc:Choice>
-    <mc:Fallback>
+    <mc:Fallback xmlns="">
       <p:timing>
         <p:tnLst>
           <p:par>
@@ -15163,8 +15164,8 @@
   <p:clrMapOvr>
     <a:masterClrMapping/>
   </p:clrMapOvr>
-  <mc:AlternateContent xmlns:mc="http://schemas.openxmlformats.org/markup-compatibility/2006">
-    <mc:Choice xmlns:p14="http://schemas.microsoft.com/office/powerpoint/2010/main" Requires="p14">
+  <mc:AlternateContent xmlns:mc="http://schemas.openxmlformats.org/markup-compatibility/2006" xmlns:p14="http://schemas.microsoft.com/office/powerpoint/2010/main">
+    <mc:Choice Requires="p14">
       <p:timing>
         <p:tnLst>
           <p:par>
@@ -16029,7 +16030,7 @@
         </p:bldLst>
       </p:timing>
     </mc:Choice>
-    <mc:Fallback>
+    <mc:Fallback xmlns="">
       <p:timing>
         <p:tnLst>
           <p:par>
@@ -17785,8 +17786,8 @@
   <p:clrMapOvr>
     <a:masterClrMapping/>
   </p:clrMapOvr>
-  <mc:AlternateContent xmlns:mc="http://schemas.openxmlformats.org/markup-compatibility/2006">
-    <mc:Choice xmlns:p14="http://schemas.microsoft.com/office/powerpoint/2010/main" Requires="p14">
+  <mc:AlternateContent xmlns:mc="http://schemas.openxmlformats.org/markup-compatibility/2006" xmlns:p14="http://schemas.microsoft.com/office/powerpoint/2010/main">
+    <mc:Choice Requires="p14">
       <p:timing>
         <p:tnLst>
           <p:par>
@@ -18906,7 +18907,7 @@
         </p:bldLst>
       </p:timing>
     </mc:Choice>
-    <mc:Fallback>
+    <mc:Fallback xmlns="">
       <p:timing>
         <p:tnLst>
           <p:par>
@@ -21763,8 +21764,8 @@
   <p:clrMapOvr>
     <a:masterClrMapping/>
   </p:clrMapOvr>
-  <mc:AlternateContent xmlns:mc="http://schemas.openxmlformats.org/markup-compatibility/2006">
-    <mc:Choice xmlns:p14="http://schemas.microsoft.com/office/powerpoint/2010/main" Requires="p14">
+  <mc:AlternateContent xmlns:mc="http://schemas.openxmlformats.org/markup-compatibility/2006" xmlns:p14="http://schemas.microsoft.com/office/powerpoint/2010/main">
+    <mc:Choice Requires="p14">
       <p:timing>
         <p:tnLst>
           <p:par>
@@ -23424,7 +23425,7 @@
         </p:bldLst>
       </p:timing>
     </mc:Choice>
-    <mc:Fallback>
+    <mc:Fallback xmlns="">
       <p:timing>
         <p:tnLst>
           <p:par>
@@ -26904,8 +26905,8 @@
   <p:clrMapOvr>
     <a:masterClrMapping/>
   </p:clrMapOvr>
-  <mc:AlternateContent xmlns:mc="http://schemas.openxmlformats.org/markup-compatibility/2006">
-    <mc:Choice xmlns:p14="http://schemas.microsoft.com/office/powerpoint/2010/main" Requires="p14">
+  <mc:AlternateContent xmlns:mc="http://schemas.openxmlformats.org/markup-compatibility/2006" xmlns:p14="http://schemas.microsoft.com/office/powerpoint/2010/main">
+    <mc:Choice Requires="p14">
       <p:timing>
         <p:tnLst>
           <p:par>
@@ -28565,7 +28566,7 @@
         </p:bldLst>
       </p:timing>
     </mc:Choice>
-    <mc:Fallback>
+    <mc:Fallback xmlns="">
       <p:timing>
         <p:tnLst>
           <p:par>
@@ -31975,8 +31976,8 @@
   <p:clrMapOvr>
     <a:masterClrMapping/>
   </p:clrMapOvr>
-  <mc:AlternateContent xmlns:mc="http://schemas.openxmlformats.org/markup-compatibility/2006">
-    <mc:Choice xmlns:p14="http://schemas.microsoft.com/office/powerpoint/2010/main" Requires="p14">
+  <mc:AlternateContent xmlns:mc="http://schemas.openxmlformats.org/markup-compatibility/2006" xmlns:p14="http://schemas.microsoft.com/office/powerpoint/2010/main">
+    <mc:Choice Requires="p14">
       <p:timing>
         <p:tnLst>
           <p:par>
@@ -33738,7 +33739,7 @@
         </p:bldLst>
       </p:timing>
     </mc:Choice>
-    <mc:Fallback>
+    <mc:Fallback xmlns="">
       <p:timing>
         <p:tnLst>
           <p:par>
@@ -35501,6 +35502,94 @@
       </p:timing>
     </mc:Fallback>
   </mc:AlternateContent>
+</p:sld>
+</file>
+
+<file path=ppt/slides/slide32.xml><?xml version="1.0" encoding="utf-8"?>
+<p:sld xmlns:a="http://schemas.openxmlformats.org/drawingml/2006/main" xmlns:r="http://schemas.openxmlformats.org/officeDocument/2006/relationships" xmlns:p="http://schemas.openxmlformats.org/presentationml/2006/main">
+  <p:cSld>
+    <p:spTree>
+      <p:nvGrpSpPr>
+        <p:cNvPr id="1" name=""/>
+        <p:cNvGrpSpPr/>
+        <p:nvPr/>
+      </p:nvGrpSpPr>
+      <p:grpSpPr>
+        <a:xfrm>
+          <a:off x="0" y="0"/>
+          <a:ext cx="0" cy="0"/>
+          <a:chOff x="0" y="0"/>
+          <a:chExt cx="0" cy="0"/>
+        </a:xfrm>
+      </p:grpSpPr>
+      <p:sp>
+        <p:nvSpPr>
+          <p:cNvPr id="2" name="标题 1">
+            <a:extLst>
+              <a:ext uri="{FF2B5EF4-FFF2-40B4-BE49-F238E27FC236}">
+                <a16:creationId xmlns:a16="http://schemas.microsoft.com/office/drawing/2014/main" id="{3611708E-C3EB-4F63-9C46-211979B10899}"/>
+              </a:ext>
+            </a:extLst>
+          </p:cNvPr>
+          <p:cNvSpPr>
+            <a:spLocks noGrp="1"/>
+          </p:cNvSpPr>
+          <p:nvPr>
+            <p:ph type="title"/>
+          </p:nvPr>
+        </p:nvSpPr>
+        <p:spPr/>
+        <p:txBody>
+          <a:bodyPr/>
+          <a:lstStyle/>
+          <a:p>
+            <a:endParaRPr lang="zh-CN" altLang="en-US"/>
+          </a:p>
+        </p:txBody>
+      </p:sp>
+      <p:sp>
+        <p:nvSpPr>
+          <p:cNvPr id="3" name="内容占位符 2">
+            <a:extLst>
+              <a:ext uri="{FF2B5EF4-FFF2-40B4-BE49-F238E27FC236}">
+                <a16:creationId xmlns:a16="http://schemas.microsoft.com/office/drawing/2014/main" id="{A2F10F62-D67C-49E0-B87A-8CDD7E25B8CB}"/>
+              </a:ext>
+            </a:extLst>
+          </p:cNvPr>
+          <p:cNvSpPr>
+            <a:spLocks noGrp="1"/>
+          </p:cNvSpPr>
+          <p:nvPr>
+            <p:ph idx="1"/>
+          </p:nvPr>
+        </p:nvSpPr>
+        <p:spPr/>
+        <p:txBody>
+          <a:bodyPr/>
+          <a:lstStyle/>
+          <a:p>
+            <a:r>
+              <a:rPr lang="en-US" altLang="zh-CN"/>
+              <a:t>Reference: https</a:t>
+            </a:r>
+            <a:r>
+              <a:rPr lang="en-US" altLang="zh-CN" dirty="0"/>
+              <a:t>://www.bilibili.com/video/BV1ax411Z7RU/?vd_source=e422e2614baa36cb808376bf194b6359&amp;spm_id_from=333.788.player.switch&amp;p=2</a:t>
+            </a:r>
+            <a:endParaRPr lang="zh-CN" altLang="en-US" dirty="0"/>
+          </a:p>
+        </p:txBody>
+      </p:sp>
+    </p:spTree>
+    <p:extLst>
+      <p:ext uri="{BB962C8B-B14F-4D97-AF65-F5344CB8AC3E}">
+        <p14:creationId xmlns:p14="http://schemas.microsoft.com/office/powerpoint/2010/main" val="1708260146"/>
+      </p:ext>
+    </p:extLst>
+  </p:cSld>
+  <p:clrMapOvr>
+    <a:masterClrMapping/>
+  </p:clrMapOvr>
 </p:sld>
 </file>
 
